--- a/docs/plots/carbo/jx_carbo_cox_linear_ratio_death.pptx
+++ b/docs/plots/carbo/jx_carbo_cox_linear_ratio_death.pptx
@@ -3003,503 +3003,518 @@
           <p:spPr>
             <a:xfrm>
               <a:off x="817517" y="1896563"/>
-              <a:ext cx="7370972" cy="3644792"/>
+              <a:ext cx="7370972" cy="3631514"/>
             </a:xfrm>
             <a:custGeom>
               <a:avLst/>
               <a:pathLst>
-                <a:path w="7370972" h="3644792">
+                <a:path w="7370972" h="3631514">
                   <a:moveTo>
-                    <a:pt x="2171456" y="0"/>
+                    <a:pt x="1848197" y="0"/>
                   </a:moveTo>
                   <a:lnTo>
-                    <a:pt x="2247125" y="312683"/>
-                  </a:lnTo>
-                  <a:lnTo>
-                    <a:pt x="2324759" y="605374"/>
-                  </a:lnTo>
-                  <a:lnTo>
-                    <a:pt x="2402393" y="872415"/>
-                  </a:lnTo>
-                  <a:lnTo>
-                    <a:pt x="2480027" y="1116055"/>
-                  </a:lnTo>
-                  <a:lnTo>
-                    <a:pt x="2557661" y="1338344"/>
-                  </a:lnTo>
-                  <a:lnTo>
-                    <a:pt x="2635295" y="1541153"/>
-                  </a:lnTo>
-                  <a:lnTo>
-                    <a:pt x="2712930" y="1726189"/>
-                  </a:lnTo>
-                  <a:lnTo>
-                    <a:pt x="2790564" y="1895010"/>
-                  </a:lnTo>
-                  <a:lnTo>
-                    <a:pt x="2868198" y="2049037"/>
-                  </a:lnTo>
-                  <a:lnTo>
-                    <a:pt x="2945832" y="2189565"/>
-                  </a:lnTo>
-                  <a:lnTo>
-                    <a:pt x="3023466" y="2317779"/>
-                  </a:lnTo>
-                  <a:lnTo>
-                    <a:pt x="3101100" y="2434757"/>
-                  </a:lnTo>
-                  <a:lnTo>
-                    <a:pt x="3178734" y="2541484"/>
-                  </a:lnTo>
-                  <a:lnTo>
-                    <a:pt x="3256368" y="2638859"/>
-                  </a:lnTo>
-                  <a:lnTo>
-                    <a:pt x="3334002" y="2727700"/>
-                  </a:lnTo>
-                  <a:lnTo>
-                    <a:pt x="3411636" y="2788518"/>
-                  </a:lnTo>
-                  <a:lnTo>
-                    <a:pt x="3489270" y="2805217"/>
-                  </a:lnTo>
-                  <a:lnTo>
-                    <a:pt x="3566904" y="2821592"/>
-                  </a:lnTo>
-                  <a:lnTo>
-                    <a:pt x="3644538" y="2837651"/>
-                  </a:lnTo>
-                  <a:lnTo>
-                    <a:pt x="3722172" y="2853400"/>
-                  </a:lnTo>
-                  <a:lnTo>
-                    <a:pt x="3799806" y="2868844"/>
-                  </a:lnTo>
-                  <a:lnTo>
-                    <a:pt x="3877440" y="2883990"/>
-                  </a:lnTo>
-                  <a:lnTo>
-                    <a:pt x="3955074" y="2898844"/>
-                  </a:lnTo>
-                  <a:lnTo>
-                    <a:pt x="4032708" y="2913410"/>
-                  </a:lnTo>
-                  <a:lnTo>
-                    <a:pt x="4110342" y="2927695"/>
-                  </a:lnTo>
-                  <a:lnTo>
-                    <a:pt x="4187976" y="2941704"/>
-                  </a:lnTo>
-                  <a:lnTo>
-                    <a:pt x="4265610" y="2955442"/>
-                  </a:lnTo>
-                  <a:lnTo>
-                    <a:pt x="4343244" y="2968914"/>
-                  </a:lnTo>
-                  <a:lnTo>
-                    <a:pt x="4420879" y="2982126"/>
-                  </a:lnTo>
-                  <a:lnTo>
-                    <a:pt x="4498513" y="2995083"/>
-                  </a:lnTo>
-                  <a:lnTo>
-                    <a:pt x="4576147" y="3007790"/>
-                  </a:lnTo>
-                  <a:lnTo>
-                    <a:pt x="4653781" y="3020251"/>
-                  </a:lnTo>
-                  <a:lnTo>
-                    <a:pt x="4731415" y="3032471"/>
-                  </a:lnTo>
-                  <a:lnTo>
-                    <a:pt x="4809049" y="3044455"/>
-                  </a:lnTo>
-                  <a:lnTo>
-                    <a:pt x="4886683" y="3056208"/>
-                  </a:lnTo>
-                  <a:lnTo>
-                    <a:pt x="4964317" y="3067733"/>
-                  </a:lnTo>
-                  <a:lnTo>
-                    <a:pt x="5041951" y="3079036"/>
-                  </a:lnTo>
-                  <a:lnTo>
-                    <a:pt x="5119585" y="3090120"/>
-                  </a:lnTo>
-                  <a:lnTo>
-                    <a:pt x="5197219" y="3100990"/>
-                  </a:lnTo>
-                  <a:lnTo>
-                    <a:pt x="5274853" y="3111650"/>
-                  </a:lnTo>
-                  <a:lnTo>
-                    <a:pt x="5352487" y="3122104"/>
-                  </a:lnTo>
-                  <a:lnTo>
-                    <a:pt x="5430121" y="3132356"/>
-                  </a:lnTo>
-                  <a:lnTo>
-                    <a:pt x="5507755" y="3142410"/>
-                  </a:lnTo>
-                  <a:lnTo>
-                    <a:pt x="5585389" y="3152270"/>
-                  </a:lnTo>
-                  <a:lnTo>
-                    <a:pt x="5663023" y="3161939"/>
-                  </a:lnTo>
-                  <a:lnTo>
-                    <a:pt x="5740657" y="3171421"/>
-                  </a:lnTo>
-                  <a:lnTo>
-                    <a:pt x="5818291" y="3180720"/>
-                  </a:lnTo>
-                  <a:lnTo>
-                    <a:pt x="5895925" y="3189840"/>
-                  </a:lnTo>
-                  <a:lnTo>
-                    <a:pt x="5973559" y="3198783"/>
-                  </a:lnTo>
-                  <a:lnTo>
-                    <a:pt x="6051193" y="3207553"/>
-                  </a:lnTo>
-                  <a:lnTo>
-                    <a:pt x="6128827" y="3216154"/>
-                  </a:lnTo>
-                  <a:lnTo>
-                    <a:pt x="6206462" y="3224589"/>
-                  </a:lnTo>
-                  <a:lnTo>
-                    <a:pt x="6284096" y="3232860"/>
-                  </a:lnTo>
-                  <a:lnTo>
-                    <a:pt x="6361730" y="3240972"/>
-                  </a:lnTo>
-                  <a:lnTo>
-                    <a:pt x="6439364" y="3248927"/>
-                  </a:lnTo>
-                  <a:lnTo>
-                    <a:pt x="6516998" y="3256729"/>
-                  </a:lnTo>
-                  <a:lnTo>
-                    <a:pt x="6594632" y="3264379"/>
-                  </a:lnTo>
-                  <a:lnTo>
-                    <a:pt x="6672266" y="3271882"/>
-                  </a:lnTo>
-                  <a:lnTo>
-                    <a:pt x="6749900" y="3279240"/>
-                  </a:lnTo>
-                  <a:lnTo>
-                    <a:pt x="6827534" y="3286455"/>
-                  </a:lnTo>
-                  <a:lnTo>
-                    <a:pt x="6905168" y="3293531"/>
-                  </a:lnTo>
-                  <a:lnTo>
-                    <a:pt x="6982802" y="3300471"/>
-                  </a:lnTo>
-                  <a:lnTo>
-                    <a:pt x="7060436" y="3307276"/>
-                  </a:lnTo>
-                  <a:lnTo>
-                    <a:pt x="7138070" y="3313950"/>
-                  </a:lnTo>
-                  <a:lnTo>
-                    <a:pt x="7215704" y="3320495"/>
-                  </a:lnTo>
-                  <a:lnTo>
-                    <a:pt x="7293338" y="3326913"/>
-                  </a:lnTo>
-                  <a:lnTo>
-                    <a:pt x="7370972" y="3333208"/>
-                  </a:lnTo>
-                  <a:lnTo>
-                    <a:pt x="7370972" y="3644792"/>
-                  </a:lnTo>
-                  <a:lnTo>
-                    <a:pt x="7293338" y="3644038"/>
-                  </a:lnTo>
-                  <a:lnTo>
-                    <a:pt x="7215704" y="3643212"/>
-                  </a:lnTo>
-                  <a:lnTo>
-                    <a:pt x="7138070" y="3642306"/>
-                  </a:lnTo>
-                  <a:lnTo>
-                    <a:pt x="7060436" y="3641313"/>
-                  </a:lnTo>
-                  <a:lnTo>
-                    <a:pt x="6982802" y="3640224"/>
-                  </a:lnTo>
-                  <a:lnTo>
-                    <a:pt x="6905168" y="3639031"/>
-                  </a:lnTo>
-                  <a:lnTo>
-                    <a:pt x="6827534" y="3637724"/>
-                  </a:lnTo>
-                  <a:lnTo>
-                    <a:pt x="6749900" y="3636291"/>
-                  </a:lnTo>
-                  <a:lnTo>
-                    <a:pt x="6672266" y="3634720"/>
-                  </a:lnTo>
-                  <a:lnTo>
-                    <a:pt x="6594632" y="3632999"/>
-                  </a:lnTo>
-                  <a:lnTo>
-                    <a:pt x="6516998" y="3631112"/>
-                  </a:lnTo>
-                  <a:lnTo>
-                    <a:pt x="6439364" y="3629044"/>
-                  </a:lnTo>
-                  <a:lnTo>
-                    <a:pt x="6361730" y="3626777"/>
-                  </a:lnTo>
-                  <a:lnTo>
-                    <a:pt x="6284096" y="3624293"/>
-                  </a:lnTo>
-                  <a:lnTo>
-                    <a:pt x="6206462" y="3621570"/>
-                  </a:lnTo>
-                  <a:lnTo>
-                    <a:pt x="6128827" y="3618585"/>
-                  </a:lnTo>
-                  <a:lnTo>
-                    <a:pt x="6051193" y="3615314"/>
-                  </a:lnTo>
-                  <a:lnTo>
-                    <a:pt x="5973559" y="3611728"/>
-                  </a:lnTo>
-                  <a:lnTo>
-                    <a:pt x="5895925" y="3607799"/>
-                  </a:lnTo>
-                  <a:lnTo>
-                    <a:pt x="5818291" y="3603491"/>
-                  </a:lnTo>
-                  <a:lnTo>
-                    <a:pt x="5740657" y="3598770"/>
-                  </a:lnTo>
-                  <a:lnTo>
-                    <a:pt x="5663023" y="3593596"/>
-                  </a:lnTo>
-                  <a:lnTo>
-                    <a:pt x="5585389" y="3587924"/>
-                  </a:lnTo>
-                  <a:lnTo>
-                    <a:pt x="5507755" y="3581708"/>
-                  </a:lnTo>
-                  <a:lnTo>
-                    <a:pt x="5430121" y="3574894"/>
-                  </a:lnTo>
-                  <a:lnTo>
-                    <a:pt x="5352487" y="3567427"/>
-                  </a:lnTo>
-                  <a:lnTo>
-                    <a:pt x="5274853" y="3559242"/>
-                  </a:lnTo>
-                  <a:lnTo>
-                    <a:pt x="5197219" y="3550270"/>
-                  </a:lnTo>
-                  <a:lnTo>
-                    <a:pt x="5119585" y="3540437"/>
-                  </a:lnTo>
-                  <a:lnTo>
-                    <a:pt x="5041951" y="3529660"/>
-                  </a:lnTo>
-                  <a:lnTo>
-                    <a:pt x="4964317" y="3517848"/>
-                  </a:lnTo>
-                  <a:lnTo>
-                    <a:pt x="4886683" y="3504900"/>
-                  </a:lnTo>
-                  <a:lnTo>
-                    <a:pt x="4809049" y="3490710"/>
-                  </a:lnTo>
-                  <a:lnTo>
-                    <a:pt x="4731415" y="3475156"/>
-                  </a:lnTo>
-                  <a:lnTo>
-                    <a:pt x="4653781" y="3458108"/>
-                  </a:lnTo>
-                  <a:lnTo>
-                    <a:pt x="4576147" y="3439423"/>
-                  </a:lnTo>
-                  <a:lnTo>
-                    <a:pt x="4498513" y="3418943"/>
-                  </a:lnTo>
-                  <a:lnTo>
-                    <a:pt x="4420879" y="3396496"/>
-                  </a:lnTo>
-                  <a:lnTo>
-                    <a:pt x="4343244" y="3371893"/>
-                  </a:lnTo>
-                  <a:lnTo>
-                    <a:pt x="4265610" y="3344927"/>
-                  </a:lnTo>
-                  <a:lnTo>
-                    <a:pt x="4187976" y="3315371"/>
-                  </a:lnTo>
-                  <a:lnTo>
-                    <a:pt x="4110342" y="3282976"/>
-                  </a:lnTo>
-                  <a:lnTo>
-                    <a:pt x="4032708" y="3247469"/>
-                  </a:lnTo>
-                  <a:lnTo>
-                    <a:pt x="3955074" y="3208552"/>
-                  </a:lnTo>
-                  <a:lnTo>
-                    <a:pt x="3877440" y="3165897"/>
-                  </a:lnTo>
-                  <a:lnTo>
-                    <a:pt x="3799806" y="3119145"/>
-                  </a:lnTo>
-                  <a:lnTo>
-                    <a:pt x="3722172" y="3067903"/>
-                  </a:lnTo>
-                  <a:lnTo>
-                    <a:pt x="3644538" y="3011738"/>
-                  </a:lnTo>
-                  <a:lnTo>
-                    <a:pt x="3566904" y="2950179"/>
-                  </a:lnTo>
-                  <a:lnTo>
-                    <a:pt x="3489270" y="2882708"/>
-                  </a:lnTo>
-                  <a:lnTo>
-                    <a:pt x="3411636" y="2808755"/>
-                  </a:lnTo>
-                  <a:lnTo>
-                    <a:pt x="3334002" y="2771491"/>
-                  </a:lnTo>
-                  <a:lnTo>
-                    <a:pt x="3256368" y="2754128"/>
-                  </a:lnTo>
-                  <a:lnTo>
-                    <a:pt x="3178734" y="2736423"/>
-                  </a:lnTo>
-                  <a:lnTo>
-                    <a:pt x="3101100" y="2718370"/>
-                  </a:lnTo>
-                  <a:lnTo>
-                    <a:pt x="3023466" y="2699960"/>
-                  </a:lnTo>
-                  <a:lnTo>
-                    <a:pt x="2945832" y="2681188"/>
-                  </a:lnTo>
-                  <a:lnTo>
-                    <a:pt x="2868198" y="2662046"/>
-                  </a:lnTo>
-                  <a:lnTo>
-                    <a:pt x="2790564" y="2642527"/>
-                  </a:lnTo>
-                  <a:lnTo>
-                    <a:pt x="2712930" y="2622623"/>
-                  </a:lnTo>
-                  <a:lnTo>
-                    <a:pt x="2635295" y="2602327"/>
-                  </a:lnTo>
-                  <a:lnTo>
-                    <a:pt x="2557661" y="2581630"/>
-                  </a:lnTo>
-                  <a:lnTo>
-                    <a:pt x="2480027" y="2560527"/>
-                  </a:lnTo>
-                  <a:lnTo>
-                    <a:pt x="2402393" y="2539007"/>
-                  </a:lnTo>
-                  <a:lnTo>
-                    <a:pt x="2324759" y="2517063"/>
-                  </a:lnTo>
-                  <a:lnTo>
-                    <a:pt x="2247125" y="2494687"/>
-                  </a:lnTo>
-                  <a:lnTo>
-                    <a:pt x="2169491" y="2471870"/>
-                  </a:lnTo>
-                  <a:lnTo>
-                    <a:pt x="2091857" y="2448603"/>
-                  </a:lnTo>
-                  <a:lnTo>
-                    <a:pt x="2014223" y="2424878"/>
-                  </a:lnTo>
-                  <a:lnTo>
-                    <a:pt x="1936589" y="2400686"/>
-                  </a:lnTo>
-                  <a:lnTo>
-                    <a:pt x="1858955" y="2376016"/>
-                  </a:lnTo>
-                  <a:lnTo>
-                    <a:pt x="1781321" y="2350861"/>
-                  </a:lnTo>
-                  <a:lnTo>
-                    <a:pt x="1703687" y="2325210"/>
-                  </a:lnTo>
-                  <a:lnTo>
-                    <a:pt x="1626053" y="2299053"/>
-                  </a:lnTo>
-                  <a:lnTo>
-                    <a:pt x="1548419" y="2272381"/>
-                  </a:lnTo>
-                  <a:lnTo>
-                    <a:pt x="1470785" y="2245184"/>
-                  </a:lnTo>
-                  <a:lnTo>
-                    <a:pt x="1393151" y="2217450"/>
-                  </a:lnTo>
-                  <a:lnTo>
-                    <a:pt x="1315517" y="2189170"/>
-                  </a:lnTo>
-                  <a:lnTo>
-                    <a:pt x="1237883" y="2160333"/>
-                  </a:lnTo>
-                  <a:lnTo>
-                    <a:pt x="1160249" y="2130928"/>
-                  </a:lnTo>
-                  <a:lnTo>
-                    <a:pt x="1082615" y="2100943"/>
-                  </a:lnTo>
-                  <a:lnTo>
-                    <a:pt x="1004981" y="2070368"/>
-                  </a:lnTo>
-                  <a:lnTo>
-                    <a:pt x="927346" y="2039190"/>
-                  </a:lnTo>
-                  <a:lnTo>
-                    <a:pt x="849712" y="2007397"/>
-                  </a:lnTo>
-                  <a:lnTo>
-                    <a:pt x="772078" y="1974978"/>
-                  </a:lnTo>
-                  <a:lnTo>
-                    <a:pt x="694444" y="1941920"/>
-                  </a:lnTo>
-                  <a:lnTo>
-                    <a:pt x="616810" y="1908211"/>
-                  </a:lnTo>
-                  <a:lnTo>
-                    <a:pt x="539176" y="1873838"/>
-                  </a:lnTo>
-                  <a:lnTo>
-                    <a:pt x="461542" y="1838787"/>
-                  </a:lnTo>
-                  <a:lnTo>
-                    <a:pt x="383908" y="1803046"/>
-                  </a:lnTo>
-                  <a:lnTo>
-                    <a:pt x="306274" y="1766601"/>
-                  </a:lnTo>
-                  <a:lnTo>
-                    <a:pt x="228640" y="1729437"/>
-                  </a:lnTo>
-                  <a:lnTo>
-                    <a:pt x="151006" y="1691541"/>
-                  </a:lnTo>
-                  <a:lnTo>
-                    <a:pt x="73372" y="1652898"/>
-                  </a:lnTo>
-                  <a:lnTo>
-                    <a:pt x="0" y="1615657"/>
+                    <a:pt x="1858955" y="37625"/>
+                  </a:lnTo>
+                  <a:lnTo>
+                    <a:pt x="1936589" y="290187"/>
+                  </a:lnTo>
+                  <a:lnTo>
+                    <a:pt x="2014223" y="525103"/>
+                  </a:lnTo>
+                  <a:lnTo>
+                    <a:pt x="2091857" y="743608"/>
+                  </a:lnTo>
+                  <a:lnTo>
+                    <a:pt x="2169491" y="946846"/>
+                  </a:lnTo>
+                  <a:lnTo>
+                    <a:pt x="2247125" y="1135886"/>
+                  </a:lnTo>
+                  <a:lnTo>
+                    <a:pt x="2324759" y="1311718"/>
+                  </a:lnTo>
+                  <a:lnTo>
+                    <a:pt x="2402393" y="1475266"/>
+                  </a:lnTo>
+                  <a:lnTo>
+                    <a:pt x="2480027" y="1627387"/>
+                  </a:lnTo>
+                  <a:lnTo>
+                    <a:pt x="2557661" y="1768881"/>
+                  </a:lnTo>
+                  <a:lnTo>
+                    <a:pt x="2635295" y="1900489"/>
+                  </a:lnTo>
+                  <a:lnTo>
+                    <a:pt x="2712930" y="2022902"/>
+                  </a:lnTo>
+                  <a:lnTo>
+                    <a:pt x="2790564" y="2136764"/>
+                  </a:lnTo>
+                  <a:lnTo>
+                    <a:pt x="2868198" y="2242670"/>
+                  </a:lnTo>
+                  <a:lnTo>
+                    <a:pt x="2945832" y="2341177"/>
+                  </a:lnTo>
+                  <a:lnTo>
+                    <a:pt x="3023466" y="2432802"/>
+                  </a:lnTo>
+                  <a:lnTo>
+                    <a:pt x="3101100" y="2518026"/>
+                  </a:lnTo>
+                  <a:lnTo>
+                    <a:pt x="3178734" y="2597295"/>
+                  </a:lnTo>
+                  <a:lnTo>
+                    <a:pt x="3256368" y="2671027"/>
+                  </a:lnTo>
+                  <a:lnTo>
+                    <a:pt x="3334002" y="2739607"/>
+                  </a:lnTo>
+                  <a:lnTo>
+                    <a:pt x="3411636" y="2784335"/>
+                  </a:lnTo>
+                  <a:lnTo>
+                    <a:pt x="3489270" y="2788491"/>
+                  </a:lnTo>
+                  <a:lnTo>
+                    <a:pt x="3566904" y="2792627"/>
+                  </a:lnTo>
+                  <a:lnTo>
+                    <a:pt x="3644538" y="2796743"/>
+                  </a:lnTo>
+                  <a:lnTo>
+                    <a:pt x="3722172" y="2800840"/>
+                  </a:lnTo>
+                  <a:lnTo>
+                    <a:pt x="3799806" y="2804917"/>
+                  </a:lnTo>
+                  <a:lnTo>
+                    <a:pt x="3877440" y="2808975"/>
+                  </a:lnTo>
+                  <a:lnTo>
+                    <a:pt x="3955074" y="2813013"/>
+                  </a:lnTo>
+                  <a:lnTo>
+                    <a:pt x="4032708" y="2817032"/>
+                  </a:lnTo>
+                  <a:lnTo>
+                    <a:pt x="4110342" y="2821031"/>
+                  </a:lnTo>
+                  <a:lnTo>
+                    <a:pt x="4187976" y="2825012"/>
+                  </a:lnTo>
+                  <a:lnTo>
+                    <a:pt x="4265610" y="2828973"/>
+                  </a:lnTo>
+                  <a:lnTo>
+                    <a:pt x="4343244" y="2832916"/>
+                  </a:lnTo>
+                  <a:lnTo>
+                    <a:pt x="4420879" y="2836839"/>
+                  </a:lnTo>
+                  <a:lnTo>
+                    <a:pt x="4498513" y="2840744"/>
+                  </a:lnTo>
+                  <a:lnTo>
+                    <a:pt x="4576147" y="2844630"/>
+                  </a:lnTo>
+                  <a:lnTo>
+                    <a:pt x="4653781" y="2848498"/>
+                  </a:lnTo>
+                  <a:lnTo>
+                    <a:pt x="4731415" y="2852347"/>
+                  </a:lnTo>
+                  <a:lnTo>
+                    <a:pt x="4809049" y="2856177"/>
+                  </a:lnTo>
+                  <a:lnTo>
+                    <a:pt x="4886683" y="2859990"/>
+                  </a:lnTo>
+                  <a:lnTo>
+                    <a:pt x="4964317" y="2863784"/>
+                  </a:lnTo>
+                  <a:lnTo>
+                    <a:pt x="5041951" y="2867559"/>
+                  </a:lnTo>
+                  <a:lnTo>
+                    <a:pt x="5119585" y="2871317"/>
+                  </a:lnTo>
+                  <a:lnTo>
+                    <a:pt x="5197219" y="2875057"/>
+                  </a:lnTo>
+                  <a:lnTo>
+                    <a:pt x="5274853" y="2878779"/>
+                  </a:lnTo>
+                  <a:lnTo>
+                    <a:pt x="5352487" y="2882483"/>
+                  </a:lnTo>
+                  <a:lnTo>
+                    <a:pt x="5430121" y="2886169"/>
+                  </a:lnTo>
+                  <a:lnTo>
+                    <a:pt x="5507755" y="2889838"/>
+                  </a:lnTo>
+                  <a:lnTo>
+                    <a:pt x="5585389" y="2893489"/>
+                  </a:lnTo>
+                  <a:lnTo>
+                    <a:pt x="5663023" y="2897123"/>
+                  </a:lnTo>
+                  <a:lnTo>
+                    <a:pt x="5740657" y="2900739"/>
+                  </a:lnTo>
+                  <a:lnTo>
+                    <a:pt x="5818291" y="2904338"/>
+                  </a:lnTo>
+                  <a:lnTo>
+                    <a:pt x="5895925" y="2907920"/>
+                  </a:lnTo>
+                  <a:lnTo>
+                    <a:pt x="5973559" y="2911484"/>
+                  </a:lnTo>
+                  <a:lnTo>
+                    <a:pt x="6051193" y="2915032"/>
+                  </a:lnTo>
+                  <a:lnTo>
+                    <a:pt x="6128827" y="2918562"/>
+                  </a:lnTo>
+                  <a:lnTo>
+                    <a:pt x="6206462" y="2922076"/>
+                  </a:lnTo>
+                  <a:lnTo>
+                    <a:pt x="6284096" y="2925573"/>
+                  </a:lnTo>
+                  <a:lnTo>
+                    <a:pt x="6361730" y="2929053"/>
+                  </a:lnTo>
+                  <a:lnTo>
+                    <a:pt x="6439364" y="2932516"/>
+                  </a:lnTo>
+                  <a:lnTo>
+                    <a:pt x="6516998" y="2935963"/>
+                  </a:lnTo>
+                  <a:lnTo>
+                    <a:pt x="6594632" y="2939393"/>
+                  </a:lnTo>
+                  <a:lnTo>
+                    <a:pt x="6672266" y="2942807"/>
+                  </a:lnTo>
+                  <a:lnTo>
+                    <a:pt x="6749900" y="2946205"/>
+                  </a:lnTo>
+                  <a:lnTo>
+                    <a:pt x="6827534" y="2949586"/>
+                  </a:lnTo>
+                  <a:lnTo>
+                    <a:pt x="6905168" y="2952951"/>
+                  </a:lnTo>
+                  <a:lnTo>
+                    <a:pt x="6982802" y="2956300"/>
+                  </a:lnTo>
+                  <a:lnTo>
+                    <a:pt x="7060436" y="2959633"/>
+                  </a:lnTo>
+                  <a:lnTo>
+                    <a:pt x="7138070" y="2962951"/>
+                  </a:lnTo>
+                  <a:lnTo>
+                    <a:pt x="7215704" y="2966252"/>
+                  </a:lnTo>
+                  <a:lnTo>
+                    <a:pt x="7293338" y="2969537"/>
+                  </a:lnTo>
+                  <a:lnTo>
+                    <a:pt x="7370972" y="2972807"/>
+                  </a:lnTo>
+                  <a:lnTo>
+                    <a:pt x="7370972" y="3631514"/>
+                  </a:lnTo>
+                  <a:lnTo>
+                    <a:pt x="7293338" y="3629927"/>
+                  </a:lnTo>
+                  <a:lnTo>
+                    <a:pt x="7215704" y="3628220"/>
+                  </a:lnTo>
+                  <a:lnTo>
+                    <a:pt x="7138070" y="3626386"/>
+                  </a:lnTo>
+                  <a:lnTo>
+                    <a:pt x="7060436" y="3624414"/>
+                  </a:lnTo>
+                  <a:lnTo>
+                    <a:pt x="6982802" y="3622293"/>
+                  </a:lnTo>
+                  <a:lnTo>
+                    <a:pt x="6905168" y="3620014"/>
+                  </a:lnTo>
+                  <a:lnTo>
+                    <a:pt x="6827534" y="3617563"/>
+                  </a:lnTo>
+                  <a:lnTo>
+                    <a:pt x="6749900" y="3614928"/>
+                  </a:lnTo>
+                  <a:lnTo>
+                    <a:pt x="6672266" y="3612095"/>
+                  </a:lnTo>
+                  <a:lnTo>
+                    <a:pt x="6594632" y="3609049"/>
+                  </a:lnTo>
+                  <a:lnTo>
+                    <a:pt x="6516998" y="3605775"/>
+                  </a:lnTo>
+                  <a:lnTo>
+                    <a:pt x="6439364" y="3602254"/>
+                  </a:lnTo>
+                  <a:lnTo>
+                    <a:pt x="6361730" y="3598469"/>
+                  </a:lnTo>
+                  <a:lnTo>
+                    <a:pt x="6284096" y="3594400"/>
+                  </a:lnTo>
+                  <a:lnTo>
+                    <a:pt x="6206462" y="3590026"/>
+                  </a:lnTo>
+                  <a:lnTo>
+                    <a:pt x="6128827" y="3585322"/>
+                  </a:lnTo>
+                  <a:lnTo>
+                    <a:pt x="6051193" y="3580266"/>
+                  </a:lnTo>
+                  <a:lnTo>
+                    <a:pt x="5973559" y="3574829"/>
+                  </a:lnTo>
+                  <a:lnTo>
+                    <a:pt x="5895925" y="3568984"/>
+                  </a:lnTo>
+                  <a:lnTo>
+                    <a:pt x="5818291" y="3562701"/>
+                  </a:lnTo>
+                  <a:lnTo>
+                    <a:pt x="5740657" y="3555945"/>
+                  </a:lnTo>
+                  <a:lnTo>
+                    <a:pt x="5663023" y="3548682"/>
+                  </a:lnTo>
+                  <a:lnTo>
+                    <a:pt x="5585389" y="3540873"/>
+                  </a:lnTo>
+                  <a:lnTo>
+                    <a:pt x="5507755" y="3532477"/>
+                  </a:lnTo>
+                  <a:lnTo>
+                    <a:pt x="5430121" y="3523451"/>
+                  </a:lnTo>
+                  <a:lnTo>
+                    <a:pt x="5352487" y="3513748"/>
+                  </a:lnTo>
+                  <a:lnTo>
+                    <a:pt x="5274853" y="3503315"/>
+                  </a:lnTo>
+                  <a:lnTo>
+                    <a:pt x="5197219" y="3492098"/>
+                  </a:lnTo>
+                  <a:lnTo>
+                    <a:pt x="5119585" y="3480039"/>
+                  </a:lnTo>
+                  <a:lnTo>
+                    <a:pt x="5041951" y="3467075"/>
+                  </a:lnTo>
+                  <a:lnTo>
+                    <a:pt x="4964317" y="3453136"/>
+                  </a:lnTo>
+                  <a:lnTo>
+                    <a:pt x="4886683" y="3438151"/>
+                  </a:lnTo>
+                  <a:lnTo>
+                    <a:pt x="4809049" y="3422040"/>
+                  </a:lnTo>
+                  <a:lnTo>
+                    <a:pt x="4731415" y="3404719"/>
+                  </a:lnTo>
+                  <a:lnTo>
+                    <a:pt x="4653781" y="3386097"/>
+                  </a:lnTo>
+                  <a:lnTo>
+                    <a:pt x="4576147" y="3366076"/>
+                  </a:lnTo>
+                  <a:lnTo>
+                    <a:pt x="4498513" y="3344551"/>
+                  </a:lnTo>
+                  <a:lnTo>
+                    <a:pt x="4420879" y="3321409"/>
+                  </a:lnTo>
+                  <a:lnTo>
+                    <a:pt x="4343244" y="3296530"/>
+                  </a:lnTo>
+                  <a:lnTo>
+                    <a:pt x="4265610" y="3269781"/>
+                  </a:lnTo>
+                  <a:lnTo>
+                    <a:pt x="4187976" y="3241024"/>
+                  </a:lnTo>
+                  <a:lnTo>
+                    <a:pt x="4110342" y="3210106"/>
+                  </a:lnTo>
+                  <a:lnTo>
+                    <a:pt x="4032708" y="3176866"/>
+                  </a:lnTo>
+                  <a:lnTo>
+                    <a:pt x="3955074" y="3141129"/>
+                  </a:lnTo>
+                  <a:lnTo>
+                    <a:pt x="3877440" y="3102708"/>
+                  </a:lnTo>
+                  <a:lnTo>
+                    <a:pt x="3799806" y="3061401"/>
+                  </a:lnTo>
+                  <a:lnTo>
+                    <a:pt x="3722172" y="3016992"/>
+                  </a:lnTo>
+                  <a:lnTo>
+                    <a:pt x="3644538" y="2969247"/>
+                  </a:lnTo>
+                  <a:lnTo>
+                    <a:pt x="3566904" y="2917915"/>
+                  </a:lnTo>
+                  <a:lnTo>
+                    <a:pt x="3489270" y="2862728"/>
+                  </a:lnTo>
+                  <a:lnTo>
+                    <a:pt x="3411636" y="2803396"/>
+                  </a:lnTo>
+                  <a:lnTo>
+                    <a:pt x="3334002" y="2780159"/>
+                  </a:lnTo>
+                  <a:lnTo>
+                    <a:pt x="3256368" y="2775962"/>
+                  </a:lnTo>
+                  <a:lnTo>
+                    <a:pt x="3178734" y="2771746"/>
+                  </a:lnTo>
+                  <a:lnTo>
+                    <a:pt x="3101100" y="2767509"/>
+                  </a:lnTo>
+                  <a:lnTo>
+                    <a:pt x="3023466" y="2763252"/>
+                  </a:lnTo>
+                  <a:lnTo>
+                    <a:pt x="2945832" y="2758975"/>
+                  </a:lnTo>
+                  <a:lnTo>
+                    <a:pt x="2868198" y="2754677"/>
+                  </a:lnTo>
+                  <a:lnTo>
+                    <a:pt x="2790564" y="2750358"/>
+                  </a:lnTo>
+                  <a:lnTo>
+                    <a:pt x="2712930" y="2746019"/>
+                  </a:lnTo>
+                  <a:lnTo>
+                    <a:pt x="2635295" y="2741658"/>
+                  </a:lnTo>
+                  <a:lnTo>
+                    <a:pt x="2557661" y="2737277"/>
+                  </a:lnTo>
+                  <a:lnTo>
+                    <a:pt x="2480027" y="2732874"/>
+                  </a:lnTo>
+                  <a:lnTo>
+                    <a:pt x="2402393" y="2728451"/>
+                  </a:lnTo>
+                  <a:lnTo>
+                    <a:pt x="2324759" y="2724006"/>
+                  </a:lnTo>
+                  <a:lnTo>
+                    <a:pt x="2247125" y="2719540"/>
+                  </a:lnTo>
+                  <a:lnTo>
+                    <a:pt x="2169491" y="2715052"/>
+                  </a:lnTo>
+                  <a:lnTo>
+                    <a:pt x="2091857" y="2710543"/>
+                  </a:lnTo>
+                  <a:lnTo>
+                    <a:pt x="2014223" y="2706012"/>
+                  </a:lnTo>
+                  <a:lnTo>
+                    <a:pt x="1936589" y="2701459"/>
+                  </a:lnTo>
+                  <a:lnTo>
+                    <a:pt x="1858955" y="2696884"/>
+                  </a:lnTo>
+                  <a:lnTo>
+                    <a:pt x="1781321" y="2692287"/>
+                  </a:lnTo>
+                  <a:lnTo>
+                    <a:pt x="1703687" y="2687669"/>
+                  </a:lnTo>
+                  <a:lnTo>
+                    <a:pt x="1626053" y="2683028"/>
+                  </a:lnTo>
+                  <a:lnTo>
+                    <a:pt x="1548419" y="2678364"/>
+                  </a:lnTo>
+                  <a:lnTo>
+                    <a:pt x="1470785" y="2673679"/>
+                  </a:lnTo>
+                  <a:lnTo>
+                    <a:pt x="1393151" y="2668970"/>
+                  </a:lnTo>
+                  <a:lnTo>
+                    <a:pt x="1315517" y="2664239"/>
+                  </a:lnTo>
+                  <a:lnTo>
+                    <a:pt x="1237883" y="2659486"/>
+                  </a:lnTo>
+                  <a:lnTo>
+                    <a:pt x="1160249" y="2654709"/>
+                  </a:lnTo>
+                  <a:lnTo>
+                    <a:pt x="1082615" y="2649910"/>
+                  </a:lnTo>
+                  <a:lnTo>
+                    <a:pt x="1004981" y="2645087"/>
+                  </a:lnTo>
+                  <a:lnTo>
+                    <a:pt x="927346" y="2640241"/>
+                  </a:lnTo>
+                  <a:lnTo>
+                    <a:pt x="849712" y="2635372"/>
+                  </a:lnTo>
+                  <a:lnTo>
+                    <a:pt x="772078" y="2630479"/>
+                  </a:lnTo>
+                  <a:lnTo>
+                    <a:pt x="694444" y="2625563"/>
+                  </a:lnTo>
+                  <a:lnTo>
+                    <a:pt x="616810" y="2620624"/>
+                  </a:lnTo>
+                  <a:lnTo>
+                    <a:pt x="539176" y="2615660"/>
+                  </a:lnTo>
+                  <a:lnTo>
+                    <a:pt x="461542" y="2610673"/>
+                  </a:lnTo>
+                  <a:lnTo>
+                    <a:pt x="383908" y="2605662"/>
+                  </a:lnTo>
+                  <a:lnTo>
+                    <a:pt x="306274" y="2600626"/>
+                  </a:lnTo>
+                  <a:lnTo>
+                    <a:pt x="228640" y="2595567"/>
+                  </a:lnTo>
+                  <a:lnTo>
+                    <a:pt x="151006" y="2590483"/>
+                  </a:lnTo>
+                  <a:lnTo>
+                    <a:pt x="73372" y="2585374"/>
+                  </a:lnTo>
+                  <a:lnTo>
+                    <a:pt x="0" y="2580523"/>
                   </a:lnTo>
                   <a:close/>
                 </a:path>
@@ -3525,216 +3540,231 @@
           </p:nvSpPr>
           <p:spPr>
             <a:xfrm>
-              <a:off x="2988974" y="1896563"/>
-              <a:ext cx="5199515" cy="3333208"/>
+              <a:off x="2665715" y="1896563"/>
+              <a:ext cx="5522774" cy="2972807"/>
             </a:xfrm>
             <a:custGeom>
               <a:avLst/>
               <a:pathLst>
-                <a:path w="5199515" h="3333208">
+                <a:path w="5522774" h="2972807">
                   <a:moveTo>
                     <a:pt x="0" y="0"/>
                   </a:moveTo>
                   <a:lnTo>
-                    <a:pt x="75669" y="312683"/>
-                  </a:lnTo>
-                  <a:lnTo>
-                    <a:pt x="153303" y="605374"/>
-                  </a:lnTo>
-                  <a:lnTo>
-                    <a:pt x="230937" y="872415"/>
-                  </a:lnTo>
-                  <a:lnTo>
-                    <a:pt x="308571" y="1116055"/>
-                  </a:lnTo>
-                  <a:lnTo>
-                    <a:pt x="386205" y="1338344"/>
-                  </a:lnTo>
-                  <a:lnTo>
-                    <a:pt x="463839" y="1541153"/>
-                  </a:lnTo>
-                  <a:lnTo>
-                    <a:pt x="541473" y="1726189"/>
-                  </a:lnTo>
-                  <a:lnTo>
-                    <a:pt x="619107" y="1895010"/>
-                  </a:lnTo>
-                  <a:lnTo>
-                    <a:pt x="696741" y="2049037"/>
-                  </a:lnTo>
-                  <a:lnTo>
-                    <a:pt x="774375" y="2189565"/>
-                  </a:lnTo>
-                  <a:lnTo>
-                    <a:pt x="852009" y="2317779"/>
-                  </a:lnTo>
-                  <a:lnTo>
-                    <a:pt x="929643" y="2434757"/>
-                  </a:lnTo>
-                  <a:lnTo>
-                    <a:pt x="1007277" y="2541484"/>
-                  </a:lnTo>
-                  <a:lnTo>
-                    <a:pt x="1084911" y="2638859"/>
-                  </a:lnTo>
-                  <a:lnTo>
-                    <a:pt x="1162545" y="2727700"/>
-                  </a:lnTo>
-                  <a:lnTo>
-                    <a:pt x="1240179" y="2788518"/>
-                  </a:lnTo>
-                  <a:lnTo>
-                    <a:pt x="1317813" y="2805217"/>
-                  </a:lnTo>
-                  <a:lnTo>
-                    <a:pt x="1395447" y="2821592"/>
-                  </a:lnTo>
-                  <a:lnTo>
-                    <a:pt x="1473081" y="2837651"/>
-                  </a:lnTo>
-                  <a:lnTo>
-                    <a:pt x="1550715" y="2853400"/>
-                  </a:lnTo>
-                  <a:lnTo>
-                    <a:pt x="1628349" y="2868844"/>
-                  </a:lnTo>
-                  <a:lnTo>
-                    <a:pt x="1705983" y="2883990"/>
-                  </a:lnTo>
-                  <a:lnTo>
-                    <a:pt x="1783618" y="2898844"/>
-                  </a:lnTo>
-                  <a:lnTo>
-                    <a:pt x="1861252" y="2913410"/>
-                  </a:lnTo>
-                  <a:lnTo>
-                    <a:pt x="1938886" y="2927695"/>
-                  </a:lnTo>
-                  <a:lnTo>
-                    <a:pt x="2016520" y="2941704"/>
-                  </a:lnTo>
-                  <a:lnTo>
-                    <a:pt x="2094154" y="2955442"/>
-                  </a:lnTo>
-                  <a:lnTo>
-                    <a:pt x="2171788" y="2968914"/>
-                  </a:lnTo>
-                  <a:lnTo>
-                    <a:pt x="2249422" y="2982126"/>
-                  </a:lnTo>
-                  <a:lnTo>
-                    <a:pt x="2327056" y="2995083"/>
-                  </a:lnTo>
-                  <a:lnTo>
-                    <a:pt x="2404690" y="3007790"/>
-                  </a:lnTo>
-                  <a:lnTo>
-                    <a:pt x="2482324" y="3020251"/>
-                  </a:lnTo>
-                  <a:lnTo>
-                    <a:pt x="2559958" y="3032471"/>
-                  </a:lnTo>
-                  <a:lnTo>
-                    <a:pt x="2637592" y="3044455"/>
-                  </a:lnTo>
-                  <a:lnTo>
-                    <a:pt x="2715226" y="3056208"/>
-                  </a:lnTo>
-                  <a:lnTo>
-                    <a:pt x="2792860" y="3067733"/>
-                  </a:lnTo>
-                  <a:lnTo>
-                    <a:pt x="2870494" y="3079036"/>
-                  </a:lnTo>
-                  <a:lnTo>
-                    <a:pt x="2948128" y="3090120"/>
-                  </a:lnTo>
-                  <a:lnTo>
-                    <a:pt x="3025762" y="3100990"/>
-                  </a:lnTo>
-                  <a:lnTo>
-                    <a:pt x="3103396" y="3111650"/>
-                  </a:lnTo>
-                  <a:lnTo>
-                    <a:pt x="3181030" y="3122104"/>
-                  </a:lnTo>
-                  <a:lnTo>
-                    <a:pt x="3258664" y="3132356"/>
-                  </a:lnTo>
-                  <a:lnTo>
-                    <a:pt x="3336298" y="3142410"/>
-                  </a:lnTo>
-                  <a:lnTo>
-                    <a:pt x="3413932" y="3152270"/>
-                  </a:lnTo>
-                  <a:lnTo>
-                    <a:pt x="3491567" y="3161939"/>
-                  </a:lnTo>
-                  <a:lnTo>
-                    <a:pt x="3569201" y="3171421"/>
-                  </a:lnTo>
-                  <a:lnTo>
-                    <a:pt x="3646835" y="3180720"/>
-                  </a:lnTo>
-                  <a:lnTo>
-                    <a:pt x="3724469" y="3189840"/>
-                  </a:lnTo>
-                  <a:lnTo>
-                    <a:pt x="3802103" y="3198783"/>
-                  </a:lnTo>
-                  <a:lnTo>
-                    <a:pt x="3879737" y="3207553"/>
-                  </a:lnTo>
-                  <a:lnTo>
-                    <a:pt x="3957371" y="3216154"/>
-                  </a:lnTo>
-                  <a:lnTo>
-                    <a:pt x="4035005" y="3224589"/>
-                  </a:lnTo>
-                  <a:lnTo>
-                    <a:pt x="4112639" y="3232860"/>
-                  </a:lnTo>
-                  <a:lnTo>
-                    <a:pt x="4190273" y="3240972"/>
-                  </a:lnTo>
-                  <a:lnTo>
-                    <a:pt x="4267907" y="3248927"/>
-                  </a:lnTo>
-                  <a:lnTo>
-                    <a:pt x="4345541" y="3256729"/>
-                  </a:lnTo>
-                  <a:lnTo>
-                    <a:pt x="4423175" y="3264379"/>
-                  </a:lnTo>
-                  <a:lnTo>
-                    <a:pt x="4500809" y="3271882"/>
-                  </a:lnTo>
-                  <a:lnTo>
-                    <a:pt x="4578443" y="3279240"/>
-                  </a:lnTo>
-                  <a:lnTo>
-                    <a:pt x="4656077" y="3286455"/>
-                  </a:lnTo>
-                  <a:lnTo>
-                    <a:pt x="4733711" y="3293531"/>
-                  </a:lnTo>
-                  <a:lnTo>
-                    <a:pt x="4811345" y="3300471"/>
-                  </a:lnTo>
-                  <a:lnTo>
-                    <a:pt x="4888979" y="3307276"/>
-                  </a:lnTo>
-                  <a:lnTo>
-                    <a:pt x="4966613" y="3313950"/>
-                  </a:lnTo>
-                  <a:lnTo>
-                    <a:pt x="5044247" y="3320495"/>
-                  </a:lnTo>
-                  <a:lnTo>
-                    <a:pt x="5121881" y="3326913"/>
-                  </a:lnTo>
-                  <a:lnTo>
-                    <a:pt x="5199515" y="3333208"/>
+                    <a:pt x="10757" y="37625"/>
+                  </a:lnTo>
+                  <a:lnTo>
+                    <a:pt x="88391" y="290187"/>
+                  </a:lnTo>
+                  <a:lnTo>
+                    <a:pt x="166025" y="525103"/>
+                  </a:lnTo>
+                  <a:lnTo>
+                    <a:pt x="243659" y="743608"/>
+                  </a:lnTo>
+                  <a:lnTo>
+                    <a:pt x="321293" y="946846"/>
+                  </a:lnTo>
+                  <a:lnTo>
+                    <a:pt x="398927" y="1135886"/>
+                  </a:lnTo>
+                  <a:lnTo>
+                    <a:pt x="476561" y="1311718"/>
+                  </a:lnTo>
+                  <a:lnTo>
+                    <a:pt x="554195" y="1475266"/>
+                  </a:lnTo>
+                  <a:lnTo>
+                    <a:pt x="631829" y="1627387"/>
+                  </a:lnTo>
+                  <a:lnTo>
+                    <a:pt x="709464" y="1768881"/>
+                  </a:lnTo>
+                  <a:lnTo>
+                    <a:pt x="787098" y="1900489"/>
+                  </a:lnTo>
+                  <a:lnTo>
+                    <a:pt x="864732" y="2022902"/>
+                  </a:lnTo>
+                  <a:lnTo>
+                    <a:pt x="942366" y="2136764"/>
+                  </a:lnTo>
+                  <a:lnTo>
+                    <a:pt x="1020000" y="2242670"/>
+                  </a:lnTo>
+                  <a:lnTo>
+                    <a:pt x="1097634" y="2341177"/>
+                  </a:lnTo>
+                  <a:lnTo>
+                    <a:pt x="1175268" y="2432802"/>
+                  </a:lnTo>
+                  <a:lnTo>
+                    <a:pt x="1252902" y="2518026"/>
+                  </a:lnTo>
+                  <a:lnTo>
+                    <a:pt x="1330536" y="2597295"/>
+                  </a:lnTo>
+                  <a:lnTo>
+                    <a:pt x="1408170" y="2671027"/>
+                  </a:lnTo>
+                  <a:lnTo>
+                    <a:pt x="1485804" y="2739607"/>
+                  </a:lnTo>
+                  <a:lnTo>
+                    <a:pt x="1563438" y="2784335"/>
+                  </a:lnTo>
+                  <a:lnTo>
+                    <a:pt x="1641072" y="2788491"/>
+                  </a:lnTo>
+                  <a:lnTo>
+                    <a:pt x="1718706" y="2792627"/>
+                  </a:lnTo>
+                  <a:lnTo>
+                    <a:pt x="1796340" y="2796743"/>
+                  </a:lnTo>
+                  <a:lnTo>
+                    <a:pt x="1873974" y="2800840"/>
+                  </a:lnTo>
+                  <a:lnTo>
+                    <a:pt x="1951608" y="2804917"/>
+                  </a:lnTo>
+                  <a:lnTo>
+                    <a:pt x="2029242" y="2808975"/>
+                  </a:lnTo>
+                  <a:lnTo>
+                    <a:pt x="2106876" y="2813013"/>
+                  </a:lnTo>
+                  <a:lnTo>
+                    <a:pt x="2184510" y="2817032"/>
+                  </a:lnTo>
+                  <a:lnTo>
+                    <a:pt x="2262144" y="2821031"/>
+                  </a:lnTo>
+                  <a:lnTo>
+                    <a:pt x="2339778" y="2825012"/>
+                  </a:lnTo>
+                  <a:lnTo>
+                    <a:pt x="2417413" y="2828973"/>
+                  </a:lnTo>
+                  <a:lnTo>
+                    <a:pt x="2495047" y="2832916"/>
+                  </a:lnTo>
+                  <a:lnTo>
+                    <a:pt x="2572681" y="2836839"/>
+                  </a:lnTo>
+                  <a:lnTo>
+                    <a:pt x="2650315" y="2840744"/>
+                  </a:lnTo>
+                  <a:lnTo>
+                    <a:pt x="2727949" y="2844630"/>
+                  </a:lnTo>
+                  <a:lnTo>
+                    <a:pt x="2805583" y="2848498"/>
+                  </a:lnTo>
+                  <a:lnTo>
+                    <a:pt x="2883217" y="2852347"/>
+                  </a:lnTo>
+                  <a:lnTo>
+                    <a:pt x="2960851" y="2856177"/>
+                  </a:lnTo>
+                  <a:lnTo>
+                    <a:pt x="3038485" y="2859990"/>
+                  </a:lnTo>
+                  <a:lnTo>
+                    <a:pt x="3116119" y="2863784"/>
+                  </a:lnTo>
+                  <a:lnTo>
+                    <a:pt x="3193753" y="2867559"/>
+                  </a:lnTo>
+                  <a:lnTo>
+                    <a:pt x="3271387" y="2871317"/>
+                  </a:lnTo>
+                  <a:lnTo>
+                    <a:pt x="3349021" y="2875057"/>
+                  </a:lnTo>
+                  <a:lnTo>
+                    <a:pt x="3426655" y="2878779"/>
+                  </a:lnTo>
+                  <a:lnTo>
+                    <a:pt x="3504289" y="2882483"/>
+                  </a:lnTo>
+                  <a:lnTo>
+                    <a:pt x="3581923" y="2886169"/>
+                  </a:lnTo>
+                  <a:lnTo>
+                    <a:pt x="3659557" y="2889838"/>
+                  </a:lnTo>
+                  <a:lnTo>
+                    <a:pt x="3737191" y="2893489"/>
+                  </a:lnTo>
+                  <a:lnTo>
+                    <a:pt x="3814825" y="2897123"/>
+                  </a:lnTo>
+                  <a:lnTo>
+                    <a:pt x="3892459" y="2900739"/>
+                  </a:lnTo>
+                  <a:lnTo>
+                    <a:pt x="3970093" y="2904338"/>
+                  </a:lnTo>
+                  <a:lnTo>
+                    <a:pt x="4047727" y="2907920"/>
+                  </a:lnTo>
+                  <a:lnTo>
+                    <a:pt x="4125361" y="2911484"/>
+                  </a:lnTo>
+                  <a:lnTo>
+                    <a:pt x="4202996" y="2915032"/>
+                  </a:lnTo>
+                  <a:lnTo>
+                    <a:pt x="4280630" y="2918562"/>
+                  </a:lnTo>
+                  <a:lnTo>
+                    <a:pt x="4358264" y="2922076"/>
+                  </a:lnTo>
+                  <a:lnTo>
+                    <a:pt x="4435898" y="2925573"/>
+                  </a:lnTo>
+                  <a:lnTo>
+                    <a:pt x="4513532" y="2929053"/>
+                  </a:lnTo>
+                  <a:lnTo>
+                    <a:pt x="4591166" y="2932516"/>
+                  </a:lnTo>
+                  <a:lnTo>
+                    <a:pt x="4668800" y="2935963"/>
+                  </a:lnTo>
+                  <a:lnTo>
+                    <a:pt x="4746434" y="2939393"/>
+                  </a:lnTo>
+                  <a:lnTo>
+                    <a:pt x="4824068" y="2942807"/>
+                  </a:lnTo>
+                  <a:lnTo>
+                    <a:pt x="4901702" y="2946205"/>
+                  </a:lnTo>
+                  <a:lnTo>
+                    <a:pt x="4979336" y="2949586"/>
+                  </a:lnTo>
+                  <a:lnTo>
+                    <a:pt x="5056970" y="2952951"/>
+                  </a:lnTo>
+                  <a:lnTo>
+                    <a:pt x="5134604" y="2956300"/>
+                  </a:lnTo>
+                  <a:lnTo>
+                    <a:pt x="5212238" y="2959633"/>
+                  </a:lnTo>
+                  <a:lnTo>
+                    <a:pt x="5289872" y="2962951"/>
+                  </a:lnTo>
+                  <a:lnTo>
+                    <a:pt x="5367506" y="2966252"/>
+                  </a:lnTo>
+                  <a:lnTo>
+                    <a:pt x="5445140" y="2969537"/>
+                  </a:lnTo>
+                  <a:lnTo>
+                    <a:pt x="5522774" y="2972807"/>
                   </a:lnTo>
                 </a:path>
               </a:pathLst>
@@ -3754,297 +3784,297 @@
           </p:nvSpPr>
           <p:spPr>
             <a:xfrm>
-              <a:off x="817517" y="3512220"/>
-              <a:ext cx="7370972" cy="2029135"/>
+              <a:off x="817517" y="4477086"/>
+              <a:ext cx="7370972" cy="1050990"/>
             </a:xfrm>
             <a:custGeom>
               <a:avLst/>
               <a:pathLst>
-                <a:path w="7370972" h="2029135">
+                <a:path w="7370972" h="1050990">
                   <a:moveTo>
-                    <a:pt x="7370972" y="2029135"/>
+                    <a:pt x="7370972" y="1050990"/>
                   </a:moveTo>
                   <a:lnTo>
-                    <a:pt x="7293338" y="2028381"/>
-                  </a:lnTo>
-                  <a:lnTo>
-                    <a:pt x="7215704" y="2027554"/>
-                  </a:lnTo>
-                  <a:lnTo>
-                    <a:pt x="7138070" y="2026648"/>
-                  </a:lnTo>
-                  <a:lnTo>
-                    <a:pt x="7060436" y="2025655"/>
-                  </a:lnTo>
-                  <a:lnTo>
-                    <a:pt x="6982802" y="2024567"/>
-                  </a:lnTo>
-                  <a:lnTo>
-                    <a:pt x="6905168" y="2023374"/>
-                  </a:lnTo>
-                  <a:lnTo>
-                    <a:pt x="6827534" y="2022067"/>
-                  </a:lnTo>
-                  <a:lnTo>
-                    <a:pt x="6749900" y="2020634"/>
-                  </a:lnTo>
-                  <a:lnTo>
-                    <a:pt x="6672266" y="2019063"/>
-                  </a:lnTo>
-                  <a:lnTo>
-                    <a:pt x="6594632" y="2017341"/>
-                  </a:lnTo>
-                  <a:lnTo>
-                    <a:pt x="6516998" y="2015455"/>
-                  </a:lnTo>
-                  <a:lnTo>
-                    <a:pt x="6439364" y="2013387"/>
-                  </a:lnTo>
-                  <a:lnTo>
-                    <a:pt x="6361730" y="2011120"/>
-                  </a:lnTo>
-                  <a:lnTo>
-                    <a:pt x="6284096" y="2008635"/>
-                  </a:lnTo>
-                  <a:lnTo>
-                    <a:pt x="6206462" y="2005912"/>
-                  </a:lnTo>
-                  <a:lnTo>
-                    <a:pt x="6128827" y="2002928"/>
-                  </a:lnTo>
-                  <a:lnTo>
-                    <a:pt x="6051193" y="1999656"/>
-                  </a:lnTo>
-                  <a:lnTo>
-                    <a:pt x="5973559" y="1996071"/>
-                  </a:lnTo>
-                  <a:lnTo>
-                    <a:pt x="5895925" y="1992141"/>
-                  </a:lnTo>
-                  <a:lnTo>
-                    <a:pt x="5818291" y="1987834"/>
-                  </a:lnTo>
-                  <a:lnTo>
-                    <a:pt x="5740657" y="1983113"/>
-                  </a:lnTo>
-                  <a:lnTo>
-                    <a:pt x="5663023" y="1977938"/>
-                  </a:lnTo>
-                  <a:lnTo>
-                    <a:pt x="5585389" y="1972267"/>
-                  </a:lnTo>
-                  <a:lnTo>
-                    <a:pt x="5507755" y="1966050"/>
-                  </a:lnTo>
-                  <a:lnTo>
-                    <a:pt x="5430121" y="1959237"/>
-                  </a:lnTo>
-                  <a:lnTo>
-                    <a:pt x="5352487" y="1951769"/>
-                  </a:lnTo>
-                  <a:lnTo>
-                    <a:pt x="5274853" y="1943584"/>
-                  </a:lnTo>
-                  <a:lnTo>
-                    <a:pt x="5197219" y="1934613"/>
-                  </a:lnTo>
-                  <a:lnTo>
-                    <a:pt x="5119585" y="1924780"/>
-                  </a:lnTo>
-                  <a:lnTo>
-                    <a:pt x="5041951" y="1914003"/>
-                  </a:lnTo>
-                  <a:lnTo>
-                    <a:pt x="4964317" y="1902190"/>
-                  </a:lnTo>
-                  <a:lnTo>
-                    <a:pt x="4886683" y="1889243"/>
-                  </a:lnTo>
-                  <a:lnTo>
-                    <a:pt x="4809049" y="1875052"/>
-                  </a:lnTo>
-                  <a:lnTo>
-                    <a:pt x="4731415" y="1859498"/>
-                  </a:lnTo>
-                  <a:lnTo>
-                    <a:pt x="4653781" y="1842451"/>
-                  </a:lnTo>
-                  <a:lnTo>
-                    <a:pt x="4576147" y="1823766"/>
-                  </a:lnTo>
-                  <a:lnTo>
-                    <a:pt x="4498513" y="1803286"/>
-                  </a:lnTo>
-                  <a:lnTo>
-                    <a:pt x="4420879" y="1780839"/>
-                  </a:lnTo>
-                  <a:lnTo>
-                    <a:pt x="4343244" y="1756236"/>
-                  </a:lnTo>
-                  <a:lnTo>
-                    <a:pt x="4265610" y="1729270"/>
-                  </a:lnTo>
-                  <a:lnTo>
-                    <a:pt x="4187976" y="1699714"/>
-                  </a:lnTo>
-                  <a:lnTo>
-                    <a:pt x="4110342" y="1667318"/>
-                  </a:lnTo>
-                  <a:lnTo>
-                    <a:pt x="4032708" y="1631812"/>
-                  </a:lnTo>
-                  <a:lnTo>
-                    <a:pt x="3955074" y="1592895"/>
-                  </a:lnTo>
-                  <a:lnTo>
-                    <a:pt x="3877440" y="1550240"/>
-                  </a:lnTo>
-                  <a:lnTo>
-                    <a:pt x="3799806" y="1503488"/>
-                  </a:lnTo>
-                  <a:lnTo>
-                    <a:pt x="3722172" y="1452245"/>
-                  </a:lnTo>
-                  <a:lnTo>
-                    <a:pt x="3644538" y="1396081"/>
-                  </a:lnTo>
-                  <a:lnTo>
-                    <a:pt x="3566904" y="1334522"/>
-                  </a:lnTo>
-                  <a:lnTo>
-                    <a:pt x="3489270" y="1267050"/>
-                  </a:lnTo>
-                  <a:lnTo>
-                    <a:pt x="3411636" y="1193098"/>
-                  </a:lnTo>
-                  <a:lnTo>
-                    <a:pt x="3334002" y="1155834"/>
-                  </a:lnTo>
-                  <a:lnTo>
-                    <a:pt x="3256368" y="1138471"/>
-                  </a:lnTo>
-                  <a:lnTo>
-                    <a:pt x="3178734" y="1120766"/>
-                  </a:lnTo>
-                  <a:lnTo>
-                    <a:pt x="3101100" y="1102712"/>
-                  </a:lnTo>
-                  <a:lnTo>
-                    <a:pt x="3023466" y="1084303"/>
-                  </a:lnTo>
-                  <a:lnTo>
-                    <a:pt x="2945832" y="1065530"/>
-                  </a:lnTo>
-                  <a:lnTo>
-                    <a:pt x="2868198" y="1046388"/>
-                  </a:lnTo>
-                  <a:lnTo>
-                    <a:pt x="2790564" y="1026869"/>
-                  </a:lnTo>
-                  <a:lnTo>
-                    <a:pt x="2712930" y="1006965"/>
-                  </a:lnTo>
-                  <a:lnTo>
-                    <a:pt x="2635295" y="986669"/>
-                  </a:lnTo>
-                  <a:lnTo>
-                    <a:pt x="2557661" y="965973"/>
-                  </a:lnTo>
-                  <a:lnTo>
-                    <a:pt x="2480027" y="944869"/>
-                  </a:lnTo>
-                  <a:lnTo>
-                    <a:pt x="2402393" y="923349"/>
-                  </a:lnTo>
-                  <a:lnTo>
-                    <a:pt x="2324759" y="901406"/>
-                  </a:lnTo>
-                  <a:lnTo>
-                    <a:pt x="2247125" y="879029"/>
-                  </a:lnTo>
-                  <a:lnTo>
-                    <a:pt x="2169491" y="856212"/>
-                  </a:lnTo>
-                  <a:lnTo>
-                    <a:pt x="2091857" y="832946"/>
-                  </a:lnTo>
-                  <a:lnTo>
-                    <a:pt x="2014223" y="809221"/>
-                  </a:lnTo>
-                  <a:lnTo>
-                    <a:pt x="1936589" y="785028"/>
-                  </a:lnTo>
-                  <a:lnTo>
-                    <a:pt x="1858955" y="760359"/>
-                  </a:lnTo>
-                  <a:lnTo>
-                    <a:pt x="1781321" y="735203"/>
-                  </a:lnTo>
-                  <a:lnTo>
-                    <a:pt x="1703687" y="709552"/>
-                  </a:lnTo>
-                  <a:lnTo>
-                    <a:pt x="1626053" y="683396"/>
-                  </a:lnTo>
-                  <a:lnTo>
-                    <a:pt x="1548419" y="656724"/>
-                  </a:lnTo>
-                  <a:lnTo>
-                    <a:pt x="1470785" y="629526"/>
-                  </a:lnTo>
-                  <a:lnTo>
-                    <a:pt x="1393151" y="601793"/>
-                  </a:lnTo>
-                  <a:lnTo>
-                    <a:pt x="1315517" y="573513"/>
-                  </a:lnTo>
-                  <a:lnTo>
-                    <a:pt x="1237883" y="544676"/>
-                  </a:lnTo>
-                  <a:lnTo>
-                    <a:pt x="1160249" y="515270"/>
-                  </a:lnTo>
-                  <a:lnTo>
-                    <a:pt x="1082615" y="485286"/>
-                  </a:lnTo>
-                  <a:lnTo>
-                    <a:pt x="1004981" y="454710"/>
-                  </a:lnTo>
-                  <a:lnTo>
-                    <a:pt x="927346" y="423532"/>
-                  </a:lnTo>
-                  <a:lnTo>
-                    <a:pt x="849712" y="391740"/>
-                  </a:lnTo>
-                  <a:lnTo>
-                    <a:pt x="772078" y="359321"/>
-                  </a:lnTo>
-                  <a:lnTo>
-                    <a:pt x="694444" y="326263"/>
-                  </a:lnTo>
-                  <a:lnTo>
-                    <a:pt x="616810" y="292554"/>
-                  </a:lnTo>
-                  <a:lnTo>
-                    <a:pt x="539176" y="258181"/>
-                  </a:lnTo>
-                  <a:lnTo>
-                    <a:pt x="461542" y="223130"/>
-                  </a:lnTo>
-                  <a:lnTo>
-                    <a:pt x="383908" y="187389"/>
-                  </a:lnTo>
-                  <a:lnTo>
-                    <a:pt x="306274" y="150943"/>
-                  </a:lnTo>
-                  <a:lnTo>
-                    <a:pt x="228640" y="113779"/>
-                  </a:lnTo>
-                  <a:lnTo>
-                    <a:pt x="151006" y="75883"/>
-                  </a:lnTo>
-                  <a:lnTo>
-                    <a:pt x="73372" y="37241"/>
+                    <a:pt x="7293338" y="1049403"/>
+                  </a:lnTo>
+                  <a:lnTo>
+                    <a:pt x="7215704" y="1047697"/>
+                  </a:lnTo>
+                  <a:lnTo>
+                    <a:pt x="7138070" y="1045862"/>
+                  </a:lnTo>
+                  <a:lnTo>
+                    <a:pt x="7060436" y="1043890"/>
+                  </a:lnTo>
+                  <a:lnTo>
+                    <a:pt x="6982802" y="1041770"/>
+                  </a:lnTo>
+                  <a:lnTo>
+                    <a:pt x="6905168" y="1039490"/>
+                  </a:lnTo>
+                  <a:lnTo>
+                    <a:pt x="6827534" y="1037039"/>
+                  </a:lnTo>
+                  <a:lnTo>
+                    <a:pt x="6749900" y="1034404"/>
+                  </a:lnTo>
+                  <a:lnTo>
+                    <a:pt x="6672266" y="1031571"/>
+                  </a:lnTo>
+                  <a:lnTo>
+                    <a:pt x="6594632" y="1028526"/>
+                  </a:lnTo>
+                  <a:lnTo>
+                    <a:pt x="6516998" y="1025251"/>
+                  </a:lnTo>
+                  <a:lnTo>
+                    <a:pt x="6439364" y="1021731"/>
+                  </a:lnTo>
+                  <a:lnTo>
+                    <a:pt x="6361730" y="1017946"/>
+                  </a:lnTo>
+                  <a:lnTo>
+                    <a:pt x="6284096" y="1013877"/>
+                  </a:lnTo>
+                  <a:lnTo>
+                    <a:pt x="6206462" y="1009502"/>
+                  </a:lnTo>
+                  <a:lnTo>
+                    <a:pt x="6128827" y="1004799"/>
+                  </a:lnTo>
+                  <a:lnTo>
+                    <a:pt x="6051193" y="999742"/>
+                  </a:lnTo>
+                  <a:lnTo>
+                    <a:pt x="5973559" y="994306"/>
+                  </a:lnTo>
+                  <a:lnTo>
+                    <a:pt x="5895925" y="988461"/>
+                  </a:lnTo>
+                  <a:lnTo>
+                    <a:pt x="5818291" y="982177"/>
+                  </a:lnTo>
+                  <a:lnTo>
+                    <a:pt x="5740657" y="975421"/>
+                  </a:lnTo>
+                  <a:lnTo>
+                    <a:pt x="5663023" y="968158"/>
+                  </a:lnTo>
+                  <a:lnTo>
+                    <a:pt x="5585389" y="960349"/>
+                  </a:lnTo>
+                  <a:lnTo>
+                    <a:pt x="5507755" y="951954"/>
+                  </a:lnTo>
+                  <a:lnTo>
+                    <a:pt x="5430121" y="942928"/>
+                  </a:lnTo>
+                  <a:lnTo>
+                    <a:pt x="5352487" y="933224"/>
+                  </a:lnTo>
+                  <a:lnTo>
+                    <a:pt x="5274853" y="922791"/>
+                  </a:lnTo>
+                  <a:lnTo>
+                    <a:pt x="5197219" y="911575"/>
+                  </a:lnTo>
+                  <a:lnTo>
+                    <a:pt x="5119585" y="899516"/>
+                  </a:lnTo>
+                  <a:lnTo>
+                    <a:pt x="5041951" y="886551"/>
+                  </a:lnTo>
+                  <a:lnTo>
+                    <a:pt x="4964317" y="872613"/>
+                  </a:lnTo>
+                  <a:lnTo>
+                    <a:pt x="4886683" y="857628"/>
+                  </a:lnTo>
+                  <a:lnTo>
+                    <a:pt x="4809049" y="841517"/>
+                  </a:lnTo>
+                  <a:lnTo>
+                    <a:pt x="4731415" y="824195"/>
+                  </a:lnTo>
+                  <a:lnTo>
+                    <a:pt x="4653781" y="805573"/>
+                  </a:lnTo>
+                  <a:lnTo>
+                    <a:pt x="4576147" y="785552"/>
+                  </a:lnTo>
+                  <a:lnTo>
+                    <a:pt x="4498513" y="764028"/>
+                  </a:lnTo>
+                  <a:lnTo>
+                    <a:pt x="4420879" y="740886"/>
+                  </a:lnTo>
+                  <a:lnTo>
+                    <a:pt x="4343244" y="716006"/>
+                  </a:lnTo>
+                  <a:lnTo>
+                    <a:pt x="4265610" y="689258"/>
+                  </a:lnTo>
+                  <a:lnTo>
+                    <a:pt x="4187976" y="660500"/>
+                  </a:lnTo>
+                  <a:lnTo>
+                    <a:pt x="4110342" y="629583"/>
+                  </a:lnTo>
+                  <a:lnTo>
+                    <a:pt x="4032708" y="596343"/>
+                  </a:lnTo>
+                  <a:lnTo>
+                    <a:pt x="3955074" y="560606"/>
+                  </a:lnTo>
+                  <a:lnTo>
+                    <a:pt x="3877440" y="522185"/>
+                  </a:lnTo>
+                  <a:lnTo>
+                    <a:pt x="3799806" y="480878"/>
+                  </a:lnTo>
+                  <a:lnTo>
+                    <a:pt x="3722172" y="436469"/>
+                  </a:lnTo>
+                  <a:lnTo>
+                    <a:pt x="3644538" y="388723"/>
+                  </a:lnTo>
+                  <a:lnTo>
+                    <a:pt x="3566904" y="337392"/>
+                  </a:lnTo>
+                  <a:lnTo>
+                    <a:pt x="3489270" y="282205"/>
+                  </a:lnTo>
+                  <a:lnTo>
+                    <a:pt x="3411636" y="222872"/>
+                  </a:lnTo>
+                  <a:lnTo>
+                    <a:pt x="3334002" y="199635"/>
+                  </a:lnTo>
+                  <a:lnTo>
+                    <a:pt x="3256368" y="195439"/>
+                  </a:lnTo>
+                  <a:lnTo>
+                    <a:pt x="3178734" y="191223"/>
+                  </a:lnTo>
+                  <a:lnTo>
+                    <a:pt x="3101100" y="186986"/>
+                  </a:lnTo>
+                  <a:lnTo>
+                    <a:pt x="3023466" y="182729"/>
+                  </a:lnTo>
+                  <a:lnTo>
+                    <a:pt x="2945832" y="178451"/>
+                  </a:lnTo>
+                  <a:lnTo>
+                    <a:pt x="2868198" y="174153"/>
+                  </a:lnTo>
+                  <a:lnTo>
+                    <a:pt x="2790564" y="169835"/>
+                  </a:lnTo>
+                  <a:lnTo>
+                    <a:pt x="2712930" y="165495"/>
+                  </a:lnTo>
+                  <a:lnTo>
+                    <a:pt x="2635295" y="161135"/>
+                  </a:lnTo>
+                  <a:lnTo>
+                    <a:pt x="2557661" y="156753"/>
+                  </a:lnTo>
+                  <a:lnTo>
+                    <a:pt x="2480027" y="152351"/>
+                  </a:lnTo>
+                  <a:lnTo>
+                    <a:pt x="2402393" y="147927"/>
+                  </a:lnTo>
+                  <a:lnTo>
+                    <a:pt x="2324759" y="143483"/>
+                  </a:lnTo>
+                  <a:lnTo>
+                    <a:pt x="2247125" y="139016"/>
+                  </a:lnTo>
+                  <a:lnTo>
+                    <a:pt x="2169491" y="134529"/>
+                  </a:lnTo>
+                  <a:lnTo>
+                    <a:pt x="2091857" y="130019"/>
+                  </a:lnTo>
+                  <a:lnTo>
+                    <a:pt x="2014223" y="125488"/>
+                  </a:lnTo>
+                  <a:lnTo>
+                    <a:pt x="1936589" y="120935"/>
+                  </a:lnTo>
+                  <a:lnTo>
+                    <a:pt x="1858955" y="116361"/>
+                  </a:lnTo>
+                  <a:lnTo>
+                    <a:pt x="1781321" y="111764"/>
+                  </a:lnTo>
+                  <a:lnTo>
+                    <a:pt x="1703687" y="107145"/>
+                  </a:lnTo>
+                  <a:lnTo>
+                    <a:pt x="1626053" y="102504"/>
+                  </a:lnTo>
+                  <a:lnTo>
+                    <a:pt x="1548419" y="97841"/>
+                  </a:lnTo>
+                  <a:lnTo>
+                    <a:pt x="1470785" y="93155"/>
+                  </a:lnTo>
+                  <a:lnTo>
+                    <a:pt x="1393151" y="88447"/>
+                  </a:lnTo>
+                  <a:lnTo>
+                    <a:pt x="1315517" y="83716"/>
+                  </a:lnTo>
+                  <a:lnTo>
+                    <a:pt x="1237883" y="78962"/>
+                  </a:lnTo>
+                  <a:lnTo>
+                    <a:pt x="1160249" y="74186"/>
+                  </a:lnTo>
+                  <a:lnTo>
+                    <a:pt x="1082615" y="69386"/>
+                  </a:lnTo>
+                  <a:lnTo>
+                    <a:pt x="1004981" y="64564"/>
+                  </a:lnTo>
+                  <a:lnTo>
+                    <a:pt x="927346" y="59718"/>
+                  </a:lnTo>
+                  <a:lnTo>
+                    <a:pt x="849712" y="54849"/>
+                  </a:lnTo>
+                  <a:lnTo>
+                    <a:pt x="772078" y="49956"/>
+                  </a:lnTo>
+                  <a:lnTo>
+                    <a:pt x="694444" y="45040"/>
+                  </a:lnTo>
+                  <a:lnTo>
+                    <a:pt x="616810" y="40100"/>
+                  </a:lnTo>
+                  <a:lnTo>
+                    <a:pt x="539176" y="35137"/>
+                  </a:lnTo>
+                  <a:lnTo>
+                    <a:pt x="461542" y="30150"/>
+                  </a:lnTo>
+                  <a:lnTo>
+                    <a:pt x="383908" y="25138"/>
+                  </a:lnTo>
+                  <a:lnTo>
+                    <a:pt x="306274" y="20103"/>
+                  </a:lnTo>
+                  <a:lnTo>
+                    <a:pt x="228640" y="15043"/>
+                  </a:lnTo>
+                  <a:lnTo>
+                    <a:pt x="151006" y="9959"/>
+                  </a:lnTo>
+                  <a:lnTo>
+                    <a:pt x="73372" y="4851"/>
                   </a:lnTo>
                   <a:lnTo>
                     <a:pt x="0" y="0"/>
@@ -4067,249 +4097,282 @@
           </p:nvSpPr>
           <p:spPr>
             <a:xfrm>
-              <a:off x="2200584" y="1896563"/>
-              <a:ext cx="5987905" cy="3602564"/>
+              <a:off x="1318601" y="1896563"/>
+              <a:ext cx="6869888" cy="3532791"/>
             </a:xfrm>
             <a:custGeom>
               <a:avLst/>
               <a:pathLst>
-                <a:path w="5987905" h="3602564">
+                <a:path w="6869888" h="3532791">
                   <a:moveTo>
                     <a:pt x="0" y="0"/>
                   </a:moveTo>
                   <a:lnTo>
-                    <a:pt x="10084" y="26933"/>
-                  </a:lnTo>
-                  <a:lnTo>
-                    <a:pt x="87718" y="223065"/>
-                  </a:lnTo>
-                  <a:lnTo>
-                    <a:pt x="165352" y="408587"/>
-                  </a:lnTo>
-                  <a:lnTo>
-                    <a:pt x="242986" y="584074"/>
-                  </a:lnTo>
-                  <a:lnTo>
-                    <a:pt x="320620" y="750068"/>
-                  </a:lnTo>
-                  <a:lnTo>
-                    <a:pt x="398254" y="907082"/>
-                  </a:lnTo>
-                  <a:lnTo>
-                    <a:pt x="475888" y="1055603"/>
-                  </a:lnTo>
-                  <a:lnTo>
-                    <a:pt x="553522" y="1196089"/>
-                  </a:lnTo>
-                  <a:lnTo>
-                    <a:pt x="631156" y="1328976"/>
-                  </a:lnTo>
-                  <a:lnTo>
-                    <a:pt x="708790" y="1454674"/>
-                  </a:lnTo>
-                  <a:lnTo>
-                    <a:pt x="786424" y="1573573"/>
-                  </a:lnTo>
-                  <a:lnTo>
-                    <a:pt x="864058" y="1686040"/>
-                  </a:lnTo>
-                  <a:lnTo>
-                    <a:pt x="941692" y="1792423"/>
-                  </a:lnTo>
-                  <a:lnTo>
-                    <a:pt x="1019326" y="1893052"/>
-                  </a:lnTo>
-                  <a:lnTo>
-                    <a:pt x="1096960" y="1988236"/>
-                  </a:lnTo>
-                  <a:lnTo>
-                    <a:pt x="1174594" y="2078272"/>
-                  </a:lnTo>
-                  <a:lnTo>
-                    <a:pt x="1252228" y="2163437"/>
-                  </a:lnTo>
-                  <a:lnTo>
-                    <a:pt x="1329862" y="2243996"/>
-                  </a:lnTo>
-                  <a:lnTo>
-                    <a:pt x="1407496" y="2320196"/>
-                  </a:lnTo>
-                  <a:lnTo>
-                    <a:pt x="1485130" y="2392275"/>
-                  </a:lnTo>
-                  <a:lnTo>
-                    <a:pt x="1562765" y="2460454"/>
-                  </a:lnTo>
-                  <a:lnTo>
-                    <a:pt x="1640399" y="2524946"/>
-                  </a:lnTo>
-                  <a:lnTo>
-                    <a:pt x="1718033" y="2585948"/>
-                  </a:lnTo>
-                  <a:lnTo>
-                    <a:pt x="1795667" y="2643651"/>
-                  </a:lnTo>
-                  <a:lnTo>
-                    <a:pt x="1873301" y="2698232"/>
-                  </a:lnTo>
-                  <a:lnTo>
-                    <a:pt x="1950935" y="2749861"/>
-                  </a:lnTo>
-                  <a:lnTo>
-                    <a:pt x="2028569" y="2798697"/>
-                  </a:lnTo>
-                  <a:lnTo>
-                    <a:pt x="2106203" y="2844891"/>
-                  </a:lnTo>
-                  <a:lnTo>
-                    <a:pt x="2183837" y="2888586"/>
-                  </a:lnTo>
-                  <a:lnTo>
-                    <a:pt x="2261471" y="2929918"/>
-                  </a:lnTo>
-                  <a:lnTo>
-                    <a:pt x="2339105" y="2969013"/>
-                  </a:lnTo>
-                  <a:lnTo>
-                    <a:pt x="2416739" y="3005994"/>
-                  </a:lnTo>
-                  <a:lnTo>
-                    <a:pt x="2494373" y="3040975"/>
-                  </a:lnTo>
-                  <a:lnTo>
-                    <a:pt x="2572007" y="3074063"/>
-                  </a:lnTo>
-                  <a:lnTo>
-                    <a:pt x="2649641" y="3105361"/>
-                  </a:lnTo>
-                  <a:lnTo>
-                    <a:pt x="2727275" y="3134966"/>
-                  </a:lnTo>
-                  <a:lnTo>
-                    <a:pt x="2804909" y="3162970"/>
-                  </a:lnTo>
-                  <a:lnTo>
-                    <a:pt x="2882543" y="3189458"/>
-                  </a:lnTo>
-                  <a:lnTo>
-                    <a:pt x="2960177" y="3214514"/>
-                  </a:lnTo>
-                  <a:lnTo>
-                    <a:pt x="3037811" y="3238215"/>
-                  </a:lnTo>
-                  <a:lnTo>
-                    <a:pt x="3115445" y="3260633"/>
-                  </a:lnTo>
-                  <a:lnTo>
-                    <a:pt x="3193079" y="3281839"/>
-                  </a:lnTo>
-                  <a:lnTo>
-                    <a:pt x="3270714" y="3301898"/>
-                  </a:lnTo>
-                  <a:lnTo>
-                    <a:pt x="3348348" y="3320871"/>
-                  </a:lnTo>
-                  <a:lnTo>
-                    <a:pt x="3425982" y="3338818"/>
-                  </a:lnTo>
-                  <a:lnTo>
-                    <a:pt x="3503616" y="3355795"/>
-                  </a:lnTo>
-                  <a:lnTo>
-                    <a:pt x="3581250" y="3371853"/>
-                  </a:lnTo>
-                  <a:lnTo>
-                    <a:pt x="3658884" y="3387042"/>
-                  </a:lnTo>
-                  <a:lnTo>
-                    <a:pt x="3736518" y="3401410"/>
-                  </a:lnTo>
-                  <a:lnTo>
-                    <a:pt x="3814152" y="3415000"/>
-                  </a:lnTo>
-                  <a:lnTo>
-                    <a:pt x="3891786" y="3427855"/>
-                  </a:lnTo>
-                  <a:lnTo>
-                    <a:pt x="3969420" y="3440015"/>
-                  </a:lnTo>
-                  <a:lnTo>
-                    <a:pt x="4047054" y="3451517"/>
-                  </a:lnTo>
-                  <a:lnTo>
-                    <a:pt x="4124688" y="3462397"/>
-                  </a:lnTo>
-                  <a:lnTo>
-                    <a:pt x="4202322" y="3472688"/>
-                  </a:lnTo>
-                  <a:lnTo>
-                    <a:pt x="4279956" y="3482423"/>
-                  </a:lnTo>
-                  <a:lnTo>
-                    <a:pt x="4357590" y="3491631"/>
-                  </a:lnTo>
-                  <a:lnTo>
-                    <a:pt x="4435224" y="3500341"/>
-                  </a:lnTo>
-                  <a:lnTo>
-                    <a:pt x="4512858" y="3508580"/>
-                  </a:lnTo>
-                  <a:lnTo>
-                    <a:pt x="4590492" y="3516373"/>
-                  </a:lnTo>
-                  <a:lnTo>
-                    <a:pt x="4668126" y="3523744"/>
-                  </a:lnTo>
-                  <a:lnTo>
-                    <a:pt x="4745760" y="3530717"/>
-                  </a:lnTo>
-                  <a:lnTo>
-                    <a:pt x="4823394" y="3537313"/>
-                  </a:lnTo>
-                  <a:lnTo>
-                    <a:pt x="4901028" y="3543552"/>
-                  </a:lnTo>
-                  <a:lnTo>
-                    <a:pt x="4978663" y="3549453"/>
-                  </a:lnTo>
-                  <a:lnTo>
-                    <a:pt x="5056297" y="3555035"/>
-                  </a:lnTo>
-                  <a:lnTo>
-                    <a:pt x="5133931" y="3560315"/>
-                  </a:lnTo>
-                  <a:lnTo>
-                    <a:pt x="5211565" y="3565310"/>
-                  </a:lnTo>
-                  <a:lnTo>
-                    <a:pt x="5289199" y="3570034"/>
-                  </a:lnTo>
-                  <a:lnTo>
-                    <a:pt x="5366833" y="3574503"/>
-                  </a:lnTo>
-                  <a:lnTo>
-                    <a:pt x="5444467" y="3578730"/>
-                  </a:lnTo>
-                  <a:lnTo>
-                    <a:pt x="5522101" y="3582728"/>
-                  </a:lnTo>
-                  <a:lnTo>
-                    <a:pt x="5599735" y="3586510"/>
-                  </a:lnTo>
-                  <a:lnTo>
-                    <a:pt x="5677369" y="3590087"/>
-                  </a:lnTo>
-                  <a:lnTo>
-                    <a:pt x="5755003" y="3593471"/>
-                  </a:lnTo>
-                  <a:lnTo>
-                    <a:pt x="5832637" y="3596672"/>
-                  </a:lnTo>
-                  <a:lnTo>
-                    <a:pt x="5910271" y="3599700"/>
-                  </a:lnTo>
-                  <a:lnTo>
-                    <a:pt x="5987905" y="3602564"/>
+                    <a:pt x="38092" y="69217"/>
+                  </a:lnTo>
+                  <a:lnTo>
+                    <a:pt x="115726" y="204941"/>
+                  </a:lnTo>
+                  <a:lnTo>
+                    <a:pt x="193360" y="335525"/>
+                  </a:lnTo>
+                  <a:lnTo>
+                    <a:pt x="270994" y="461163"/>
+                  </a:lnTo>
+                  <a:lnTo>
+                    <a:pt x="348628" y="582042"/>
+                  </a:lnTo>
+                  <a:lnTo>
+                    <a:pt x="426262" y="698343"/>
+                  </a:lnTo>
+                  <a:lnTo>
+                    <a:pt x="503897" y="810239"/>
+                  </a:lnTo>
+                  <a:lnTo>
+                    <a:pt x="581531" y="917897"/>
+                  </a:lnTo>
+                  <a:lnTo>
+                    <a:pt x="659165" y="1021477"/>
+                  </a:lnTo>
+                  <a:lnTo>
+                    <a:pt x="736799" y="1121134"/>
+                  </a:lnTo>
+                  <a:lnTo>
+                    <a:pt x="814433" y="1217016"/>
+                  </a:lnTo>
+                  <a:lnTo>
+                    <a:pt x="892067" y="1309267"/>
+                  </a:lnTo>
+                  <a:lnTo>
+                    <a:pt x="969701" y="1398024"/>
+                  </a:lnTo>
+                  <a:lnTo>
+                    <a:pt x="1047335" y="1483419"/>
+                  </a:lnTo>
+                  <a:lnTo>
+                    <a:pt x="1124969" y="1565579"/>
+                  </a:lnTo>
+                  <a:lnTo>
+                    <a:pt x="1202603" y="1644628"/>
+                  </a:lnTo>
+                  <a:lnTo>
+                    <a:pt x="1280237" y="1720683"/>
+                  </a:lnTo>
+                  <a:lnTo>
+                    <a:pt x="1357871" y="1793857"/>
+                  </a:lnTo>
+                  <a:lnTo>
+                    <a:pt x="1435505" y="1864260"/>
+                  </a:lnTo>
+                  <a:lnTo>
+                    <a:pt x="1513139" y="1931996"/>
+                  </a:lnTo>
+                  <a:lnTo>
+                    <a:pt x="1590773" y="1997166"/>
+                  </a:lnTo>
+                  <a:lnTo>
+                    <a:pt x="1668407" y="2059868"/>
+                  </a:lnTo>
+                  <a:lnTo>
+                    <a:pt x="1746041" y="2120196"/>
+                  </a:lnTo>
+                  <a:lnTo>
+                    <a:pt x="1823675" y="2178238"/>
+                  </a:lnTo>
+                  <a:lnTo>
+                    <a:pt x="1901309" y="2234082"/>
+                  </a:lnTo>
+                  <a:lnTo>
+                    <a:pt x="1978943" y="2287811"/>
+                  </a:lnTo>
+                  <a:lnTo>
+                    <a:pt x="2056577" y="2339505"/>
+                  </a:lnTo>
+                  <a:lnTo>
+                    <a:pt x="2134211" y="2389241"/>
+                  </a:lnTo>
+                  <a:lnTo>
+                    <a:pt x="2211846" y="2437093"/>
+                  </a:lnTo>
+                  <a:lnTo>
+                    <a:pt x="2289480" y="2483132"/>
+                  </a:lnTo>
+                  <a:lnTo>
+                    <a:pt x="2367114" y="2527428"/>
+                  </a:lnTo>
+                  <a:lnTo>
+                    <a:pt x="2444748" y="2570046"/>
+                  </a:lnTo>
+                  <a:lnTo>
+                    <a:pt x="2522382" y="2611050"/>
+                  </a:lnTo>
+                  <a:lnTo>
+                    <a:pt x="2600016" y="2650501"/>
+                  </a:lnTo>
+                  <a:lnTo>
+                    <a:pt x="2677650" y="2688458"/>
+                  </a:lnTo>
+                  <a:lnTo>
+                    <a:pt x="2755284" y="2724977"/>
+                  </a:lnTo>
+                  <a:lnTo>
+                    <a:pt x="2832918" y="2760113"/>
+                  </a:lnTo>
+                  <a:lnTo>
+                    <a:pt x="2910552" y="2793918"/>
+                  </a:lnTo>
+                  <a:lnTo>
+                    <a:pt x="2988186" y="2826443"/>
+                  </a:lnTo>
+                  <a:lnTo>
+                    <a:pt x="3065820" y="2857736"/>
+                  </a:lnTo>
+                  <a:lnTo>
+                    <a:pt x="3143454" y="2887843"/>
+                  </a:lnTo>
+                  <a:lnTo>
+                    <a:pt x="3221088" y="2916811"/>
+                  </a:lnTo>
+                  <a:lnTo>
+                    <a:pt x="3298722" y="2944681"/>
+                  </a:lnTo>
+                  <a:lnTo>
+                    <a:pt x="3376356" y="2971495"/>
+                  </a:lnTo>
+                  <a:lnTo>
+                    <a:pt x="3453990" y="2997294"/>
+                  </a:lnTo>
+                  <a:lnTo>
+                    <a:pt x="3531624" y="3022116"/>
+                  </a:lnTo>
+                  <a:lnTo>
+                    <a:pt x="3609258" y="3045997"/>
+                  </a:lnTo>
+                  <a:lnTo>
+                    <a:pt x="3686892" y="3068974"/>
+                  </a:lnTo>
+                  <a:lnTo>
+                    <a:pt x="3764526" y="3091081"/>
+                  </a:lnTo>
+                  <a:lnTo>
+                    <a:pt x="3842160" y="3112351"/>
+                  </a:lnTo>
+                  <a:lnTo>
+                    <a:pt x="3919794" y="3132815"/>
+                  </a:lnTo>
+                  <a:lnTo>
+                    <a:pt x="3997429" y="3152503"/>
+                  </a:lnTo>
+                  <a:lnTo>
+                    <a:pt x="4075063" y="3171447"/>
+                  </a:lnTo>
+                  <a:lnTo>
+                    <a:pt x="4152697" y="3189672"/>
+                  </a:lnTo>
+                  <a:lnTo>
+                    <a:pt x="4230331" y="3207207"/>
+                  </a:lnTo>
+                  <a:lnTo>
+                    <a:pt x="4307965" y="3224079"/>
+                  </a:lnTo>
+                  <a:lnTo>
+                    <a:pt x="4385599" y="3240311"/>
+                  </a:lnTo>
+                  <a:lnTo>
+                    <a:pt x="4463233" y="3255928"/>
+                  </a:lnTo>
+                  <a:lnTo>
+                    <a:pt x="4540867" y="3270954"/>
+                  </a:lnTo>
+                  <a:lnTo>
+                    <a:pt x="4618501" y="3285411"/>
+                  </a:lnTo>
+                  <a:lnTo>
+                    <a:pt x="4696135" y="3299320"/>
+                  </a:lnTo>
+                  <a:lnTo>
+                    <a:pt x="4773769" y="3312702"/>
+                  </a:lnTo>
+                  <a:lnTo>
+                    <a:pt x="4851403" y="3325578"/>
+                  </a:lnTo>
+                  <a:lnTo>
+                    <a:pt x="4929037" y="3337965"/>
+                  </a:lnTo>
+                  <a:lnTo>
+                    <a:pt x="5006671" y="3349884"/>
+                  </a:lnTo>
+                  <a:lnTo>
+                    <a:pt x="5084305" y="3361351"/>
+                  </a:lnTo>
+                  <a:lnTo>
+                    <a:pt x="5161939" y="3372384"/>
+                  </a:lnTo>
+                  <a:lnTo>
+                    <a:pt x="5239573" y="3382999"/>
+                  </a:lnTo>
+                  <a:lnTo>
+                    <a:pt x="5317207" y="3393212"/>
+                  </a:lnTo>
+                  <a:lnTo>
+                    <a:pt x="5394841" y="3403038"/>
+                  </a:lnTo>
+                  <a:lnTo>
+                    <a:pt x="5472475" y="3412492"/>
+                  </a:lnTo>
+                  <a:lnTo>
+                    <a:pt x="5550109" y="3421588"/>
+                  </a:lnTo>
+                  <a:lnTo>
+                    <a:pt x="5627743" y="3430339"/>
+                  </a:lnTo>
+                  <a:lnTo>
+                    <a:pt x="5705378" y="3438759"/>
+                  </a:lnTo>
+                  <a:lnTo>
+                    <a:pt x="5783012" y="3446860"/>
+                  </a:lnTo>
+                  <a:lnTo>
+                    <a:pt x="5860646" y="3454654"/>
+                  </a:lnTo>
+                  <a:lnTo>
+                    <a:pt x="5938280" y="3462153"/>
+                  </a:lnTo>
+                  <a:lnTo>
+                    <a:pt x="6015914" y="3469368"/>
+                  </a:lnTo>
+                  <a:lnTo>
+                    <a:pt x="6093548" y="3476310"/>
+                  </a:lnTo>
+                  <a:lnTo>
+                    <a:pt x="6171182" y="3482989"/>
+                  </a:lnTo>
+                  <a:lnTo>
+                    <a:pt x="6248816" y="3489414"/>
+                  </a:lnTo>
+                  <a:lnTo>
+                    <a:pt x="6326450" y="3495597"/>
+                  </a:lnTo>
+                  <a:lnTo>
+                    <a:pt x="6404084" y="3501545"/>
+                  </a:lnTo>
+                  <a:lnTo>
+                    <a:pt x="6481718" y="3507268"/>
+                  </a:lnTo>
+                  <a:lnTo>
+                    <a:pt x="6559352" y="3512774"/>
+                  </a:lnTo>
+                  <a:lnTo>
+                    <a:pt x="6636986" y="3518072"/>
+                  </a:lnTo>
+                  <a:lnTo>
+                    <a:pt x="6714620" y="3523169"/>
+                  </a:lnTo>
+                  <a:lnTo>
+                    <a:pt x="6792254" y="3528073"/>
+                  </a:lnTo>
+                  <a:lnTo>
+                    <a:pt x="6869888" y="3532791"/>
                   </a:lnTo>
                 </a:path>
               </a:pathLst>

--- a/docs/plots/carbo/jx_carbo_cox_linear_ratio_death.pptx
+++ b/docs/plots/carbo/jx_carbo_cox_linear_ratio_death.pptx
@@ -3003,518 +3003,512 @@
           <p:spPr>
             <a:xfrm>
               <a:off x="817517" y="1896563"/>
-              <a:ext cx="7370972" cy="3631514"/>
+              <a:ext cx="7370972" cy="3641336"/>
             </a:xfrm>
             <a:custGeom>
               <a:avLst/>
               <a:pathLst>
-                <a:path w="7370972" h="3631514">
+                <a:path w="7370972" h="3641336">
                   <a:moveTo>
-                    <a:pt x="1848197" y="0"/>
+                    <a:pt x="2069990" y="0"/>
                   </a:moveTo>
                   <a:lnTo>
-                    <a:pt x="1858955" y="37625"/>
-                  </a:lnTo>
-                  <a:lnTo>
-                    <a:pt x="1936589" y="290187"/>
-                  </a:lnTo>
-                  <a:lnTo>
-                    <a:pt x="2014223" y="525103"/>
-                  </a:lnTo>
-                  <a:lnTo>
-                    <a:pt x="2091857" y="743608"/>
-                  </a:lnTo>
-                  <a:lnTo>
-                    <a:pt x="2169491" y="946846"/>
-                  </a:lnTo>
-                  <a:lnTo>
-                    <a:pt x="2247125" y="1135886"/>
-                  </a:lnTo>
-                  <a:lnTo>
-                    <a:pt x="2324759" y="1311718"/>
-                  </a:lnTo>
-                  <a:lnTo>
-                    <a:pt x="2402393" y="1475266"/>
-                  </a:lnTo>
-                  <a:lnTo>
-                    <a:pt x="2480027" y="1627387"/>
-                  </a:lnTo>
-                  <a:lnTo>
-                    <a:pt x="2557661" y="1768881"/>
-                  </a:lnTo>
-                  <a:lnTo>
-                    <a:pt x="2635295" y="1900489"/>
-                  </a:lnTo>
-                  <a:lnTo>
-                    <a:pt x="2712930" y="2022902"/>
-                  </a:lnTo>
-                  <a:lnTo>
-                    <a:pt x="2790564" y="2136764"/>
-                  </a:lnTo>
-                  <a:lnTo>
-                    <a:pt x="2868198" y="2242670"/>
-                  </a:lnTo>
-                  <a:lnTo>
-                    <a:pt x="2945832" y="2341177"/>
-                  </a:lnTo>
-                  <a:lnTo>
-                    <a:pt x="3023466" y="2432802"/>
-                  </a:lnTo>
-                  <a:lnTo>
-                    <a:pt x="3101100" y="2518026"/>
-                  </a:lnTo>
-                  <a:lnTo>
-                    <a:pt x="3178734" y="2597295"/>
-                  </a:lnTo>
-                  <a:lnTo>
-                    <a:pt x="3256368" y="2671027"/>
-                  </a:lnTo>
-                  <a:lnTo>
-                    <a:pt x="3334002" y="2739607"/>
-                  </a:lnTo>
-                  <a:lnTo>
-                    <a:pt x="3411636" y="2784335"/>
-                  </a:lnTo>
-                  <a:lnTo>
-                    <a:pt x="3489270" y="2788491"/>
-                  </a:lnTo>
-                  <a:lnTo>
-                    <a:pt x="3566904" y="2792627"/>
-                  </a:lnTo>
-                  <a:lnTo>
-                    <a:pt x="3644538" y="2796743"/>
-                  </a:lnTo>
-                  <a:lnTo>
-                    <a:pt x="3722172" y="2800840"/>
-                  </a:lnTo>
-                  <a:lnTo>
-                    <a:pt x="3799806" y="2804917"/>
-                  </a:lnTo>
-                  <a:lnTo>
-                    <a:pt x="3877440" y="2808975"/>
-                  </a:lnTo>
-                  <a:lnTo>
-                    <a:pt x="3955074" y="2813013"/>
-                  </a:lnTo>
-                  <a:lnTo>
-                    <a:pt x="4032708" y="2817032"/>
-                  </a:lnTo>
-                  <a:lnTo>
-                    <a:pt x="4110342" y="2821031"/>
-                  </a:lnTo>
-                  <a:lnTo>
-                    <a:pt x="4187976" y="2825012"/>
-                  </a:lnTo>
-                  <a:lnTo>
-                    <a:pt x="4265610" y="2828973"/>
-                  </a:lnTo>
-                  <a:lnTo>
-                    <a:pt x="4343244" y="2832916"/>
-                  </a:lnTo>
-                  <a:lnTo>
-                    <a:pt x="4420879" y="2836839"/>
-                  </a:lnTo>
-                  <a:lnTo>
-                    <a:pt x="4498513" y="2840744"/>
-                  </a:lnTo>
-                  <a:lnTo>
-                    <a:pt x="4576147" y="2844630"/>
-                  </a:lnTo>
-                  <a:lnTo>
-                    <a:pt x="4653781" y="2848498"/>
-                  </a:lnTo>
-                  <a:lnTo>
-                    <a:pt x="4731415" y="2852347"/>
-                  </a:lnTo>
-                  <a:lnTo>
-                    <a:pt x="4809049" y="2856177"/>
-                  </a:lnTo>
-                  <a:lnTo>
-                    <a:pt x="4886683" y="2859990"/>
-                  </a:lnTo>
-                  <a:lnTo>
-                    <a:pt x="4964317" y="2863784"/>
-                  </a:lnTo>
-                  <a:lnTo>
-                    <a:pt x="5041951" y="2867559"/>
-                  </a:lnTo>
-                  <a:lnTo>
-                    <a:pt x="5119585" y="2871317"/>
-                  </a:lnTo>
-                  <a:lnTo>
-                    <a:pt x="5197219" y="2875057"/>
-                  </a:lnTo>
-                  <a:lnTo>
-                    <a:pt x="5274853" y="2878779"/>
-                  </a:lnTo>
-                  <a:lnTo>
-                    <a:pt x="5352487" y="2882483"/>
-                  </a:lnTo>
-                  <a:lnTo>
-                    <a:pt x="5430121" y="2886169"/>
-                  </a:lnTo>
-                  <a:lnTo>
-                    <a:pt x="5507755" y="2889838"/>
-                  </a:lnTo>
-                  <a:lnTo>
-                    <a:pt x="5585389" y="2893489"/>
-                  </a:lnTo>
-                  <a:lnTo>
-                    <a:pt x="5663023" y="2897123"/>
-                  </a:lnTo>
-                  <a:lnTo>
-                    <a:pt x="5740657" y="2900739"/>
-                  </a:lnTo>
-                  <a:lnTo>
-                    <a:pt x="5818291" y="2904338"/>
-                  </a:lnTo>
-                  <a:lnTo>
-                    <a:pt x="5895925" y="2907920"/>
-                  </a:lnTo>
-                  <a:lnTo>
-                    <a:pt x="5973559" y="2911484"/>
-                  </a:lnTo>
-                  <a:lnTo>
-                    <a:pt x="6051193" y="2915032"/>
-                  </a:lnTo>
-                  <a:lnTo>
-                    <a:pt x="6128827" y="2918562"/>
-                  </a:lnTo>
-                  <a:lnTo>
-                    <a:pt x="6206462" y="2922076"/>
-                  </a:lnTo>
-                  <a:lnTo>
-                    <a:pt x="6284096" y="2925573"/>
-                  </a:lnTo>
-                  <a:lnTo>
-                    <a:pt x="6361730" y="2929053"/>
-                  </a:lnTo>
-                  <a:lnTo>
-                    <a:pt x="6439364" y="2932516"/>
-                  </a:lnTo>
-                  <a:lnTo>
-                    <a:pt x="6516998" y="2935963"/>
-                  </a:lnTo>
-                  <a:lnTo>
-                    <a:pt x="6594632" y="2939393"/>
-                  </a:lnTo>
-                  <a:lnTo>
-                    <a:pt x="6672266" y="2942807"/>
-                  </a:lnTo>
-                  <a:lnTo>
-                    <a:pt x="6749900" y="2946205"/>
-                  </a:lnTo>
-                  <a:lnTo>
-                    <a:pt x="6827534" y="2949586"/>
-                  </a:lnTo>
-                  <a:lnTo>
-                    <a:pt x="6905168" y="2952951"/>
-                  </a:lnTo>
-                  <a:lnTo>
-                    <a:pt x="6982802" y="2956300"/>
-                  </a:lnTo>
-                  <a:lnTo>
-                    <a:pt x="7060436" y="2959633"/>
-                  </a:lnTo>
-                  <a:lnTo>
-                    <a:pt x="7138070" y="2962951"/>
-                  </a:lnTo>
-                  <a:lnTo>
-                    <a:pt x="7215704" y="2966252"/>
-                  </a:lnTo>
-                  <a:lnTo>
-                    <a:pt x="7293338" y="2969537"/>
-                  </a:lnTo>
-                  <a:lnTo>
-                    <a:pt x="7370972" y="2972807"/>
-                  </a:lnTo>
-                  <a:lnTo>
-                    <a:pt x="7370972" y="3631514"/>
-                  </a:lnTo>
-                  <a:lnTo>
-                    <a:pt x="7293338" y="3629927"/>
-                  </a:lnTo>
-                  <a:lnTo>
-                    <a:pt x="7215704" y="3628220"/>
-                  </a:lnTo>
-                  <a:lnTo>
-                    <a:pt x="7138070" y="3626386"/>
-                  </a:lnTo>
-                  <a:lnTo>
-                    <a:pt x="7060436" y="3624414"/>
-                  </a:lnTo>
-                  <a:lnTo>
-                    <a:pt x="6982802" y="3622293"/>
-                  </a:lnTo>
-                  <a:lnTo>
-                    <a:pt x="6905168" y="3620014"/>
-                  </a:lnTo>
-                  <a:lnTo>
-                    <a:pt x="6827534" y="3617563"/>
-                  </a:lnTo>
-                  <a:lnTo>
-                    <a:pt x="6749900" y="3614928"/>
-                  </a:lnTo>
-                  <a:lnTo>
-                    <a:pt x="6672266" y="3612095"/>
-                  </a:lnTo>
-                  <a:lnTo>
-                    <a:pt x="6594632" y="3609049"/>
-                  </a:lnTo>
-                  <a:lnTo>
-                    <a:pt x="6516998" y="3605775"/>
-                  </a:lnTo>
-                  <a:lnTo>
-                    <a:pt x="6439364" y="3602254"/>
-                  </a:lnTo>
-                  <a:lnTo>
-                    <a:pt x="6361730" y="3598469"/>
-                  </a:lnTo>
-                  <a:lnTo>
-                    <a:pt x="6284096" y="3594400"/>
-                  </a:lnTo>
-                  <a:lnTo>
-                    <a:pt x="6206462" y="3590026"/>
-                  </a:lnTo>
-                  <a:lnTo>
-                    <a:pt x="6128827" y="3585322"/>
-                  </a:lnTo>
-                  <a:lnTo>
-                    <a:pt x="6051193" y="3580266"/>
-                  </a:lnTo>
-                  <a:lnTo>
-                    <a:pt x="5973559" y="3574829"/>
-                  </a:lnTo>
-                  <a:lnTo>
-                    <a:pt x="5895925" y="3568984"/>
-                  </a:lnTo>
-                  <a:lnTo>
-                    <a:pt x="5818291" y="3562701"/>
-                  </a:lnTo>
-                  <a:lnTo>
-                    <a:pt x="5740657" y="3555945"/>
-                  </a:lnTo>
-                  <a:lnTo>
-                    <a:pt x="5663023" y="3548682"/>
-                  </a:lnTo>
-                  <a:lnTo>
-                    <a:pt x="5585389" y="3540873"/>
-                  </a:lnTo>
-                  <a:lnTo>
-                    <a:pt x="5507755" y="3532477"/>
-                  </a:lnTo>
-                  <a:lnTo>
-                    <a:pt x="5430121" y="3523451"/>
-                  </a:lnTo>
-                  <a:lnTo>
-                    <a:pt x="5352487" y="3513748"/>
-                  </a:lnTo>
-                  <a:lnTo>
-                    <a:pt x="5274853" y="3503315"/>
-                  </a:lnTo>
-                  <a:lnTo>
-                    <a:pt x="5197219" y="3492098"/>
-                  </a:lnTo>
-                  <a:lnTo>
-                    <a:pt x="5119585" y="3480039"/>
-                  </a:lnTo>
-                  <a:lnTo>
-                    <a:pt x="5041951" y="3467075"/>
-                  </a:lnTo>
-                  <a:lnTo>
-                    <a:pt x="4964317" y="3453136"/>
-                  </a:lnTo>
-                  <a:lnTo>
-                    <a:pt x="4886683" y="3438151"/>
-                  </a:lnTo>
-                  <a:lnTo>
-                    <a:pt x="4809049" y="3422040"/>
-                  </a:lnTo>
-                  <a:lnTo>
-                    <a:pt x="4731415" y="3404719"/>
-                  </a:lnTo>
-                  <a:lnTo>
-                    <a:pt x="4653781" y="3386097"/>
-                  </a:lnTo>
-                  <a:lnTo>
-                    <a:pt x="4576147" y="3366076"/>
-                  </a:lnTo>
-                  <a:lnTo>
-                    <a:pt x="4498513" y="3344551"/>
-                  </a:lnTo>
-                  <a:lnTo>
-                    <a:pt x="4420879" y="3321409"/>
-                  </a:lnTo>
-                  <a:lnTo>
-                    <a:pt x="4343244" y="3296530"/>
-                  </a:lnTo>
-                  <a:lnTo>
-                    <a:pt x="4265610" y="3269781"/>
-                  </a:lnTo>
-                  <a:lnTo>
-                    <a:pt x="4187976" y="3241024"/>
-                  </a:lnTo>
-                  <a:lnTo>
-                    <a:pt x="4110342" y="3210106"/>
-                  </a:lnTo>
-                  <a:lnTo>
-                    <a:pt x="4032708" y="3176866"/>
-                  </a:lnTo>
-                  <a:lnTo>
-                    <a:pt x="3955074" y="3141129"/>
-                  </a:lnTo>
-                  <a:lnTo>
-                    <a:pt x="3877440" y="3102708"/>
-                  </a:lnTo>
-                  <a:lnTo>
-                    <a:pt x="3799806" y="3061401"/>
-                  </a:lnTo>
-                  <a:lnTo>
-                    <a:pt x="3722172" y="3016992"/>
-                  </a:lnTo>
-                  <a:lnTo>
-                    <a:pt x="3644538" y="2969247"/>
-                  </a:lnTo>
-                  <a:lnTo>
-                    <a:pt x="3566904" y="2917915"/>
-                  </a:lnTo>
-                  <a:lnTo>
-                    <a:pt x="3489270" y="2862728"/>
-                  </a:lnTo>
-                  <a:lnTo>
-                    <a:pt x="3411636" y="2803396"/>
-                  </a:lnTo>
-                  <a:lnTo>
-                    <a:pt x="3334002" y="2780159"/>
-                  </a:lnTo>
-                  <a:lnTo>
-                    <a:pt x="3256368" y="2775962"/>
-                  </a:lnTo>
-                  <a:lnTo>
-                    <a:pt x="3178734" y="2771746"/>
-                  </a:lnTo>
-                  <a:lnTo>
-                    <a:pt x="3101100" y="2767509"/>
-                  </a:lnTo>
-                  <a:lnTo>
-                    <a:pt x="3023466" y="2763252"/>
-                  </a:lnTo>
-                  <a:lnTo>
-                    <a:pt x="2945832" y="2758975"/>
-                  </a:lnTo>
-                  <a:lnTo>
-                    <a:pt x="2868198" y="2754677"/>
-                  </a:lnTo>
-                  <a:lnTo>
-                    <a:pt x="2790564" y="2750358"/>
-                  </a:lnTo>
-                  <a:lnTo>
-                    <a:pt x="2712930" y="2746019"/>
-                  </a:lnTo>
-                  <a:lnTo>
-                    <a:pt x="2635295" y="2741658"/>
-                  </a:lnTo>
-                  <a:lnTo>
-                    <a:pt x="2557661" y="2737277"/>
-                  </a:lnTo>
-                  <a:lnTo>
-                    <a:pt x="2480027" y="2732874"/>
-                  </a:lnTo>
-                  <a:lnTo>
-                    <a:pt x="2402393" y="2728451"/>
-                  </a:lnTo>
-                  <a:lnTo>
-                    <a:pt x="2324759" y="2724006"/>
-                  </a:lnTo>
-                  <a:lnTo>
-                    <a:pt x="2247125" y="2719540"/>
-                  </a:lnTo>
-                  <a:lnTo>
-                    <a:pt x="2169491" y="2715052"/>
-                  </a:lnTo>
-                  <a:lnTo>
-                    <a:pt x="2091857" y="2710543"/>
-                  </a:lnTo>
-                  <a:lnTo>
-                    <a:pt x="2014223" y="2706012"/>
-                  </a:lnTo>
-                  <a:lnTo>
-                    <a:pt x="1936589" y="2701459"/>
-                  </a:lnTo>
-                  <a:lnTo>
-                    <a:pt x="1858955" y="2696884"/>
-                  </a:lnTo>
-                  <a:lnTo>
-                    <a:pt x="1781321" y="2692287"/>
-                  </a:lnTo>
-                  <a:lnTo>
-                    <a:pt x="1703687" y="2687669"/>
-                  </a:lnTo>
-                  <a:lnTo>
-                    <a:pt x="1626053" y="2683028"/>
-                  </a:lnTo>
-                  <a:lnTo>
-                    <a:pt x="1548419" y="2678364"/>
-                  </a:lnTo>
-                  <a:lnTo>
-                    <a:pt x="1470785" y="2673679"/>
-                  </a:lnTo>
-                  <a:lnTo>
-                    <a:pt x="1393151" y="2668970"/>
-                  </a:lnTo>
-                  <a:lnTo>
-                    <a:pt x="1315517" y="2664239"/>
-                  </a:lnTo>
-                  <a:lnTo>
-                    <a:pt x="1237883" y="2659486"/>
-                  </a:lnTo>
-                  <a:lnTo>
-                    <a:pt x="1160249" y="2654709"/>
-                  </a:lnTo>
-                  <a:lnTo>
-                    <a:pt x="1082615" y="2649910"/>
-                  </a:lnTo>
-                  <a:lnTo>
-                    <a:pt x="1004981" y="2645087"/>
-                  </a:lnTo>
-                  <a:lnTo>
-                    <a:pt x="927346" y="2640241"/>
-                  </a:lnTo>
-                  <a:lnTo>
-                    <a:pt x="849712" y="2635372"/>
-                  </a:lnTo>
-                  <a:lnTo>
-                    <a:pt x="772078" y="2630479"/>
-                  </a:lnTo>
-                  <a:lnTo>
-                    <a:pt x="694444" y="2625563"/>
-                  </a:lnTo>
-                  <a:lnTo>
-                    <a:pt x="616810" y="2620624"/>
-                  </a:lnTo>
-                  <a:lnTo>
-                    <a:pt x="539176" y="2615660"/>
-                  </a:lnTo>
-                  <a:lnTo>
-                    <a:pt x="461542" y="2610673"/>
-                  </a:lnTo>
-                  <a:lnTo>
-                    <a:pt x="383908" y="2605662"/>
-                  </a:lnTo>
-                  <a:lnTo>
-                    <a:pt x="306274" y="2600626"/>
-                  </a:lnTo>
-                  <a:lnTo>
-                    <a:pt x="228640" y="2595567"/>
-                  </a:lnTo>
-                  <a:lnTo>
-                    <a:pt x="151006" y="2590483"/>
-                  </a:lnTo>
-                  <a:lnTo>
-                    <a:pt x="73372" y="2585374"/>
-                  </a:lnTo>
-                  <a:lnTo>
-                    <a:pt x="0" y="2580523"/>
+                    <a:pt x="2091857" y="88627"/>
+                  </a:lnTo>
+                  <a:lnTo>
+                    <a:pt x="2169491" y="377759"/>
+                  </a:lnTo>
+                  <a:lnTo>
+                    <a:pt x="2247125" y="643434"/>
+                  </a:lnTo>
+                  <a:lnTo>
+                    <a:pt x="2324759" y="887557"/>
+                  </a:lnTo>
+                  <a:lnTo>
+                    <a:pt x="2402393" y="1111875"/>
+                  </a:lnTo>
+                  <a:lnTo>
+                    <a:pt x="2480027" y="1317995"/>
+                  </a:lnTo>
+                  <a:lnTo>
+                    <a:pt x="2557661" y="1507393"/>
+                  </a:lnTo>
+                  <a:lnTo>
+                    <a:pt x="2635295" y="1681427"/>
+                  </a:lnTo>
+                  <a:lnTo>
+                    <a:pt x="2712930" y="1841342"/>
+                  </a:lnTo>
+                  <a:lnTo>
+                    <a:pt x="2790564" y="1988284"/>
+                  </a:lnTo>
+                  <a:lnTo>
+                    <a:pt x="2868198" y="2123306"/>
+                  </a:lnTo>
+                  <a:lnTo>
+                    <a:pt x="2945832" y="2247373"/>
+                  </a:lnTo>
+                  <a:lnTo>
+                    <a:pt x="3023466" y="2361376"/>
+                  </a:lnTo>
+                  <a:lnTo>
+                    <a:pt x="3101100" y="2466130"/>
+                  </a:lnTo>
+                  <a:lnTo>
+                    <a:pt x="3178734" y="2562386"/>
+                  </a:lnTo>
+                  <a:lnTo>
+                    <a:pt x="3256368" y="2650834"/>
+                  </a:lnTo>
+                  <a:lnTo>
+                    <a:pt x="3334002" y="2732105"/>
+                  </a:lnTo>
+                  <a:lnTo>
+                    <a:pt x="3411636" y="2786570"/>
+                  </a:lnTo>
+                  <a:lnTo>
+                    <a:pt x="3489270" y="2797457"/>
+                  </a:lnTo>
+                  <a:lnTo>
+                    <a:pt x="3566904" y="2808208"/>
+                  </a:lnTo>
+                  <a:lnTo>
+                    <a:pt x="3644538" y="2818823"/>
+                  </a:lnTo>
+                  <a:lnTo>
+                    <a:pt x="3722172" y="2829305"/>
+                  </a:lnTo>
+                  <a:lnTo>
+                    <a:pt x="3799806" y="2839656"/>
+                  </a:lnTo>
+                  <a:lnTo>
+                    <a:pt x="3877440" y="2849876"/>
+                  </a:lnTo>
+                  <a:lnTo>
+                    <a:pt x="3955074" y="2859967"/>
+                  </a:lnTo>
+                  <a:lnTo>
+                    <a:pt x="4032708" y="2869932"/>
+                  </a:lnTo>
+                  <a:lnTo>
+                    <a:pt x="4110342" y="2879772"/>
+                  </a:lnTo>
+                  <a:lnTo>
+                    <a:pt x="4187976" y="2889487"/>
+                  </a:lnTo>
+                  <a:lnTo>
+                    <a:pt x="4265610" y="2899081"/>
+                  </a:lnTo>
+                  <a:lnTo>
+                    <a:pt x="4343244" y="2908554"/>
+                  </a:lnTo>
+                  <a:lnTo>
+                    <a:pt x="4420879" y="2917908"/>
+                  </a:lnTo>
+                  <a:lnTo>
+                    <a:pt x="4498513" y="2927144"/>
+                  </a:lnTo>
+                  <a:lnTo>
+                    <a:pt x="4576147" y="2936265"/>
+                  </a:lnTo>
+                  <a:lnTo>
+                    <a:pt x="4653781" y="2945270"/>
+                  </a:lnTo>
+                  <a:lnTo>
+                    <a:pt x="4731415" y="2954163"/>
+                  </a:lnTo>
+                  <a:lnTo>
+                    <a:pt x="4809049" y="2962943"/>
+                  </a:lnTo>
+                  <a:lnTo>
+                    <a:pt x="4886683" y="2971614"/>
+                  </a:lnTo>
+                  <a:lnTo>
+                    <a:pt x="4964317" y="2980175"/>
+                  </a:lnTo>
+                  <a:lnTo>
+                    <a:pt x="5041951" y="2988629"/>
+                  </a:lnTo>
+                  <a:lnTo>
+                    <a:pt x="5119585" y="2996976"/>
+                  </a:lnTo>
+                  <a:lnTo>
+                    <a:pt x="5197219" y="3005218"/>
+                  </a:lnTo>
+                  <a:lnTo>
+                    <a:pt x="5274853" y="3013357"/>
+                  </a:lnTo>
+                  <a:lnTo>
+                    <a:pt x="5352487" y="3021394"/>
+                  </a:lnTo>
+                  <a:lnTo>
+                    <a:pt x="5430121" y="3029329"/>
+                  </a:lnTo>
+                  <a:lnTo>
+                    <a:pt x="5507755" y="3037165"/>
+                  </a:lnTo>
+                  <a:lnTo>
+                    <a:pt x="5585389" y="3044902"/>
+                  </a:lnTo>
+                  <a:lnTo>
+                    <a:pt x="5663023" y="3052542"/>
+                  </a:lnTo>
+                  <a:lnTo>
+                    <a:pt x="5740657" y="3060086"/>
+                  </a:lnTo>
+                  <a:lnTo>
+                    <a:pt x="5818291" y="3067535"/>
+                  </a:lnTo>
+                  <a:lnTo>
+                    <a:pt x="5895925" y="3074890"/>
+                  </a:lnTo>
+                  <a:lnTo>
+                    <a:pt x="5973559" y="3082153"/>
+                  </a:lnTo>
+                  <a:lnTo>
+                    <a:pt x="6051193" y="3089325"/>
+                  </a:lnTo>
+                  <a:lnTo>
+                    <a:pt x="6128827" y="3096407"/>
+                  </a:lnTo>
+                  <a:lnTo>
+                    <a:pt x="6206462" y="3103399"/>
+                  </a:lnTo>
+                  <a:lnTo>
+                    <a:pt x="6284096" y="3110304"/>
+                  </a:lnTo>
+                  <a:lnTo>
+                    <a:pt x="6361730" y="3117121"/>
+                  </a:lnTo>
+                  <a:lnTo>
+                    <a:pt x="6439364" y="3123853"/>
+                  </a:lnTo>
+                  <a:lnTo>
+                    <a:pt x="6516998" y="3130501"/>
+                  </a:lnTo>
+                  <a:lnTo>
+                    <a:pt x="6594632" y="3137065"/>
+                  </a:lnTo>
+                  <a:lnTo>
+                    <a:pt x="6672266" y="3143546"/>
+                  </a:lnTo>
+                  <a:lnTo>
+                    <a:pt x="6749900" y="3149946"/>
+                  </a:lnTo>
+                  <a:lnTo>
+                    <a:pt x="6827534" y="3156265"/>
+                  </a:lnTo>
+                  <a:lnTo>
+                    <a:pt x="6905168" y="3162505"/>
+                  </a:lnTo>
+                  <a:lnTo>
+                    <a:pt x="6982802" y="3168667"/>
+                  </a:lnTo>
+                  <a:lnTo>
+                    <a:pt x="7060436" y="3174751"/>
+                  </a:lnTo>
+                  <a:lnTo>
+                    <a:pt x="7138070" y="3180759"/>
+                  </a:lnTo>
+                  <a:lnTo>
+                    <a:pt x="7215704" y="3186691"/>
+                  </a:lnTo>
+                  <a:lnTo>
+                    <a:pt x="7293338" y="3192548"/>
+                  </a:lnTo>
+                  <a:lnTo>
+                    <a:pt x="7370972" y="3198332"/>
+                  </a:lnTo>
+                  <a:lnTo>
+                    <a:pt x="7370972" y="3641336"/>
+                  </a:lnTo>
+                  <a:lnTo>
+                    <a:pt x="7293338" y="3640337"/>
+                  </a:lnTo>
+                  <a:lnTo>
+                    <a:pt x="7215704" y="3639251"/>
+                  </a:lnTo>
+                  <a:lnTo>
+                    <a:pt x="7138070" y="3638068"/>
+                  </a:lnTo>
+                  <a:lnTo>
+                    <a:pt x="7060436" y="3636782"/>
+                  </a:lnTo>
+                  <a:lnTo>
+                    <a:pt x="6982802" y="3635381"/>
+                  </a:lnTo>
+                  <a:lnTo>
+                    <a:pt x="6905168" y="3633857"/>
+                  </a:lnTo>
+                  <a:lnTo>
+                    <a:pt x="6827534" y="3632199"/>
+                  </a:lnTo>
+                  <a:lnTo>
+                    <a:pt x="6749900" y="3630394"/>
+                  </a:lnTo>
+                  <a:lnTo>
+                    <a:pt x="6672266" y="3628429"/>
+                  </a:lnTo>
+                  <a:lnTo>
+                    <a:pt x="6594632" y="3626292"/>
+                  </a:lnTo>
+                  <a:lnTo>
+                    <a:pt x="6516998" y="3623965"/>
+                  </a:lnTo>
+                  <a:lnTo>
+                    <a:pt x="6439364" y="3621433"/>
+                  </a:lnTo>
+                  <a:lnTo>
+                    <a:pt x="6361730" y="3618678"/>
+                  </a:lnTo>
+                  <a:lnTo>
+                    <a:pt x="6284096" y="3615679"/>
+                  </a:lnTo>
+                  <a:lnTo>
+                    <a:pt x="6206462" y="3612415"/>
+                  </a:lnTo>
+                  <a:lnTo>
+                    <a:pt x="6128827" y="3608864"/>
+                  </a:lnTo>
+                  <a:lnTo>
+                    <a:pt x="6051193" y="3604999"/>
+                  </a:lnTo>
+                  <a:lnTo>
+                    <a:pt x="5973559" y="3600792"/>
+                  </a:lnTo>
+                  <a:lnTo>
+                    <a:pt x="5895925" y="3596214"/>
+                  </a:lnTo>
+                  <a:lnTo>
+                    <a:pt x="5818291" y="3591232"/>
+                  </a:lnTo>
+                  <a:lnTo>
+                    <a:pt x="5740657" y="3585811"/>
+                  </a:lnTo>
+                  <a:lnTo>
+                    <a:pt x="5663023" y="3579910"/>
+                  </a:lnTo>
+                  <a:lnTo>
+                    <a:pt x="5585389" y="3573489"/>
+                  </a:lnTo>
+                  <a:lnTo>
+                    <a:pt x="5507755" y="3566500"/>
+                  </a:lnTo>
+                  <a:lnTo>
+                    <a:pt x="5430121" y="3558895"/>
+                  </a:lnTo>
+                  <a:lnTo>
+                    <a:pt x="5352487" y="3550618"/>
+                  </a:lnTo>
+                  <a:lnTo>
+                    <a:pt x="5274853" y="3541611"/>
+                  </a:lnTo>
+                  <a:lnTo>
+                    <a:pt x="5197219" y="3531808"/>
+                  </a:lnTo>
+                  <a:lnTo>
+                    <a:pt x="5119585" y="3521140"/>
+                  </a:lnTo>
+                  <a:lnTo>
+                    <a:pt x="5041951" y="3509529"/>
+                  </a:lnTo>
+                  <a:lnTo>
+                    <a:pt x="4964317" y="3496894"/>
+                  </a:lnTo>
+                  <a:lnTo>
+                    <a:pt x="4886683" y="3483144"/>
+                  </a:lnTo>
+                  <a:lnTo>
+                    <a:pt x="4809049" y="3468179"/>
+                  </a:lnTo>
+                  <a:lnTo>
+                    <a:pt x="4731415" y="3451893"/>
+                  </a:lnTo>
+                  <a:lnTo>
+                    <a:pt x="4653781" y="3434169"/>
+                  </a:lnTo>
+                  <a:lnTo>
+                    <a:pt x="4576147" y="3414881"/>
+                  </a:lnTo>
+                  <a:lnTo>
+                    <a:pt x="4498513" y="3393889"/>
+                  </a:lnTo>
+                  <a:lnTo>
+                    <a:pt x="4420879" y="3371044"/>
+                  </a:lnTo>
+                  <a:lnTo>
+                    <a:pt x="4343244" y="3346183"/>
+                  </a:lnTo>
+                  <a:lnTo>
+                    <a:pt x="4265610" y="3319126"/>
+                  </a:lnTo>
+                  <a:lnTo>
+                    <a:pt x="4187976" y="3289681"/>
+                  </a:lnTo>
+                  <a:lnTo>
+                    <a:pt x="4110342" y="3257636"/>
+                  </a:lnTo>
+                  <a:lnTo>
+                    <a:pt x="4032708" y="3222762"/>
+                  </a:lnTo>
+                  <a:lnTo>
+                    <a:pt x="3955074" y="3184808"/>
+                  </a:lnTo>
+                  <a:lnTo>
+                    <a:pt x="3877440" y="3143504"/>
+                  </a:lnTo>
+                  <a:lnTo>
+                    <a:pt x="3799806" y="3098554"/>
+                  </a:lnTo>
+                  <a:lnTo>
+                    <a:pt x="3722172" y="3049635"/>
+                  </a:lnTo>
+                  <a:lnTo>
+                    <a:pt x="3644538" y="2996397"/>
+                  </a:lnTo>
+                  <a:lnTo>
+                    <a:pt x="3566904" y="2938458"/>
+                  </a:lnTo>
+                  <a:lnTo>
+                    <a:pt x="3489270" y="2875405"/>
+                  </a:lnTo>
+                  <a:lnTo>
+                    <a:pt x="3411636" y="2806784"/>
+                  </a:lnTo>
+                  <a:lnTo>
+                    <a:pt x="3334002" y="2775544"/>
+                  </a:lnTo>
+                  <a:lnTo>
+                    <a:pt x="3256368" y="2764377"/>
+                  </a:lnTo>
+                  <a:lnTo>
+                    <a:pt x="3178734" y="2753069"/>
+                  </a:lnTo>
+                  <a:lnTo>
+                    <a:pt x="3101100" y="2741616"/>
+                  </a:lnTo>
+                  <a:lnTo>
+                    <a:pt x="3023466" y="2730018"/>
+                  </a:lnTo>
+                  <a:lnTo>
+                    <a:pt x="2945832" y="2718272"/>
+                  </a:lnTo>
+                  <a:lnTo>
+                    <a:pt x="2868198" y="2706376"/>
+                  </a:lnTo>
+                  <a:lnTo>
+                    <a:pt x="2790564" y="2694329"/>
+                  </a:lnTo>
+                  <a:lnTo>
+                    <a:pt x="2712930" y="2682129"/>
+                  </a:lnTo>
+                  <a:lnTo>
+                    <a:pt x="2635295" y="2669773"/>
+                  </a:lnTo>
+                  <a:lnTo>
+                    <a:pt x="2557661" y="2657260"/>
+                  </a:lnTo>
+                  <a:lnTo>
+                    <a:pt x="2480027" y="2644588"/>
+                  </a:lnTo>
+                  <a:lnTo>
+                    <a:pt x="2402393" y="2631754"/>
+                  </a:lnTo>
+                  <a:lnTo>
+                    <a:pt x="2324759" y="2618757"/>
+                  </a:lnTo>
+                  <a:lnTo>
+                    <a:pt x="2247125" y="2605595"/>
+                  </a:lnTo>
+                  <a:lnTo>
+                    <a:pt x="2169491" y="2592264"/>
+                  </a:lnTo>
+                  <a:lnTo>
+                    <a:pt x="2091857" y="2578765"/>
+                  </a:lnTo>
+                  <a:lnTo>
+                    <a:pt x="2014223" y="2565093"/>
+                  </a:lnTo>
+                  <a:lnTo>
+                    <a:pt x="1936589" y="2551247"/>
+                  </a:lnTo>
+                  <a:lnTo>
+                    <a:pt x="1858955" y="2537225"/>
+                  </a:lnTo>
+                  <a:lnTo>
+                    <a:pt x="1781321" y="2523025"/>
+                  </a:lnTo>
+                  <a:lnTo>
+                    <a:pt x="1703687" y="2508644"/>
+                  </a:lnTo>
+                  <a:lnTo>
+                    <a:pt x="1626053" y="2494079"/>
+                  </a:lnTo>
+                  <a:lnTo>
+                    <a:pt x="1548419" y="2479329"/>
+                  </a:lnTo>
+                  <a:lnTo>
+                    <a:pt x="1470785" y="2464392"/>
+                  </a:lnTo>
+                  <a:lnTo>
+                    <a:pt x="1393151" y="2449264"/>
+                  </a:lnTo>
+                  <a:lnTo>
+                    <a:pt x="1315517" y="2433944"/>
+                  </a:lnTo>
+                  <a:lnTo>
+                    <a:pt x="1237883" y="2418428"/>
+                  </a:lnTo>
+                  <a:lnTo>
+                    <a:pt x="1160249" y="2402715"/>
+                  </a:lnTo>
+                  <a:lnTo>
+                    <a:pt x="1082615" y="2386802"/>
+                  </a:lnTo>
+                  <a:lnTo>
+                    <a:pt x="1004981" y="2370687"/>
+                  </a:lnTo>
+                  <a:lnTo>
+                    <a:pt x="927346" y="2354366"/>
+                  </a:lnTo>
+                  <a:lnTo>
+                    <a:pt x="849712" y="2337838"/>
+                  </a:lnTo>
+                  <a:lnTo>
+                    <a:pt x="772078" y="2321099"/>
+                  </a:lnTo>
+                  <a:lnTo>
+                    <a:pt x="694444" y="2304147"/>
+                  </a:lnTo>
+                  <a:lnTo>
+                    <a:pt x="616810" y="2286979"/>
+                  </a:lnTo>
+                  <a:lnTo>
+                    <a:pt x="539176" y="2269593"/>
+                  </a:lnTo>
+                  <a:lnTo>
+                    <a:pt x="461542" y="2251985"/>
+                  </a:lnTo>
+                  <a:lnTo>
+                    <a:pt x="383908" y="2234153"/>
+                  </a:lnTo>
+                  <a:lnTo>
+                    <a:pt x="306274" y="2216094"/>
+                  </a:lnTo>
+                  <a:lnTo>
+                    <a:pt x="228640" y="2197805"/>
+                  </a:lnTo>
+                  <a:lnTo>
+                    <a:pt x="151006" y="2179283"/>
+                  </a:lnTo>
+                  <a:lnTo>
+                    <a:pt x="73372" y="2160526"/>
+                  </a:lnTo>
+                  <a:lnTo>
+                    <a:pt x="0" y="2142572"/>
+                  </a:lnTo>
+                  <a:lnTo>
+                    <a:pt x="0" y="0"/>
                   </a:lnTo>
                   <a:close/>
                 </a:path>
@@ -3540,231 +3534,222 @@
           </p:nvSpPr>
           <p:spPr>
             <a:xfrm>
-              <a:off x="2665715" y="1896563"/>
-              <a:ext cx="5522774" cy="2972807"/>
+              <a:off x="2887508" y="1896563"/>
+              <a:ext cx="5300981" cy="3198332"/>
             </a:xfrm>
             <a:custGeom>
               <a:avLst/>
               <a:pathLst>
-                <a:path w="5522774" h="2972807">
+                <a:path w="5300981" h="3198332">
                   <a:moveTo>
                     <a:pt x="0" y="0"/>
                   </a:moveTo>
                   <a:lnTo>
-                    <a:pt x="10757" y="37625"/>
-                  </a:lnTo>
-                  <a:lnTo>
-                    <a:pt x="88391" y="290187"/>
-                  </a:lnTo>
-                  <a:lnTo>
-                    <a:pt x="166025" y="525103"/>
-                  </a:lnTo>
-                  <a:lnTo>
-                    <a:pt x="243659" y="743608"/>
-                  </a:lnTo>
-                  <a:lnTo>
-                    <a:pt x="321293" y="946846"/>
-                  </a:lnTo>
-                  <a:lnTo>
-                    <a:pt x="398927" y="1135886"/>
-                  </a:lnTo>
-                  <a:lnTo>
-                    <a:pt x="476561" y="1311718"/>
-                  </a:lnTo>
-                  <a:lnTo>
-                    <a:pt x="554195" y="1475266"/>
-                  </a:lnTo>
-                  <a:lnTo>
-                    <a:pt x="631829" y="1627387"/>
-                  </a:lnTo>
-                  <a:lnTo>
-                    <a:pt x="709464" y="1768881"/>
-                  </a:lnTo>
-                  <a:lnTo>
-                    <a:pt x="787098" y="1900489"/>
-                  </a:lnTo>
-                  <a:lnTo>
-                    <a:pt x="864732" y="2022902"/>
-                  </a:lnTo>
-                  <a:lnTo>
-                    <a:pt x="942366" y="2136764"/>
-                  </a:lnTo>
-                  <a:lnTo>
-                    <a:pt x="1020000" y="2242670"/>
-                  </a:lnTo>
-                  <a:lnTo>
-                    <a:pt x="1097634" y="2341177"/>
-                  </a:lnTo>
-                  <a:lnTo>
-                    <a:pt x="1175268" y="2432802"/>
-                  </a:lnTo>
-                  <a:lnTo>
-                    <a:pt x="1252902" y="2518026"/>
-                  </a:lnTo>
-                  <a:lnTo>
-                    <a:pt x="1330536" y="2597295"/>
-                  </a:lnTo>
-                  <a:lnTo>
-                    <a:pt x="1408170" y="2671027"/>
-                  </a:lnTo>
-                  <a:lnTo>
-                    <a:pt x="1485804" y="2739607"/>
-                  </a:lnTo>
-                  <a:lnTo>
-                    <a:pt x="1563438" y="2784335"/>
-                  </a:lnTo>
-                  <a:lnTo>
-                    <a:pt x="1641072" y="2788491"/>
-                  </a:lnTo>
-                  <a:lnTo>
-                    <a:pt x="1718706" y="2792627"/>
-                  </a:lnTo>
-                  <a:lnTo>
-                    <a:pt x="1796340" y="2796743"/>
-                  </a:lnTo>
-                  <a:lnTo>
-                    <a:pt x="1873974" y="2800840"/>
-                  </a:lnTo>
-                  <a:lnTo>
-                    <a:pt x="1951608" y="2804917"/>
-                  </a:lnTo>
-                  <a:lnTo>
-                    <a:pt x="2029242" y="2808975"/>
-                  </a:lnTo>
-                  <a:lnTo>
-                    <a:pt x="2106876" y="2813013"/>
-                  </a:lnTo>
-                  <a:lnTo>
-                    <a:pt x="2184510" y="2817032"/>
-                  </a:lnTo>
-                  <a:lnTo>
-                    <a:pt x="2262144" y="2821031"/>
-                  </a:lnTo>
-                  <a:lnTo>
-                    <a:pt x="2339778" y="2825012"/>
-                  </a:lnTo>
-                  <a:lnTo>
-                    <a:pt x="2417413" y="2828973"/>
-                  </a:lnTo>
-                  <a:lnTo>
-                    <a:pt x="2495047" y="2832916"/>
-                  </a:lnTo>
-                  <a:lnTo>
-                    <a:pt x="2572681" y="2836839"/>
-                  </a:lnTo>
-                  <a:lnTo>
-                    <a:pt x="2650315" y="2840744"/>
-                  </a:lnTo>
-                  <a:lnTo>
-                    <a:pt x="2727949" y="2844630"/>
-                  </a:lnTo>
-                  <a:lnTo>
-                    <a:pt x="2805583" y="2848498"/>
-                  </a:lnTo>
-                  <a:lnTo>
-                    <a:pt x="2883217" y="2852347"/>
-                  </a:lnTo>
-                  <a:lnTo>
-                    <a:pt x="2960851" y="2856177"/>
-                  </a:lnTo>
-                  <a:lnTo>
-                    <a:pt x="3038485" y="2859990"/>
-                  </a:lnTo>
-                  <a:lnTo>
-                    <a:pt x="3116119" y="2863784"/>
-                  </a:lnTo>
-                  <a:lnTo>
-                    <a:pt x="3193753" y="2867559"/>
-                  </a:lnTo>
-                  <a:lnTo>
-                    <a:pt x="3271387" y="2871317"/>
-                  </a:lnTo>
-                  <a:lnTo>
-                    <a:pt x="3349021" y="2875057"/>
-                  </a:lnTo>
-                  <a:lnTo>
-                    <a:pt x="3426655" y="2878779"/>
-                  </a:lnTo>
-                  <a:lnTo>
-                    <a:pt x="3504289" y="2882483"/>
-                  </a:lnTo>
-                  <a:lnTo>
-                    <a:pt x="3581923" y="2886169"/>
-                  </a:lnTo>
-                  <a:lnTo>
-                    <a:pt x="3659557" y="2889838"/>
-                  </a:lnTo>
-                  <a:lnTo>
-                    <a:pt x="3737191" y="2893489"/>
-                  </a:lnTo>
-                  <a:lnTo>
-                    <a:pt x="3814825" y="2897123"/>
-                  </a:lnTo>
-                  <a:lnTo>
-                    <a:pt x="3892459" y="2900739"/>
-                  </a:lnTo>
-                  <a:lnTo>
-                    <a:pt x="3970093" y="2904338"/>
-                  </a:lnTo>
-                  <a:lnTo>
-                    <a:pt x="4047727" y="2907920"/>
-                  </a:lnTo>
-                  <a:lnTo>
-                    <a:pt x="4125361" y="2911484"/>
-                  </a:lnTo>
-                  <a:lnTo>
-                    <a:pt x="4202996" y="2915032"/>
-                  </a:lnTo>
-                  <a:lnTo>
-                    <a:pt x="4280630" y="2918562"/>
-                  </a:lnTo>
-                  <a:lnTo>
-                    <a:pt x="4358264" y="2922076"/>
-                  </a:lnTo>
-                  <a:lnTo>
-                    <a:pt x="4435898" y="2925573"/>
-                  </a:lnTo>
-                  <a:lnTo>
-                    <a:pt x="4513532" y="2929053"/>
-                  </a:lnTo>
-                  <a:lnTo>
-                    <a:pt x="4591166" y="2932516"/>
-                  </a:lnTo>
-                  <a:lnTo>
-                    <a:pt x="4668800" y="2935963"/>
-                  </a:lnTo>
-                  <a:lnTo>
-                    <a:pt x="4746434" y="2939393"/>
-                  </a:lnTo>
-                  <a:lnTo>
-                    <a:pt x="4824068" y="2942807"/>
-                  </a:lnTo>
-                  <a:lnTo>
-                    <a:pt x="4901702" y="2946205"/>
-                  </a:lnTo>
-                  <a:lnTo>
-                    <a:pt x="4979336" y="2949586"/>
-                  </a:lnTo>
-                  <a:lnTo>
-                    <a:pt x="5056970" y="2952951"/>
-                  </a:lnTo>
-                  <a:lnTo>
-                    <a:pt x="5134604" y="2956300"/>
-                  </a:lnTo>
-                  <a:lnTo>
-                    <a:pt x="5212238" y="2959633"/>
-                  </a:lnTo>
-                  <a:lnTo>
-                    <a:pt x="5289872" y="2962951"/>
-                  </a:lnTo>
-                  <a:lnTo>
-                    <a:pt x="5367506" y="2966252"/>
-                  </a:lnTo>
-                  <a:lnTo>
-                    <a:pt x="5445140" y="2969537"/>
-                  </a:lnTo>
-                  <a:lnTo>
-                    <a:pt x="5522774" y="2972807"/>
+                    <a:pt x="21866" y="88627"/>
+                  </a:lnTo>
+                  <a:lnTo>
+                    <a:pt x="99500" y="377759"/>
+                  </a:lnTo>
+                  <a:lnTo>
+                    <a:pt x="177134" y="643434"/>
+                  </a:lnTo>
+                  <a:lnTo>
+                    <a:pt x="254768" y="887557"/>
+                  </a:lnTo>
+                  <a:lnTo>
+                    <a:pt x="332402" y="1111875"/>
+                  </a:lnTo>
+                  <a:lnTo>
+                    <a:pt x="410036" y="1317995"/>
+                  </a:lnTo>
+                  <a:lnTo>
+                    <a:pt x="487670" y="1507393"/>
+                  </a:lnTo>
+                  <a:lnTo>
+                    <a:pt x="565305" y="1681427"/>
+                  </a:lnTo>
+                  <a:lnTo>
+                    <a:pt x="642939" y="1841342"/>
+                  </a:lnTo>
+                  <a:lnTo>
+                    <a:pt x="720573" y="1988284"/>
+                  </a:lnTo>
+                  <a:lnTo>
+                    <a:pt x="798207" y="2123306"/>
+                  </a:lnTo>
+                  <a:lnTo>
+                    <a:pt x="875841" y="2247373"/>
+                  </a:lnTo>
+                  <a:lnTo>
+                    <a:pt x="953475" y="2361376"/>
+                  </a:lnTo>
+                  <a:lnTo>
+                    <a:pt x="1031109" y="2466130"/>
+                  </a:lnTo>
+                  <a:lnTo>
+                    <a:pt x="1108743" y="2562386"/>
+                  </a:lnTo>
+                  <a:lnTo>
+                    <a:pt x="1186377" y="2650834"/>
+                  </a:lnTo>
+                  <a:lnTo>
+                    <a:pt x="1264011" y="2732105"/>
+                  </a:lnTo>
+                  <a:lnTo>
+                    <a:pt x="1341645" y="2786570"/>
+                  </a:lnTo>
+                  <a:lnTo>
+                    <a:pt x="1419279" y="2797457"/>
+                  </a:lnTo>
+                  <a:lnTo>
+                    <a:pt x="1496913" y="2808208"/>
+                  </a:lnTo>
+                  <a:lnTo>
+                    <a:pt x="1574547" y="2818823"/>
+                  </a:lnTo>
+                  <a:lnTo>
+                    <a:pt x="1652181" y="2829305"/>
+                  </a:lnTo>
+                  <a:lnTo>
+                    <a:pt x="1729815" y="2839656"/>
+                  </a:lnTo>
+                  <a:lnTo>
+                    <a:pt x="1807449" y="2849876"/>
+                  </a:lnTo>
+                  <a:lnTo>
+                    <a:pt x="1885083" y="2859967"/>
+                  </a:lnTo>
+                  <a:lnTo>
+                    <a:pt x="1962717" y="2869932"/>
+                  </a:lnTo>
+                  <a:lnTo>
+                    <a:pt x="2040351" y="2879772"/>
+                  </a:lnTo>
+                  <a:lnTo>
+                    <a:pt x="2117985" y="2889487"/>
+                  </a:lnTo>
+                  <a:lnTo>
+                    <a:pt x="2195619" y="2899081"/>
+                  </a:lnTo>
+                  <a:lnTo>
+                    <a:pt x="2273254" y="2908554"/>
+                  </a:lnTo>
+                  <a:lnTo>
+                    <a:pt x="2350888" y="2917908"/>
+                  </a:lnTo>
+                  <a:lnTo>
+                    <a:pt x="2428522" y="2927144"/>
+                  </a:lnTo>
+                  <a:lnTo>
+                    <a:pt x="2506156" y="2936265"/>
+                  </a:lnTo>
+                  <a:lnTo>
+                    <a:pt x="2583790" y="2945270"/>
+                  </a:lnTo>
+                  <a:lnTo>
+                    <a:pt x="2661424" y="2954163"/>
+                  </a:lnTo>
+                  <a:lnTo>
+                    <a:pt x="2739058" y="2962943"/>
+                  </a:lnTo>
+                  <a:lnTo>
+                    <a:pt x="2816692" y="2971614"/>
+                  </a:lnTo>
+                  <a:lnTo>
+                    <a:pt x="2894326" y="2980175"/>
+                  </a:lnTo>
+                  <a:lnTo>
+                    <a:pt x="2971960" y="2988629"/>
+                  </a:lnTo>
+                  <a:lnTo>
+                    <a:pt x="3049594" y="2996976"/>
+                  </a:lnTo>
+                  <a:lnTo>
+                    <a:pt x="3127228" y="3005218"/>
+                  </a:lnTo>
+                  <a:lnTo>
+                    <a:pt x="3204862" y="3013357"/>
+                  </a:lnTo>
+                  <a:lnTo>
+                    <a:pt x="3282496" y="3021394"/>
+                  </a:lnTo>
+                  <a:lnTo>
+                    <a:pt x="3360130" y="3029329"/>
+                  </a:lnTo>
+                  <a:lnTo>
+                    <a:pt x="3437764" y="3037165"/>
+                  </a:lnTo>
+                  <a:lnTo>
+                    <a:pt x="3515398" y="3044902"/>
+                  </a:lnTo>
+                  <a:lnTo>
+                    <a:pt x="3593032" y="3052542"/>
+                  </a:lnTo>
+                  <a:lnTo>
+                    <a:pt x="3670666" y="3060086"/>
+                  </a:lnTo>
+                  <a:lnTo>
+                    <a:pt x="3748300" y="3067535"/>
+                  </a:lnTo>
+                  <a:lnTo>
+                    <a:pt x="3825934" y="3074890"/>
+                  </a:lnTo>
+                  <a:lnTo>
+                    <a:pt x="3903568" y="3082153"/>
+                  </a:lnTo>
+                  <a:lnTo>
+                    <a:pt x="3981203" y="3089325"/>
+                  </a:lnTo>
+                  <a:lnTo>
+                    <a:pt x="4058837" y="3096407"/>
+                  </a:lnTo>
+                  <a:lnTo>
+                    <a:pt x="4136471" y="3103399"/>
+                  </a:lnTo>
+                  <a:lnTo>
+                    <a:pt x="4214105" y="3110304"/>
+                  </a:lnTo>
+                  <a:lnTo>
+                    <a:pt x="4291739" y="3117121"/>
+                  </a:lnTo>
+                  <a:lnTo>
+                    <a:pt x="4369373" y="3123853"/>
+                  </a:lnTo>
+                  <a:lnTo>
+                    <a:pt x="4447007" y="3130501"/>
+                  </a:lnTo>
+                  <a:lnTo>
+                    <a:pt x="4524641" y="3137065"/>
+                  </a:lnTo>
+                  <a:lnTo>
+                    <a:pt x="4602275" y="3143546"/>
+                  </a:lnTo>
+                  <a:lnTo>
+                    <a:pt x="4679909" y="3149946"/>
+                  </a:lnTo>
+                  <a:lnTo>
+                    <a:pt x="4757543" y="3156265"/>
+                  </a:lnTo>
+                  <a:lnTo>
+                    <a:pt x="4835177" y="3162505"/>
+                  </a:lnTo>
+                  <a:lnTo>
+                    <a:pt x="4912811" y="3168667"/>
+                  </a:lnTo>
+                  <a:lnTo>
+                    <a:pt x="4990445" y="3174751"/>
+                  </a:lnTo>
+                  <a:lnTo>
+                    <a:pt x="5068079" y="3180759"/>
+                  </a:lnTo>
+                  <a:lnTo>
+                    <a:pt x="5145713" y="3186691"/>
+                  </a:lnTo>
+                  <a:lnTo>
+                    <a:pt x="5223347" y="3192548"/>
+                  </a:lnTo>
+                  <a:lnTo>
+                    <a:pt x="5300981" y="3198332"/>
                   </a:lnTo>
                 </a:path>
               </a:pathLst>
@@ -3784,297 +3769,297 @@
           </p:nvSpPr>
           <p:spPr>
             <a:xfrm>
-              <a:off x="817517" y="4477086"/>
-              <a:ext cx="7370972" cy="1050990"/>
+              <a:off x="817517" y="4039136"/>
+              <a:ext cx="7370972" cy="1498763"/>
             </a:xfrm>
             <a:custGeom>
               <a:avLst/>
               <a:pathLst>
-                <a:path w="7370972" h="1050990">
+                <a:path w="7370972" h="1498763">
                   <a:moveTo>
-                    <a:pt x="7370972" y="1050990"/>
+                    <a:pt x="7370972" y="1498763"/>
                   </a:moveTo>
                   <a:lnTo>
-                    <a:pt x="7293338" y="1049403"/>
-                  </a:lnTo>
-                  <a:lnTo>
-                    <a:pt x="7215704" y="1047697"/>
-                  </a:lnTo>
-                  <a:lnTo>
-                    <a:pt x="7138070" y="1045862"/>
-                  </a:lnTo>
-                  <a:lnTo>
-                    <a:pt x="7060436" y="1043890"/>
-                  </a:lnTo>
-                  <a:lnTo>
-                    <a:pt x="6982802" y="1041770"/>
-                  </a:lnTo>
-                  <a:lnTo>
-                    <a:pt x="6905168" y="1039490"/>
-                  </a:lnTo>
-                  <a:lnTo>
-                    <a:pt x="6827534" y="1037039"/>
-                  </a:lnTo>
-                  <a:lnTo>
-                    <a:pt x="6749900" y="1034404"/>
-                  </a:lnTo>
-                  <a:lnTo>
-                    <a:pt x="6672266" y="1031571"/>
-                  </a:lnTo>
-                  <a:lnTo>
-                    <a:pt x="6594632" y="1028526"/>
-                  </a:lnTo>
-                  <a:lnTo>
-                    <a:pt x="6516998" y="1025251"/>
-                  </a:lnTo>
-                  <a:lnTo>
-                    <a:pt x="6439364" y="1021731"/>
-                  </a:lnTo>
-                  <a:lnTo>
-                    <a:pt x="6361730" y="1017946"/>
-                  </a:lnTo>
-                  <a:lnTo>
-                    <a:pt x="6284096" y="1013877"/>
-                  </a:lnTo>
-                  <a:lnTo>
-                    <a:pt x="6206462" y="1009502"/>
-                  </a:lnTo>
-                  <a:lnTo>
-                    <a:pt x="6128827" y="1004799"/>
-                  </a:lnTo>
-                  <a:lnTo>
-                    <a:pt x="6051193" y="999742"/>
-                  </a:lnTo>
-                  <a:lnTo>
-                    <a:pt x="5973559" y="994306"/>
-                  </a:lnTo>
-                  <a:lnTo>
-                    <a:pt x="5895925" y="988461"/>
-                  </a:lnTo>
-                  <a:lnTo>
-                    <a:pt x="5818291" y="982177"/>
-                  </a:lnTo>
-                  <a:lnTo>
-                    <a:pt x="5740657" y="975421"/>
-                  </a:lnTo>
-                  <a:lnTo>
-                    <a:pt x="5663023" y="968158"/>
-                  </a:lnTo>
-                  <a:lnTo>
-                    <a:pt x="5585389" y="960349"/>
-                  </a:lnTo>
-                  <a:lnTo>
-                    <a:pt x="5507755" y="951954"/>
-                  </a:lnTo>
-                  <a:lnTo>
-                    <a:pt x="5430121" y="942928"/>
-                  </a:lnTo>
-                  <a:lnTo>
-                    <a:pt x="5352487" y="933224"/>
-                  </a:lnTo>
-                  <a:lnTo>
-                    <a:pt x="5274853" y="922791"/>
-                  </a:lnTo>
-                  <a:lnTo>
-                    <a:pt x="5197219" y="911575"/>
-                  </a:lnTo>
-                  <a:lnTo>
-                    <a:pt x="5119585" y="899516"/>
-                  </a:lnTo>
-                  <a:lnTo>
-                    <a:pt x="5041951" y="886551"/>
-                  </a:lnTo>
-                  <a:lnTo>
-                    <a:pt x="4964317" y="872613"/>
-                  </a:lnTo>
-                  <a:lnTo>
-                    <a:pt x="4886683" y="857628"/>
-                  </a:lnTo>
-                  <a:lnTo>
-                    <a:pt x="4809049" y="841517"/>
-                  </a:lnTo>
-                  <a:lnTo>
-                    <a:pt x="4731415" y="824195"/>
-                  </a:lnTo>
-                  <a:lnTo>
-                    <a:pt x="4653781" y="805573"/>
-                  </a:lnTo>
-                  <a:lnTo>
-                    <a:pt x="4576147" y="785552"/>
-                  </a:lnTo>
-                  <a:lnTo>
-                    <a:pt x="4498513" y="764028"/>
-                  </a:lnTo>
-                  <a:lnTo>
-                    <a:pt x="4420879" y="740886"/>
-                  </a:lnTo>
-                  <a:lnTo>
-                    <a:pt x="4343244" y="716006"/>
-                  </a:lnTo>
-                  <a:lnTo>
-                    <a:pt x="4265610" y="689258"/>
-                  </a:lnTo>
-                  <a:lnTo>
-                    <a:pt x="4187976" y="660500"/>
-                  </a:lnTo>
-                  <a:lnTo>
-                    <a:pt x="4110342" y="629583"/>
-                  </a:lnTo>
-                  <a:lnTo>
-                    <a:pt x="4032708" y="596343"/>
-                  </a:lnTo>
-                  <a:lnTo>
-                    <a:pt x="3955074" y="560606"/>
-                  </a:lnTo>
-                  <a:lnTo>
-                    <a:pt x="3877440" y="522185"/>
-                  </a:lnTo>
-                  <a:lnTo>
-                    <a:pt x="3799806" y="480878"/>
-                  </a:lnTo>
-                  <a:lnTo>
-                    <a:pt x="3722172" y="436469"/>
-                  </a:lnTo>
-                  <a:lnTo>
-                    <a:pt x="3644538" y="388723"/>
-                  </a:lnTo>
-                  <a:lnTo>
-                    <a:pt x="3566904" y="337392"/>
-                  </a:lnTo>
-                  <a:lnTo>
-                    <a:pt x="3489270" y="282205"/>
-                  </a:lnTo>
-                  <a:lnTo>
-                    <a:pt x="3411636" y="222872"/>
-                  </a:lnTo>
-                  <a:lnTo>
-                    <a:pt x="3334002" y="199635"/>
-                  </a:lnTo>
-                  <a:lnTo>
-                    <a:pt x="3256368" y="195439"/>
-                  </a:lnTo>
-                  <a:lnTo>
-                    <a:pt x="3178734" y="191223"/>
-                  </a:lnTo>
-                  <a:lnTo>
-                    <a:pt x="3101100" y="186986"/>
-                  </a:lnTo>
-                  <a:lnTo>
-                    <a:pt x="3023466" y="182729"/>
-                  </a:lnTo>
-                  <a:lnTo>
-                    <a:pt x="2945832" y="178451"/>
-                  </a:lnTo>
-                  <a:lnTo>
-                    <a:pt x="2868198" y="174153"/>
-                  </a:lnTo>
-                  <a:lnTo>
-                    <a:pt x="2790564" y="169835"/>
-                  </a:lnTo>
-                  <a:lnTo>
-                    <a:pt x="2712930" y="165495"/>
-                  </a:lnTo>
-                  <a:lnTo>
-                    <a:pt x="2635295" y="161135"/>
-                  </a:lnTo>
-                  <a:lnTo>
-                    <a:pt x="2557661" y="156753"/>
-                  </a:lnTo>
-                  <a:lnTo>
-                    <a:pt x="2480027" y="152351"/>
-                  </a:lnTo>
-                  <a:lnTo>
-                    <a:pt x="2402393" y="147927"/>
-                  </a:lnTo>
-                  <a:lnTo>
-                    <a:pt x="2324759" y="143483"/>
-                  </a:lnTo>
-                  <a:lnTo>
-                    <a:pt x="2247125" y="139016"/>
-                  </a:lnTo>
-                  <a:lnTo>
-                    <a:pt x="2169491" y="134529"/>
-                  </a:lnTo>
-                  <a:lnTo>
-                    <a:pt x="2091857" y="130019"/>
-                  </a:lnTo>
-                  <a:lnTo>
-                    <a:pt x="2014223" y="125488"/>
-                  </a:lnTo>
-                  <a:lnTo>
-                    <a:pt x="1936589" y="120935"/>
-                  </a:lnTo>
-                  <a:lnTo>
-                    <a:pt x="1858955" y="116361"/>
-                  </a:lnTo>
-                  <a:lnTo>
-                    <a:pt x="1781321" y="111764"/>
-                  </a:lnTo>
-                  <a:lnTo>
-                    <a:pt x="1703687" y="107145"/>
-                  </a:lnTo>
-                  <a:lnTo>
-                    <a:pt x="1626053" y="102504"/>
-                  </a:lnTo>
-                  <a:lnTo>
-                    <a:pt x="1548419" y="97841"/>
-                  </a:lnTo>
-                  <a:lnTo>
-                    <a:pt x="1470785" y="93155"/>
-                  </a:lnTo>
-                  <a:lnTo>
-                    <a:pt x="1393151" y="88447"/>
-                  </a:lnTo>
-                  <a:lnTo>
-                    <a:pt x="1315517" y="83716"/>
-                  </a:lnTo>
-                  <a:lnTo>
-                    <a:pt x="1237883" y="78962"/>
-                  </a:lnTo>
-                  <a:lnTo>
-                    <a:pt x="1160249" y="74186"/>
-                  </a:lnTo>
-                  <a:lnTo>
-                    <a:pt x="1082615" y="69386"/>
-                  </a:lnTo>
-                  <a:lnTo>
-                    <a:pt x="1004981" y="64564"/>
-                  </a:lnTo>
-                  <a:lnTo>
-                    <a:pt x="927346" y="59718"/>
-                  </a:lnTo>
-                  <a:lnTo>
-                    <a:pt x="849712" y="54849"/>
-                  </a:lnTo>
-                  <a:lnTo>
-                    <a:pt x="772078" y="49956"/>
-                  </a:lnTo>
-                  <a:lnTo>
-                    <a:pt x="694444" y="45040"/>
-                  </a:lnTo>
-                  <a:lnTo>
-                    <a:pt x="616810" y="40100"/>
-                  </a:lnTo>
-                  <a:lnTo>
-                    <a:pt x="539176" y="35137"/>
-                  </a:lnTo>
-                  <a:lnTo>
-                    <a:pt x="461542" y="30150"/>
-                  </a:lnTo>
-                  <a:lnTo>
-                    <a:pt x="383908" y="25138"/>
-                  </a:lnTo>
-                  <a:lnTo>
-                    <a:pt x="306274" y="20103"/>
-                  </a:lnTo>
-                  <a:lnTo>
-                    <a:pt x="228640" y="15043"/>
-                  </a:lnTo>
-                  <a:lnTo>
-                    <a:pt x="151006" y="9959"/>
-                  </a:lnTo>
-                  <a:lnTo>
-                    <a:pt x="73372" y="4851"/>
+                    <a:pt x="7293338" y="1497764"/>
+                  </a:lnTo>
+                  <a:lnTo>
+                    <a:pt x="7215704" y="1496678"/>
+                  </a:lnTo>
+                  <a:lnTo>
+                    <a:pt x="7138070" y="1495496"/>
+                  </a:lnTo>
+                  <a:lnTo>
+                    <a:pt x="7060436" y="1494209"/>
+                  </a:lnTo>
+                  <a:lnTo>
+                    <a:pt x="6982802" y="1492808"/>
+                  </a:lnTo>
+                  <a:lnTo>
+                    <a:pt x="6905168" y="1491284"/>
+                  </a:lnTo>
+                  <a:lnTo>
+                    <a:pt x="6827534" y="1489626"/>
+                  </a:lnTo>
+                  <a:lnTo>
+                    <a:pt x="6749900" y="1487821"/>
+                  </a:lnTo>
+                  <a:lnTo>
+                    <a:pt x="6672266" y="1485856"/>
+                  </a:lnTo>
+                  <a:lnTo>
+                    <a:pt x="6594632" y="1483719"/>
+                  </a:lnTo>
+                  <a:lnTo>
+                    <a:pt x="6516998" y="1481392"/>
+                  </a:lnTo>
+                  <a:lnTo>
+                    <a:pt x="6439364" y="1478860"/>
+                  </a:lnTo>
+                  <a:lnTo>
+                    <a:pt x="6361730" y="1476105"/>
+                  </a:lnTo>
+                  <a:lnTo>
+                    <a:pt x="6284096" y="1473106"/>
+                  </a:lnTo>
+                  <a:lnTo>
+                    <a:pt x="6206462" y="1469842"/>
+                  </a:lnTo>
+                  <a:lnTo>
+                    <a:pt x="6128827" y="1466291"/>
+                  </a:lnTo>
+                  <a:lnTo>
+                    <a:pt x="6051193" y="1462426"/>
+                  </a:lnTo>
+                  <a:lnTo>
+                    <a:pt x="5973559" y="1458219"/>
+                  </a:lnTo>
+                  <a:lnTo>
+                    <a:pt x="5895925" y="1453641"/>
+                  </a:lnTo>
+                  <a:lnTo>
+                    <a:pt x="5818291" y="1448659"/>
+                  </a:lnTo>
+                  <a:lnTo>
+                    <a:pt x="5740657" y="1443238"/>
+                  </a:lnTo>
+                  <a:lnTo>
+                    <a:pt x="5663023" y="1437337"/>
+                  </a:lnTo>
+                  <a:lnTo>
+                    <a:pt x="5585389" y="1430916"/>
+                  </a:lnTo>
+                  <a:lnTo>
+                    <a:pt x="5507755" y="1423927"/>
+                  </a:lnTo>
+                  <a:lnTo>
+                    <a:pt x="5430121" y="1416322"/>
+                  </a:lnTo>
+                  <a:lnTo>
+                    <a:pt x="5352487" y="1408045"/>
+                  </a:lnTo>
+                  <a:lnTo>
+                    <a:pt x="5274853" y="1399038"/>
+                  </a:lnTo>
+                  <a:lnTo>
+                    <a:pt x="5197219" y="1389235"/>
+                  </a:lnTo>
+                  <a:lnTo>
+                    <a:pt x="5119585" y="1378567"/>
+                  </a:lnTo>
+                  <a:lnTo>
+                    <a:pt x="5041951" y="1366956"/>
+                  </a:lnTo>
+                  <a:lnTo>
+                    <a:pt x="4964317" y="1354321"/>
+                  </a:lnTo>
+                  <a:lnTo>
+                    <a:pt x="4886683" y="1340571"/>
+                  </a:lnTo>
+                  <a:lnTo>
+                    <a:pt x="4809049" y="1325606"/>
+                  </a:lnTo>
+                  <a:lnTo>
+                    <a:pt x="4731415" y="1309320"/>
+                  </a:lnTo>
+                  <a:lnTo>
+                    <a:pt x="4653781" y="1291596"/>
+                  </a:lnTo>
+                  <a:lnTo>
+                    <a:pt x="4576147" y="1272308"/>
+                  </a:lnTo>
+                  <a:lnTo>
+                    <a:pt x="4498513" y="1251316"/>
+                  </a:lnTo>
+                  <a:lnTo>
+                    <a:pt x="4420879" y="1228472"/>
+                  </a:lnTo>
+                  <a:lnTo>
+                    <a:pt x="4343244" y="1203610"/>
+                  </a:lnTo>
+                  <a:lnTo>
+                    <a:pt x="4265610" y="1176553"/>
+                  </a:lnTo>
+                  <a:lnTo>
+                    <a:pt x="4187976" y="1147108"/>
+                  </a:lnTo>
+                  <a:lnTo>
+                    <a:pt x="4110342" y="1115063"/>
+                  </a:lnTo>
+                  <a:lnTo>
+                    <a:pt x="4032708" y="1080189"/>
+                  </a:lnTo>
+                  <a:lnTo>
+                    <a:pt x="3955074" y="1042235"/>
+                  </a:lnTo>
+                  <a:lnTo>
+                    <a:pt x="3877440" y="1000932"/>
+                  </a:lnTo>
+                  <a:lnTo>
+                    <a:pt x="3799806" y="955981"/>
+                  </a:lnTo>
+                  <a:lnTo>
+                    <a:pt x="3722172" y="907062"/>
+                  </a:lnTo>
+                  <a:lnTo>
+                    <a:pt x="3644538" y="853824"/>
+                  </a:lnTo>
+                  <a:lnTo>
+                    <a:pt x="3566904" y="795885"/>
+                  </a:lnTo>
+                  <a:lnTo>
+                    <a:pt x="3489270" y="732832"/>
+                  </a:lnTo>
+                  <a:lnTo>
+                    <a:pt x="3411636" y="664211"/>
+                  </a:lnTo>
+                  <a:lnTo>
+                    <a:pt x="3334002" y="632971"/>
+                  </a:lnTo>
+                  <a:lnTo>
+                    <a:pt x="3256368" y="621804"/>
+                  </a:lnTo>
+                  <a:lnTo>
+                    <a:pt x="3178734" y="610496"/>
+                  </a:lnTo>
+                  <a:lnTo>
+                    <a:pt x="3101100" y="599043"/>
+                  </a:lnTo>
+                  <a:lnTo>
+                    <a:pt x="3023466" y="587445"/>
+                  </a:lnTo>
+                  <a:lnTo>
+                    <a:pt x="2945832" y="575699"/>
+                  </a:lnTo>
+                  <a:lnTo>
+                    <a:pt x="2868198" y="563803"/>
+                  </a:lnTo>
+                  <a:lnTo>
+                    <a:pt x="2790564" y="551756"/>
+                  </a:lnTo>
+                  <a:lnTo>
+                    <a:pt x="2712930" y="539556"/>
+                  </a:lnTo>
+                  <a:lnTo>
+                    <a:pt x="2635295" y="527200"/>
+                  </a:lnTo>
+                  <a:lnTo>
+                    <a:pt x="2557661" y="514687"/>
+                  </a:lnTo>
+                  <a:lnTo>
+                    <a:pt x="2480027" y="502015"/>
+                  </a:lnTo>
+                  <a:lnTo>
+                    <a:pt x="2402393" y="489181"/>
+                  </a:lnTo>
+                  <a:lnTo>
+                    <a:pt x="2324759" y="476184"/>
+                  </a:lnTo>
+                  <a:lnTo>
+                    <a:pt x="2247125" y="463022"/>
+                  </a:lnTo>
+                  <a:lnTo>
+                    <a:pt x="2169491" y="449692"/>
+                  </a:lnTo>
+                  <a:lnTo>
+                    <a:pt x="2091857" y="436192"/>
+                  </a:lnTo>
+                  <a:lnTo>
+                    <a:pt x="2014223" y="422520"/>
+                  </a:lnTo>
+                  <a:lnTo>
+                    <a:pt x="1936589" y="408674"/>
+                  </a:lnTo>
+                  <a:lnTo>
+                    <a:pt x="1858955" y="394652"/>
+                  </a:lnTo>
+                  <a:lnTo>
+                    <a:pt x="1781321" y="380452"/>
+                  </a:lnTo>
+                  <a:lnTo>
+                    <a:pt x="1703687" y="366071"/>
+                  </a:lnTo>
+                  <a:lnTo>
+                    <a:pt x="1626053" y="351506"/>
+                  </a:lnTo>
+                  <a:lnTo>
+                    <a:pt x="1548419" y="336756"/>
+                  </a:lnTo>
+                  <a:lnTo>
+                    <a:pt x="1470785" y="321819"/>
+                  </a:lnTo>
+                  <a:lnTo>
+                    <a:pt x="1393151" y="306691"/>
+                  </a:lnTo>
+                  <a:lnTo>
+                    <a:pt x="1315517" y="291371"/>
+                  </a:lnTo>
+                  <a:lnTo>
+                    <a:pt x="1237883" y="275855"/>
+                  </a:lnTo>
+                  <a:lnTo>
+                    <a:pt x="1160249" y="260143"/>
+                  </a:lnTo>
+                  <a:lnTo>
+                    <a:pt x="1082615" y="244230"/>
+                  </a:lnTo>
+                  <a:lnTo>
+                    <a:pt x="1004981" y="228114"/>
+                  </a:lnTo>
+                  <a:lnTo>
+                    <a:pt x="927346" y="211793"/>
+                  </a:lnTo>
+                  <a:lnTo>
+                    <a:pt x="849712" y="195265"/>
+                  </a:lnTo>
+                  <a:lnTo>
+                    <a:pt x="772078" y="178526"/>
+                  </a:lnTo>
+                  <a:lnTo>
+                    <a:pt x="694444" y="161574"/>
+                  </a:lnTo>
+                  <a:lnTo>
+                    <a:pt x="616810" y="144406"/>
+                  </a:lnTo>
+                  <a:lnTo>
+                    <a:pt x="539176" y="127020"/>
+                  </a:lnTo>
+                  <a:lnTo>
+                    <a:pt x="461542" y="109412"/>
+                  </a:lnTo>
+                  <a:lnTo>
+                    <a:pt x="383908" y="91580"/>
+                  </a:lnTo>
+                  <a:lnTo>
+                    <a:pt x="306274" y="73521"/>
+                  </a:lnTo>
+                  <a:lnTo>
+                    <a:pt x="228640" y="55232"/>
+                  </a:lnTo>
+                  <a:lnTo>
+                    <a:pt x="151006" y="36711"/>
+                  </a:lnTo>
+                  <a:lnTo>
+                    <a:pt x="73372" y="17953"/>
                   </a:lnTo>
                   <a:lnTo>
                     <a:pt x="0" y="0"/>
@@ -4097,282 +4082,258 @@
           </p:nvSpPr>
           <p:spPr>
             <a:xfrm>
-              <a:off x="1318601" y="1896563"/>
-              <a:ext cx="6869888" cy="3532791"/>
+              <a:off x="1912834" y="1896563"/>
+              <a:ext cx="6275656" cy="3580969"/>
             </a:xfrm>
             <a:custGeom>
               <a:avLst/>
               <a:pathLst>
-                <a:path w="6869888" h="3532791">
+                <a:path w="6275656" h="3580969">
                   <a:moveTo>
                     <a:pt x="0" y="0"/>
                   </a:moveTo>
                   <a:lnTo>
-                    <a:pt x="38092" y="69217"/>
-                  </a:lnTo>
-                  <a:lnTo>
-                    <a:pt x="115726" y="204941"/>
-                  </a:lnTo>
-                  <a:lnTo>
-                    <a:pt x="193360" y="335525"/>
-                  </a:lnTo>
-                  <a:lnTo>
-                    <a:pt x="270994" y="461163"/>
-                  </a:lnTo>
-                  <a:lnTo>
-                    <a:pt x="348628" y="582042"/>
-                  </a:lnTo>
-                  <a:lnTo>
-                    <a:pt x="426262" y="698343"/>
-                  </a:lnTo>
-                  <a:lnTo>
-                    <a:pt x="503897" y="810239"/>
-                  </a:lnTo>
-                  <a:lnTo>
-                    <a:pt x="581531" y="917897"/>
-                  </a:lnTo>
-                  <a:lnTo>
-                    <a:pt x="659165" y="1021477"/>
-                  </a:lnTo>
-                  <a:lnTo>
-                    <a:pt x="736799" y="1121134"/>
-                  </a:lnTo>
-                  <a:lnTo>
-                    <a:pt x="814433" y="1217016"/>
-                  </a:lnTo>
-                  <a:lnTo>
-                    <a:pt x="892067" y="1309267"/>
-                  </a:lnTo>
-                  <a:lnTo>
-                    <a:pt x="969701" y="1398024"/>
-                  </a:lnTo>
-                  <a:lnTo>
-                    <a:pt x="1047335" y="1483419"/>
-                  </a:lnTo>
-                  <a:lnTo>
-                    <a:pt x="1124969" y="1565579"/>
-                  </a:lnTo>
-                  <a:lnTo>
-                    <a:pt x="1202603" y="1644628"/>
-                  </a:lnTo>
-                  <a:lnTo>
-                    <a:pt x="1280237" y="1720683"/>
-                  </a:lnTo>
-                  <a:lnTo>
-                    <a:pt x="1357871" y="1793857"/>
-                  </a:lnTo>
-                  <a:lnTo>
-                    <a:pt x="1435505" y="1864260"/>
-                  </a:lnTo>
-                  <a:lnTo>
-                    <a:pt x="1513139" y="1931996"/>
-                  </a:lnTo>
-                  <a:lnTo>
-                    <a:pt x="1590773" y="1997166"/>
-                  </a:lnTo>
-                  <a:lnTo>
-                    <a:pt x="1668407" y="2059868"/>
-                  </a:lnTo>
-                  <a:lnTo>
-                    <a:pt x="1746041" y="2120196"/>
-                  </a:lnTo>
-                  <a:lnTo>
-                    <a:pt x="1823675" y="2178238"/>
-                  </a:lnTo>
-                  <a:lnTo>
-                    <a:pt x="1901309" y="2234082"/>
-                  </a:lnTo>
-                  <a:lnTo>
-                    <a:pt x="1978943" y="2287811"/>
-                  </a:lnTo>
-                  <a:lnTo>
-                    <a:pt x="2056577" y="2339505"/>
-                  </a:lnTo>
-                  <a:lnTo>
-                    <a:pt x="2134211" y="2389241"/>
-                  </a:lnTo>
-                  <a:lnTo>
-                    <a:pt x="2211846" y="2437093"/>
-                  </a:lnTo>
-                  <a:lnTo>
-                    <a:pt x="2289480" y="2483132"/>
-                  </a:lnTo>
-                  <a:lnTo>
-                    <a:pt x="2367114" y="2527428"/>
-                  </a:lnTo>
-                  <a:lnTo>
-                    <a:pt x="2444748" y="2570046"/>
-                  </a:lnTo>
-                  <a:lnTo>
-                    <a:pt x="2522382" y="2611050"/>
-                  </a:lnTo>
-                  <a:lnTo>
-                    <a:pt x="2600016" y="2650501"/>
-                  </a:lnTo>
-                  <a:lnTo>
-                    <a:pt x="2677650" y="2688458"/>
-                  </a:lnTo>
-                  <a:lnTo>
-                    <a:pt x="2755284" y="2724977"/>
-                  </a:lnTo>
-                  <a:lnTo>
-                    <a:pt x="2832918" y="2760113"/>
-                  </a:lnTo>
-                  <a:lnTo>
-                    <a:pt x="2910552" y="2793918"/>
-                  </a:lnTo>
-                  <a:lnTo>
-                    <a:pt x="2988186" y="2826443"/>
-                  </a:lnTo>
-                  <a:lnTo>
-                    <a:pt x="3065820" y="2857736"/>
-                  </a:lnTo>
-                  <a:lnTo>
-                    <a:pt x="3143454" y="2887843"/>
-                  </a:lnTo>
-                  <a:lnTo>
-                    <a:pt x="3221088" y="2916811"/>
-                  </a:lnTo>
-                  <a:lnTo>
-                    <a:pt x="3298722" y="2944681"/>
-                  </a:lnTo>
-                  <a:lnTo>
-                    <a:pt x="3376356" y="2971495"/>
-                  </a:lnTo>
-                  <a:lnTo>
-                    <a:pt x="3453990" y="2997294"/>
-                  </a:lnTo>
-                  <a:lnTo>
-                    <a:pt x="3531624" y="3022116"/>
-                  </a:lnTo>
-                  <a:lnTo>
-                    <a:pt x="3609258" y="3045997"/>
-                  </a:lnTo>
-                  <a:lnTo>
-                    <a:pt x="3686892" y="3068974"/>
-                  </a:lnTo>
-                  <a:lnTo>
-                    <a:pt x="3764526" y="3091081"/>
-                  </a:lnTo>
-                  <a:lnTo>
-                    <a:pt x="3842160" y="3112351"/>
-                  </a:lnTo>
-                  <a:lnTo>
-                    <a:pt x="3919794" y="3132815"/>
-                  </a:lnTo>
-                  <a:lnTo>
-                    <a:pt x="3997429" y="3152503"/>
-                  </a:lnTo>
-                  <a:lnTo>
-                    <a:pt x="4075063" y="3171447"/>
-                  </a:lnTo>
-                  <a:lnTo>
-                    <a:pt x="4152697" y="3189672"/>
-                  </a:lnTo>
-                  <a:lnTo>
-                    <a:pt x="4230331" y="3207207"/>
-                  </a:lnTo>
-                  <a:lnTo>
-                    <a:pt x="4307965" y="3224079"/>
-                  </a:lnTo>
-                  <a:lnTo>
-                    <a:pt x="4385599" y="3240311"/>
-                  </a:lnTo>
-                  <a:lnTo>
-                    <a:pt x="4463233" y="3255928"/>
-                  </a:lnTo>
-                  <a:lnTo>
-                    <a:pt x="4540867" y="3270954"/>
-                  </a:lnTo>
-                  <a:lnTo>
-                    <a:pt x="4618501" y="3285411"/>
-                  </a:lnTo>
-                  <a:lnTo>
-                    <a:pt x="4696135" y="3299320"/>
-                  </a:lnTo>
-                  <a:lnTo>
-                    <a:pt x="4773769" y="3312702"/>
-                  </a:lnTo>
-                  <a:lnTo>
-                    <a:pt x="4851403" y="3325578"/>
-                  </a:lnTo>
-                  <a:lnTo>
-                    <a:pt x="4929037" y="3337965"/>
-                  </a:lnTo>
-                  <a:lnTo>
-                    <a:pt x="5006671" y="3349884"/>
-                  </a:lnTo>
-                  <a:lnTo>
-                    <a:pt x="5084305" y="3361351"/>
-                  </a:lnTo>
-                  <a:lnTo>
-                    <a:pt x="5161939" y="3372384"/>
-                  </a:lnTo>
-                  <a:lnTo>
-                    <a:pt x="5239573" y="3382999"/>
-                  </a:lnTo>
-                  <a:lnTo>
-                    <a:pt x="5317207" y="3393212"/>
-                  </a:lnTo>
-                  <a:lnTo>
-                    <a:pt x="5394841" y="3403038"/>
-                  </a:lnTo>
-                  <a:lnTo>
-                    <a:pt x="5472475" y="3412492"/>
-                  </a:lnTo>
-                  <a:lnTo>
-                    <a:pt x="5550109" y="3421588"/>
-                  </a:lnTo>
-                  <a:lnTo>
-                    <a:pt x="5627743" y="3430339"/>
-                  </a:lnTo>
-                  <a:lnTo>
-                    <a:pt x="5705378" y="3438759"/>
-                  </a:lnTo>
-                  <a:lnTo>
-                    <a:pt x="5783012" y="3446860"/>
-                  </a:lnTo>
-                  <a:lnTo>
-                    <a:pt x="5860646" y="3454654"/>
-                  </a:lnTo>
-                  <a:lnTo>
-                    <a:pt x="5938280" y="3462153"/>
-                  </a:lnTo>
-                  <a:lnTo>
-                    <a:pt x="6015914" y="3469368"/>
-                  </a:lnTo>
-                  <a:lnTo>
-                    <a:pt x="6093548" y="3476310"/>
-                  </a:lnTo>
-                  <a:lnTo>
-                    <a:pt x="6171182" y="3482989"/>
-                  </a:lnTo>
-                  <a:lnTo>
-                    <a:pt x="6248816" y="3489414"/>
-                  </a:lnTo>
-                  <a:lnTo>
-                    <a:pt x="6326450" y="3495597"/>
-                  </a:lnTo>
-                  <a:lnTo>
-                    <a:pt x="6404084" y="3501545"/>
-                  </a:lnTo>
-                  <a:lnTo>
-                    <a:pt x="6481718" y="3507268"/>
-                  </a:lnTo>
-                  <a:lnTo>
-                    <a:pt x="6559352" y="3512774"/>
-                  </a:lnTo>
-                  <a:lnTo>
-                    <a:pt x="6636986" y="3518072"/>
-                  </a:lnTo>
-                  <a:lnTo>
-                    <a:pt x="6714620" y="3523169"/>
-                  </a:lnTo>
-                  <a:lnTo>
-                    <a:pt x="6792254" y="3528073"/>
-                  </a:lnTo>
-                  <a:lnTo>
-                    <a:pt x="6869888" y="3532791"/>
+                    <a:pt x="64932" y="146142"/>
+                  </a:lnTo>
+                  <a:lnTo>
+                    <a:pt x="142566" y="312576"/>
+                  </a:lnTo>
+                  <a:lnTo>
+                    <a:pt x="220200" y="471111"/>
+                  </a:lnTo>
+                  <a:lnTo>
+                    <a:pt x="297835" y="622122"/>
+                  </a:lnTo>
+                  <a:lnTo>
+                    <a:pt x="375469" y="765964"/>
+                  </a:lnTo>
+                  <a:lnTo>
+                    <a:pt x="453103" y="902979"/>
+                  </a:lnTo>
+                  <a:lnTo>
+                    <a:pt x="530737" y="1033491"/>
+                  </a:lnTo>
+                  <a:lnTo>
+                    <a:pt x="608371" y="1157808"/>
+                  </a:lnTo>
+                  <a:lnTo>
+                    <a:pt x="686005" y="1276225"/>
+                  </a:lnTo>
+                  <a:lnTo>
+                    <a:pt x="763639" y="1389020"/>
+                  </a:lnTo>
+                  <a:lnTo>
+                    <a:pt x="841273" y="1496462"/>
+                  </a:lnTo>
+                  <a:lnTo>
+                    <a:pt x="918907" y="1598805"/>
+                  </a:lnTo>
+                  <a:lnTo>
+                    <a:pt x="996541" y="1696289"/>
+                  </a:lnTo>
+                  <a:lnTo>
+                    <a:pt x="1074175" y="1789147"/>
+                  </a:lnTo>
+                  <a:lnTo>
+                    <a:pt x="1151809" y="1877597"/>
+                  </a:lnTo>
+                  <a:lnTo>
+                    <a:pt x="1229443" y="1961849"/>
+                  </a:lnTo>
+                  <a:lnTo>
+                    <a:pt x="1307077" y="2042102"/>
+                  </a:lnTo>
+                  <a:lnTo>
+                    <a:pt x="1384711" y="2118546"/>
+                  </a:lnTo>
+                  <a:lnTo>
+                    <a:pt x="1462345" y="2191361"/>
+                  </a:lnTo>
+                  <a:lnTo>
+                    <a:pt x="1539979" y="2260720"/>
+                  </a:lnTo>
+                  <a:lnTo>
+                    <a:pt x="1617613" y="2326787"/>
+                  </a:lnTo>
+                  <a:lnTo>
+                    <a:pt x="1695247" y="2389719"/>
+                  </a:lnTo>
+                  <a:lnTo>
+                    <a:pt x="1772881" y="2449663"/>
+                  </a:lnTo>
+                  <a:lnTo>
+                    <a:pt x="1850515" y="2506762"/>
+                  </a:lnTo>
+                  <a:lnTo>
+                    <a:pt x="1928149" y="2561151"/>
+                  </a:lnTo>
+                  <a:lnTo>
+                    <a:pt x="2005784" y="2612958"/>
+                  </a:lnTo>
+                  <a:lnTo>
+                    <a:pt x="2083418" y="2662306"/>
+                  </a:lnTo>
+                  <a:lnTo>
+                    <a:pt x="2161052" y="2709312"/>
+                  </a:lnTo>
+                  <a:lnTo>
+                    <a:pt x="2238686" y="2754087"/>
+                  </a:lnTo>
+                  <a:lnTo>
+                    <a:pt x="2316320" y="2796737"/>
+                  </a:lnTo>
+                  <a:lnTo>
+                    <a:pt x="2393954" y="2837362"/>
+                  </a:lnTo>
+                  <a:lnTo>
+                    <a:pt x="2471588" y="2876059"/>
+                  </a:lnTo>
+                  <a:lnTo>
+                    <a:pt x="2549222" y="2912919"/>
+                  </a:lnTo>
+                  <a:lnTo>
+                    <a:pt x="2626856" y="2948030"/>
+                  </a:lnTo>
+                  <a:lnTo>
+                    <a:pt x="2704490" y="2981474"/>
+                  </a:lnTo>
+                  <a:lnTo>
+                    <a:pt x="2782124" y="3013331"/>
+                  </a:lnTo>
+                  <a:lnTo>
+                    <a:pt x="2859758" y="3043676"/>
+                  </a:lnTo>
+                  <a:lnTo>
+                    <a:pt x="2937392" y="3072580"/>
+                  </a:lnTo>
+                  <a:lnTo>
+                    <a:pt x="3015026" y="3100113"/>
+                  </a:lnTo>
+                  <a:lnTo>
+                    <a:pt x="3092660" y="3126338"/>
+                  </a:lnTo>
+                  <a:lnTo>
+                    <a:pt x="3170294" y="3151319"/>
+                  </a:lnTo>
+                  <a:lnTo>
+                    <a:pt x="3247928" y="3175114"/>
+                  </a:lnTo>
+                  <a:lnTo>
+                    <a:pt x="3325562" y="3197780"/>
+                  </a:lnTo>
+                  <a:lnTo>
+                    <a:pt x="3403196" y="3219370"/>
+                  </a:lnTo>
+                  <a:lnTo>
+                    <a:pt x="3480830" y="3239935"/>
+                  </a:lnTo>
+                  <a:lnTo>
+                    <a:pt x="3558464" y="3259524"/>
+                  </a:lnTo>
+                  <a:lnTo>
+                    <a:pt x="3636098" y="3278183"/>
+                  </a:lnTo>
+                  <a:lnTo>
+                    <a:pt x="3713733" y="3295957"/>
+                  </a:lnTo>
+                  <a:lnTo>
+                    <a:pt x="3791367" y="3312887"/>
+                  </a:lnTo>
+                  <a:lnTo>
+                    <a:pt x="3869001" y="3329013"/>
+                  </a:lnTo>
+                  <a:lnTo>
+                    <a:pt x="3946635" y="3344374"/>
+                  </a:lnTo>
+                  <a:lnTo>
+                    <a:pt x="4024269" y="3359006"/>
+                  </a:lnTo>
+                  <a:lnTo>
+                    <a:pt x="4101903" y="3372944"/>
+                  </a:lnTo>
+                  <a:lnTo>
+                    <a:pt x="4179537" y="3386219"/>
+                  </a:lnTo>
+                  <a:lnTo>
+                    <a:pt x="4257171" y="3398865"/>
+                  </a:lnTo>
+                  <a:lnTo>
+                    <a:pt x="4334805" y="3410911"/>
+                  </a:lnTo>
+                  <a:lnTo>
+                    <a:pt x="4412439" y="3422384"/>
+                  </a:lnTo>
+                  <a:lnTo>
+                    <a:pt x="4490073" y="3433314"/>
+                  </a:lnTo>
+                  <a:lnTo>
+                    <a:pt x="4567707" y="3443724"/>
+                  </a:lnTo>
+                  <a:lnTo>
+                    <a:pt x="4645341" y="3453640"/>
+                  </a:lnTo>
+                  <a:lnTo>
+                    <a:pt x="4722975" y="3463086"/>
+                  </a:lnTo>
+                  <a:lnTo>
+                    <a:pt x="4800609" y="3472083"/>
+                  </a:lnTo>
+                  <a:lnTo>
+                    <a:pt x="4878243" y="3480653"/>
+                  </a:lnTo>
+                  <a:lnTo>
+                    <a:pt x="4955877" y="3488817"/>
+                  </a:lnTo>
+                  <a:lnTo>
+                    <a:pt x="5033511" y="3496593"/>
+                  </a:lnTo>
+                  <a:lnTo>
+                    <a:pt x="5111145" y="3504000"/>
+                  </a:lnTo>
+                  <a:lnTo>
+                    <a:pt x="5188779" y="3511055"/>
+                  </a:lnTo>
+                  <a:lnTo>
+                    <a:pt x="5266413" y="3517775"/>
+                  </a:lnTo>
+                  <a:lnTo>
+                    <a:pt x="5344047" y="3524177"/>
+                  </a:lnTo>
+                  <a:lnTo>
+                    <a:pt x="5421681" y="3530274"/>
+                  </a:lnTo>
+                  <a:lnTo>
+                    <a:pt x="5499316" y="3536083"/>
+                  </a:lnTo>
+                  <a:lnTo>
+                    <a:pt x="5576950" y="3541615"/>
+                  </a:lnTo>
+                  <a:lnTo>
+                    <a:pt x="5654584" y="3546885"/>
+                  </a:lnTo>
+                  <a:lnTo>
+                    <a:pt x="5732218" y="3551905"/>
+                  </a:lnTo>
+                  <a:lnTo>
+                    <a:pt x="5809852" y="3556686"/>
+                  </a:lnTo>
+                  <a:lnTo>
+                    <a:pt x="5887486" y="3561241"/>
+                  </a:lnTo>
+                  <a:lnTo>
+                    <a:pt x="5965120" y="3565579"/>
+                  </a:lnTo>
+                  <a:lnTo>
+                    <a:pt x="6042754" y="3569712"/>
+                  </a:lnTo>
+                  <a:lnTo>
+                    <a:pt x="6120388" y="3573648"/>
+                  </a:lnTo>
+                  <a:lnTo>
+                    <a:pt x="6198022" y="3577398"/>
+                  </a:lnTo>
+                  <a:lnTo>
+                    <a:pt x="6275656" y="3580969"/>
                   </a:lnTo>
                 </a:path>
               </a:pathLst>

--- a/docs/plots/carbo/jx_carbo_cox_linear_ratio_death.pptx
+++ b/docs/plots/carbo/jx_carbo_cox_linear_ratio_death.pptx
@@ -3003,512 +3003,518 @@
           <p:spPr>
             <a:xfrm>
               <a:off x="817517" y="1896563"/>
-              <a:ext cx="7370972" cy="3641336"/>
+              <a:ext cx="7370972" cy="3631514"/>
             </a:xfrm>
             <a:custGeom>
               <a:avLst/>
               <a:pathLst>
-                <a:path w="7370972" h="3641336">
+                <a:path w="7370972" h="3631514">
                   <a:moveTo>
-                    <a:pt x="2069990" y="0"/>
+                    <a:pt x="1848197" y="0"/>
                   </a:moveTo>
                   <a:lnTo>
-                    <a:pt x="2091857" y="88627"/>
-                  </a:lnTo>
-                  <a:lnTo>
-                    <a:pt x="2169491" y="377759"/>
-                  </a:lnTo>
-                  <a:lnTo>
-                    <a:pt x="2247125" y="643434"/>
-                  </a:lnTo>
-                  <a:lnTo>
-                    <a:pt x="2324759" y="887557"/>
-                  </a:lnTo>
-                  <a:lnTo>
-                    <a:pt x="2402393" y="1111875"/>
-                  </a:lnTo>
-                  <a:lnTo>
-                    <a:pt x="2480027" y="1317995"/>
-                  </a:lnTo>
-                  <a:lnTo>
-                    <a:pt x="2557661" y="1507393"/>
-                  </a:lnTo>
-                  <a:lnTo>
-                    <a:pt x="2635295" y="1681427"/>
-                  </a:lnTo>
-                  <a:lnTo>
-                    <a:pt x="2712930" y="1841342"/>
-                  </a:lnTo>
-                  <a:lnTo>
-                    <a:pt x="2790564" y="1988284"/>
-                  </a:lnTo>
-                  <a:lnTo>
-                    <a:pt x="2868198" y="2123306"/>
-                  </a:lnTo>
-                  <a:lnTo>
-                    <a:pt x="2945832" y="2247373"/>
-                  </a:lnTo>
-                  <a:lnTo>
-                    <a:pt x="3023466" y="2361376"/>
-                  </a:lnTo>
-                  <a:lnTo>
-                    <a:pt x="3101100" y="2466130"/>
-                  </a:lnTo>
-                  <a:lnTo>
-                    <a:pt x="3178734" y="2562386"/>
-                  </a:lnTo>
-                  <a:lnTo>
-                    <a:pt x="3256368" y="2650834"/>
-                  </a:lnTo>
-                  <a:lnTo>
-                    <a:pt x="3334002" y="2732105"/>
-                  </a:lnTo>
-                  <a:lnTo>
-                    <a:pt x="3411636" y="2786570"/>
-                  </a:lnTo>
-                  <a:lnTo>
-                    <a:pt x="3489270" y="2797457"/>
-                  </a:lnTo>
-                  <a:lnTo>
-                    <a:pt x="3566904" y="2808208"/>
-                  </a:lnTo>
-                  <a:lnTo>
-                    <a:pt x="3644538" y="2818823"/>
-                  </a:lnTo>
-                  <a:lnTo>
-                    <a:pt x="3722172" y="2829305"/>
-                  </a:lnTo>
-                  <a:lnTo>
-                    <a:pt x="3799806" y="2839656"/>
-                  </a:lnTo>
-                  <a:lnTo>
-                    <a:pt x="3877440" y="2849876"/>
-                  </a:lnTo>
-                  <a:lnTo>
-                    <a:pt x="3955074" y="2859967"/>
-                  </a:lnTo>
-                  <a:lnTo>
-                    <a:pt x="4032708" y="2869932"/>
-                  </a:lnTo>
-                  <a:lnTo>
-                    <a:pt x="4110342" y="2879772"/>
-                  </a:lnTo>
-                  <a:lnTo>
-                    <a:pt x="4187976" y="2889487"/>
-                  </a:lnTo>
-                  <a:lnTo>
-                    <a:pt x="4265610" y="2899081"/>
-                  </a:lnTo>
-                  <a:lnTo>
-                    <a:pt x="4343244" y="2908554"/>
-                  </a:lnTo>
-                  <a:lnTo>
-                    <a:pt x="4420879" y="2917908"/>
-                  </a:lnTo>
-                  <a:lnTo>
-                    <a:pt x="4498513" y="2927144"/>
-                  </a:lnTo>
-                  <a:lnTo>
-                    <a:pt x="4576147" y="2936265"/>
-                  </a:lnTo>
-                  <a:lnTo>
-                    <a:pt x="4653781" y="2945270"/>
-                  </a:lnTo>
-                  <a:lnTo>
-                    <a:pt x="4731415" y="2954163"/>
-                  </a:lnTo>
-                  <a:lnTo>
-                    <a:pt x="4809049" y="2962943"/>
-                  </a:lnTo>
-                  <a:lnTo>
-                    <a:pt x="4886683" y="2971614"/>
-                  </a:lnTo>
-                  <a:lnTo>
-                    <a:pt x="4964317" y="2980175"/>
-                  </a:lnTo>
-                  <a:lnTo>
-                    <a:pt x="5041951" y="2988629"/>
-                  </a:lnTo>
-                  <a:lnTo>
-                    <a:pt x="5119585" y="2996976"/>
-                  </a:lnTo>
-                  <a:lnTo>
-                    <a:pt x="5197219" y="3005218"/>
-                  </a:lnTo>
-                  <a:lnTo>
-                    <a:pt x="5274853" y="3013357"/>
-                  </a:lnTo>
-                  <a:lnTo>
-                    <a:pt x="5352487" y="3021394"/>
-                  </a:lnTo>
-                  <a:lnTo>
-                    <a:pt x="5430121" y="3029329"/>
-                  </a:lnTo>
-                  <a:lnTo>
-                    <a:pt x="5507755" y="3037165"/>
-                  </a:lnTo>
-                  <a:lnTo>
-                    <a:pt x="5585389" y="3044902"/>
-                  </a:lnTo>
-                  <a:lnTo>
-                    <a:pt x="5663023" y="3052542"/>
-                  </a:lnTo>
-                  <a:lnTo>
-                    <a:pt x="5740657" y="3060086"/>
-                  </a:lnTo>
-                  <a:lnTo>
-                    <a:pt x="5818291" y="3067535"/>
-                  </a:lnTo>
-                  <a:lnTo>
-                    <a:pt x="5895925" y="3074890"/>
-                  </a:lnTo>
-                  <a:lnTo>
-                    <a:pt x="5973559" y="3082153"/>
-                  </a:lnTo>
-                  <a:lnTo>
-                    <a:pt x="6051193" y="3089325"/>
-                  </a:lnTo>
-                  <a:lnTo>
-                    <a:pt x="6128827" y="3096407"/>
-                  </a:lnTo>
-                  <a:lnTo>
-                    <a:pt x="6206462" y="3103399"/>
-                  </a:lnTo>
-                  <a:lnTo>
-                    <a:pt x="6284096" y="3110304"/>
-                  </a:lnTo>
-                  <a:lnTo>
-                    <a:pt x="6361730" y="3117121"/>
-                  </a:lnTo>
-                  <a:lnTo>
-                    <a:pt x="6439364" y="3123853"/>
-                  </a:lnTo>
-                  <a:lnTo>
-                    <a:pt x="6516998" y="3130501"/>
-                  </a:lnTo>
-                  <a:lnTo>
-                    <a:pt x="6594632" y="3137065"/>
-                  </a:lnTo>
-                  <a:lnTo>
-                    <a:pt x="6672266" y="3143546"/>
-                  </a:lnTo>
-                  <a:lnTo>
-                    <a:pt x="6749900" y="3149946"/>
-                  </a:lnTo>
-                  <a:lnTo>
-                    <a:pt x="6827534" y="3156265"/>
-                  </a:lnTo>
-                  <a:lnTo>
-                    <a:pt x="6905168" y="3162505"/>
-                  </a:lnTo>
-                  <a:lnTo>
-                    <a:pt x="6982802" y="3168667"/>
-                  </a:lnTo>
-                  <a:lnTo>
-                    <a:pt x="7060436" y="3174751"/>
-                  </a:lnTo>
-                  <a:lnTo>
-                    <a:pt x="7138070" y="3180759"/>
-                  </a:lnTo>
-                  <a:lnTo>
-                    <a:pt x="7215704" y="3186691"/>
-                  </a:lnTo>
-                  <a:lnTo>
-                    <a:pt x="7293338" y="3192548"/>
-                  </a:lnTo>
-                  <a:lnTo>
-                    <a:pt x="7370972" y="3198332"/>
-                  </a:lnTo>
-                  <a:lnTo>
-                    <a:pt x="7370972" y="3641336"/>
-                  </a:lnTo>
-                  <a:lnTo>
-                    <a:pt x="7293338" y="3640337"/>
-                  </a:lnTo>
-                  <a:lnTo>
-                    <a:pt x="7215704" y="3639251"/>
-                  </a:lnTo>
-                  <a:lnTo>
-                    <a:pt x="7138070" y="3638068"/>
-                  </a:lnTo>
-                  <a:lnTo>
-                    <a:pt x="7060436" y="3636782"/>
-                  </a:lnTo>
-                  <a:lnTo>
-                    <a:pt x="6982802" y="3635381"/>
-                  </a:lnTo>
-                  <a:lnTo>
-                    <a:pt x="6905168" y="3633857"/>
-                  </a:lnTo>
-                  <a:lnTo>
-                    <a:pt x="6827534" y="3632199"/>
-                  </a:lnTo>
-                  <a:lnTo>
-                    <a:pt x="6749900" y="3630394"/>
-                  </a:lnTo>
-                  <a:lnTo>
-                    <a:pt x="6672266" y="3628429"/>
-                  </a:lnTo>
-                  <a:lnTo>
-                    <a:pt x="6594632" y="3626292"/>
-                  </a:lnTo>
-                  <a:lnTo>
-                    <a:pt x="6516998" y="3623965"/>
-                  </a:lnTo>
-                  <a:lnTo>
-                    <a:pt x="6439364" y="3621433"/>
-                  </a:lnTo>
-                  <a:lnTo>
-                    <a:pt x="6361730" y="3618678"/>
-                  </a:lnTo>
-                  <a:lnTo>
-                    <a:pt x="6284096" y="3615679"/>
-                  </a:lnTo>
-                  <a:lnTo>
-                    <a:pt x="6206462" y="3612415"/>
-                  </a:lnTo>
-                  <a:lnTo>
-                    <a:pt x="6128827" y="3608864"/>
-                  </a:lnTo>
-                  <a:lnTo>
-                    <a:pt x="6051193" y="3604999"/>
-                  </a:lnTo>
-                  <a:lnTo>
-                    <a:pt x="5973559" y="3600792"/>
-                  </a:lnTo>
-                  <a:lnTo>
-                    <a:pt x="5895925" y="3596214"/>
-                  </a:lnTo>
-                  <a:lnTo>
-                    <a:pt x="5818291" y="3591232"/>
-                  </a:lnTo>
-                  <a:lnTo>
-                    <a:pt x="5740657" y="3585811"/>
-                  </a:lnTo>
-                  <a:lnTo>
-                    <a:pt x="5663023" y="3579910"/>
-                  </a:lnTo>
-                  <a:lnTo>
-                    <a:pt x="5585389" y="3573489"/>
-                  </a:lnTo>
-                  <a:lnTo>
-                    <a:pt x="5507755" y="3566500"/>
-                  </a:lnTo>
-                  <a:lnTo>
-                    <a:pt x="5430121" y="3558895"/>
-                  </a:lnTo>
-                  <a:lnTo>
-                    <a:pt x="5352487" y="3550618"/>
-                  </a:lnTo>
-                  <a:lnTo>
-                    <a:pt x="5274853" y="3541611"/>
-                  </a:lnTo>
-                  <a:lnTo>
-                    <a:pt x="5197219" y="3531808"/>
-                  </a:lnTo>
-                  <a:lnTo>
-                    <a:pt x="5119585" y="3521140"/>
-                  </a:lnTo>
-                  <a:lnTo>
-                    <a:pt x="5041951" y="3509529"/>
-                  </a:lnTo>
-                  <a:lnTo>
-                    <a:pt x="4964317" y="3496894"/>
-                  </a:lnTo>
-                  <a:lnTo>
-                    <a:pt x="4886683" y="3483144"/>
-                  </a:lnTo>
-                  <a:lnTo>
-                    <a:pt x="4809049" y="3468179"/>
-                  </a:lnTo>
-                  <a:lnTo>
-                    <a:pt x="4731415" y="3451893"/>
-                  </a:lnTo>
-                  <a:lnTo>
-                    <a:pt x="4653781" y="3434169"/>
-                  </a:lnTo>
-                  <a:lnTo>
-                    <a:pt x="4576147" y="3414881"/>
-                  </a:lnTo>
-                  <a:lnTo>
-                    <a:pt x="4498513" y="3393889"/>
-                  </a:lnTo>
-                  <a:lnTo>
-                    <a:pt x="4420879" y="3371044"/>
-                  </a:lnTo>
-                  <a:lnTo>
-                    <a:pt x="4343244" y="3346183"/>
-                  </a:lnTo>
-                  <a:lnTo>
-                    <a:pt x="4265610" y="3319126"/>
-                  </a:lnTo>
-                  <a:lnTo>
-                    <a:pt x="4187976" y="3289681"/>
-                  </a:lnTo>
-                  <a:lnTo>
-                    <a:pt x="4110342" y="3257636"/>
-                  </a:lnTo>
-                  <a:lnTo>
-                    <a:pt x="4032708" y="3222762"/>
-                  </a:lnTo>
-                  <a:lnTo>
-                    <a:pt x="3955074" y="3184808"/>
-                  </a:lnTo>
-                  <a:lnTo>
-                    <a:pt x="3877440" y="3143504"/>
-                  </a:lnTo>
-                  <a:lnTo>
-                    <a:pt x="3799806" y="3098554"/>
-                  </a:lnTo>
-                  <a:lnTo>
-                    <a:pt x="3722172" y="3049635"/>
-                  </a:lnTo>
-                  <a:lnTo>
-                    <a:pt x="3644538" y="2996397"/>
-                  </a:lnTo>
-                  <a:lnTo>
-                    <a:pt x="3566904" y="2938458"/>
-                  </a:lnTo>
-                  <a:lnTo>
-                    <a:pt x="3489270" y="2875405"/>
-                  </a:lnTo>
-                  <a:lnTo>
-                    <a:pt x="3411636" y="2806784"/>
-                  </a:lnTo>
-                  <a:lnTo>
-                    <a:pt x="3334002" y="2775544"/>
-                  </a:lnTo>
-                  <a:lnTo>
-                    <a:pt x="3256368" y="2764377"/>
-                  </a:lnTo>
-                  <a:lnTo>
-                    <a:pt x="3178734" y="2753069"/>
-                  </a:lnTo>
-                  <a:lnTo>
-                    <a:pt x="3101100" y="2741616"/>
-                  </a:lnTo>
-                  <a:lnTo>
-                    <a:pt x="3023466" y="2730018"/>
-                  </a:lnTo>
-                  <a:lnTo>
-                    <a:pt x="2945832" y="2718272"/>
-                  </a:lnTo>
-                  <a:lnTo>
-                    <a:pt x="2868198" y="2706376"/>
-                  </a:lnTo>
-                  <a:lnTo>
-                    <a:pt x="2790564" y="2694329"/>
-                  </a:lnTo>
-                  <a:lnTo>
-                    <a:pt x="2712930" y="2682129"/>
-                  </a:lnTo>
-                  <a:lnTo>
-                    <a:pt x="2635295" y="2669773"/>
-                  </a:lnTo>
-                  <a:lnTo>
-                    <a:pt x="2557661" y="2657260"/>
-                  </a:lnTo>
-                  <a:lnTo>
-                    <a:pt x="2480027" y="2644588"/>
-                  </a:lnTo>
-                  <a:lnTo>
-                    <a:pt x="2402393" y="2631754"/>
-                  </a:lnTo>
-                  <a:lnTo>
-                    <a:pt x="2324759" y="2618757"/>
-                  </a:lnTo>
-                  <a:lnTo>
-                    <a:pt x="2247125" y="2605595"/>
-                  </a:lnTo>
-                  <a:lnTo>
-                    <a:pt x="2169491" y="2592264"/>
-                  </a:lnTo>
-                  <a:lnTo>
-                    <a:pt x="2091857" y="2578765"/>
-                  </a:lnTo>
-                  <a:lnTo>
-                    <a:pt x="2014223" y="2565093"/>
-                  </a:lnTo>
-                  <a:lnTo>
-                    <a:pt x="1936589" y="2551247"/>
-                  </a:lnTo>
-                  <a:lnTo>
-                    <a:pt x="1858955" y="2537225"/>
-                  </a:lnTo>
-                  <a:lnTo>
-                    <a:pt x="1781321" y="2523025"/>
-                  </a:lnTo>
-                  <a:lnTo>
-                    <a:pt x="1703687" y="2508644"/>
-                  </a:lnTo>
-                  <a:lnTo>
-                    <a:pt x="1626053" y="2494079"/>
-                  </a:lnTo>
-                  <a:lnTo>
-                    <a:pt x="1548419" y="2479329"/>
-                  </a:lnTo>
-                  <a:lnTo>
-                    <a:pt x="1470785" y="2464392"/>
-                  </a:lnTo>
-                  <a:lnTo>
-                    <a:pt x="1393151" y="2449264"/>
-                  </a:lnTo>
-                  <a:lnTo>
-                    <a:pt x="1315517" y="2433944"/>
-                  </a:lnTo>
-                  <a:lnTo>
-                    <a:pt x="1237883" y="2418428"/>
-                  </a:lnTo>
-                  <a:lnTo>
-                    <a:pt x="1160249" y="2402715"/>
-                  </a:lnTo>
-                  <a:lnTo>
-                    <a:pt x="1082615" y="2386802"/>
-                  </a:lnTo>
-                  <a:lnTo>
-                    <a:pt x="1004981" y="2370687"/>
-                  </a:lnTo>
-                  <a:lnTo>
-                    <a:pt x="927346" y="2354366"/>
-                  </a:lnTo>
-                  <a:lnTo>
-                    <a:pt x="849712" y="2337838"/>
-                  </a:lnTo>
-                  <a:lnTo>
-                    <a:pt x="772078" y="2321099"/>
-                  </a:lnTo>
-                  <a:lnTo>
-                    <a:pt x="694444" y="2304147"/>
-                  </a:lnTo>
-                  <a:lnTo>
-                    <a:pt x="616810" y="2286979"/>
-                  </a:lnTo>
-                  <a:lnTo>
-                    <a:pt x="539176" y="2269593"/>
-                  </a:lnTo>
-                  <a:lnTo>
-                    <a:pt x="461542" y="2251985"/>
-                  </a:lnTo>
-                  <a:lnTo>
-                    <a:pt x="383908" y="2234153"/>
-                  </a:lnTo>
-                  <a:lnTo>
-                    <a:pt x="306274" y="2216094"/>
-                  </a:lnTo>
-                  <a:lnTo>
-                    <a:pt x="228640" y="2197805"/>
-                  </a:lnTo>
-                  <a:lnTo>
-                    <a:pt x="151006" y="2179283"/>
-                  </a:lnTo>
-                  <a:lnTo>
-                    <a:pt x="73372" y="2160526"/>
-                  </a:lnTo>
-                  <a:lnTo>
-                    <a:pt x="0" y="2142572"/>
-                  </a:lnTo>
-                  <a:lnTo>
-                    <a:pt x="0" y="0"/>
+                    <a:pt x="1858955" y="37625"/>
+                  </a:lnTo>
+                  <a:lnTo>
+                    <a:pt x="1936589" y="290187"/>
+                  </a:lnTo>
+                  <a:lnTo>
+                    <a:pt x="2014223" y="525103"/>
+                  </a:lnTo>
+                  <a:lnTo>
+                    <a:pt x="2091857" y="743608"/>
+                  </a:lnTo>
+                  <a:lnTo>
+                    <a:pt x="2169491" y="946846"/>
+                  </a:lnTo>
+                  <a:lnTo>
+                    <a:pt x="2247125" y="1135886"/>
+                  </a:lnTo>
+                  <a:lnTo>
+                    <a:pt x="2324759" y="1311718"/>
+                  </a:lnTo>
+                  <a:lnTo>
+                    <a:pt x="2402393" y="1475266"/>
+                  </a:lnTo>
+                  <a:lnTo>
+                    <a:pt x="2480027" y="1627387"/>
+                  </a:lnTo>
+                  <a:lnTo>
+                    <a:pt x="2557661" y="1768881"/>
+                  </a:lnTo>
+                  <a:lnTo>
+                    <a:pt x="2635295" y="1900489"/>
+                  </a:lnTo>
+                  <a:lnTo>
+                    <a:pt x="2712930" y="2022902"/>
+                  </a:lnTo>
+                  <a:lnTo>
+                    <a:pt x="2790564" y="2136764"/>
+                  </a:lnTo>
+                  <a:lnTo>
+                    <a:pt x="2868198" y="2242670"/>
+                  </a:lnTo>
+                  <a:lnTo>
+                    <a:pt x="2945832" y="2341177"/>
+                  </a:lnTo>
+                  <a:lnTo>
+                    <a:pt x="3023466" y="2432802"/>
+                  </a:lnTo>
+                  <a:lnTo>
+                    <a:pt x="3101100" y="2518026"/>
+                  </a:lnTo>
+                  <a:lnTo>
+                    <a:pt x="3178734" y="2597295"/>
+                  </a:lnTo>
+                  <a:lnTo>
+                    <a:pt x="3256368" y="2671027"/>
+                  </a:lnTo>
+                  <a:lnTo>
+                    <a:pt x="3334002" y="2739607"/>
+                  </a:lnTo>
+                  <a:lnTo>
+                    <a:pt x="3411636" y="2784335"/>
+                  </a:lnTo>
+                  <a:lnTo>
+                    <a:pt x="3489270" y="2788491"/>
+                  </a:lnTo>
+                  <a:lnTo>
+                    <a:pt x="3566904" y="2792627"/>
+                  </a:lnTo>
+                  <a:lnTo>
+                    <a:pt x="3644538" y="2796743"/>
+                  </a:lnTo>
+                  <a:lnTo>
+                    <a:pt x="3722172" y="2800840"/>
+                  </a:lnTo>
+                  <a:lnTo>
+                    <a:pt x="3799806" y="2804917"/>
+                  </a:lnTo>
+                  <a:lnTo>
+                    <a:pt x="3877440" y="2808975"/>
+                  </a:lnTo>
+                  <a:lnTo>
+                    <a:pt x="3955074" y="2813013"/>
+                  </a:lnTo>
+                  <a:lnTo>
+                    <a:pt x="4032708" y="2817032"/>
+                  </a:lnTo>
+                  <a:lnTo>
+                    <a:pt x="4110342" y="2821031"/>
+                  </a:lnTo>
+                  <a:lnTo>
+                    <a:pt x="4187976" y="2825012"/>
+                  </a:lnTo>
+                  <a:lnTo>
+                    <a:pt x="4265610" y="2828973"/>
+                  </a:lnTo>
+                  <a:lnTo>
+                    <a:pt x="4343244" y="2832916"/>
+                  </a:lnTo>
+                  <a:lnTo>
+                    <a:pt x="4420879" y="2836839"/>
+                  </a:lnTo>
+                  <a:lnTo>
+                    <a:pt x="4498513" y="2840744"/>
+                  </a:lnTo>
+                  <a:lnTo>
+                    <a:pt x="4576147" y="2844630"/>
+                  </a:lnTo>
+                  <a:lnTo>
+                    <a:pt x="4653781" y="2848498"/>
+                  </a:lnTo>
+                  <a:lnTo>
+                    <a:pt x="4731415" y="2852347"/>
+                  </a:lnTo>
+                  <a:lnTo>
+                    <a:pt x="4809049" y="2856177"/>
+                  </a:lnTo>
+                  <a:lnTo>
+                    <a:pt x="4886683" y="2859990"/>
+                  </a:lnTo>
+                  <a:lnTo>
+                    <a:pt x="4964317" y="2863784"/>
+                  </a:lnTo>
+                  <a:lnTo>
+                    <a:pt x="5041951" y="2867559"/>
+                  </a:lnTo>
+                  <a:lnTo>
+                    <a:pt x="5119585" y="2871317"/>
+                  </a:lnTo>
+                  <a:lnTo>
+                    <a:pt x="5197219" y="2875057"/>
+                  </a:lnTo>
+                  <a:lnTo>
+                    <a:pt x="5274853" y="2878779"/>
+                  </a:lnTo>
+                  <a:lnTo>
+                    <a:pt x="5352487" y="2882483"/>
+                  </a:lnTo>
+                  <a:lnTo>
+                    <a:pt x="5430121" y="2886169"/>
+                  </a:lnTo>
+                  <a:lnTo>
+                    <a:pt x="5507755" y="2889838"/>
+                  </a:lnTo>
+                  <a:lnTo>
+                    <a:pt x="5585389" y="2893489"/>
+                  </a:lnTo>
+                  <a:lnTo>
+                    <a:pt x="5663023" y="2897123"/>
+                  </a:lnTo>
+                  <a:lnTo>
+                    <a:pt x="5740657" y="2900739"/>
+                  </a:lnTo>
+                  <a:lnTo>
+                    <a:pt x="5818291" y="2904338"/>
+                  </a:lnTo>
+                  <a:lnTo>
+                    <a:pt x="5895925" y="2907920"/>
+                  </a:lnTo>
+                  <a:lnTo>
+                    <a:pt x="5973559" y="2911484"/>
+                  </a:lnTo>
+                  <a:lnTo>
+                    <a:pt x="6051193" y="2915032"/>
+                  </a:lnTo>
+                  <a:lnTo>
+                    <a:pt x="6128827" y="2918562"/>
+                  </a:lnTo>
+                  <a:lnTo>
+                    <a:pt x="6206462" y="2922076"/>
+                  </a:lnTo>
+                  <a:lnTo>
+                    <a:pt x="6284096" y="2925573"/>
+                  </a:lnTo>
+                  <a:lnTo>
+                    <a:pt x="6361730" y="2929053"/>
+                  </a:lnTo>
+                  <a:lnTo>
+                    <a:pt x="6439364" y="2932516"/>
+                  </a:lnTo>
+                  <a:lnTo>
+                    <a:pt x="6516998" y="2935963"/>
+                  </a:lnTo>
+                  <a:lnTo>
+                    <a:pt x="6594632" y="2939393"/>
+                  </a:lnTo>
+                  <a:lnTo>
+                    <a:pt x="6672266" y="2942807"/>
+                  </a:lnTo>
+                  <a:lnTo>
+                    <a:pt x="6749900" y="2946205"/>
+                  </a:lnTo>
+                  <a:lnTo>
+                    <a:pt x="6827534" y="2949586"/>
+                  </a:lnTo>
+                  <a:lnTo>
+                    <a:pt x="6905168" y="2952951"/>
+                  </a:lnTo>
+                  <a:lnTo>
+                    <a:pt x="6982802" y="2956300"/>
+                  </a:lnTo>
+                  <a:lnTo>
+                    <a:pt x="7060436" y="2959633"/>
+                  </a:lnTo>
+                  <a:lnTo>
+                    <a:pt x="7138070" y="2962951"/>
+                  </a:lnTo>
+                  <a:lnTo>
+                    <a:pt x="7215704" y="2966252"/>
+                  </a:lnTo>
+                  <a:lnTo>
+                    <a:pt x="7293338" y="2969537"/>
+                  </a:lnTo>
+                  <a:lnTo>
+                    <a:pt x="7370972" y="2972807"/>
+                  </a:lnTo>
+                  <a:lnTo>
+                    <a:pt x="7370972" y="3631514"/>
+                  </a:lnTo>
+                  <a:lnTo>
+                    <a:pt x="7293338" y="3629927"/>
+                  </a:lnTo>
+                  <a:lnTo>
+                    <a:pt x="7215704" y="3628220"/>
+                  </a:lnTo>
+                  <a:lnTo>
+                    <a:pt x="7138070" y="3626386"/>
+                  </a:lnTo>
+                  <a:lnTo>
+                    <a:pt x="7060436" y="3624414"/>
+                  </a:lnTo>
+                  <a:lnTo>
+                    <a:pt x="6982802" y="3622293"/>
+                  </a:lnTo>
+                  <a:lnTo>
+                    <a:pt x="6905168" y="3620014"/>
+                  </a:lnTo>
+                  <a:lnTo>
+                    <a:pt x="6827534" y="3617563"/>
+                  </a:lnTo>
+                  <a:lnTo>
+                    <a:pt x="6749900" y="3614928"/>
+                  </a:lnTo>
+                  <a:lnTo>
+                    <a:pt x="6672266" y="3612095"/>
+                  </a:lnTo>
+                  <a:lnTo>
+                    <a:pt x="6594632" y="3609049"/>
+                  </a:lnTo>
+                  <a:lnTo>
+                    <a:pt x="6516998" y="3605775"/>
+                  </a:lnTo>
+                  <a:lnTo>
+                    <a:pt x="6439364" y="3602254"/>
+                  </a:lnTo>
+                  <a:lnTo>
+                    <a:pt x="6361730" y="3598469"/>
+                  </a:lnTo>
+                  <a:lnTo>
+                    <a:pt x="6284096" y="3594400"/>
+                  </a:lnTo>
+                  <a:lnTo>
+                    <a:pt x="6206462" y="3590026"/>
+                  </a:lnTo>
+                  <a:lnTo>
+                    <a:pt x="6128827" y="3585322"/>
+                  </a:lnTo>
+                  <a:lnTo>
+                    <a:pt x="6051193" y="3580266"/>
+                  </a:lnTo>
+                  <a:lnTo>
+                    <a:pt x="5973559" y="3574829"/>
+                  </a:lnTo>
+                  <a:lnTo>
+                    <a:pt x="5895925" y="3568984"/>
+                  </a:lnTo>
+                  <a:lnTo>
+                    <a:pt x="5818291" y="3562701"/>
+                  </a:lnTo>
+                  <a:lnTo>
+                    <a:pt x="5740657" y="3555945"/>
+                  </a:lnTo>
+                  <a:lnTo>
+                    <a:pt x="5663023" y="3548682"/>
+                  </a:lnTo>
+                  <a:lnTo>
+                    <a:pt x="5585389" y="3540873"/>
+                  </a:lnTo>
+                  <a:lnTo>
+                    <a:pt x="5507755" y="3532477"/>
+                  </a:lnTo>
+                  <a:lnTo>
+                    <a:pt x="5430121" y="3523451"/>
+                  </a:lnTo>
+                  <a:lnTo>
+                    <a:pt x="5352487" y="3513748"/>
+                  </a:lnTo>
+                  <a:lnTo>
+                    <a:pt x="5274853" y="3503315"/>
+                  </a:lnTo>
+                  <a:lnTo>
+                    <a:pt x="5197219" y="3492098"/>
+                  </a:lnTo>
+                  <a:lnTo>
+                    <a:pt x="5119585" y="3480039"/>
+                  </a:lnTo>
+                  <a:lnTo>
+                    <a:pt x="5041951" y="3467075"/>
+                  </a:lnTo>
+                  <a:lnTo>
+                    <a:pt x="4964317" y="3453136"/>
+                  </a:lnTo>
+                  <a:lnTo>
+                    <a:pt x="4886683" y="3438151"/>
+                  </a:lnTo>
+                  <a:lnTo>
+                    <a:pt x="4809049" y="3422040"/>
+                  </a:lnTo>
+                  <a:lnTo>
+                    <a:pt x="4731415" y="3404719"/>
+                  </a:lnTo>
+                  <a:lnTo>
+                    <a:pt x="4653781" y="3386097"/>
+                  </a:lnTo>
+                  <a:lnTo>
+                    <a:pt x="4576147" y="3366076"/>
+                  </a:lnTo>
+                  <a:lnTo>
+                    <a:pt x="4498513" y="3344551"/>
+                  </a:lnTo>
+                  <a:lnTo>
+                    <a:pt x="4420879" y="3321409"/>
+                  </a:lnTo>
+                  <a:lnTo>
+                    <a:pt x="4343244" y="3296530"/>
+                  </a:lnTo>
+                  <a:lnTo>
+                    <a:pt x="4265610" y="3269781"/>
+                  </a:lnTo>
+                  <a:lnTo>
+                    <a:pt x="4187976" y="3241024"/>
+                  </a:lnTo>
+                  <a:lnTo>
+                    <a:pt x="4110342" y="3210106"/>
+                  </a:lnTo>
+                  <a:lnTo>
+                    <a:pt x="4032708" y="3176866"/>
+                  </a:lnTo>
+                  <a:lnTo>
+                    <a:pt x="3955074" y="3141129"/>
+                  </a:lnTo>
+                  <a:lnTo>
+                    <a:pt x="3877440" y="3102708"/>
+                  </a:lnTo>
+                  <a:lnTo>
+                    <a:pt x="3799806" y="3061401"/>
+                  </a:lnTo>
+                  <a:lnTo>
+                    <a:pt x="3722172" y="3016992"/>
+                  </a:lnTo>
+                  <a:lnTo>
+                    <a:pt x="3644538" y="2969247"/>
+                  </a:lnTo>
+                  <a:lnTo>
+                    <a:pt x="3566904" y="2917915"/>
+                  </a:lnTo>
+                  <a:lnTo>
+                    <a:pt x="3489270" y="2862728"/>
+                  </a:lnTo>
+                  <a:lnTo>
+                    <a:pt x="3411636" y="2803396"/>
+                  </a:lnTo>
+                  <a:lnTo>
+                    <a:pt x="3334002" y="2780159"/>
+                  </a:lnTo>
+                  <a:lnTo>
+                    <a:pt x="3256368" y="2775962"/>
+                  </a:lnTo>
+                  <a:lnTo>
+                    <a:pt x="3178734" y="2771746"/>
+                  </a:lnTo>
+                  <a:lnTo>
+                    <a:pt x="3101100" y="2767509"/>
+                  </a:lnTo>
+                  <a:lnTo>
+                    <a:pt x="3023466" y="2763252"/>
+                  </a:lnTo>
+                  <a:lnTo>
+                    <a:pt x="2945832" y="2758975"/>
+                  </a:lnTo>
+                  <a:lnTo>
+                    <a:pt x="2868198" y="2754677"/>
+                  </a:lnTo>
+                  <a:lnTo>
+                    <a:pt x="2790564" y="2750358"/>
+                  </a:lnTo>
+                  <a:lnTo>
+                    <a:pt x="2712930" y="2746019"/>
+                  </a:lnTo>
+                  <a:lnTo>
+                    <a:pt x="2635295" y="2741658"/>
+                  </a:lnTo>
+                  <a:lnTo>
+                    <a:pt x="2557661" y="2737277"/>
+                  </a:lnTo>
+                  <a:lnTo>
+                    <a:pt x="2480027" y="2732874"/>
+                  </a:lnTo>
+                  <a:lnTo>
+                    <a:pt x="2402393" y="2728451"/>
+                  </a:lnTo>
+                  <a:lnTo>
+                    <a:pt x="2324759" y="2724006"/>
+                  </a:lnTo>
+                  <a:lnTo>
+                    <a:pt x="2247125" y="2719540"/>
+                  </a:lnTo>
+                  <a:lnTo>
+                    <a:pt x="2169491" y="2715052"/>
+                  </a:lnTo>
+                  <a:lnTo>
+                    <a:pt x="2091857" y="2710543"/>
+                  </a:lnTo>
+                  <a:lnTo>
+                    <a:pt x="2014223" y="2706012"/>
+                  </a:lnTo>
+                  <a:lnTo>
+                    <a:pt x="1936589" y="2701459"/>
+                  </a:lnTo>
+                  <a:lnTo>
+                    <a:pt x="1858955" y="2696884"/>
+                  </a:lnTo>
+                  <a:lnTo>
+                    <a:pt x="1781321" y="2692287"/>
+                  </a:lnTo>
+                  <a:lnTo>
+                    <a:pt x="1703687" y="2687669"/>
+                  </a:lnTo>
+                  <a:lnTo>
+                    <a:pt x="1626053" y="2683028"/>
+                  </a:lnTo>
+                  <a:lnTo>
+                    <a:pt x="1548419" y="2678364"/>
+                  </a:lnTo>
+                  <a:lnTo>
+                    <a:pt x="1470785" y="2673679"/>
+                  </a:lnTo>
+                  <a:lnTo>
+                    <a:pt x="1393151" y="2668970"/>
+                  </a:lnTo>
+                  <a:lnTo>
+                    <a:pt x="1315517" y="2664239"/>
+                  </a:lnTo>
+                  <a:lnTo>
+                    <a:pt x="1237883" y="2659486"/>
+                  </a:lnTo>
+                  <a:lnTo>
+                    <a:pt x="1160249" y="2654709"/>
+                  </a:lnTo>
+                  <a:lnTo>
+                    <a:pt x="1082615" y="2649910"/>
+                  </a:lnTo>
+                  <a:lnTo>
+                    <a:pt x="1004981" y="2645087"/>
+                  </a:lnTo>
+                  <a:lnTo>
+                    <a:pt x="927346" y="2640241"/>
+                  </a:lnTo>
+                  <a:lnTo>
+                    <a:pt x="849712" y="2635372"/>
+                  </a:lnTo>
+                  <a:lnTo>
+                    <a:pt x="772078" y="2630479"/>
+                  </a:lnTo>
+                  <a:lnTo>
+                    <a:pt x="694444" y="2625563"/>
+                  </a:lnTo>
+                  <a:lnTo>
+                    <a:pt x="616810" y="2620624"/>
+                  </a:lnTo>
+                  <a:lnTo>
+                    <a:pt x="539176" y="2615660"/>
+                  </a:lnTo>
+                  <a:lnTo>
+                    <a:pt x="461542" y="2610673"/>
+                  </a:lnTo>
+                  <a:lnTo>
+                    <a:pt x="383908" y="2605662"/>
+                  </a:lnTo>
+                  <a:lnTo>
+                    <a:pt x="306274" y="2600626"/>
+                  </a:lnTo>
+                  <a:lnTo>
+                    <a:pt x="228640" y="2595567"/>
+                  </a:lnTo>
+                  <a:lnTo>
+                    <a:pt x="151006" y="2590483"/>
+                  </a:lnTo>
+                  <a:lnTo>
+                    <a:pt x="73372" y="2585374"/>
+                  </a:lnTo>
+                  <a:lnTo>
+                    <a:pt x="0" y="2580523"/>
                   </a:lnTo>
                   <a:close/>
                 </a:path>
@@ -3534,222 +3540,231 @@
           </p:nvSpPr>
           <p:spPr>
             <a:xfrm>
-              <a:off x="2887508" y="1896563"/>
-              <a:ext cx="5300981" cy="3198332"/>
+              <a:off x="2665715" y="1896563"/>
+              <a:ext cx="5522774" cy="2972807"/>
             </a:xfrm>
             <a:custGeom>
               <a:avLst/>
               <a:pathLst>
-                <a:path w="5300981" h="3198332">
+                <a:path w="5522774" h="2972807">
                   <a:moveTo>
                     <a:pt x="0" y="0"/>
                   </a:moveTo>
                   <a:lnTo>
-                    <a:pt x="21866" y="88627"/>
-                  </a:lnTo>
-                  <a:lnTo>
-                    <a:pt x="99500" y="377759"/>
-                  </a:lnTo>
-                  <a:lnTo>
-                    <a:pt x="177134" y="643434"/>
-                  </a:lnTo>
-                  <a:lnTo>
-                    <a:pt x="254768" y="887557"/>
-                  </a:lnTo>
-                  <a:lnTo>
-                    <a:pt x="332402" y="1111875"/>
-                  </a:lnTo>
-                  <a:lnTo>
-                    <a:pt x="410036" y="1317995"/>
-                  </a:lnTo>
-                  <a:lnTo>
-                    <a:pt x="487670" y="1507393"/>
-                  </a:lnTo>
-                  <a:lnTo>
-                    <a:pt x="565305" y="1681427"/>
-                  </a:lnTo>
-                  <a:lnTo>
-                    <a:pt x="642939" y="1841342"/>
-                  </a:lnTo>
-                  <a:lnTo>
-                    <a:pt x="720573" y="1988284"/>
-                  </a:lnTo>
-                  <a:lnTo>
-                    <a:pt x="798207" y="2123306"/>
-                  </a:lnTo>
-                  <a:lnTo>
-                    <a:pt x="875841" y="2247373"/>
-                  </a:lnTo>
-                  <a:lnTo>
-                    <a:pt x="953475" y="2361376"/>
-                  </a:lnTo>
-                  <a:lnTo>
-                    <a:pt x="1031109" y="2466130"/>
-                  </a:lnTo>
-                  <a:lnTo>
-                    <a:pt x="1108743" y="2562386"/>
-                  </a:lnTo>
-                  <a:lnTo>
-                    <a:pt x="1186377" y="2650834"/>
-                  </a:lnTo>
-                  <a:lnTo>
-                    <a:pt x="1264011" y="2732105"/>
-                  </a:lnTo>
-                  <a:lnTo>
-                    <a:pt x="1341645" y="2786570"/>
-                  </a:lnTo>
-                  <a:lnTo>
-                    <a:pt x="1419279" y="2797457"/>
-                  </a:lnTo>
-                  <a:lnTo>
-                    <a:pt x="1496913" y="2808208"/>
-                  </a:lnTo>
-                  <a:lnTo>
-                    <a:pt x="1574547" y="2818823"/>
-                  </a:lnTo>
-                  <a:lnTo>
-                    <a:pt x="1652181" y="2829305"/>
-                  </a:lnTo>
-                  <a:lnTo>
-                    <a:pt x="1729815" y="2839656"/>
-                  </a:lnTo>
-                  <a:lnTo>
-                    <a:pt x="1807449" y="2849876"/>
-                  </a:lnTo>
-                  <a:lnTo>
-                    <a:pt x="1885083" y="2859967"/>
-                  </a:lnTo>
-                  <a:lnTo>
-                    <a:pt x="1962717" y="2869932"/>
-                  </a:lnTo>
-                  <a:lnTo>
-                    <a:pt x="2040351" y="2879772"/>
-                  </a:lnTo>
-                  <a:lnTo>
-                    <a:pt x="2117985" y="2889487"/>
-                  </a:lnTo>
-                  <a:lnTo>
-                    <a:pt x="2195619" y="2899081"/>
-                  </a:lnTo>
-                  <a:lnTo>
-                    <a:pt x="2273254" y="2908554"/>
-                  </a:lnTo>
-                  <a:lnTo>
-                    <a:pt x="2350888" y="2917908"/>
-                  </a:lnTo>
-                  <a:lnTo>
-                    <a:pt x="2428522" y="2927144"/>
-                  </a:lnTo>
-                  <a:lnTo>
-                    <a:pt x="2506156" y="2936265"/>
-                  </a:lnTo>
-                  <a:lnTo>
-                    <a:pt x="2583790" y="2945270"/>
-                  </a:lnTo>
-                  <a:lnTo>
-                    <a:pt x="2661424" y="2954163"/>
-                  </a:lnTo>
-                  <a:lnTo>
-                    <a:pt x="2739058" y="2962943"/>
-                  </a:lnTo>
-                  <a:lnTo>
-                    <a:pt x="2816692" y="2971614"/>
-                  </a:lnTo>
-                  <a:lnTo>
-                    <a:pt x="2894326" y="2980175"/>
-                  </a:lnTo>
-                  <a:lnTo>
-                    <a:pt x="2971960" y="2988629"/>
-                  </a:lnTo>
-                  <a:lnTo>
-                    <a:pt x="3049594" y="2996976"/>
-                  </a:lnTo>
-                  <a:lnTo>
-                    <a:pt x="3127228" y="3005218"/>
-                  </a:lnTo>
-                  <a:lnTo>
-                    <a:pt x="3204862" y="3013357"/>
-                  </a:lnTo>
-                  <a:lnTo>
-                    <a:pt x="3282496" y="3021394"/>
-                  </a:lnTo>
-                  <a:lnTo>
-                    <a:pt x="3360130" y="3029329"/>
-                  </a:lnTo>
-                  <a:lnTo>
-                    <a:pt x="3437764" y="3037165"/>
-                  </a:lnTo>
-                  <a:lnTo>
-                    <a:pt x="3515398" y="3044902"/>
-                  </a:lnTo>
-                  <a:lnTo>
-                    <a:pt x="3593032" y="3052542"/>
-                  </a:lnTo>
-                  <a:lnTo>
-                    <a:pt x="3670666" y="3060086"/>
-                  </a:lnTo>
-                  <a:lnTo>
-                    <a:pt x="3748300" y="3067535"/>
-                  </a:lnTo>
-                  <a:lnTo>
-                    <a:pt x="3825934" y="3074890"/>
-                  </a:lnTo>
-                  <a:lnTo>
-                    <a:pt x="3903568" y="3082153"/>
-                  </a:lnTo>
-                  <a:lnTo>
-                    <a:pt x="3981203" y="3089325"/>
-                  </a:lnTo>
-                  <a:lnTo>
-                    <a:pt x="4058837" y="3096407"/>
-                  </a:lnTo>
-                  <a:lnTo>
-                    <a:pt x="4136471" y="3103399"/>
-                  </a:lnTo>
-                  <a:lnTo>
-                    <a:pt x="4214105" y="3110304"/>
-                  </a:lnTo>
-                  <a:lnTo>
-                    <a:pt x="4291739" y="3117121"/>
-                  </a:lnTo>
-                  <a:lnTo>
-                    <a:pt x="4369373" y="3123853"/>
-                  </a:lnTo>
-                  <a:lnTo>
-                    <a:pt x="4447007" y="3130501"/>
-                  </a:lnTo>
-                  <a:lnTo>
-                    <a:pt x="4524641" y="3137065"/>
-                  </a:lnTo>
-                  <a:lnTo>
-                    <a:pt x="4602275" y="3143546"/>
-                  </a:lnTo>
-                  <a:lnTo>
-                    <a:pt x="4679909" y="3149946"/>
-                  </a:lnTo>
-                  <a:lnTo>
-                    <a:pt x="4757543" y="3156265"/>
-                  </a:lnTo>
-                  <a:lnTo>
-                    <a:pt x="4835177" y="3162505"/>
-                  </a:lnTo>
-                  <a:lnTo>
-                    <a:pt x="4912811" y="3168667"/>
-                  </a:lnTo>
-                  <a:lnTo>
-                    <a:pt x="4990445" y="3174751"/>
-                  </a:lnTo>
-                  <a:lnTo>
-                    <a:pt x="5068079" y="3180759"/>
-                  </a:lnTo>
-                  <a:lnTo>
-                    <a:pt x="5145713" y="3186691"/>
-                  </a:lnTo>
-                  <a:lnTo>
-                    <a:pt x="5223347" y="3192548"/>
-                  </a:lnTo>
-                  <a:lnTo>
-                    <a:pt x="5300981" y="3198332"/>
+                    <a:pt x="10757" y="37625"/>
+                  </a:lnTo>
+                  <a:lnTo>
+                    <a:pt x="88391" y="290187"/>
+                  </a:lnTo>
+                  <a:lnTo>
+                    <a:pt x="166025" y="525103"/>
+                  </a:lnTo>
+                  <a:lnTo>
+                    <a:pt x="243659" y="743608"/>
+                  </a:lnTo>
+                  <a:lnTo>
+                    <a:pt x="321293" y="946846"/>
+                  </a:lnTo>
+                  <a:lnTo>
+                    <a:pt x="398927" y="1135886"/>
+                  </a:lnTo>
+                  <a:lnTo>
+                    <a:pt x="476561" y="1311718"/>
+                  </a:lnTo>
+                  <a:lnTo>
+                    <a:pt x="554195" y="1475266"/>
+                  </a:lnTo>
+                  <a:lnTo>
+                    <a:pt x="631829" y="1627387"/>
+                  </a:lnTo>
+                  <a:lnTo>
+                    <a:pt x="709464" y="1768881"/>
+                  </a:lnTo>
+                  <a:lnTo>
+                    <a:pt x="787098" y="1900489"/>
+                  </a:lnTo>
+                  <a:lnTo>
+                    <a:pt x="864732" y="2022902"/>
+                  </a:lnTo>
+                  <a:lnTo>
+                    <a:pt x="942366" y="2136764"/>
+                  </a:lnTo>
+                  <a:lnTo>
+                    <a:pt x="1020000" y="2242670"/>
+                  </a:lnTo>
+                  <a:lnTo>
+                    <a:pt x="1097634" y="2341177"/>
+                  </a:lnTo>
+                  <a:lnTo>
+                    <a:pt x="1175268" y="2432802"/>
+                  </a:lnTo>
+                  <a:lnTo>
+                    <a:pt x="1252902" y="2518026"/>
+                  </a:lnTo>
+                  <a:lnTo>
+                    <a:pt x="1330536" y="2597295"/>
+                  </a:lnTo>
+                  <a:lnTo>
+                    <a:pt x="1408170" y="2671027"/>
+                  </a:lnTo>
+                  <a:lnTo>
+                    <a:pt x="1485804" y="2739607"/>
+                  </a:lnTo>
+                  <a:lnTo>
+                    <a:pt x="1563438" y="2784335"/>
+                  </a:lnTo>
+                  <a:lnTo>
+                    <a:pt x="1641072" y="2788491"/>
+                  </a:lnTo>
+                  <a:lnTo>
+                    <a:pt x="1718706" y="2792627"/>
+                  </a:lnTo>
+                  <a:lnTo>
+                    <a:pt x="1796340" y="2796743"/>
+                  </a:lnTo>
+                  <a:lnTo>
+                    <a:pt x="1873974" y="2800840"/>
+                  </a:lnTo>
+                  <a:lnTo>
+                    <a:pt x="1951608" y="2804917"/>
+                  </a:lnTo>
+                  <a:lnTo>
+                    <a:pt x="2029242" y="2808975"/>
+                  </a:lnTo>
+                  <a:lnTo>
+                    <a:pt x="2106876" y="2813013"/>
+                  </a:lnTo>
+                  <a:lnTo>
+                    <a:pt x="2184510" y="2817032"/>
+                  </a:lnTo>
+                  <a:lnTo>
+                    <a:pt x="2262144" y="2821031"/>
+                  </a:lnTo>
+                  <a:lnTo>
+                    <a:pt x="2339778" y="2825012"/>
+                  </a:lnTo>
+                  <a:lnTo>
+                    <a:pt x="2417413" y="2828973"/>
+                  </a:lnTo>
+                  <a:lnTo>
+                    <a:pt x="2495047" y="2832916"/>
+                  </a:lnTo>
+                  <a:lnTo>
+                    <a:pt x="2572681" y="2836839"/>
+                  </a:lnTo>
+                  <a:lnTo>
+                    <a:pt x="2650315" y="2840744"/>
+                  </a:lnTo>
+                  <a:lnTo>
+                    <a:pt x="2727949" y="2844630"/>
+                  </a:lnTo>
+                  <a:lnTo>
+                    <a:pt x="2805583" y="2848498"/>
+                  </a:lnTo>
+                  <a:lnTo>
+                    <a:pt x="2883217" y="2852347"/>
+                  </a:lnTo>
+                  <a:lnTo>
+                    <a:pt x="2960851" y="2856177"/>
+                  </a:lnTo>
+                  <a:lnTo>
+                    <a:pt x="3038485" y="2859990"/>
+                  </a:lnTo>
+                  <a:lnTo>
+                    <a:pt x="3116119" y="2863784"/>
+                  </a:lnTo>
+                  <a:lnTo>
+                    <a:pt x="3193753" y="2867559"/>
+                  </a:lnTo>
+                  <a:lnTo>
+                    <a:pt x="3271387" y="2871317"/>
+                  </a:lnTo>
+                  <a:lnTo>
+                    <a:pt x="3349021" y="2875057"/>
+                  </a:lnTo>
+                  <a:lnTo>
+                    <a:pt x="3426655" y="2878779"/>
+                  </a:lnTo>
+                  <a:lnTo>
+                    <a:pt x="3504289" y="2882483"/>
+                  </a:lnTo>
+                  <a:lnTo>
+                    <a:pt x="3581923" y="2886169"/>
+                  </a:lnTo>
+                  <a:lnTo>
+                    <a:pt x="3659557" y="2889838"/>
+                  </a:lnTo>
+                  <a:lnTo>
+                    <a:pt x="3737191" y="2893489"/>
+                  </a:lnTo>
+                  <a:lnTo>
+                    <a:pt x="3814825" y="2897123"/>
+                  </a:lnTo>
+                  <a:lnTo>
+                    <a:pt x="3892459" y="2900739"/>
+                  </a:lnTo>
+                  <a:lnTo>
+                    <a:pt x="3970093" y="2904338"/>
+                  </a:lnTo>
+                  <a:lnTo>
+                    <a:pt x="4047727" y="2907920"/>
+                  </a:lnTo>
+                  <a:lnTo>
+                    <a:pt x="4125361" y="2911484"/>
+                  </a:lnTo>
+                  <a:lnTo>
+                    <a:pt x="4202996" y="2915032"/>
+                  </a:lnTo>
+                  <a:lnTo>
+                    <a:pt x="4280630" y="2918562"/>
+                  </a:lnTo>
+                  <a:lnTo>
+                    <a:pt x="4358264" y="2922076"/>
+                  </a:lnTo>
+                  <a:lnTo>
+                    <a:pt x="4435898" y="2925573"/>
+                  </a:lnTo>
+                  <a:lnTo>
+                    <a:pt x="4513532" y="2929053"/>
+                  </a:lnTo>
+                  <a:lnTo>
+                    <a:pt x="4591166" y="2932516"/>
+                  </a:lnTo>
+                  <a:lnTo>
+                    <a:pt x="4668800" y="2935963"/>
+                  </a:lnTo>
+                  <a:lnTo>
+                    <a:pt x="4746434" y="2939393"/>
+                  </a:lnTo>
+                  <a:lnTo>
+                    <a:pt x="4824068" y="2942807"/>
+                  </a:lnTo>
+                  <a:lnTo>
+                    <a:pt x="4901702" y="2946205"/>
+                  </a:lnTo>
+                  <a:lnTo>
+                    <a:pt x="4979336" y="2949586"/>
+                  </a:lnTo>
+                  <a:lnTo>
+                    <a:pt x="5056970" y="2952951"/>
+                  </a:lnTo>
+                  <a:lnTo>
+                    <a:pt x="5134604" y="2956300"/>
+                  </a:lnTo>
+                  <a:lnTo>
+                    <a:pt x="5212238" y="2959633"/>
+                  </a:lnTo>
+                  <a:lnTo>
+                    <a:pt x="5289872" y="2962951"/>
+                  </a:lnTo>
+                  <a:lnTo>
+                    <a:pt x="5367506" y="2966252"/>
+                  </a:lnTo>
+                  <a:lnTo>
+                    <a:pt x="5445140" y="2969537"/>
+                  </a:lnTo>
+                  <a:lnTo>
+                    <a:pt x="5522774" y="2972807"/>
                   </a:lnTo>
                 </a:path>
               </a:pathLst>
@@ -3769,297 +3784,297 @@
           </p:nvSpPr>
           <p:spPr>
             <a:xfrm>
-              <a:off x="817517" y="4039136"/>
-              <a:ext cx="7370972" cy="1498763"/>
+              <a:off x="817517" y="4477086"/>
+              <a:ext cx="7370972" cy="1050990"/>
             </a:xfrm>
             <a:custGeom>
               <a:avLst/>
               <a:pathLst>
-                <a:path w="7370972" h="1498763">
+                <a:path w="7370972" h="1050990">
                   <a:moveTo>
-                    <a:pt x="7370972" y="1498763"/>
+                    <a:pt x="7370972" y="1050990"/>
                   </a:moveTo>
                   <a:lnTo>
-                    <a:pt x="7293338" y="1497764"/>
-                  </a:lnTo>
-                  <a:lnTo>
-                    <a:pt x="7215704" y="1496678"/>
-                  </a:lnTo>
-                  <a:lnTo>
-                    <a:pt x="7138070" y="1495496"/>
-                  </a:lnTo>
-                  <a:lnTo>
-                    <a:pt x="7060436" y="1494209"/>
-                  </a:lnTo>
-                  <a:lnTo>
-                    <a:pt x="6982802" y="1492808"/>
-                  </a:lnTo>
-                  <a:lnTo>
-                    <a:pt x="6905168" y="1491284"/>
-                  </a:lnTo>
-                  <a:lnTo>
-                    <a:pt x="6827534" y="1489626"/>
-                  </a:lnTo>
-                  <a:lnTo>
-                    <a:pt x="6749900" y="1487821"/>
-                  </a:lnTo>
-                  <a:lnTo>
-                    <a:pt x="6672266" y="1485856"/>
-                  </a:lnTo>
-                  <a:lnTo>
-                    <a:pt x="6594632" y="1483719"/>
-                  </a:lnTo>
-                  <a:lnTo>
-                    <a:pt x="6516998" y="1481392"/>
-                  </a:lnTo>
-                  <a:lnTo>
-                    <a:pt x="6439364" y="1478860"/>
-                  </a:lnTo>
-                  <a:lnTo>
-                    <a:pt x="6361730" y="1476105"/>
-                  </a:lnTo>
-                  <a:lnTo>
-                    <a:pt x="6284096" y="1473106"/>
-                  </a:lnTo>
-                  <a:lnTo>
-                    <a:pt x="6206462" y="1469842"/>
-                  </a:lnTo>
-                  <a:lnTo>
-                    <a:pt x="6128827" y="1466291"/>
-                  </a:lnTo>
-                  <a:lnTo>
-                    <a:pt x="6051193" y="1462426"/>
-                  </a:lnTo>
-                  <a:lnTo>
-                    <a:pt x="5973559" y="1458219"/>
-                  </a:lnTo>
-                  <a:lnTo>
-                    <a:pt x="5895925" y="1453641"/>
-                  </a:lnTo>
-                  <a:lnTo>
-                    <a:pt x="5818291" y="1448659"/>
-                  </a:lnTo>
-                  <a:lnTo>
-                    <a:pt x="5740657" y="1443238"/>
-                  </a:lnTo>
-                  <a:lnTo>
-                    <a:pt x="5663023" y="1437337"/>
-                  </a:lnTo>
-                  <a:lnTo>
-                    <a:pt x="5585389" y="1430916"/>
-                  </a:lnTo>
-                  <a:lnTo>
-                    <a:pt x="5507755" y="1423927"/>
-                  </a:lnTo>
-                  <a:lnTo>
-                    <a:pt x="5430121" y="1416322"/>
-                  </a:lnTo>
-                  <a:lnTo>
-                    <a:pt x="5352487" y="1408045"/>
-                  </a:lnTo>
-                  <a:lnTo>
-                    <a:pt x="5274853" y="1399038"/>
-                  </a:lnTo>
-                  <a:lnTo>
-                    <a:pt x="5197219" y="1389235"/>
-                  </a:lnTo>
-                  <a:lnTo>
-                    <a:pt x="5119585" y="1378567"/>
-                  </a:lnTo>
-                  <a:lnTo>
-                    <a:pt x="5041951" y="1366956"/>
-                  </a:lnTo>
-                  <a:lnTo>
-                    <a:pt x="4964317" y="1354321"/>
-                  </a:lnTo>
-                  <a:lnTo>
-                    <a:pt x="4886683" y="1340571"/>
-                  </a:lnTo>
-                  <a:lnTo>
-                    <a:pt x="4809049" y="1325606"/>
-                  </a:lnTo>
-                  <a:lnTo>
-                    <a:pt x="4731415" y="1309320"/>
-                  </a:lnTo>
-                  <a:lnTo>
-                    <a:pt x="4653781" y="1291596"/>
-                  </a:lnTo>
-                  <a:lnTo>
-                    <a:pt x="4576147" y="1272308"/>
-                  </a:lnTo>
-                  <a:lnTo>
-                    <a:pt x="4498513" y="1251316"/>
-                  </a:lnTo>
-                  <a:lnTo>
-                    <a:pt x="4420879" y="1228472"/>
-                  </a:lnTo>
-                  <a:lnTo>
-                    <a:pt x="4343244" y="1203610"/>
-                  </a:lnTo>
-                  <a:lnTo>
-                    <a:pt x="4265610" y="1176553"/>
-                  </a:lnTo>
-                  <a:lnTo>
-                    <a:pt x="4187976" y="1147108"/>
-                  </a:lnTo>
-                  <a:lnTo>
-                    <a:pt x="4110342" y="1115063"/>
-                  </a:lnTo>
-                  <a:lnTo>
-                    <a:pt x="4032708" y="1080189"/>
-                  </a:lnTo>
-                  <a:lnTo>
-                    <a:pt x="3955074" y="1042235"/>
-                  </a:lnTo>
-                  <a:lnTo>
-                    <a:pt x="3877440" y="1000932"/>
-                  </a:lnTo>
-                  <a:lnTo>
-                    <a:pt x="3799806" y="955981"/>
-                  </a:lnTo>
-                  <a:lnTo>
-                    <a:pt x="3722172" y="907062"/>
-                  </a:lnTo>
-                  <a:lnTo>
-                    <a:pt x="3644538" y="853824"/>
-                  </a:lnTo>
-                  <a:lnTo>
-                    <a:pt x="3566904" y="795885"/>
-                  </a:lnTo>
-                  <a:lnTo>
-                    <a:pt x="3489270" y="732832"/>
-                  </a:lnTo>
-                  <a:lnTo>
-                    <a:pt x="3411636" y="664211"/>
-                  </a:lnTo>
-                  <a:lnTo>
-                    <a:pt x="3334002" y="632971"/>
-                  </a:lnTo>
-                  <a:lnTo>
-                    <a:pt x="3256368" y="621804"/>
-                  </a:lnTo>
-                  <a:lnTo>
-                    <a:pt x="3178734" y="610496"/>
-                  </a:lnTo>
-                  <a:lnTo>
-                    <a:pt x="3101100" y="599043"/>
-                  </a:lnTo>
-                  <a:lnTo>
-                    <a:pt x="3023466" y="587445"/>
-                  </a:lnTo>
-                  <a:lnTo>
-                    <a:pt x="2945832" y="575699"/>
-                  </a:lnTo>
-                  <a:lnTo>
-                    <a:pt x="2868198" y="563803"/>
-                  </a:lnTo>
-                  <a:lnTo>
-                    <a:pt x="2790564" y="551756"/>
-                  </a:lnTo>
-                  <a:lnTo>
-                    <a:pt x="2712930" y="539556"/>
-                  </a:lnTo>
-                  <a:lnTo>
-                    <a:pt x="2635295" y="527200"/>
-                  </a:lnTo>
-                  <a:lnTo>
-                    <a:pt x="2557661" y="514687"/>
-                  </a:lnTo>
-                  <a:lnTo>
-                    <a:pt x="2480027" y="502015"/>
-                  </a:lnTo>
-                  <a:lnTo>
-                    <a:pt x="2402393" y="489181"/>
-                  </a:lnTo>
-                  <a:lnTo>
-                    <a:pt x="2324759" y="476184"/>
-                  </a:lnTo>
-                  <a:lnTo>
-                    <a:pt x="2247125" y="463022"/>
-                  </a:lnTo>
-                  <a:lnTo>
-                    <a:pt x="2169491" y="449692"/>
-                  </a:lnTo>
-                  <a:lnTo>
-                    <a:pt x="2091857" y="436192"/>
-                  </a:lnTo>
-                  <a:lnTo>
-                    <a:pt x="2014223" y="422520"/>
-                  </a:lnTo>
-                  <a:lnTo>
-                    <a:pt x="1936589" y="408674"/>
-                  </a:lnTo>
-                  <a:lnTo>
-                    <a:pt x="1858955" y="394652"/>
-                  </a:lnTo>
-                  <a:lnTo>
-                    <a:pt x="1781321" y="380452"/>
-                  </a:lnTo>
-                  <a:lnTo>
-                    <a:pt x="1703687" y="366071"/>
-                  </a:lnTo>
-                  <a:lnTo>
-                    <a:pt x="1626053" y="351506"/>
-                  </a:lnTo>
-                  <a:lnTo>
-                    <a:pt x="1548419" y="336756"/>
-                  </a:lnTo>
-                  <a:lnTo>
-                    <a:pt x="1470785" y="321819"/>
-                  </a:lnTo>
-                  <a:lnTo>
-                    <a:pt x="1393151" y="306691"/>
-                  </a:lnTo>
-                  <a:lnTo>
-                    <a:pt x="1315517" y="291371"/>
-                  </a:lnTo>
-                  <a:lnTo>
-                    <a:pt x="1237883" y="275855"/>
-                  </a:lnTo>
-                  <a:lnTo>
-                    <a:pt x="1160249" y="260143"/>
-                  </a:lnTo>
-                  <a:lnTo>
-                    <a:pt x="1082615" y="244230"/>
-                  </a:lnTo>
-                  <a:lnTo>
-                    <a:pt x="1004981" y="228114"/>
-                  </a:lnTo>
-                  <a:lnTo>
-                    <a:pt x="927346" y="211793"/>
-                  </a:lnTo>
-                  <a:lnTo>
-                    <a:pt x="849712" y="195265"/>
-                  </a:lnTo>
-                  <a:lnTo>
-                    <a:pt x="772078" y="178526"/>
-                  </a:lnTo>
-                  <a:lnTo>
-                    <a:pt x="694444" y="161574"/>
-                  </a:lnTo>
-                  <a:lnTo>
-                    <a:pt x="616810" y="144406"/>
-                  </a:lnTo>
-                  <a:lnTo>
-                    <a:pt x="539176" y="127020"/>
-                  </a:lnTo>
-                  <a:lnTo>
-                    <a:pt x="461542" y="109412"/>
-                  </a:lnTo>
-                  <a:lnTo>
-                    <a:pt x="383908" y="91580"/>
-                  </a:lnTo>
-                  <a:lnTo>
-                    <a:pt x="306274" y="73521"/>
-                  </a:lnTo>
-                  <a:lnTo>
-                    <a:pt x="228640" y="55232"/>
-                  </a:lnTo>
-                  <a:lnTo>
-                    <a:pt x="151006" y="36711"/>
-                  </a:lnTo>
-                  <a:lnTo>
-                    <a:pt x="73372" y="17953"/>
+                    <a:pt x="7293338" y="1049403"/>
+                  </a:lnTo>
+                  <a:lnTo>
+                    <a:pt x="7215704" y="1047697"/>
+                  </a:lnTo>
+                  <a:lnTo>
+                    <a:pt x="7138070" y="1045862"/>
+                  </a:lnTo>
+                  <a:lnTo>
+                    <a:pt x="7060436" y="1043890"/>
+                  </a:lnTo>
+                  <a:lnTo>
+                    <a:pt x="6982802" y="1041770"/>
+                  </a:lnTo>
+                  <a:lnTo>
+                    <a:pt x="6905168" y="1039490"/>
+                  </a:lnTo>
+                  <a:lnTo>
+                    <a:pt x="6827534" y="1037039"/>
+                  </a:lnTo>
+                  <a:lnTo>
+                    <a:pt x="6749900" y="1034404"/>
+                  </a:lnTo>
+                  <a:lnTo>
+                    <a:pt x="6672266" y="1031571"/>
+                  </a:lnTo>
+                  <a:lnTo>
+                    <a:pt x="6594632" y="1028526"/>
+                  </a:lnTo>
+                  <a:lnTo>
+                    <a:pt x="6516998" y="1025251"/>
+                  </a:lnTo>
+                  <a:lnTo>
+                    <a:pt x="6439364" y="1021731"/>
+                  </a:lnTo>
+                  <a:lnTo>
+                    <a:pt x="6361730" y="1017946"/>
+                  </a:lnTo>
+                  <a:lnTo>
+                    <a:pt x="6284096" y="1013877"/>
+                  </a:lnTo>
+                  <a:lnTo>
+                    <a:pt x="6206462" y="1009502"/>
+                  </a:lnTo>
+                  <a:lnTo>
+                    <a:pt x="6128827" y="1004799"/>
+                  </a:lnTo>
+                  <a:lnTo>
+                    <a:pt x="6051193" y="999742"/>
+                  </a:lnTo>
+                  <a:lnTo>
+                    <a:pt x="5973559" y="994306"/>
+                  </a:lnTo>
+                  <a:lnTo>
+                    <a:pt x="5895925" y="988461"/>
+                  </a:lnTo>
+                  <a:lnTo>
+                    <a:pt x="5818291" y="982177"/>
+                  </a:lnTo>
+                  <a:lnTo>
+                    <a:pt x="5740657" y="975421"/>
+                  </a:lnTo>
+                  <a:lnTo>
+                    <a:pt x="5663023" y="968158"/>
+                  </a:lnTo>
+                  <a:lnTo>
+                    <a:pt x="5585389" y="960349"/>
+                  </a:lnTo>
+                  <a:lnTo>
+                    <a:pt x="5507755" y="951954"/>
+                  </a:lnTo>
+                  <a:lnTo>
+                    <a:pt x="5430121" y="942928"/>
+                  </a:lnTo>
+                  <a:lnTo>
+                    <a:pt x="5352487" y="933224"/>
+                  </a:lnTo>
+                  <a:lnTo>
+                    <a:pt x="5274853" y="922791"/>
+                  </a:lnTo>
+                  <a:lnTo>
+                    <a:pt x="5197219" y="911575"/>
+                  </a:lnTo>
+                  <a:lnTo>
+                    <a:pt x="5119585" y="899516"/>
+                  </a:lnTo>
+                  <a:lnTo>
+                    <a:pt x="5041951" y="886551"/>
+                  </a:lnTo>
+                  <a:lnTo>
+                    <a:pt x="4964317" y="872613"/>
+                  </a:lnTo>
+                  <a:lnTo>
+                    <a:pt x="4886683" y="857628"/>
+                  </a:lnTo>
+                  <a:lnTo>
+                    <a:pt x="4809049" y="841517"/>
+                  </a:lnTo>
+                  <a:lnTo>
+                    <a:pt x="4731415" y="824195"/>
+                  </a:lnTo>
+                  <a:lnTo>
+                    <a:pt x="4653781" y="805573"/>
+                  </a:lnTo>
+                  <a:lnTo>
+                    <a:pt x="4576147" y="785552"/>
+                  </a:lnTo>
+                  <a:lnTo>
+                    <a:pt x="4498513" y="764028"/>
+                  </a:lnTo>
+                  <a:lnTo>
+                    <a:pt x="4420879" y="740886"/>
+                  </a:lnTo>
+                  <a:lnTo>
+                    <a:pt x="4343244" y="716006"/>
+                  </a:lnTo>
+                  <a:lnTo>
+                    <a:pt x="4265610" y="689258"/>
+                  </a:lnTo>
+                  <a:lnTo>
+                    <a:pt x="4187976" y="660500"/>
+                  </a:lnTo>
+                  <a:lnTo>
+                    <a:pt x="4110342" y="629583"/>
+                  </a:lnTo>
+                  <a:lnTo>
+                    <a:pt x="4032708" y="596343"/>
+                  </a:lnTo>
+                  <a:lnTo>
+                    <a:pt x="3955074" y="560606"/>
+                  </a:lnTo>
+                  <a:lnTo>
+                    <a:pt x="3877440" y="522185"/>
+                  </a:lnTo>
+                  <a:lnTo>
+                    <a:pt x="3799806" y="480878"/>
+                  </a:lnTo>
+                  <a:lnTo>
+                    <a:pt x="3722172" y="436469"/>
+                  </a:lnTo>
+                  <a:lnTo>
+                    <a:pt x="3644538" y="388723"/>
+                  </a:lnTo>
+                  <a:lnTo>
+                    <a:pt x="3566904" y="337392"/>
+                  </a:lnTo>
+                  <a:lnTo>
+                    <a:pt x="3489270" y="282205"/>
+                  </a:lnTo>
+                  <a:lnTo>
+                    <a:pt x="3411636" y="222872"/>
+                  </a:lnTo>
+                  <a:lnTo>
+                    <a:pt x="3334002" y="199635"/>
+                  </a:lnTo>
+                  <a:lnTo>
+                    <a:pt x="3256368" y="195439"/>
+                  </a:lnTo>
+                  <a:lnTo>
+                    <a:pt x="3178734" y="191223"/>
+                  </a:lnTo>
+                  <a:lnTo>
+                    <a:pt x="3101100" y="186986"/>
+                  </a:lnTo>
+                  <a:lnTo>
+                    <a:pt x="3023466" y="182729"/>
+                  </a:lnTo>
+                  <a:lnTo>
+                    <a:pt x="2945832" y="178451"/>
+                  </a:lnTo>
+                  <a:lnTo>
+                    <a:pt x="2868198" y="174153"/>
+                  </a:lnTo>
+                  <a:lnTo>
+                    <a:pt x="2790564" y="169835"/>
+                  </a:lnTo>
+                  <a:lnTo>
+                    <a:pt x="2712930" y="165495"/>
+                  </a:lnTo>
+                  <a:lnTo>
+                    <a:pt x="2635295" y="161135"/>
+                  </a:lnTo>
+                  <a:lnTo>
+                    <a:pt x="2557661" y="156753"/>
+                  </a:lnTo>
+                  <a:lnTo>
+                    <a:pt x="2480027" y="152351"/>
+                  </a:lnTo>
+                  <a:lnTo>
+                    <a:pt x="2402393" y="147927"/>
+                  </a:lnTo>
+                  <a:lnTo>
+                    <a:pt x="2324759" y="143483"/>
+                  </a:lnTo>
+                  <a:lnTo>
+                    <a:pt x="2247125" y="139016"/>
+                  </a:lnTo>
+                  <a:lnTo>
+                    <a:pt x="2169491" y="134529"/>
+                  </a:lnTo>
+                  <a:lnTo>
+                    <a:pt x="2091857" y="130019"/>
+                  </a:lnTo>
+                  <a:lnTo>
+                    <a:pt x="2014223" y="125488"/>
+                  </a:lnTo>
+                  <a:lnTo>
+                    <a:pt x="1936589" y="120935"/>
+                  </a:lnTo>
+                  <a:lnTo>
+                    <a:pt x="1858955" y="116361"/>
+                  </a:lnTo>
+                  <a:lnTo>
+                    <a:pt x="1781321" y="111764"/>
+                  </a:lnTo>
+                  <a:lnTo>
+                    <a:pt x="1703687" y="107145"/>
+                  </a:lnTo>
+                  <a:lnTo>
+                    <a:pt x="1626053" y="102504"/>
+                  </a:lnTo>
+                  <a:lnTo>
+                    <a:pt x="1548419" y="97841"/>
+                  </a:lnTo>
+                  <a:lnTo>
+                    <a:pt x="1470785" y="93155"/>
+                  </a:lnTo>
+                  <a:lnTo>
+                    <a:pt x="1393151" y="88447"/>
+                  </a:lnTo>
+                  <a:lnTo>
+                    <a:pt x="1315517" y="83716"/>
+                  </a:lnTo>
+                  <a:lnTo>
+                    <a:pt x="1237883" y="78962"/>
+                  </a:lnTo>
+                  <a:lnTo>
+                    <a:pt x="1160249" y="74186"/>
+                  </a:lnTo>
+                  <a:lnTo>
+                    <a:pt x="1082615" y="69386"/>
+                  </a:lnTo>
+                  <a:lnTo>
+                    <a:pt x="1004981" y="64564"/>
+                  </a:lnTo>
+                  <a:lnTo>
+                    <a:pt x="927346" y="59718"/>
+                  </a:lnTo>
+                  <a:lnTo>
+                    <a:pt x="849712" y="54849"/>
+                  </a:lnTo>
+                  <a:lnTo>
+                    <a:pt x="772078" y="49956"/>
+                  </a:lnTo>
+                  <a:lnTo>
+                    <a:pt x="694444" y="45040"/>
+                  </a:lnTo>
+                  <a:lnTo>
+                    <a:pt x="616810" y="40100"/>
+                  </a:lnTo>
+                  <a:lnTo>
+                    <a:pt x="539176" y="35137"/>
+                  </a:lnTo>
+                  <a:lnTo>
+                    <a:pt x="461542" y="30150"/>
+                  </a:lnTo>
+                  <a:lnTo>
+                    <a:pt x="383908" y="25138"/>
+                  </a:lnTo>
+                  <a:lnTo>
+                    <a:pt x="306274" y="20103"/>
+                  </a:lnTo>
+                  <a:lnTo>
+                    <a:pt x="228640" y="15043"/>
+                  </a:lnTo>
+                  <a:lnTo>
+                    <a:pt x="151006" y="9959"/>
+                  </a:lnTo>
+                  <a:lnTo>
+                    <a:pt x="73372" y="4851"/>
                   </a:lnTo>
                   <a:lnTo>
                     <a:pt x="0" y="0"/>
@@ -4082,258 +4097,282 @@
           </p:nvSpPr>
           <p:spPr>
             <a:xfrm>
-              <a:off x="1912834" y="1896563"/>
-              <a:ext cx="6275656" cy="3580969"/>
+              <a:off x="1318601" y="1896563"/>
+              <a:ext cx="6869888" cy="3532791"/>
             </a:xfrm>
             <a:custGeom>
               <a:avLst/>
               <a:pathLst>
-                <a:path w="6275656" h="3580969">
+                <a:path w="6869888" h="3532791">
                   <a:moveTo>
                     <a:pt x="0" y="0"/>
                   </a:moveTo>
                   <a:lnTo>
-                    <a:pt x="64932" y="146142"/>
-                  </a:lnTo>
-                  <a:lnTo>
-                    <a:pt x="142566" y="312576"/>
-                  </a:lnTo>
-                  <a:lnTo>
-                    <a:pt x="220200" y="471111"/>
-                  </a:lnTo>
-                  <a:lnTo>
-                    <a:pt x="297835" y="622122"/>
-                  </a:lnTo>
-                  <a:lnTo>
-                    <a:pt x="375469" y="765964"/>
-                  </a:lnTo>
-                  <a:lnTo>
-                    <a:pt x="453103" y="902979"/>
-                  </a:lnTo>
-                  <a:lnTo>
-                    <a:pt x="530737" y="1033491"/>
-                  </a:lnTo>
-                  <a:lnTo>
-                    <a:pt x="608371" y="1157808"/>
-                  </a:lnTo>
-                  <a:lnTo>
-                    <a:pt x="686005" y="1276225"/>
-                  </a:lnTo>
-                  <a:lnTo>
-                    <a:pt x="763639" y="1389020"/>
-                  </a:lnTo>
-                  <a:lnTo>
-                    <a:pt x="841273" y="1496462"/>
-                  </a:lnTo>
-                  <a:lnTo>
-                    <a:pt x="918907" y="1598805"/>
-                  </a:lnTo>
-                  <a:lnTo>
-                    <a:pt x="996541" y="1696289"/>
-                  </a:lnTo>
-                  <a:lnTo>
-                    <a:pt x="1074175" y="1789147"/>
-                  </a:lnTo>
-                  <a:lnTo>
-                    <a:pt x="1151809" y="1877597"/>
-                  </a:lnTo>
-                  <a:lnTo>
-                    <a:pt x="1229443" y="1961849"/>
-                  </a:lnTo>
-                  <a:lnTo>
-                    <a:pt x="1307077" y="2042102"/>
-                  </a:lnTo>
-                  <a:lnTo>
-                    <a:pt x="1384711" y="2118546"/>
-                  </a:lnTo>
-                  <a:lnTo>
-                    <a:pt x="1462345" y="2191361"/>
-                  </a:lnTo>
-                  <a:lnTo>
-                    <a:pt x="1539979" y="2260720"/>
-                  </a:lnTo>
-                  <a:lnTo>
-                    <a:pt x="1617613" y="2326787"/>
-                  </a:lnTo>
-                  <a:lnTo>
-                    <a:pt x="1695247" y="2389719"/>
-                  </a:lnTo>
-                  <a:lnTo>
-                    <a:pt x="1772881" y="2449663"/>
-                  </a:lnTo>
-                  <a:lnTo>
-                    <a:pt x="1850515" y="2506762"/>
-                  </a:lnTo>
-                  <a:lnTo>
-                    <a:pt x="1928149" y="2561151"/>
-                  </a:lnTo>
-                  <a:lnTo>
-                    <a:pt x="2005784" y="2612958"/>
-                  </a:lnTo>
-                  <a:lnTo>
-                    <a:pt x="2083418" y="2662306"/>
-                  </a:lnTo>
-                  <a:lnTo>
-                    <a:pt x="2161052" y="2709312"/>
-                  </a:lnTo>
-                  <a:lnTo>
-                    <a:pt x="2238686" y="2754087"/>
-                  </a:lnTo>
-                  <a:lnTo>
-                    <a:pt x="2316320" y="2796737"/>
-                  </a:lnTo>
-                  <a:lnTo>
-                    <a:pt x="2393954" y="2837362"/>
-                  </a:lnTo>
-                  <a:lnTo>
-                    <a:pt x="2471588" y="2876059"/>
-                  </a:lnTo>
-                  <a:lnTo>
-                    <a:pt x="2549222" y="2912919"/>
-                  </a:lnTo>
-                  <a:lnTo>
-                    <a:pt x="2626856" y="2948030"/>
-                  </a:lnTo>
-                  <a:lnTo>
-                    <a:pt x="2704490" y="2981474"/>
-                  </a:lnTo>
-                  <a:lnTo>
-                    <a:pt x="2782124" y="3013331"/>
-                  </a:lnTo>
-                  <a:lnTo>
-                    <a:pt x="2859758" y="3043676"/>
-                  </a:lnTo>
-                  <a:lnTo>
-                    <a:pt x="2937392" y="3072580"/>
-                  </a:lnTo>
-                  <a:lnTo>
-                    <a:pt x="3015026" y="3100113"/>
-                  </a:lnTo>
-                  <a:lnTo>
-                    <a:pt x="3092660" y="3126338"/>
-                  </a:lnTo>
-                  <a:lnTo>
-                    <a:pt x="3170294" y="3151319"/>
-                  </a:lnTo>
-                  <a:lnTo>
-                    <a:pt x="3247928" y="3175114"/>
-                  </a:lnTo>
-                  <a:lnTo>
-                    <a:pt x="3325562" y="3197780"/>
-                  </a:lnTo>
-                  <a:lnTo>
-                    <a:pt x="3403196" y="3219370"/>
-                  </a:lnTo>
-                  <a:lnTo>
-                    <a:pt x="3480830" y="3239935"/>
-                  </a:lnTo>
-                  <a:lnTo>
-                    <a:pt x="3558464" y="3259524"/>
-                  </a:lnTo>
-                  <a:lnTo>
-                    <a:pt x="3636098" y="3278183"/>
-                  </a:lnTo>
-                  <a:lnTo>
-                    <a:pt x="3713733" y="3295957"/>
-                  </a:lnTo>
-                  <a:lnTo>
-                    <a:pt x="3791367" y="3312887"/>
-                  </a:lnTo>
-                  <a:lnTo>
-                    <a:pt x="3869001" y="3329013"/>
-                  </a:lnTo>
-                  <a:lnTo>
-                    <a:pt x="3946635" y="3344374"/>
-                  </a:lnTo>
-                  <a:lnTo>
-                    <a:pt x="4024269" y="3359006"/>
-                  </a:lnTo>
-                  <a:lnTo>
-                    <a:pt x="4101903" y="3372944"/>
-                  </a:lnTo>
-                  <a:lnTo>
-                    <a:pt x="4179537" y="3386219"/>
-                  </a:lnTo>
-                  <a:lnTo>
-                    <a:pt x="4257171" y="3398865"/>
-                  </a:lnTo>
-                  <a:lnTo>
-                    <a:pt x="4334805" y="3410911"/>
-                  </a:lnTo>
-                  <a:lnTo>
-                    <a:pt x="4412439" y="3422384"/>
-                  </a:lnTo>
-                  <a:lnTo>
-                    <a:pt x="4490073" y="3433314"/>
-                  </a:lnTo>
-                  <a:lnTo>
-                    <a:pt x="4567707" y="3443724"/>
-                  </a:lnTo>
-                  <a:lnTo>
-                    <a:pt x="4645341" y="3453640"/>
-                  </a:lnTo>
-                  <a:lnTo>
-                    <a:pt x="4722975" y="3463086"/>
-                  </a:lnTo>
-                  <a:lnTo>
-                    <a:pt x="4800609" y="3472083"/>
-                  </a:lnTo>
-                  <a:lnTo>
-                    <a:pt x="4878243" y="3480653"/>
-                  </a:lnTo>
-                  <a:lnTo>
-                    <a:pt x="4955877" y="3488817"/>
-                  </a:lnTo>
-                  <a:lnTo>
-                    <a:pt x="5033511" y="3496593"/>
-                  </a:lnTo>
-                  <a:lnTo>
-                    <a:pt x="5111145" y="3504000"/>
-                  </a:lnTo>
-                  <a:lnTo>
-                    <a:pt x="5188779" y="3511055"/>
-                  </a:lnTo>
-                  <a:lnTo>
-                    <a:pt x="5266413" y="3517775"/>
-                  </a:lnTo>
-                  <a:lnTo>
-                    <a:pt x="5344047" y="3524177"/>
-                  </a:lnTo>
-                  <a:lnTo>
-                    <a:pt x="5421681" y="3530274"/>
-                  </a:lnTo>
-                  <a:lnTo>
-                    <a:pt x="5499316" y="3536083"/>
-                  </a:lnTo>
-                  <a:lnTo>
-                    <a:pt x="5576950" y="3541615"/>
-                  </a:lnTo>
-                  <a:lnTo>
-                    <a:pt x="5654584" y="3546885"/>
-                  </a:lnTo>
-                  <a:lnTo>
-                    <a:pt x="5732218" y="3551905"/>
-                  </a:lnTo>
-                  <a:lnTo>
-                    <a:pt x="5809852" y="3556686"/>
-                  </a:lnTo>
-                  <a:lnTo>
-                    <a:pt x="5887486" y="3561241"/>
-                  </a:lnTo>
-                  <a:lnTo>
-                    <a:pt x="5965120" y="3565579"/>
-                  </a:lnTo>
-                  <a:lnTo>
-                    <a:pt x="6042754" y="3569712"/>
-                  </a:lnTo>
-                  <a:lnTo>
-                    <a:pt x="6120388" y="3573648"/>
-                  </a:lnTo>
-                  <a:lnTo>
-                    <a:pt x="6198022" y="3577398"/>
-                  </a:lnTo>
-                  <a:lnTo>
-                    <a:pt x="6275656" y="3580969"/>
+                    <a:pt x="38092" y="69217"/>
+                  </a:lnTo>
+                  <a:lnTo>
+                    <a:pt x="115726" y="204941"/>
+                  </a:lnTo>
+                  <a:lnTo>
+                    <a:pt x="193360" y="335525"/>
+                  </a:lnTo>
+                  <a:lnTo>
+                    <a:pt x="270994" y="461163"/>
+                  </a:lnTo>
+                  <a:lnTo>
+                    <a:pt x="348628" y="582042"/>
+                  </a:lnTo>
+                  <a:lnTo>
+                    <a:pt x="426262" y="698343"/>
+                  </a:lnTo>
+                  <a:lnTo>
+                    <a:pt x="503897" y="810239"/>
+                  </a:lnTo>
+                  <a:lnTo>
+                    <a:pt x="581531" y="917897"/>
+                  </a:lnTo>
+                  <a:lnTo>
+                    <a:pt x="659165" y="1021477"/>
+                  </a:lnTo>
+                  <a:lnTo>
+                    <a:pt x="736799" y="1121134"/>
+                  </a:lnTo>
+                  <a:lnTo>
+                    <a:pt x="814433" y="1217016"/>
+                  </a:lnTo>
+                  <a:lnTo>
+                    <a:pt x="892067" y="1309267"/>
+                  </a:lnTo>
+                  <a:lnTo>
+                    <a:pt x="969701" y="1398024"/>
+                  </a:lnTo>
+                  <a:lnTo>
+                    <a:pt x="1047335" y="1483419"/>
+                  </a:lnTo>
+                  <a:lnTo>
+                    <a:pt x="1124969" y="1565579"/>
+                  </a:lnTo>
+                  <a:lnTo>
+                    <a:pt x="1202603" y="1644628"/>
+                  </a:lnTo>
+                  <a:lnTo>
+                    <a:pt x="1280237" y="1720683"/>
+                  </a:lnTo>
+                  <a:lnTo>
+                    <a:pt x="1357871" y="1793857"/>
+                  </a:lnTo>
+                  <a:lnTo>
+                    <a:pt x="1435505" y="1864260"/>
+                  </a:lnTo>
+                  <a:lnTo>
+                    <a:pt x="1513139" y="1931996"/>
+                  </a:lnTo>
+                  <a:lnTo>
+                    <a:pt x="1590773" y="1997166"/>
+                  </a:lnTo>
+                  <a:lnTo>
+                    <a:pt x="1668407" y="2059868"/>
+                  </a:lnTo>
+                  <a:lnTo>
+                    <a:pt x="1746041" y="2120196"/>
+                  </a:lnTo>
+                  <a:lnTo>
+                    <a:pt x="1823675" y="2178238"/>
+                  </a:lnTo>
+                  <a:lnTo>
+                    <a:pt x="1901309" y="2234082"/>
+                  </a:lnTo>
+                  <a:lnTo>
+                    <a:pt x="1978943" y="2287811"/>
+                  </a:lnTo>
+                  <a:lnTo>
+                    <a:pt x="2056577" y="2339505"/>
+                  </a:lnTo>
+                  <a:lnTo>
+                    <a:pt x="2134211" y="2389241"/>
+                  </a:lnTo>
+                  <a:lnTo>
+                    <a:pt x="2211846" y="2437093"/>
+                  </a:lnTo>
+                  <a:lnTo>
+                    <a:pt x="2289480" y="2483132"/>
+                  </a:lnTo>
+                  <a:lnTo>
+                    <a:pt x="2367114" y="2527428"/>
+                  </a:lnTo>
+                  <a:lnTo>
+                    <a:pt x="2444748" y="2570046"/>
+                  </a:lnTo>
+                  <a:lnTo>
+                    <a:pt x="2522382" y="2611050"/>
+                  </a:lnTo>
+                  <a:lnTo>
+                    <a:pt x="2600016" y="2650501"/>
+                  </a:lnTo>
+                  <a:lnTo>
+                    <a:pt x="2677650" y="2688458"/>
+                  </a:lnTo>
+                  <a:lnTo>
+                    <a:pt x="2755284" y="2724977"/>
+                  </a:lnTo>
+                  <a:lnTo>
+                    <a:pt x="2832918" y="2760113"/>
+                  </a:lnTo>
+                  <a:lnTo>
+                    <a:pt x="2910552" y="2793918"/>
+                  </a:lnTo>
+                  <a:lnTo>
+                    <a:pt x="2988186" y="2826443"/>
+                  </a:lnTo>
+                  <a:lnTo>
+                    <a:pt x="3065820" y="2857736"/>
+                  </a:lnTo>
+                  <a:lnTo>
+                    <a:pt x="3143454" y="2887843"/>
+                  </a:lnTo>
+                  <a:lnTo>
+                    <a:pt x="3221088" y="2916811"/>
+                  </a:lnTo>
+                  <a:lnTo>
+                    <a:pt x="3298722" y="2944681"/>
+                  </a:lnTo>
+                  <a:lnTo>
+                    <a:pt x="3376356" y="2971495"/>
+                  </a:lnTo>
+                  <a:lnTo>
+                    <a:pt x="3453990" y="2997294"/>
+                  </a:lnTo>
+                  <a:lnTo>
+                    <a:pt x="3531624" y="3022116"/>
+                  </a:lnTo>
+                  <a:lnTo>
+                    <a:pt x="3609258" y="3045997"/>
+                  </a:lnTo>
+                  <a:lnTo>
+                    <a:pt x="3686892" y="3068974"/>
+                  </a:lnTo>
+                  <a:lnTo>
+                    <a:pt x="3764526" y="3091081"/>
+                  </a:lnTo>
+                  <a:lnTo>
+                    <a:pt x="3842160" y="3112351"/>
+                  </a:lnTo>
+                  <a:lnTo>
+                    <a:pt x="3919794" y="3132815"/>
+                  </a:lnTo>
+                  <a:lnTo>
+                    <a:pt x="3997429" y="3152503"/>
+                  </a:lnTo>
+                  <a:lnTo>
+                    <a:pt x="4075063" y="3171447"/>
+                  </a:lnTo>
+                  <a:lnTo>
+                    <a:pt x="4152697" y="3189672"/>
+                  </a:lnTo>
+                  <a:lnTo>
+                    <a:pt x="4230331" y="3207207"/>
+                  </a:lnTo>
+                  <a:lnTo>
+                    <a:pt x="4307965" y="3224079"/>
+                  </a:lnTo>
+                  <a:lnTo>
+                    <a:pt x="4385599" y="3240311"/>
+                  </a:lnTo>
+                  <a:lnTo>
+                    <a:pt x="4463233" y="3255928"/>
+                  </a:lnTo>
+                  <a:lnTo>
+                    <a:pt x="4540867" y="3270954"/>
+                  </a:lnTo>
+                  <a:lnTo>
+                    <a:pt x="4618501" y="3285411"/>
+                  </a:lnTo>
+                  <a:lnTo>
+                    <a:pt x="4696135" y="3299320"/>
+                  </a:lnTo>
+                  <a:lnTo>
+                    <a:pt x="4773769" y="3312702"/>
+                  </a:lnTo>
+                  <a:lnTo>
+                    <a:pt x="4851403" y="3325578"/>
+                  </a:lnTo>
+                  <a:lnTo>
+                    <a:pt x="4929037" y="3337965"/>
+                  </a:lnTo>
+                  <a:lnTo>
+                    <a:pt x="5006671" y="3349884"/>
+                  </a:lnTo>
+                  <a:lnTo>
+                    <a:pt x="5084305" y="3361351"/>
+                  </a:lnTo>
+                  <a:lnTo>
+                    <a:pt x="5161939" y="3372384"/>
+                  </a:lnTo>
+                  <a:lnTo>
+                    <a:pt x="5239573" y="3382999"/>
+                  </a:lnTo>
+                  <a:lnTo>
+                    <a:pt x="5317207" y="3393212"/>
+                  </a:lnTo>
+                  <a:lnTo>
+                    <a:pt x="5394841" y="3403038"/>
+                  </a:lnTo>
+                  <a:lnTo>
+                    <a:pt x="5472475" y="3412492"/>
+                  </a:lnTo>
+                  <a:lnTo>
+                    <a:pt x="5550109" y="3421588"/>
+                  </a:lnTo>
+                  <a:lnTo>
+                    <a:pt x="5627743" y="3430339"/>
+                  </a:lnTo>
+                  <a:lnTo>
+                    <a:pt x="5705378" y="3438759"/>
+                  </a:lnTo>
+                  <a:lnTo>
+                    <a:pt x="5783012" y="3446860"/>
+                  </a:lnTo>
+                  <a:lnTo>
+                    <a:pt x="5860646" y="3454654"/>
+                  </a:lnTo>
+                  <a:lnTo>
+                    <a:pt x="5938280" y="3462153"/>
+                  </a:lnTo>
+                  <a:lnTo>
+                    <a:pt x="6015914" y="3469368"/>
+                  </a:lnTo>
+                  <a:lnTo>
+                    <a:pt x="6093548" y="3476310"/>
+                  </a:lnTo>
+                  <a:lnTo>
+                    <a:pt x="6171182" y="3482989"/>
+                  </a:lnTo>
+                  <a:lnTo>
+                    <a:pt x="6248816" y="3489414"/>
+                  </a:lnTo>
+                  <a:lnTo>
+                    <a:pt x="6326450" y="3495597"/>
+                  </a:lnTo>
+                  <a:lnTo>
+                    <a:pt x="6404084" y="3501545"/>
+                  </a:lnTo>
+                  <a:lnTo>
+                    <a:pt x="6481718" y="3507268"/>
+                  </a:lnTo>
+                  <a:lnTo>
+                    <a:pt x="6559352" y="3512774"/>
+                  </a:lnTo>
+                  <a:lnTo>
+                    <a:pt x="6636986" y="3518072"/>
+                  </a:lnTo>
+                  <a:lnTo>
+                    <a:pt x="6714620" y="3523169"/>
+                  </a:lnTo>
+                  <a:lnTo>
+                    <a:pt x="6792254" y="3528073"/>
+                  </a:lnTo>
+                  <a:lnTo>
+                    <a:pt x="6869888" y="3532791"/>
                   </a:lnTo>
                 </a:path>
               </a:pathLst>

--- a/docs/plots/carbo/jx_carbo_cox_linear_ratio_death.pptx
+++ b/docs/plots/carbo/jx_carbo_cox_linear_ratio_death.pptx
@@ -3034,7 +3034,7 @@
                     <a:pt x="2324759" y="1311718"/>
                   </a:lnTo>
                   <a:lnTo>
-                    <a:pt x="2402393" y="1475266"/>
+                    <a:pt x="2402393" y="1475265"/>
                   </a:lnTo>
                   <a:lnTo>
                     <a:pt x="2480027" y="1627387"/>
@@ -3572,7 +3572,7 @@
                     <a:pt x="476561" y="1311718"/>
                   </a:lnTo>
                   <a:lnTo>
-                    <a:pt x="554195" y="1475266"/>
+                    <a:pt x="554195" y="1475265"/>
                   </a:lnTo>
                   <a:lnTo>
                     <a:pt x="631829" y="1627387"/>
@@ -3644,7 +3644,7 @@
                     <a:pt x="2339778" y="2825012"/>
                   </a:lnTo>
                   <a:lnTo>
-                    <a:pt x="2417413" y="2828973"/>
+                    <a:pt x="2417412" y="2828973"/>
                   </a:lnTo>
                   <a:lnTo>
                     <a:pt x="2495047" y="2832916"/>
@@ -3801,7 +3801,7 @@
                     <a:pt x="7215704" y="1047697"/>
                   </a:lnTo>
                   <a:lnTo>
-                    <a:pt x="7138070" y="1045862"/>
+                    <a:pt x="7138070" y="1045863"/>
                   </a:lnTo>
                   <a:lnTo>
                     <a:pt x="7060436" y="1043890"/>
@@ -4192,7 +4192,7 @@
                     <a:pt x="2134211" y="2389241"/>
                   </a:lnTo>
                   <a:lnTo>
-                    <a:pt x="2211846" y="2437093"/>
+                    <a:pt x="2211845" y="2437093"/>
                   </a:lnTo>
                   <a:lnTo>
                     <a:pt x="2289480" y="2483132"/>

--- a/docs/plots/carbo/jx_carbo_cox_linear_ratio_death.pptx
+++ b/docs/plots/carbo/jx_carbo_cox_linear_ratio_death.pptx
@@ -2271,7 +2271,7 @@
           </p:nvSpPr>
           <p:spPr>
             <a:xfrm>
-              <a:off x="817517" y="5114368"/>
+              <a:off x="817517" y="5142518"/>
               <a:ext cx="7799693" cy="0"/>
             </a:xfrm>
             <a:custGeom>
@@ -2314,7 +2314,7 @@
           </p:nvSpPr>
           <p:spPr>
             <a:xfrm>
-              <a:off x="817517" y="4244691"/>
+              <a:off x="817517" y="4313054"/>
               <a:ext cx="7799693" cy="0"/>
             </a:xfrm>
             <a:custGeom>
@@ -2357,7 +2357,7 @@
           </p:nvSpPr>
           <p:spPr>
             <a:xfrm>
-              <a:off x="817517" y="3375014"/>
+              <a:off x="817517" y="3483591"/>
               <a:ext cx="7799693" cy="0"/>
             </a:xfrm>
             <a:custGeom>
@@ -2400,7 +2400,7 @@
           </p:nvSpPr>
           <p:spPr>
             <a:xfrm>
-              <a:off x="817517" y="2505337"/>
+              <a:off x="817517" y="2654127"/>
               <a:ext cx="7799693" cy="0"/>
             </a:xfrm>
             <a:custGeom>
@@ -2443,15 +2443,15 @@
           </p:nvSpPr>
           <p:spPr>
             <a:xfrm>
-              <a:off x="1615213" y="1896563"/>
-              <a:ext cx="0" cy="3826579"/>
+              <a:off x="1615213" y="2073503"/>
+              <a:ext cx="0" cy="3649639"/>
             </a:xfrm>
             <a:custGeom>
               <a:avLst/>
               <a:pathLst>
-                <a:path w="0" h="3826579">
+                <a:path w="0" h="3649639">
                   <a:moveTo>
-                    <a:pt x="0" y="3826579"/>
+                    <a:pt x="0" y="3649639"/>
                   </a:moveTo>
                   <a:lnTo>
                     <a:pt x="0" y="0"/>
@@ -2486,15 +2486,15 @@
           </p:nvSpPr>
           <p:spPr>
             <a:xfrm>
-              <a:off x="3387871" y="1896563"/>
-              <a:ext cx="0" cy="3826579"/>
+              <a:off x="3387871" y="2073503"/>
+              <a:ext cx="0" cy="3649639"/>
             </a:xfrm>
             <a:custGeom>
               <a:avLst/>
               <a:pathLst>
-                <a:path w="0" h="3826579">
+                <a:path w="0" h="3649639">
                   <a:moveTo>
-                    <a:pt x="0" y="3826579"/>
+                    <a:pt x="0" y="3649639"/>
                   </a:moveTo>
                   <a:lnTo>
                     <a:pt x="0" y="0"/>
@@ -2529,15 +2529,15 @@
           </p:nvSpPr>
           <p:spPr>
             <a:xfrm>
-              <a:off x="5160528" y="1896563"/>
-              <a:ext cx="0" cy="3826579"/>
+              <a:off x="5160528" y="2073503"/>
+              <a:ext cx="0" cy="3649639"/>
             </a:xfrm>
             <a:custGeom>
               <a:avLst/>
               <a:pathLst>
-                <a:path w="0" h="3826579">
+                <a:path w="0" h="3649639">
                   <a:moveTo>
-                    <a:pt x="0" y="3826579"/>
+                    <a:pt x="0" y="3649639"/>
                   </a:moveTo>
                   <a:lnTo>
                     <a:pt x="0" y="0"/>
@@ -2572,15 +2572,15 @@
           </p:nvSpPr>
           <p:spPr>
             <a:xfrm>
-              <a:off x="6933186" y="1896563"/>
-              <a:ext cx="0" cy="3826579"/>
+              <a:off x="6933186" y="2073503"/>
+              <a:ext cx="0" cy="3649639"/>
             </a:xfrm>
             <a:custGeom>
               <a:avLst/>
               <a:pathLst>
-                <a:path w="0" h="3826579">
+                <a:path w="0" h="3649639">
                   <a:moveTo>
-                    <a:pt x="0" y="3826579"/>
+                    <a:pt x="0" y="3649639"/>
                   </a:moveTo>
                   <a:lnTo>
                     <a:pt x="0" y="0"/>
@@ -2615,7 +2615,7 @@
           </p:nvSpPr>
           <p:spPr>
             <a:xfrm>
-              <a:off x="817517" y="5549207"/>
+              <a:off x="817517" y="5557249"/>
               <a:ext cx="7799693" cy="0"/>
             </a:xfrm>
             <a:custGeom>
@@ -2658,7 +2658,7 @@
           </p:nvSpPr>
           <p:spPr>
             <a:xfrm>
-              <a:off x="817517" y="4679530"/>
+              <a:off x="817517" y="4727786"/>
               <a:ext cx="7799693" cy="0"/>
             </a:xfrm>
             <a:custGeom>
@@ -2701,7 +2701,7 @@
           </p:nvSpPr>
           <p:spPr>
             <a:xfrm>
-              <a:off x="817517" y="3809853"/>
+              <a:off x="817517" y="3898322"/>
               <a:ext cx="7799693" cy="0"/>
             </a:xfrm>
             <a:custGeom>
@@ -2744,7 +2744,7 @@
           </p:nvSpPr>
           <p:spPr>
             <a:xfrm>
-              <a:off x="817517" y="2940175"/>
+              <a:off x="817517" y="3068859"/>
               <a:ext cx="7799693" cy="0"/>
             </a:xfrm>
             <a:custGeom>
@@ -2787,7 +2787,7 @@
           </p:nvSpPr>
           <p:spPr>
             <a:xfrm>
-              <a:off x="817517" y="2070498"/>
+              <a:off x="817517" y="2239395"/>
               <a:ext cx="7799693" cy="0"/>
             </a:xfrm>
             <a:custGeom>
@@ -2830,15 +2830,15 @@
           </p:nvSpPr>
           <p:spPr>
             <a:xfrm>
-              <a:off x="2501542" y="1896563"/>
-              <a:ext cx="0" cy="3826579"/>
+              <a:off x="2501542" y="2073503"/>
+              <a:ext cx="0" cy="3649639"/>
             </a:xfrm>
             <a:custGeom>
               <a:avLst/>
               <a:pathLst>
-                <a:path w="0" h="3826579">
+                <a:path w="0" h="3649639">
                   <a:moveTo>
-                    <a:pt x="0" y="3826579"/>
+                    <a:pt x="0" y="3649639"/>
                   </a:moveTo>
                   <a:lnTo>
                     <a:pt x="0" y="0"/>
@@ -2873,15 +2873,15 @@
           </p:nvSpPr>
           <p:spPr>
             <a:xfrm>
-              <a:off x="4274200" y="1896563"/>
-              <a:ext cx="0" cy="3826579"/>
+              <a:off x="4274200" y="2073503"/>
+              <a:ext cx="0" cy="3649639"/>
             </a:xfrm>
             <a:custGeom>
               <a:avLst/>
               <a:pathLst>
-                <a:path w="0" h="3826579">
+                <a:path w="0" h="3649639">
                   <a:moveTo>
-                    <a:pt x="0" y="3826579"/>
+                    <a:pt x="0" y="3649639"/>
                   </a:moveTo>
                   <a:lnTo>
                     <a:pt x="0" y="0"/>
@@ -2916,15 +2916,15 @@
           </p:nvSpPr>
           <p:spPr>
             <a:xfrm>
-              <a:off x="6046857" y="1896563"/>
-              <a:ext cx="0" cy="3826579"/>
+              <a:off x="6046857" y="2073503"/>
+              <a:ext cx="0" cy="3649639"/>
             </a:xfrm>
             <a:custGeom>
               <a:avLst/>
               <a:pathLst>
-                <a:path w="0" h="3826579">
+                <a:path w="0" h="3649639">
                   <a:moveTo>
-                    <a:pt x="0" y="3826579"/>
+                    <a:pt x="0" y="3649639"/>
                   </a:moveTo>
                   <a:lnTo>
                     <a:pt x="0" y="0"/>
@@ -2959,15 +2959,15 @@
           </p:nvSpPr>
           <p:spPr>
             <a:xfrm>
-              <a:off x="7819515" y="1896563"/>
-              <a:ext cx="0" cy="3826579"/>
+              <a:off x="7819515" y="2073503"/>
+              <a:ext cx="0" cy="3649639"/>
             </a:xfrm>
             <a:custGeom>
               <a:avLst/>
               <a:pathLst>
-                <a:path w="0" h="3826579">
+                <a:path w="0" h="3649639">
                   <a:moveTo>
-                    <a:pt x="0" y="3826579"/>
+                    <a:pt x="0" y="3649639"/>
                   </a:moveTo>
                   <a:lnTo>
                     <a:pt x="0" y="0"/>
@@ -3002,519 +3002,519 @@
           </p:nvSpPr>
           <p:spPr>
             <a:xfrm>
-              <a:off x="817517" y="1896563"/>
-              <a:ext cx="7370972" cy="3631514"/>
+              <a:off x="817517" y="2073503"/>
+              <a:ext cx="7370972" cy="3463594"/>
             </a:xfrm>
             <a:custGeom>
               <a:avLst/>
               <a:pathLst>
-                <a:path w="7370972" h="3631514">
+                <a:path w="7370972" h="3463594">
                   <a:moveTo>
                     <a:pt x="1848197" y="0"/>
                   </a:moveTo>
                   <a:lnTo>
-                    <a:pt x="1858955" y="37625"/>
-                  </a:lnTo>
-                  <a:lnTo>
-                    <a:pt x="1936589" y="290187"/>
-                  </a:lnTo>
-                  <a:lnTo>
-                    <a:pt x="2014223" y="525103"/>
-                  </a:lnTo>
-                  <a:lnTo>
-                    <a:pt x="2091857" y="743608"/>
-                  </a:lnTo>
-                  <a:lnTo>
-                    <a:pt x="2169491" y="946846"/>
-                  </a:lnTo>
-                  <a:lnTo>
-                    <a:pt x="2247125" y="1135886"/>
-                  </a:lnTo>
-                  <a:lnTo>
-                    <a:pt x="2324759" y="1311718"/>
-                  </a:lnTo>
-                  <a:lnTo>
-                    <a:pt x="2402393" y="1475265"/>
-                  </a:lnTo>
-                  <a:lnTo>
-                    <a:pt x="2480027" y="1627387"/>
-                  </a:lnTo>
-                  <a:lnTo>
-                    <a:pt x="2557661" y="1768881"/>
-                  </a:lnTo>
-                  <a:lnTo>
-                    <a:pt x="2635295" y="1900489"/>
-                  </a:lnTo>
-                  <a:lnTo>
-                    <a:pt x="2712930" y="2022902"/>
-                  </a:lnTo>
-                  <a:lnTo>
-                    <a:pt x="2790564" y="2136764"/>
-                  </a:lnTo>
-                  <a:lnTo>
-                    <a:pt x="2868198" y="2242670"/>
-                  </a:lnTo>
-                  <a:lnTo>
-                    <a:pt x="2945832" y="2341177"/>
-                  </a:lnTo>
-                  <a:lnTo>
-                    <a:pt x="3023466" y="2432802"/>
-                  </a:lnTo>
-                  <a:lnTo>
-                    <a:pt x="3101100" y="2518026"/>
-                  </a:lnTo>
-                  <a:lnTo>
-                    <a:pt x="3178734" y="2597295"/>
-                  </a:lnTo>
-                  <a:lnTo>
-                    <a:pt x="3256368" y="2671027"/>
-                  </a:lnTo>
-                  <a:lnTo>
-                    <a:pt x="3334002" y="2739607"/>
-                  </a:lnTo>
-                  <a:lnTo>
-                    <a:pt x="3411636" y="2784335"/>
-                  </a:lnTo>
-                  <a:lnTo>
-                    <a:pt x="3489270" y="2788491"/>
-                  </a:lnTo>
-                  <a:lnTo>
-                    <a:pt x="3566904" y="2792627"/>
-                  </a:lnTo>
-                  <a:lnTo>
-                    <a:pt x="3644538" y="2796743"/>
-                  </a:lnTo>
-                  <a:lnTo>
-                    <a:pt x="3722172" y="2800840"/>
-                  </a:lnTo>
-                  <a:lnTo>
-                    <a:pt x="3799806" y="2804917"/>
-                  </a:lnTo>
-                  <a:lnTo>
-                    <a:pt x="3877440" y="2808975"/>
-                  </a:lnTo>
-                  <a:lnTo>
-                    <a:pt x="3955074" y="2813013"/>
-                  </a:lnTo>
-                  <a:lnTo>
-                    <a:pt x="4032708" y="2817032"/>
-                  </a:lnTo>
-                  <a:lnTo>
-                    <a:pt x="4110342" y="2821031"/>
-                  </a:lnTo>
-                  <a:lnTo>
-                    <a:pt x="4187976" y="2825012"/>
-                  </a:lnTo>
-                  <a:lnTo>
-                    <a:pt x="4265610" y="2828973"/>
-                  </a:lnTo>
-                  <a:lnTo>
-                    <a:pt x="4343244" y="2832916"/>
-                  </a:lnTo>
-                  <a:lnTo>
-                    <a:pt x="4420879" y="2836839"/>
-                  </a:lnTo>
-                  <a:lnTo>
-                    <a:pt x="4498513" y="2840744"/>
-                  </a:lnTo>
-                  <a:lnTo>
-                    <a:pt x="4576147" y="2844630"/>
-                  </a:lnTo>
-                  <a:lnTo>
-                    <a:pt x="4653781" y="2848498"/>
-                  </a:lnTo>
-                  <a:lnTo>
-                    <a:pt x="4731415" y="2852347"/>
-                  </a:lnTo>
-                  <a:lnTo>
-                    <a:pt x="4809049" y="2856177"/>
-                  </a:lnTo>
-                  <a:lnTo>
-                    <a:pt x="4886683" y="2859990"/>
-                  </a:lnTo>
-                  <a:lnTo>
-                    <a:pt x="4964317" y="2863784"/>
-                  </a:lnTo>
-                  <a:lnTo>
-                    <a:pt x="5041951" y="2867559"/>
-                  </a:lnTo>
-                  <a:lnTo>
-                    <a:pt x="5119585" y="2871317"/>
-                  </a:lnTo>
-                  <a:lnTo>
-                    <a:pt x="5197219" y="2875057"/>
-                  </a:lnTo>
-                  <a:lnTo>
-                    <a:pt x="5274853" y="2878779"/>
-                  </a:lnTo>
-                  <a:lnTo>
-                    <a:pt x="5352487" y="2882483"/>
-                  </a:lnTo>
-                  <a:lnTo>
-                    <a:pt x="5430121" y="2886169"/>
-                  </a:lnTo>
-                  <a:lnTo>
-                    <a:pt x="5507755" y="2889838"/>
-                  </a:lnTo>
-                  <a:lnTo>
-                    <a:pt x="5585389" y="2893489"/>
-                  </a:lnTo>
-                  <a:lnTo>
-                    <a:pt x="5663023" y="2897123"/>
-                  </a:lnTo>
-                  <a:lnTo>
-                    <a:pt x="5740657" y="2900739"/>
-                  </a:lnTo>
-                  <a:lnTo>
-                    <a:pt x="5818291" y="2904338"/>
-                  </a:lnTo>
-                  <a:lnTo>
-                    <a:pt x="5895925" y="2907920"/>
-                  </a:lnTo>
-                  <a:lnTo>
-                    <a:pt x="5973559" y="2911484"/>
-                  </a:lnTo>
-                  <a:lnTo>
-                    <a:pt x="6051193" y="2915032"/>
-                  </a:lnTo>
-                  <a:lnTo>
-                    <a:pt x="6128827" y="2918562"/>
-                  </a:lnTo>
-                  <a:lnTo>
-                    <a:pt x="6206462" y="2922076"/>
-                  </a:lnTo>
-                  <a:lnTo>
-                    <a:pt x="6284096" y="2925573"/>
-                  </a:lnTo>
-                  <a:lnTo>
-                    <a:pt x="6361730" y="2929053"/>
-                  </a:lnTo>
-                  <a:lnTo>
-                    <a:pt x="6439364" y="2932516"/>
-                  </a:lnTo>
-                  <a:lnTo>
-                    <a:pt x="6516998" y="2935963"/>
-                  </a:lnTo>
-                  <a:lnTo>
-                    <a:pt x="6594632" y="2939393"/>
-                  </a:lnTo>
-                  <a:lnTo>
-                    <a:pt x="6672266" y="2942807"/>
-                  </a:lnTo>
-                  <a:lnTo>
-                    <a:pt x="6749900" y="2946205"/>
-                  </a:lnTo>
-                  <a:lnTo>
-                    <a:pt x="6827534" y="2949586"/>
-                  </a:lnTo>
-                  <a:lnTo>
-                    <a:pt x="6905168" y="2952951"/>
-                  </a:lnTo>
-                  <a:lnTo>
-                    <a:pt x="6982802" y="2956300"/>
-                  </a:lnTo>
-                  <a:lnTo>
-                    <a:pt x="7060436" y="2959633"/>
-                  </a:lnTo>
-                  <a:lnTo>
-                    <a:pt x="7138070" y="2962951"/>
-                  </a:lnTo>
-                  <a:lnTo>
-                    <a:pt x="7215704" y="2966252"/>
-                  </a:lnTo>
-                  <a:lnTo>
-                    <a:pt x="7293338" y="2969537"/>
-                  </a:lnTo>
-                  <a:lnTo>
-                    <a:pt x="7370972" y="2972807"/>
-                  </a:lnTo>
-                  <a:lnTo>
-                    <a:pt x="7370972" y="3631514"/>
-                  </a:lnTo>
-                  <a:lnTo>
-                    <a:pt x="7293338" y="3629927"/>
-                  </a:lnTo>
-                  <a:lnTo>
-                    <a:pt x="7215704" y="3628220"/>
-                  </a:lnTo>
-                  <a:lnTo>
-                    <a:pt x="7138070" y="3626386"/>
-                  </a:lnTo>
-                  <a:lnTo>
-                    <a:pt x="7060436" y="3624414"/>
-                  </a:lnTo>
-                  <a:lnTo>
-                    <a:pt x="6982802" y="3622293"/>
-                  </a:lnTo>
-                  <a:lnTo>
-                    <a:pt x="6905168" y="3620014"/>
-                  </a:lnTo>
-                  <a:lnTo>
-                    <a:pt x="6827534" y="3617563"/>
-                  </a:lnTo>
-                  <a:lnTo>
-                    <a:pt x="6749900" y="3614928"/>
-                  </a:lnTo>
-                  <a:lnTo>
-                    <a:pt x="6672266" y="3612095"/>
-                  </a:lnTo>
-                  <a:lnTo>
-                    <a:pt x="6594632" y="3609049"/>
-                  </a:lnTo>
-                  <a:lnTo>
-                    <a:pt x="6516998" y="3605775"/>
-                  </a:lnTo>
-                  <a:lnTo>
-                    <a:pt x="6439364" y="3602254"/>
-                  </a:lnTo>
-                  <a:lnTo>
-                    <a:pt x="6361730" y="3598469"/>
-                  </a:lnTo>
-                  <a:lnTo>
-                    <a:pt x="6284096" y="3594400"/>
-                  </a:lnTo>
-                  <a:lnTo>
-                    <a:pt x="6206462" y="3590026"/>
-                  </a:lnTo>
-                  <a:lnTo>
-                    <a:pt x="6128827" y="3585322"/>
-                  </a:lnTo>
-                  <a:lnTo>
-                    <a:pt x="6051193" y="3580266"/>
-                  </a:lnTo>
-                  <a:lnTo>
-                    <a:pt x="5973559" y="3574829"/>
-                  </a:lnTo>
-                  <a:lnTo>
-                    <a:pt x="5895925" y="3568984"/>
-                  </a:lnTo>
-                  <a:lnTo>
-                    <a:pt x="5818291" y="3562701"/>
-                  </a:lnTo>
-                  <a:lnTo>
-                    <a:pt x="5740657" y="3555945"/>
-                  </a:lnTo>
-                  <a:lnTo>
-                    <a:pt x="5663023" y="3548682"/>
-                  </a:lnTo>
-                  <a:lnTo>
-                    <a:pt x="5585389" y="3540873"/>
-                  </a:lnTo>
-                  <a:lnTo>
-                    <a:pt x="5507755" y="3532477"/>
-                  </a:lnTo>
-                  <a:lnTo>
-                    <a:pt x="5430121" y="3523451"/>
-                  </a:lnTo>
-                  <a:lnTo>
-                    <a:pt x="5352487" y="3513748"/>
-                  </a:lnTo>
-                  <a:lnTo>
-                    <a:pt x="5274853" y="3503315"/>
-                  </a:lnTo>
-                  <a:lnTo>
-                    <a:pt x="5197219" y="3492098"/>
-                  </a:lnTo>
-                  <a:lnTo>
-                    <a:pt x="5119585" y="3480039"/>
-                  </a:lnTo>
-                  <a:lnTo>
-                    <a:pt x="5041951" y="3467075"/>
-                  </a:lnTo>
-                  <a:lnTo>
-                    <a:pt x="4964317" y="3453136"/>
-                  </a:lnTo>
-                  <a:lnTo>
-                    <a:pt x="4886683" y="3438151"/>
-                  </a:lnTo>
-                  <a:lnTo>
-                    <a:pt x="4809049" y="3422040"/>
-                  </a:lnTo>
-                  <a:lnTo>
-                    <a:pt x="4731415" y="3404719"/>
-                  </a:lnTo>
-                  <a:lnTo>
-                    <a:pt x="4653781" y="3386097"/>
-                  </a:lnTo>
-                  <a:lnTo>
-                    <a:pt x="4576147" y="3366076"/>
-                  </a:lnTo>
-                  <a:lnTo>
-                    <a:pt x="4498513" y="3344551"/>
-                  </a:lnTo>
-                  <a:lnTo>
-                    <a:pt x="4420879" y="3321409"/>
-                  </a:lnTo>
-                  <a:lnTo>
-                    <a:pt x="4343244" y="3296530"/>
-                  </a:lnTo>
-                  <a:lnTo>
-                    <a:pt x="4265610" y="3269781"/>
-                  </a:lnTo>
-                  <a:lnTo>
-                    <a:pt x="4187976" y="3241024"/>
-                  </a:lnTo>
-                  <a:lnTo>
-                    <a:pt x="4110342" y="3210106"/>
-                  </a:lnTo>
-                  <a:lnTo>
-                    <a:pt x="4032708" y="3176866"/>
-                  </a:lnTo>
-                  <a:lnTo>
-                    <a:pt x="3955074" y="3141129"/>
-                  </a:lnTo>
-                  <a:lnTo>
-                    <a:pt x="3877440" y="3102708"/>
-                  </a:lnTo>
-                  <a:lnTo>
-                    <a:pt x="3799806" y="3061401"/>
-                  </a:lnTo>
-                  <a:lnTo>
-                    <a:pt x="3722172" y="3016992"/>
-                  </a:lnTo>
-                  <a:lnTo>
-                    <a:pt x="3644538" y="2969247"/>
-                  </a:lnTo>
-                  <a:lnTo>
-                    <a:pt x="3566904" y="2917915"/>
-                  </a:lnTo>
-                  <a:lnTo>
-                    <a:pt x="3489270" y="2862728"/>
-                  </a:lnTo>
-                  <a:lnTo>
-                    <a:pt x="3411636" y="2803396"/>
-                  </a:lnTo>
-                  <a:lnTo>
-                    <a:pt x="3334002" y="2780159"/>
-                  </a:lnTo>
-                  <a:lnTo>
-                    <a:pt x="3256368" y="2775962"/>
-                  </a:lnTo>
-                  <a:lnTo>
-                    <a:pt x="3178734" y="2771746"/>
-                  </a:lnTo>
-                  <a:lnTo>
-                    <a:pt x="3101100" y="2767509"/>
-                  </a:lnTo>
-                  <a:lnTo>
-                    <a:pt x="3023466" y="2763252"/>
-                  </a:lnTo>
-                  <a:lnTo>
-                    <a:pt x="2945832" y="2758975"/>
-                  </a:lnTo>
-                  <a:lnTo>
-                    <a:pt x="2868198" y="2754677"/>
-                  </a:lnTo>
-                  <a:lnTo>
-                    <a:pt x="2790564" y="2750358"/>
-                  </a:lnTo>
-                  <a:lnTo>
-                    <a:pt x="2712930" y="2746019"/>
-                  </a:lnTo>
-                  <a:lnTo>
-                    <a:pt x="2635295" y="2741658"/>
-                  </a:lnTo>
-                  <a:lnTo>
-                    <a:pt x="2557661" y="2737277"/>
-                  </a:lnTo>
-                  <a:lnTo>
-                    <a:pt x="2480027" y="2732874"/>
-                  </a:lnTo>
-                  <a:lnTo>
-                    <a:pt x="2402393" y="2728451"/>
-                  </a:lnTo>
-                  <a:lnTo>
-                    <a:pt x="2324759" y="2724006"/>
-                  </a:lnTo>
-                  <a:lnTo>
-                    <a:pt x="2247125" y="2719540"/>
-                  </a:lnTo>
-                  <a:lnTo>
-                    <a:pt x="2169491" y="2715052"/>
-                  </a:lnTo>
-                  <a:lnTo>
-                    <a:pt x="2091857" y="2710543"/>
-                  </a:lnTo>
-                  <a:lnTo>
-                    <a:pt x="2014223" y="2706012"/>
-                  </a:lnTo>
-                  <a:lnTo>
-                    <a:pt x="1936589" y="2701459"/>
-                  </a:lnTo>
-                  <a:lnTo>
-                    <a:pt x="1858955" y="2696884"/>
-                  </a:lnTo>
-                  <a:lnTo>
-                    <a:pt x="1781321" y="2692287"/>
-                  </a:lnTo>
-                  <a:lnTo>
-                    <a:pt x="1703687" y="2687669"/>
-                  </a:lnTo>
-                  <a:lnTo>
-                    <a:pt x="1626053" y="2683028"/>
-                  </a:lnTo>
-                  <a:lnTo>
-                    <a:pt x="1548419" y="2678364"/>
-                  </a:lnTo>
-                  <a:lnTo>
-                    <a:pt x="1470785" y="2673679"/>
-                  </a:lnTo>
-                  <a:lnTo>
-                    <a:pt x="1393151" y="2668970"/>
-                  </a:lnTo>
-                  <a:lnTo>
-                    <a:pt x="1315517" y="2664239"/>
-                  </a:lnTo>
-                  <a:lnTo>
-                    <a:pt x="1237883" y="2659486"/>
-                  </a:lnTo>
-                  <a:lnTo>
-                    <a:pt x="1160249" y="2654709"/>
-                  </a:lnTo>
-                  <a:lnTo>
-                    <a:pt x="1082615" y="2649910"/>
-                  </a:lnTo>
-                  <a:lnTo>
-                    <a:pt x="1004981" y="2645087"/>
-                  </a:lnTo>
-                  <a:lnTo>
-                    <a:pt x="927346" y="2640241"/>
-                  </a:lnTo>
-                  <a:lnTo>
-                    <a:pt x="849712" y="2635372"/>
-                  </a:lnTo>
-                  <a:lnTo>
-                    <a:pt x="772078" y="2630479"/>
-                  </a:lnTo>
-                  <a:lnTo>
-                    <a:pt x="694444" y="2625563"/>
-                  </a:lnTo>
-                  <a:lnTo>
-                    <a:pt x="616810" y="2620624"/>
-                  </a:lnTo>
-                  <a:lnTo>
-                    <a:pt x="539176" y="2615660"/>
-                  </a:lnTo>
-                  <a:lnTo>
-                    <a:pt x="461542" y="2610673"/>
-                  </a:lnTo>
-                  <a:lnTo>
-                    <a:pt x="383908" y="2605662"/>
-                  </a:lnTo>
-                  <a:lnTo>
-                    <a:pt x="306274" y="2600626"/>
-                  </a:lnTo>
-                  <a:lnTo>
-                    <a:pt x="228640" y="2595567"/>
-                  </a:lnTo>
-                  <a:lnTo>
-                    <a:pt x="151006" y="2590483"/>
-                  </a:lnTo>
-                  <a:lnTo>
-                    <a:pt x="73372" y="2585374"/>
-                  </a:lnTo>
-                  <a:lnTo>
-                    <a:pt x="0" y="2580523"/>
+                    <a:pt x="1858955" y="35885"/>
+                  </a:lnTo>
+                  <a:lnTo>
+                    <a:pt x="1936589" y="276769"/>
+                  </a:lnTo>
+                  <a:lnTo>
+                    <a:pt x="2014223" y="500823"/>
+                  </a:lnTo>
+                  <a:lnTo>
+                    <a:pt x="2091857" y="709224"/>
+                  </a:lnTo>
+                  <a:lnTo>
+                    <a:pt x="2169491" y="903064"/>
+                  </a:lnTo>
+                  <a:lnTo>
+                    <a:pt x="2247125" y="1083363"/>
+                  </a:lnTo>
+                  <a:lnTo>
+                    <a:pt x="2324759" y="1251064"/>
+                  </a:lnTo>
+                  <a:lnTo>
+                    <a:pt x="2402393" y="1407050"/>
+                  </a:lnTo>
+                  <a:lnTo>
+                    <a:pt x="2480027" y="1552137"/>
+                  </a:lnTo>
+                  <a:lnTo>
+                    <a:pt x="2557661" y="1687088"/>
+                  </a:lnTo>
+                  <a:lnTo>
+                    <a:pt x="2635295" y="1812611"/>
+                  </a:lnTo>
+                  <a:lnTo>
+                    <a:pt x="2712930" y="1929364"/>
+                  </a:lnTo>
+                  <a:lnTo>
+                    <a:pt x="2790564" y="2037960"/>
+                  </a:lnTo>
+                  <a:lnTo>
+                    <a:pt x="2868198" y="2138970"/>
+                  </a:lnTo>
+                  <a:lnTo>
+                    <a:pt x="2945832" y="2232922"/>
+                  </a:lnTo>
+                  <a:lnTo>
+                    <a:pt x="3023466" y="2320310"/>
+                  </a:lnTo>
+                  <a:lnTo>
+                    <a:pt x="3101100" y="2401593"/>
+                  </a:lnTo>
+                  <a:lnTo>
+                    <a:pt x="3178734" y="2477197"/>
+                  </a:lnTo>
+                  <a:lnTo>
+                    <a:pt x="3256368" y="2547519"/>
+                  </a:lnTo>
+                  <a:lnTo>
+                    <a:pt x="3334002" y="2612929"/>
+                  </a:lnTo>
+                  <a:lnTo>
+                    <a:pt x="3411636" y="2655588"/>
+                  </a:lnTo>
+                  <a:lnTo>
+                    <a:pt x="3489270" y="2659552"/>
+                  </a:lnTo>
+                  <a:lnTo>
+                    <a:pt x="3566904" y="2663497"/>
+                  </a:lnTo>
+                  <a:lnTo>
+                    <a:pt x="3644538" y="2667423"/>
+                  </a:lnTo>
+                  <a:lnTo>
+                    <a:pt x="3722172" y="2671330"/>
+                  </a:lnTo>
+                  <a:lnTo>
+                    <a:pt x="3799806" y="2675219"/>
+                  </a:lnTo>
+                  <a:lnTo>
+                    <a:pt x="3877440" y="2679089"/>
+                  </a:lnTo>
+                  <a:lnTo>
+                    <a:pt x="3955074" y="2682940"/>
+                  </a:lnTo>
+                  <a:lnTo>
+                    <a:pt x="4032708" y="2686773"/>
+                  </a:lnTo>
+                  <a:lnTo>
+                    <a:pt x="4110342" y="2690588"/>
+                  </a:lnTo>
+                  <a:lnTo>
+                    <a:pt x="4187976" y="2694384"/>
+                  </a:lnTo>
+                  <a:lnTo>
+                    <a:pt x="4265610" y="2698163"/>
+                  </a:lnTo>
+                  <a:lnTo>
+                    <a:pt x="4343244" y="2701923"/>
+                  </a:lnTo>
+                  <a:lnTo>
+                    <a:pt x="4420879" y="2705665"/>
+                  </a:lnTo>
+                  <a:lnTo>
+                    <a:pt x="4498513" y="2709389"/>
+                  </a:lnTo>
+                  <a:lnTo>
+                    <a:pt x="4576147" y="2713096"/>
+                  </a:lnTo>
+                  <a:lnTo>
+                    <a:pt x="4653781" y="2716784"/>
+                  </a:lnTo>
+                  <a:lnTo>
+                    <a:pt x="4731415" y="2720455"/>
+                  </a:lnTo>
+                  <a:lnTo>
+                    <a:pt x="4809049" y="2724109"/>
+                  </a:lnTo>
+                  <a:lnTo>
+                    <a:pt x="4886683" y="2727745"/>
+                  </a:lnTo>
+                  <a:lnTo>
+                    <a:pt x="4964317" y="2731363"/>
+                  </a:lnTo>
+                  <a:lnTo>
+                    <a:pt x="5041951" y="2734965"/>
+                  </a:lnTo>
+                  <a:lnTo>
+                    <a:pt x="5119585" y="2738549"/>
+                  </a:lnTo>
+                  <a:lnTo>
+                    <a:pt x="5197219" y="2742115"/>
+                  </a:lnTo>
+                  <a:lnTo>
+                    <a:pt x="5274853" y="2745665"/>
+                  </a:lnTo>
+                  <a:lnTo>
+                    <a:pt x="5352487" y="2749198"/>
+                  </a:lnTo>
+                  <a:lnTo>
+                    <a:pt x="5430121" y="2752714"/>
+                  </a:lnTo>
+                  <a:lnTo>
+                    <a:pt x="5507755" y="2756213"/>
+                  </a:lnTo>
+                  <a:lnTo>
+                    <a:pt x="5585389" y="2759695"/>
+                  </a:lnTo>
+                  <a:lnTo>
+                    <a:pt x="5663023" y="2763161"/>
+                  </a:lnTo>
+                  <a:lnTo>
+                    <a:pt x="5740657" y="2766610"/>
+                  </a:lnTo>
+                  <a:lnTo>
+                    <a:pt x="5818291" y="2770042"/>
+                  </a:lnTo>
+                  <a:lnTo>
+                    <a:pt x="5895925" y="2773458"/>
+                  </a:lnTo>
+                  <a:lnTo>
+                    <a:pt x="5973559" y="2776858"/>
+                  </a:lnTo>
+                  <a:lnTo>
+                    <a:pt x="6051193" y="2780242"/>
+                  </a:lnTo>
+                  <a:lnTo>
+                    <a:pt x="6128827" y="2783609"/>
+                  </a:lnTo>
+                  <a:lnTo>
+                    <a:pt x="6206462" y="2786960"/>
+                  </a:lnTo>
+                  <a:lnTo>
+                    <a:pt x="6284096" y="2790295"/>
+                  </a:lnTo>
+                  <a:lnTo>
+                    <a:pt x="6361730" y="2793614"/>
+                  </a:lnTo>
+                  <a:lnTo>
+                    <a:pt x="6439364" y="2796918"/>
+                  </a:lnTo>
+                  <a:lnTo>
+                    <a:pt x="6516998" y="2800205"/>
+                  </a:lnTo>
+                  <a:lnTo>
+                    <a:pt x="6594632" y="2803477"/>
+                  </a:lnTo>
+                  <a:lnTo>
+                    <a:pt x="6672266" y="2806733"/>
+                  </a:lnTo>
+                  <a:lnTo>
+                    <a:pt x="6749900" y="2809973"/>
+                  </a:lnTo>
+                  <a:lnTo>
+                    <a:pt x="6827534" y="2813198"/>
+                  </a:lnTo>
+                  <a:lnTo>
+                    <a:pt x="6905168" y="2816408"/>
+                  </a:lnTo>
+                  <a:lnTo>
+                    <a:pt x="6982802" y="2819602"/>
+                  </a:lnTo>
+                  <a:lnTo>
+                    <a:pt x="7060436" y="2822781"/>
+                  </a:lnTo>
+                  <a:lnTo>
+                    <a:pt x="7138070" y="2825945"/>
+                  </a:lnTo>
+                  <a:lnTo>
+                    <a:pt x="7215704" y="2829093"/>
+                  </a:lnTo>
+                  <a:lnTo>
+                    <a:pt x="7293338" y="2832227"/>
+                  </a:lnTo>
+                  <a:lnTo>
+                    <a:pt x="7370972" y="2835345"/>
+                  </a:lnTo>
+                  <a:lnTo>
+                    <a:pt x="7370972" y="3463594"/>
+                  </a:lnTo>
+                  <a:lnTo>
+                    <a:pt x="7293338" y="3462080"/>
+                  </a:lnTo>
+                  <a:lnTo>
+                    <a:pt x="7215704" y="3460453"/>
+                  </a:lnTo>
+                  <a:lnTo>
+                    <a:pt x="7138070" y="3458703"/>
+                  </a:lnTo>
+                  <a:lnTo>
+                    <a:pt x="7060436" y="3456822"/>
+                  </a:lnTo>
+                  <a:lnTo>
+                    <a:pt x="6982802" y="3454800"/>
+                  </a:lnTo>
+                  <a:lnTo>
+                    <a:pt x="6905168" y="3452626"/>
+                  </a:lnTo>
+                  <a:lnTo>
+                    <a:pt x="6827534" y="3450288"/>
+                  </a:lnTo>
+                  <a:lnTo>
+                    <a:pt x="6749900" y="3447775"/>
+                  </a:lnTo>
+                  <a:lnTo>
+                    <a:pt x="6672266" y="3445073"/>
+                  </a:lnTo>
+                  <a:lnTo>
+                    <a:pt x="6594632" y="3442168"/>
+                  </a:lnTo>
+                  <a:lnTo>
+                    <a:pt x="6516998" y="3439045"/>
+                  </a:lnTo>
+                  <a:lnTo>
+                    <a:pt x="6439364" y="3435687"/>
+                  </a:lnTo>
+                  <a:lnTo>
+                    <a:pt x="6361730" y="3432078"/>
+                  </a:lnTo>
+                  <a:lnTo>
+                    <a:pt x="6284096" y="3428197"/>
+                  </a:lnTo>
+                  <a:lnTo>
+                    <a:pt x="6206462" y="3424024"/>
+                  </a:lnTo>
+                  <a:lnTo>
+                    <a:pt x="6128827" y="3419538"/>
+                  </a:lnTo>
+                  <a:lnTo>
+                    <a:pt x="6051193" y="3414715"/>
+                  </a:lnTo>
+                  <a:lnTo>
+                    <a:pt x="5973559" y="3409530"/>
+                  </a:lnTo>
+                  <a:lnTo>
+                    <a:pt x="5895925" y="3403956"/>
+                  </a:lnTo>
+                  <a:lnTo>
+                    <a:pt x="5818291" y="3397963"/>
+                  </a:lnTo>
+                  <a:lnTo>
+                    <a:pt x="5740657" y="3391519"/>
+                  </a:lnTo>
+                  <a:lnTo>
+                    <a:pt x="5663023" y="3384592"/>
+                  </a:lnTo>
+                  <a:lnTo>
+                    <a:pt x="5585389" y="3377144"/>
+                  </a:lnTo>
+                  <a:lnTo>
+                    <a:pt x="5507755" y="3369137"/>
+                  </a:lnTo>
+                  <a:lnTo>
+                    <a:pt x="5430121" y="3360528"/>
+                  </a:lnTo>
+                  <a:lnTo>
+                    <a:pt x="5352487" y="3351273"/>
+                  </a:lnTo>
+                  <a:lnTo>
+                    <a:pt x="5274853" y="3341323"/>
+                  </a:lnTo>
+                  <a:lnTo>
+                    <a:pt x="5197219" y="3330625"/>
+                  </a:lnTo>
+                  <a:lnTo>
+                    <a:pt x="5119585" y="3319124"/>
+                  </a:lnTo>
+                  <a:lnTo>
+                    <a:pt x="5041951" y="3306759"/>
+                  </a:lnTo>
+                  <a:lnTo>
+                    <a:pt x="4964317" y="3293465"/>
+                  </a:lnTo>
+                  <a:lnTo>
+                    <a:pt x="4886683" y="3279172"/>
+                  </a:lnTo>
+                  <a:lnTo>
+                    <a:pt x="4809049" y="3263806"/>
+                  </a:lnTo>
+                  <a:lnTo>
+                    <a:pt x="4731415" y="3247286"/>
+                  </a:lnTo>
+                  <a:lnTo>
+                    <a:pt x="4653781" y="3229525"/>
+                  </a:lnTo>
+                  <a:lnTo>
+                    <a:pt x="4576147" y="3210430"/>
+                  </a:lnTo>
+                  <a:lnTo>
+                    <a:pt x="4498513" y="3189900"/>
+                  </a:lnTo>
+                  <a:lnTo>
+                    <a:pt x="4420879" y="3167829"/>
+                  </a:lnTo>
+                  <a:lnTo>
+                    <a:pt x="4343244" y="3144099"/>
+                  </a:lnTo>
+                  <a:lnTo>
+                    <a:pt x="4265610" y="3118588"/>
+                  </a:lnTo>
+                  <a:lnTo>
+                    <a:pt x="4187976" y="3091160"/>
+                  </a:lnTo>
+                  <a:lnTo>
+                    <a:pt x="4110342" y="3061672"/>
+                  </a:lnTo>
+                  <a:lnTo>
+                    <a:pt x="4032708" y="3029969"/>
+                  </a:lnTo>
+                  <a:lnTo>
+                    <a:pt x="3955074" y="2995885"/>
+                  </a:lnTo>
+                  <a:lnTo>
+                    <a:pt x="3877440" y="2959240"/>
+                  </a:lnTo>
+                  <a:lnTo>
+                    <a:pt x="3799806" y="2919843"/>
+                  </a:lnTo>
+                  <a:lnTo>
+                    <a:pt x="3722172" y="2877487"/>
+                  </a:lnTo>
+                  <a:lnTo>
+                    <a:pt x="3644538" y="2831950"/>
+                  </a:lnTo>
+                  <a:lnTo>
+                    <a:pt x="3566904" y="2782992"/>
+                  </a:lnTo>
+                  <a:lnTo>
+                    <a:pt x="3489270" y="2730357"/>
+                  </a:lnTo>
+                  <a:lnTo>
+                    <a:pt x="3411636" y="2673768"/>
+                  </a:lnTo>
+                  <a:lnTo>
+                    <a:pt x="3334002" y="2651605"/>
+                  </a:lnTo>
+                  <a:lnTo>
+                    <a:pt x="3256368" y="2647603"/>
+                  </a:lnTo>
+                  <a:lnTo>
+                    <a:pt x="3178734" y="2643581"/>
+                  </a:lnTo>
+                  <a:lnTo>
+                    <a:pt x="3101100" y="2639541"/>
+                  </a:lnTo>
+                  <a:lnTo>
+                    <a:pt x="3023466" y="2635481"/>
+                  </a:lnTo>
+                  <a:lnTo>
+                    <a:pt x="2945832" y="2631401"/>
+                  </a:lnTo>
+                  <a:lnTo>
+                    <a:pt x="2868198" y="2627302"/>
+                  </a:lnTo>
+                  <a:lnTo>
+                    <a:pt x="2790564" y="2623183"/>
+                  </a:lnTo>
+                  <a:lnTo>
+                    <a:pt x="2712930" y="2619044"/>
+                  </a:lnTo>
+                  <a:lnTo>
+                    <a:pt x="2635295" y="2614885"/>
+                  </a:lnTo>
+                  <a:lnTo>
+                    <a:pt x="2557661" y="2610706"/>
+                  </a:lnTo>
+                  <a:lnTo>
+                    <a:pt x="2480027" y="2606507"/>
+                  </a:lnTo>
+                  <a:lnTo>
+                    <a:pt x="2402393" y="2602288"/>
+                  </a:lnTo>
+                  <a:lnTo>
+                    <a:pt x="2324759" y="2598049"/>
+                  </a:lnTo>
+                  <a:lnTo>
+                    <a:pt x="2247125" y="2593789"/>
+                  </a:lnTo>
+                  <a:lnTo>
+                    <a:pt x="2169491" y="2589509"/>
+                  </a:lnTo>
+                  <a:lnTo>
+                    <a:pt x="2091857" y="2585208"/>
+                  </a:lnTo>
+                  <a:lnTo>
+                    <a:pt x="2014223" y="2580887"/>
+                  </a:lnTo>
+                  <a:lnTo>
+                    <a:pt x="1936589" y="2576544"/>
+                  </a:lnTo>
+                  <a:lnTo>
+                    <a:pt x="1858955" y="2572181"/>
+                  </a:lnTo>
+                  <a:lnTo>
+                    <a:pt x="1781321" y="2567797"/>
+                  </a:lnTo>
+                  <a:lnTo>
+                    <a:pt x="1703687" y="2563392"/>
+                  </a:lnTo>
+                  <a:lnTo>
+                    <a:pt x="1626053" y="2558965"/>
+                  </a:lnTo>
+                  <a:lnTo>
+                    <a:pt x="1548419" y="2554518"/>
+                  </a:lnTo>
+                  <a:lnTo>
+                    <a:pt x="1470785" y="2550049"/>
+                  </a:lnTo>
+                  <a:lnTo>
+                    <a:pt x="1393151" y="2545558"/>
+                  </a:lnTo>
+                  <a:lnTo>
+                    <a:pt x="1315517" y="2541046"/>
+                  </a:lnTo>
+                  <a:lnTo>
+                    <a:pt x="1237883" y="2536512"/>
+                  </a:lnTo>
+                  <a:lnTo>
+                    <a:pt x="1160249" y="2531956"/>
+                  </a:lnTo>
+                  <a:lnTo>
+                    <a:pt x="1082615" y="2527379"/>
+                  </a:lnTo>
+                  <a:lnTo>
+                    <a:pt x="1004981" y="2522779"/>
+                  </a:lnTo>
+                  <a:lnTo>
+                    <a:pt x="927346" y="2518157"/>
+                  </a:lnTo>
+                  <a:lnTo>
+                    <a:pt x="849712" y="2513513"/>
+                  </a:lnTo>
+                  <a:lnTo>
+                    <a:pt x="772078" y="2508847"/>
+                  </a:lnTo>
+                  <a:lnTo>
+                    <a:pt x="694444" y="2504158"/>
+                  </a:lnTo>
+                  <a:lnTo>
+                    <a:pt x="616810" y="2499447"/>
+                  </a:lnTo>
+                  <a:lnTo>
+                    <a:pt x="539176" y="2494713"/>
+                  </a:lnTo>
+                  <a:lnTo>
+                    <a:pt x="461542" y="2489956"/>
+                  </a:lnTo>
+                  <a:lnTo>
+                    <a:pt x="383908" y="2485177"/>
+                  </a:lnTo>
+                  <a:lnTo>
+                    <a:pt x="306274" y="2480374"/>
+                  </a:lnTo>
+                  <a:lnTo>
+                    <a:pt x="228640" y="2475548"/>
+                  </a:lnTo>
+                  <a:lnTo>
+                    <a:pt x="151006" y="2470700"/>
+                  </a:lnTo>
+                  <a:lnTo>
+                    <a:pt x="73372" y="2465827"/>
+                  </a:lnTo>
+                  <a:lnTo>
+                    <a:pt x="0" y="2461200"/>
                   </a:lnTo>
                   <a:close/>
                 </a:path>
@@ -3540,231 +3540,231 @@
           </p:nvSpPr>
           <p:spPr>
             <a:xfrm>
-              <a:off x="2665715" y="1896563"/>
-              <a:ext cx="5522774" cy="2972807"/>
+              <a:off x="2665715" y="2073503"/>
+              <a:ext cx="5522774" cy="2835345"/>
             </a:xfrm>
             <a:custGeom>
               <a:avLst/>
               <a:pathLst>
-                <a:path w="5522774" h="2972807">
+                <a:path w="5522774" h="2835345">
                   <a:moveTo>
                     <a:pt x="0" y="0"/>
                   </a:moveTo>
                   <a:lnTo>
-                    <a:pt x="10757" y="37625"/>
-                  </a:lnTo>
-                  <a:lnTo>
-                    <a:pt x="88391" y="290187"/>
-                  </a:lnTo>
-                  <a:lnTo>
-                    <a:pt x="166025" y="525103"/>
-                  </a:lnTo>
-                  <a:lnTo>
-                    <a:pt x="243659" y="743608"/>
-                  </a:lnTo>
-                  <a:lnTo>
-                    <a:pt x="321293" y="946846"/>
-                  </a:lnTo>
-                  <a:lnTo>
-                    <a:pt x="398927" y="1135886"/>
-                  </a:lnTo>
-                  <a:lnTo>
-                    <a:pt x="476561" y="1311718"/>
-                  </a:lnTo>
-                  <a:lnTo>
-                    <a:pt x="554195" y="1475265"/>
-                  </a:lnTo>
-                  <a:lnTo>
-                    <a:pt x="631829" y="1627387"/>
-                  </a:lnTo>
-                  <a:lnTo>
-                    <a:pt x="709464" y="1768881"/>
-                  </a:lnTo>
-                  <a:lnTo>
-                    <a:pt x="787098" y="1900489"/>
-                  </a:lnTo>
-                  <a:lnTo>
-                    <a:pt x="864732" y="2022902"/>
-                  </a:lnTo>
-                  <a:lnTo>
-                    <a:pt x="942366" y="2136764"/>
-                  </a:lnTo>
-                  <a:lnTo>
-                    <a:pt x="1020000" y="2242670"/>
-                  </a:lnTo>
-                  <a:lnTo>
-                    <a:pt x="1097634" y="2341177"/>
-                  </a:lnTo>
-                  <a:lnTo>
-                    <a:pt x="1175268" y="2432802"/>
-                  </a:lnTo>
-                  <a:lnTo>
-                    <a:pt x="1252902" y="2518026"/>
-                  </a:lnTo>
-                  <a:lnTo>
-                    <a:pt x="1330536" y="2597295"/>
-                  </a:lnTo>
-                  <a:lnTo>
-                    <a:pt x="1408170" y="2671027"/>
-                  </a:lnTo>
-                  <a:lnTo>
-                    <a:pt x="1485804" y="2739607"/>
-                  </a:lnTo>
-                  <a:lnTo>
-                    <a:pt x="1563438" y="2784335"/>
-                  </a:lnTo>
-                  <a:lnTo>
-                    <a:pt x="1641072" y="2788491"/>
-                  </a:lnTo>
-                  <a:lnTo>
-                    <a:pt x="1718706" y="2792627"/>
-                  </a:lnTo>
-                  <a:lnTo>
-                    <a:pt x="1796340" y="2796743"/>
-                  </a:lnTo>
-                  <a:lnTo>
-                    <a:pt x="1873974" y="2800840"/>
-                  </a:lnTo>
-                  <a:lnTo>
-                    <a:pt x="1951608" y="2804917"/>
-                  </a:lnTo>
-                  <a:lnTo>
-                    <a:pt x="2029242" y="2808975"/>
-                  </a:lnTo>
-                  <a:lnTo>
-                    <a:pt x="2106876" y="2813013"/>
-                  </a:lnTo>
-                  <a:lnTo>
-                    <a:pt x="2184510" y="2817032"/>
-                  </a:lnTo>
-                  <a:lnTo>
-                    <a:pt x="2262144" y="2821031"/>
-                  </a:lnTo>
-                  <a:lnTo>
-                    <a:pt x="2339778" y="2825012"/>
-                  </a:lnTo>
-                  <a:lnTo>
-                    <a:pt x="2417412" y="2828973"/>
-                  </a:lnTo>
-                  <a:lnTo>
-                    <a:pt x="2495047" y="2832916"/>
-                  </a:lnTo>
-                  <a:lnTo>
-                    <a:pt x="2572681" y="2836839"/>
-                  </a:lnTo>
-                  <a:lnTo>
-                    <a:pt x="2650315" y="2840744"/>
-                  </a:lnTo>
-                  <a:lnTo>
-                    <a:pt x="2727949" y="2844630"/>
-                  </a:lnTo>
-                  <a:lnTo>
-                    <a:pt x="2805583" y="2848498"/>
-                  </a:lnTo>
-                  <a:lnTo>
-                    <a:pt x="2883217" y="2852347"/>
-                  </a:lnTo>
-                  <a:lnTo>
-                    <a:pt x="2960851" y="2856177"/>
-                  </a:lnTo>
-                  <a:lnTo>
-                    <a:pt x="3038485" y="2859990"/>
-                  </a:lnTo>
-                  <a:lnTo>
-                    <a:pt x="3116119" y="2863784"/>
-                  </a:lnTo>
-                  <a:lnTo>
-                    <a:pt x="3193753" y="2867559"/>
-                  </a:lnTo>
-                  <a:lnTo>
-                    <a:pt x="3271387" y="2871317"/>
-                  </a:lnTo>
-                  <a:lnTo>
-                    <a:pt x="3349021" y="2875057"/>
-                  </a:lnTo>
-                  <a:lnTo>
-                    <a:pt x="3426655" y="2878779"/>
-                  </a:lnTo>
-                  <a:lnTo>
-                    <a:pt x="3504289" y="2882483"/>
-                  </a:lnTo>
-                  <a:lnTo>
-                    <a:pt x="3581923" y="2886169"/>
-                  </a:lnTo>
-                  <a:lnTo>
-                    <a:pt x="3659557" y="2889838"/>
-                  </a:lnTo>
-                  <a:lnTo>
-                    <a:pt x="3737191" y="2893489"/>
-                  </a:lnTo>
-                  <a:lnTo>
-                    <a:pt x="3814825" y="2897123"/>
-                  </a:lnTo>
-                  <a:lnTo>
-                    <a:pt x="3892459" y="2900739"/>
-                  </a:lnTo>
-                  <a:lnTo>
-                    <a:pt x="3970093" y="2904338"/>
-                  </a:lnTo>
-                  <a:lnTo>
-                    <a:pt x="4047727" y="2907920"/>
-                  </a:lnTo>
-                  <a:lnTo>
-                    <a:pt x="4125361" y="2911484"/>
-                  </a:lnTo>
-                  <a:lnTo>
-                    <a:pt x="4202996" y="2915032"/>
-                  </a:lnTo>
-                  <a:lnTo>
-                    <a:pt x="4280630" y="2918562"/>
-                  </a:lnTo>
-                  <a:lnTo>
-                    <a:pt x="4358264" y="2922076"/>
-                  </a:lnTo>
-                  <a:lnTo>
-                    <a:pt x="4435898" y="2925573"/>
-                  </a:lnTo>
-                  <a:lnTo>
-                    <a:pt x="4513532" y="2929053"/>
-                  </a:lnTo>
-                  <a:lnTo>
-                    <a:pt x="4591166" y="2932516"/>
-                  </a:lnTo>
-                  <a:lnTo>
-                    <a:pt x="4668800" y="2935963"/>
-                  </a:lnTo>
-                  <a:lnTo>
-                    <a:pt x="4746434" y="2939393"/>
-                  </a:lnTo>
-                  <a:lnTo>
-                    <a:pt x="4824068" y="2942807"/>
-                  </a:lnTo>
-                  <a:lnTo>
-                    <a:pt x="4901702" y="2946205"/>
-                  </a:lnTo>
-                  <a:lnTo>
-                    <a:pt x="4979336" y="2949586"/>
-                  </a:lnTo>
-                  <a:lnTo>
-                    <a:pt x="5056970" y="2952951"/>
-                  </a:lnTo>
-                  <a:lnTo>
-                    <a:pt x="5134604" y="2956300"/>
-                  </a:lnTo>
-                  <a:lnTo>
-                    <a:pt x="5212238" y="2959633"/>
-                  </a:lnTo>
-                  <a:lnTo>
-                    <a:pt x="5289872" y="2962951"/>
-                  </a:lnTo>
-                  <a:lnTo>
-                    <a:pt x="5367506" y="2966252"/>
-                  </a:lnTo>
-                  <a:lnTo>
-                    <a:pt x="5445140" y="2969537"/>
-                  </a:lnTo>
-                  <a:lnTo>
-                    <a:pt x="5522774" y="2972807"/>
+                    <a:pt x="10757" y="35885"/>
+                  </a:lnTo>
+                  <a:lnTo>
+                    <a:pt x="88391" y="276769"/>
+                  </a:lnTo>
+                  <a:lnTo>
+                    <a:pt x="166025" y="500823"/>
+                  </a:lnTo>
+                  <a:lnTo>
+                    <a:pt x="243659" y="709224"/>
+                  </a:lnTo>
+                  <a:lnTo>
+                    <a:pt x="321293" y="903064"/>
+                  </a:lnTo>
+                  <a:lnTo>
+                    <a:pt x="398927" y="1083363"/>
+                  </a:lnTo>
+                  <a:lnTo>
+                    <a:pt x="476561" y="1251064"/>
+                  </a:lnTo>
+                  <a:lnTo>
+                    <a:pt x="554195" y="1407050"/>
+                  </a:lnTo>
+                  <a:lnTo>
+                    <a:pt x="631829" y="1552137"/>
+                  </a:lnTo>
+                  <a:lnTo>
+                    <a:pt x="709464" y="1687088"/>
+                  </a:lnTo>
+                  <a:lnTo>
+                    <a:pt x="787098" y="1812611"/>
+                  </a:lnTo>
+                  <a:lnTo>
+                    <a:pt x="864732" y="1929364"/>
+                  </a:lnTo>
+                  <a:lnTo>
+                    <a:pt x="942366" y="2037960"/>
+                  </a:lnTo>
+                  <a:lnTo>
+                    <a:pt x="1020000" y="2138970"/>
+                  </a:lnTo>
+                  <a:lnTo>
+                    <a:pt x="1097634" y="2232922"/>
+                  </a:lnTo>
+                  <a:lnTo>
+                    <a:pt x="1175268" y="2320310"/>
+                  </a:lnTo>
+                  <a:lnTo>
+                    <a:pt x="1252902" y="2401593"/>
+                  </a:lnTo>
+                  <a:lnTo>
+                    <a:pt x="1330536" y="2477197"/>
+                  </a:lnTo>
+                  <a:lnTo>
+                    <a:pt x="1408170" y="2547519"/>
+                  </a:lnTo>
+                  <a:lnTo>
+                    <a:pt x="1485804" y="2612929"/>
+                  </a:lnTo>
+                  <a:lnTo>
+                    <a:pt x="1563438" y="2655588"/>
+                  </a:lnTo>
+                  <a:lnTo>
+                    <a:pt x="1641072" y="2659552"/>
+                  </a:lnTo>
+                  <a:lnTo>
+                    <a:pt x="1718706" y="2663497"/>
+                  </a:lnTo>
+                  <a:lnTo>
+                    <a:pt x="1796340" y="2667423"/>
+                  </a:lnTo>
+                  <a:lnTo>
+                    <a:pt x="1873974" y="2671330"/>
+                  </a:lnTo>
+                  <a:lnTo>
+                    <a:pt x="1951608" y="2675219"/>
+                  </a:lnTo>
+                  <a:lnTo>
+                    <a:pt x="2029242" y="2679089"/>
+                  </a:lnTo>
+                  <a:lnTo>
+                    <a:pt x="2106876" y="2682940"/>
+                  </a:lnTo>
+                  <a:lnTo>
+                    <a:pt x="2184510" y="2686773"/>
+                  </a:lnTo>
+                  <a:lnTo>
+                    <a:pt x="2262144" y="2690588"/>
+                  </a:lnTo>
+                  <a:lnTo>
+                    <a:pt x="2339778" y="2694384"/>
+                  </a:lnTo>
+                  <a:lnTo>
+                    <a:pt x="2417412" y="2698163"/>
+                  </a:lnTo>
+                  <a:lnTo>
+                    <a:pt x="2495047" y="2701923"/>
+                  </a:lnTo>
+                  <a:lnTo>
+                    <a:pt x="2572681" y="2705665"/>
+                  </a:lnTo>
+                  <a:lnTo>
+                    <a:pt x="2650315" y="2709389"/>
+                  </a:lnTo>
+                  <a:lnTo>
+                    <a:pt x="2727949" y="2713096"/>
+                  </a:lnTo>
+                  <a:lnTo>
+                    <a:pt x="2805583" y="2716784"/>
+                  </a:lnTo>
+                  <a:lnTo>
+                    <a:pt x="2883217" y="2720455"/>
+                  </a:lnTo>
+                  <a:lnTo>
+                    <a:pt x="2960851" y="2724109"/>
+                  </a:lnTo>
+                  <a:lnTo>
+                    <a:pt x="3038485" y="2727745"/>
+                  </a:lnTo>
+                  <a:lnTo>
+                    <a:pt x="3116119" y="2731363"/>
+                  </a:lnTo>
+                  <a:lnTo>
+                    <a:pt x="3193753" y="2734965"/>
+                  </a:lnTo>
+                  <a:lnTo>
+                    <a:pt x="3271387" y="2738549"/>
+                  </a:lnTo>
+                  <a:lnTo>
+                    <a:pt x="3349021" y="2742115"/>
+                  </a:lnTo>
+                  <a:lnTo>
+                    <a:pt x="3426655" y="2745665"/>
+                  </a:lnTo>
+                  <a:lnTo>
+                    <a:pt x="3504289" y="2749198"/>
+                  </a:lnTo>
+                  <a:lnTo>
+                    <a:pt x="3581923" y="2752714"/>
+                  </a:lnTo>
+                  <a:lnTo>
+                    <a:pt x="3659557" y="2756213"/>
+                  </a:lnTo>
+                  <a:lnTo>
+                    <a:pt x="3737191" y="2759695"/>
+                  </a:lnTo>
+                  <a:lnTo>
+                    <a:pt x="3814825" y="2763161"/>
+                  </a:lnTo>
+                  <a:lnTo>
+                    <a:pt x="3892459" y="2766610"/>
+                  </a:lnTo>
+                  <a:lnTo>
+                    <a:pt x="3970093" y="2770042"/>
+                  </a:lnTo>
+                  <a:lnTo>
+                    <a:pt x="4047727" y="2773458"/>
+                  </a:lnTo>
+                  <a:lnTo>
+                    <a:pt x="4125361" y="2776858"/>
+                  </a:lnTo>
+                  <a:lnTo>
+                    <a:pt x="4202996" y="2780242"/>
+                  </a:lnTo>
+                  <a:lnTo>
+                    <a:pt x="4280630" y="2783609"/>
+                  </a:lnTo>
+                  <a:lnTo>
+                    <a:pt x="4358264" y="2786960"/>
+                  </a:lnTo>
+                  <a:lnTo>
+                    <a:pt x="4435898" y="2790295"/>
+                  </a:lnTo>
+                  <a:lnTo>
+                    <a:pt x="4513532" y="2793614"/>
+                  </a:lnTo>
+                  <a:lnTo>
+                    <a:pt x="4591166" y="2796918"/>
+                  </a:lnTo>
+                  <a:lnTo>
+                    <a:pt x="4668800" y="2800205"/>
+                  </a:lnTo>
+                  <a:lnTo>
+                    <a:pt x="4746434" y="2803477"/>
+                  </a:lnTo>
+                  <a:lnTo>
+                    <a:pt x="4824068" y="2806733"/>
+                  </a:lnTo>
+                  <a:lnTo>
+                    <a:pt x="4901702" y="2809973"/>
+                  </a:lnTo>
+                  <a:lnTo>
+                    <a:pt x="4979336" y="2813198"/>
+                  </a:lnTo>
+                  <a:lnTo>
+                    <a:pt x="5056970" y="2816408"/>
+                  </a:lnTo>
+                  <a:lnTo>
+                    <a:pt x="5134604" y="2819602"/>
+                  </a:lnTo>
+                  <a:lnTo>
+                    <a:pt x="5212238" y="2822781"/>
+                  </a:lnTo>
+                  <a:lnTo>
+                    <a:pt x="5289872" y="2825945"/>
+                  </a:lnTo>
+                  <a:lnTo>
+                    <a:pt x="5367506" y="2829093"/>
+                  </a:lnTo>
+                  <a:lnTo>
+                    <a:pt x="5445140" y="2832227"/>
+                  </a:lnTo>
+                  <a:lnTo>
+                    <a:pt x="5522774" y="2835345"/>
                   </a:lnTo>
                 </a:path>
               </a:pathLst>
@@ -3784,297 +3784,297 @@
           </p:nvSpPr>
           <p:spPr>
             <a:xfrm>
-              <a:off x="817517" y="4477086"/>
-              <a:ext cx="7370972" cy="1050990"/>
+              <a:off x="817517" y="4534704"/>
+              <a:ext cx="7370972" cy="1002393"/>
             </a:xfrm>
             <a:custGeom>
               <a:avLst/>
               <a:pathLst>
-                <a:path w="7370972" h="1050990">
+                <a:path w="7370972" h="1002393">
                   <a:moveTo>
-                    <a:pt x="7370972" y="1050990"/>
+                    <a:pt x="7370972" y="1002393"/>
                   </a:moveTo>
                   <a:lnTo>
-                    <a:pt x="7293338" y="1049403"/>
-                  </a:lnTo>
-                  <a:lnTo>
-                    <a:pt x="7215704" y="1047697"/>
-                  </a:lnTo>
-                  <a:lnTo>
-                    <a:pt x="7138070" y="1045863"/>
-                  </a:lnTo>
-                  <a:lnTo>
-                    <a:pt x="7060436" y="1043890"/>
-                  </a:lnTo>
-                  <a:lnTo>
-                    <a:pt x="6982802" y="1041770"/>
-                  </a:lnTo>
-                  <a:lnTo>
-                    <a:pt x="6905168" y="1039490"/>
-                  </a:lnTo>
-                  <a:lnTo>
-                    <a:pt x="6827534" y="1037039"/>
-                  </a:lnTo>
-                  <a:lnTo>
-                    <a:pt x="6749900" y="1034404"/>
-                  </a:lnTo>
-                  <a:lnTo>
-                    <a:pt x="6672266" y="1031571"/>
-                  </a:lnTo>
-                  <a:lnTo>
-                    <a:pt x="6594632" y="1028526"/>
-                  </a:lnTo>
-                  <a:lnTo>
-                    <a:pt x="6516998" y="1025251"/>
-                  </a:lnTo>
-                  <a:lnTo>
-                    <a:pt x="6439364" y="1021731"/>
-                  </a:lnTo>
-                  <a:lnTo>
-                    <a:pt x="6361730" y="1017946"/>
-                  </a:lnTo>
-                  <a:lnTo>
-                    <a:pt x="6284096" y="1013877"/>
-                  </a:lnTo>
-                  <a:lnTo>
-                    <a:pt x="6206462" y="1009502"/>
-                  </a:lnTo>
-                  <a:lnTo>
-                    <a:pt x="6128827" y="1004799"/>
-                  </a:lnTo>
-                  <a:lnTo>
-                    <a:pt x="6051193" y="999742"/>
-                  </a:lnTo>
-                  <a:lnTo>
-                    <a:pt x="5973559" y="994306"/>
-                  </a:lnTo>
-                  <a:lnTo>
-                    <a:pt x="5895925" y="988461"/>
-                  </a:lnTo>
-                  <a:lnTo>
-                    <a:pt x="5818291" y="982177"/>
-                  </a:lnTo>
-                  <a:lnTo>
-                    <a:pt x="5740657" y="975421"/>
-                  </a:lnTo>
-                  <a:lnTo>
-                    <a:pt x="5663023" y="968158"/>
-                  </a:lnTo>
-                  <a:lnTo>
-                    <a:pt x="5585389" y="960349"/>
-                  </a:lnTo>
-                  <a:lnTo>
-                    <a:pt x="5507755" y="951954"/>
-                  </a:lnTo>
-                  <a:lnTo>
-                    <a:pt x="5430121" y="942928"/>
-                  </a:lnTo>
-                  <a:lnTo>
-                    <a:pt x="5352487" y="933224"/>
-                  </a:lnTo>
-                  <a:lnTo>
-                    <a:pt x="5274853" y="922791"/>
-                  </a:lnTo>
-                  <a:lnTo>
-                    <a:pt x="5197219" y="911575"/>
-                  </a:lnTo>
-                  <a:lnTo>
-                    <a:pt x="5119585" y="899516"/>
-                  </a:lnTo>
-                  <a:lnTo>
-                    <a:pt x="5041951" y="886551"/>
-                  </a:lnTo>
-                  <a:lnTo>
-                    <a:pt x="4964317" y="872613"/>
-                  </a:lnTo>
-                  <a:lnTo>
-                    <a:pt x="4886683" y="857628"/>
-                  </a:lnTo>
-                  <a:lnTo>
-                    <a:pt x="4809049" y="841517"/>
-                  </a:lnTo>
-                  <a:lnTo>
-                    <a:pt x="4731415" y="824195"/>
-                  </a:lnTo>
-                  <a:lnTo>
-                    <a:pt x="4653781" y="805573"/>
-                  </a:lnTo>
-                  <a:lnTo>
-                    <a:pt x="4576147" y="785552"/>
-                  </a:lnTo>
-                  <a:lnTo>
-                    <a:pt x="4498513" y="764028"/>
-                  </a:lnTo>
-                  <a:lnTo>
-                    <a:pt x="4420879" y="740886"/>
-                  </a:lnTo>
-                  <a:lnTo>
-                    <a:pt x="4343244" y="716006"/>
-                  </a:lnTo>
-                  <a:lnTo>
-                    <a:pt x="4265610" y="689258"/>
-                  </a:lnTo>
-                  <a:lnTo>
-                    <a:pt x="4187976" y="660500"/>
-                  </a:lnTo>
-                  <a:lnTo>
-                    <a:pt x="4110342" y="629583"/>
-                  </a:lnTo>
-                  <a:lnTo>
-                    <a:pt x="4032708" y="596343"/>
-                  </a:lnTo>
-                  <a:lnTo>
-                    <a:pt x="3955074" y="560606"/>
-                  </a:lnTo>
-                  <a:lnTo>
-                    <a:pt x="3877440" y="522185"/>
-                  </a:lnTo>
-                  <a:lnTo>
-                    <a:pt x="3799806" y="480878"/>
-                  </a:lnTo>
-                  <a:lnTo>
-                    <a:pt x="3722172" y="436469"/>
-                  </a:lnTo>
-                  <a:lnTo>
-                    <a:pt x="3644538" y="388723"/>
-                  </a:lnTo>
-                  <a:lnTo>
-                    <a:pt x="3566904" y="337392"/>
-                  </a:lnTo>
-                  <a:lnTo>
-                    <a:pt x="3489270" y="282205"/>
-                  </a:lnTo>
-                  <a:lnTo>
-                    <a:pt x="3411636" y="222872"/>
-                  </a:lnTo>
-                  <a:lnTo>
-                    <a:pt x="3334002" y="199635"/>
-                  </a:lnTo>
-                  <a:lnTo>
-                    <a:pt x="3256368" y="195439"/>
-                  </a:lnTo>
-                  <a:lnTo>
-                    <a:pt x="3178734" y="191223"/>
-                  </a:lnTo>
-                  <a:lnTo>
-                    <a:pt x="3101100" y="186986"/>
-                  </a:lnTo>
-                  <a:lnTo>
-                    <a:pt x="3023466" y="182729"/>
-                  </a:lnTo>
-                  <a:lnTo>
-                    <a:pt x="2945832" y="178451"/>
-                  </a:lnTo>
-                  <a:lnTo>
-                    <a:pt x="2868198" y="174153"/>
-                  </a:lnTo>
-                  <a:lnTo>
-                    <a:pt x="2790564" y="169835"/>
-                  </a:lnTo>
-                  <a:lnTo>
-                    <a:pt x="2712930" y="165495"/>
-                  </a:lnTo>
-                  <a:lnTo>
-                    <a:pt x="2635295" y="161135"/>
-                  </a:lnTo>
-                  <a:lnTo>
-                    <a:pt x="2557661" y="156753"/>
-                  </a:lnTo>
-                  <a:lnTo>
-                    <a:pt x="2480027" y="152351"/>
-                  </a:lnTo>
-                  <a:lnTo>
-                    <a:pt x="2402393" y="147927"/>
-                  </a:lnTo>
-                  <a:lnTo>
-                    <a:pt x="2324759" y="143483"/>
-                  </a:lnTo>
-                  <a:lnTo>
-                    <a:pt x="2247125" y="139016"/>
-                  </a:lnTo>
-                  <a:lnTo>
-                    <a:pt x="2169491" y="134529"/>
-                  </a:lnTo>
-                  <a:lnTo>
-                    <a:pt x="2091857" y="130019"/>
-                  </a:lnTo>
-                  <a:lnTo>
-                    <a:pt x="2014223" y="125488"/>
-                  </a:lnTo>
-                  <a:lnTo>
-                    <a:pt x="1936589" y="120935"/>
-                  </a:lnTo>
-                  <a:lnTo>
-                    <a:pt x="1858955" y="116361"/>
-                  </a:lnTo>
-                  <a:lnTo>
-                    <a:pt x="1781321" y="111764"/>
-                  </a:lnTo>
-                  <a:lnTo>
-                    <a:pt x="1703687" y="107145"/>
-                  </a:lnTo>
-                  <a:lnTo>
-                    <a:pt x="1626053" y="102504"/>
-                  </a:lnTo>
-                  <a:lnTo>
-                    <a:pt x="1548419" y="97841"/>
-                  </a:lnTo>
-                  <a:lnTo>
-                    <a:pt x="1470785" y="93155"/>
-                  </a:lnTo>
-                  <a:lnTo>
-                    <a:pt x="1393151" y="88447"/>
-                  </a:lnTo>
-                  <a:lnTo>
-                    <a:pt x="1315517" y="83716"/>
-                  </a:lnTo>
-                  <a:lnTo>
-                    <a:pt x="1237883" y="78962"/>
-                  </a:lnTo>
-                  <a:lnTo>
-                    <a:pt x="1160249" y="74186"/>
-                  </a:lnTo>
-                  <a:lnTo>
-                    <a:pt x="1082615" y="69386"/>
-                  </a:lnTo>
-                  <a:lnTo>
-                    <a:pt x="1004981" y="64564"/>
-                  </a:lnTo>
-                  <a:lnTo>
-                    <a:pt x="927346" y="59718"/>
-                  </a:lnTo>
-                  <a:lnTo>
-                    <a:pt x="849712" y="54849"/>
-                  </a:lnTo>
-                  <a:lnTo>
-                    <a:pt x="772078" y="49956"/>
-                  </a:lnTo>
-                  <a:lnTo>
-                    <a:pt x="694444" y="45040"/>
-                  </a:lnTo>
-                  <a:lnTo>
-                    <a:pt x="616810" y="40100"/>
-                  </a:lnTo>
-                  <a:lnTo>
-                    <a:pt x="539176" y="35137"/>
-                  </a:lnTo>
-                  <a:lnTo>
-                    <a:pt x="461542" y="30150"/>
-                  </a:lnTo>
-                  <a:lnTo>
-                    <a:pt x="383908" y="25138"/>
-                  </a:lnTo>
-                  <a:lnTo>
-                    <a:pt x="306274" y="20103"/>
-                  </a:lnTo>
-                  <a:lnTo>
-                    <a:pt x="228640" y="15043"/>
-                  </a:lnTo>
-                  <a:lnTo>
-                    <a:pt x="151006" y="9959"/>
-                  </a:lnTo>
-                  <a:lnTo>
-                    <a:pt x="73372" y="4851"/>
+                    <a:pt x="7293338" y="1000879"/>
+                  </a:lnTo>
+                  <a:lnTo>
+                    <a:pt x="7215704" y="999252"/>
+                  </a:lnTo>
+                  <a:lnTo>
+                    <a:pt x="7138070" y="997502"/>
+                  </a:lnTo>
+                  <a:lnTo>
+                    <a:pt x="7060436" y="995621"/>
+                  </a:lnTo>
+                  <a:lnTo>
+                    <a:pt x="6982802" y="993599"/>
+                  </a:lnTo>
+                  <a:lnTo>
+                    <a:pt x="6905168" y="991425"/>
+                  </a:lnTo>
+                  <a:lnTo>
+                    <a:pt x="6827534" y="989087"/>
+                  </a:lnTo>
+                  <a:lnTo>
+                    <a:pt x="6749900" y="986574"/>
+                  </a:lnTo>
+                  <a:lnTo>
+                    <a:pt x="6672266" y="983872"/>
+                  </a:lnTo>
+                  <a:lnTo>
+                    <a:pt x="6594632" y="980967"/>
+                  </a:lnTo>
+                  <a:lnTo>
+                    <a:pt x="6516998" y="977844"/>
+                  </a:lnTo>
+                  <a:lnTo>
+                    <a:pt x="6439364" y="974486"/>
+                  </a:lnTo>
+                  <a:lnTo>
+                    <a:pt x="6361730" y="970877"/>
+                  </a:lnTo>
+                  <a:lnTo>
+                    <a:pt x="6284096" y="966996"/>
+                  </a:lnTo>
+                  <a:lnTo>
+                    <a:pt x="6206462" y="962823"/>
+                  </a:lnTo>
+                  <a:lnTo>
+                    <a:pt x="6128827" y="958337"/>
+                  </a:lnTo>
+                  <a:lnTo>
+                    <a:pt x="6051193" y="953514"/>
+                  </a:lnTo>
+                  <a:lnTo>
+                    <a:pt x="5973559" y="948329"/>
+                  </a:lnTo>
+                  <a:lnTo>
+                    <a:pt x="5895925" y="942755"/>
+                  </a:lnTo>
+                  <a:lnTo>
+                    <a:pt x="5818291" y="936762"/>
+                  </a:lnTo>
+                  <a:lnTo>
+                    <a:pt x="5740657" y="930318"/>
+                  </a:lnTo>
+                  <a:lnTo>
+                    <a:pt x="5663023" y="923391"/>
+                  </a:lnTo>
+                  <a:lnTo>
+                    <a:pt x="5585389" y="915943"/>
+                  </a:lnTo>
+                  <a:lnTo>
+                    <a:pt x="5507755" y="907936"/>
+                  </a:lnTo>
+                  <a:lnTo>
+                    <a:pt x="5430121" y="899327"/>
+                  </a:lnTo>
+                  <a:lnTo>
+                    <a:pt x="5352487" y="890072"/>
+                  </a:lnTo>
+                  <a:lnTo>
+                    <a:pt x="5274853" y="880122"/>
+                  </a:lnTo>
+                  <a:lnTo>
+                    <a:pt x="5197219" y="869424"/>
+                  </a:lnTo>
+                  <a:lnTo>
+                    <a:pt x="5119585" y="857923"/>
+                  </a:lnTo>
+                  <a:lnTo>
+                    <a:pt x="5041951" y="845558"/>
+                  </a:lnTo>
+                  <a:lnTo>
+                    <a:pt x="4964317" y="832264"/>
+                  </a:lnTo>
+                  <a:lnTo>
+                    <a:pt x="4886683" y="817971"/>
+                  </a:lnTo>
+                  <a:lnTo>
+                    <a:pt x="4809049" y="802605"/>
+                  </a:lnTo>
+                  <a:lnTo>
+                    <a:pt x="4731415" y="786085"/>
+                  </a:lnTo>
+                  <a:lnTo>
+                    <a:pt x="4653781" y="768324"/>
+                  </a:lnTo>
+                  <a:lnTo>
+                    <a:pt x="4576147" y="749229"/>
+                  </a:lnTo>
+                  <a:lnTo>
+                    <a:pt x="4498513" y="728699"/>
+                  </a:lnTo>
+                  <a:lnTo>
+                    <a:pt x="4420879" y="706628"/>
+                  </a:lnTo>
+                  <a:lnTo>
+                    <a:pt x="4343244" y="682898"/>
+                  </a:lnTo>
+                  <a:lnTo>
+                    <a:pt x="4265610" y="657387"/>
+                  </a:lnTo>
+                  <a:lnTo>
+                    <a:pt x="4187976" y="629959"/>
+                  </a:lnTo>
+                  <a:lnTo>
+                    <a:pt x="4110342" y="600471"/>
+                  </a:lnTo>
+                  <a:lnTo>
+                    <a:pt x="4032708" y="568768"/>
+                  </a:lnTo>
+                  <a:lnTo>
+                    <a:pt x="3955074" y="534684"/>
+                  </a:lnTo>
+                  <a:lnTo>
+                    <a:pt x="3877440" y="498039"/>
+                  </a:lnTo>
+                  <a:lnTo>
+                    <a:pt x="3799806" y="458642"/>
+                  </a:lnTo>
+                  <a:lnTo>
+                    <a:pt x="3722172" y="416286"/>
+                  </a:lnTo>
+                  <a:lnTo>
+                    <a:pt x="3644538" y="370749"/>
+                  </a:lnTo>
+                  <a:lnTo>
+                    <a:pt x="3566904" y="321791"/>
+                  </a:lnTo>
+                  <a:lnTo>
+                    <a:pt x="3489270" y="269156"/>
+                  </a:lnTo>
+                  <a:lnTo>
+                    <a:pt x="3411636" y="212567"/>
+                  </a:lnTo>
+                  <a:lnTo>
+                    <a:pt x="3334002" y="190404"/>
+                  </a:lnTo>
+                  <a:lnTo>
+                    <a:pt x="3256368" y="186402"/>
+                  </a:lnTo>
+                  <a:lnTo>
+                    <a:pt x="3178734" y="182381"/>
+                  </a:lnTo>
+                  <a:lnTo>
+                    <a:pt x="3101100" y="178340"/>
+                  </a:lnTo>
+                  <a:lnTo>
+                    <a:pt x="3023466" y="174280"/>
+                  </a:lnTo>
+                  <a:lnTo>
+                    <a:pt x="2945832" y="170200"/>
+                  </a:lnTo>
+                  <a:lnTo>
+                    <a:pt x="2868198" y="166101"/>
+                  </a:lnTo>
+                  <a:lnTo>
+                    <a:pt x="2790564" y="161982"/>
+                  </a:lnTo>
+                  <a:lnTo>
+                    <a:pt x="2712930" y="157843"/>
+                  </a:lnTo>
+                  <a:lnTo>
+                    <a:pt x="2635295" y="153684"/>
+                  </a:lnTo>
+                  <a:lnTo>
+                    <a:pt x="2557661" y="149505"/>
+                  </a:lnTo>
+                  <a:lnTo>
+                    <a:pt x="2480027" y="145306"/>
+                  </a:lnTo>
+                  <a:lnTo>
+                    <a:pt x="2402393" y="141087"/>
+                  </a:lnTo>
+                  <a:lnTo>
+                    <a:pt x="2324759" y="136848"/>
+                  </a:lnTo>
+                  <a:lnTo>
+                    <a:pt x="2247125" y="132588"/>
+                  </a:lnTo>
+                  <a:lnTo>
+                    <a:pt x="2169491" y="128308"/>
+                  </a:lnTo>
+                  <a:lnTo>
+                    <a:pt x="2091857" y="124007"/>
+                  </a:lnTo>
+                  <a:lnTo>
+                    <a:pt x="2014223" y="119686"/>
+                  </a:lnTo>
+                  <a:lnTo>
+                    <a:pt x="1936589" y="115343"/>
+                  </a:lnTo>
+                  <a:lnTo>
+                    <a:pt x="1858955" y="110980"/>
+                  </a:lnTo>
+                  <a:lnTo>
+                    <a:pt x="1781321" y="106596"/>
+                  </a:lnTo>
+                  <a:lnTo>
+                    <a:pt x="1703687" y="102191"/>
+                  </a:lnTo>
+                  <a:lnTo>
+                    <a:pt x="1626053" y="97764"/>
+                  </a:lnTo>
+                  <a:lnTo>
+                    <a:pt x="1548419" y="93317"/>
+                  </a:lnTo>
+                  <a:lnTo>
+                    <a:pt x="1470785" y="88848"/>
+                  </a:lnTo>
+                  <a:lnTo>
+                    <a:pt x="1393151" y="84357"/>
+                  </a:lnTo>
+                  <a:lnTo>
+                    <a:pt x="1315517" y="79845"/>
+                  </a:lnTo>
+                  <a:lnTo>
+                    <a:pt x="1237883" y="75311"/>
+                  </a:lnTo>
+                  <a:lnTo>
+                    <a:pt x="1160249" y="70755"/>
+                  </a:lnTo>
+                  <a:lnTo>
+                    <a:pt x="1082615" y="66178"/>
+                  </a:lnTo>
+                  <a:lnTo>
+                    <a:pt x="1004981" y="61578"/>
+                  </a:lnTo>
+                  <a:lnTo>
+                    <a:pt x="927346" y="56956"/>
+                  </a:lnTo>
+                  <a:lnTo>
+                    <a:pt x="849712" y="52312"/>
+                  </a:lnTo>
+                  <a:lnTo>
+                    <a:pt x="772078" y="47646"/>
+                  </a:lnTo>
+                  <a:lnTo>
+                    <a:pt x="694444" y="42957"/>
+                  </a:lnTo>
+                  <a:lnTo>
+                    <a:pt x="616810" y="38246"/>
+                  </a:lnTo>
+                  <a:lnTo>
+                    <a:pt x="539176" y="33512"/>
+                  </a:lnTo>
+                  <a:lnTo>
+                    <a:pt x="461542" y="28755"/>
+                  </a:lnTo>
+                  <a:lnTo>
+                    <a:pt x="383908" y="23976"/>
+                  </a:lnTo>
+                  <a:lnTo>
+                    <a:pt x="306274" y="19173"/>
+                  </a:lnTo>
+                  <a:lnTo>
+                    <a:pt x="228640" y="14348"/>
+                  </a:lnTo>
+                  <a:lnTo>
+                    <a:pt x="151006" y="9499"/>
+                  </a:lnTo>
+                  <a:lnTo>
+                    <a:pt x="73372" y="4626"/>
                   </a:lnTo>
                   <a:lnTo>
                     <a:pt x="0" y="0"/>
@@ -4097,282 +4097,282 @@
           </p:nvSpPr>
           <p:spPr>
             <a:xfrm>
-              <a:off x="1318601" y="1896563"/>
-              <a:ext cx="6869888" cy="3532791"/>
+              <a:off x="1318601" y="2073503"/>
+              <a:ext cx="6869888" cy="3369436"/>
             </a:xfrm>
             <a:custGeom>
               <a:avLst/>
               <a:pathLst>
-                <a:path w="6869888" h="3532791">
+                <a:path w="6869888" h="3369436">
                   <a:moveTo>
                     <a:pt x="0" y="0"/>
                   </a:moveTo>
                   <a:lnTo>
-                    <a:pt x="38092" y="69217"/>
-                  </a:lnTo>
-                  <a:lnTo>
-                    <a:pt x="115726" y="204941"/>
-                  </a:lnTo>
-                  <a:lnTo>
-                    <a:pt x="193360" y="335525"/>
-                  </a:lnTo>
-                  <a:lnTo>
-                    <a:pt x="270994" y="461163"/>
-                  </a:lnTo>
-                  <a:lnTo>
-                    <a:pt x="348628" y="582042"/>
-                  </a:lnTo>
-                  <a:lnTo>
-                    <a:pt x="426262" y="698343"/>
-                  </a:lnTo>
-                  <a:lnTo>
-                    <a:pt x="503897" y="810239"/>
-                  </a:lnTo>
-                  <a:lnTo>
-                    <a:pt x="581531" y="917897"/>
-                  </a:lnTo>
-                  <a:lnTo>
-                    <a:pt x="659165" y="1021477"/>
-                  </a:lnTo>
-                  <a:lnTo>
-                    <a:pt x="736799" y="1121134"/>
-                  </a:lnTo>
-                  <a:lnTo>
-                    <a:pt x="814433" y="1217016"/>
-                  </a:lnTo>
-                  <a:lnTo>
-                    <a:pt x="892067" y="1309267"/>
-                  </a:lnTo>
-                  <a:lnTo>
-                    <a:pt x="969701" y="1398024"/>
-                  </a:lnTo>
-                  <a:lnTo>
-                    <a:pt x="1047335" y="1483419"/>
-                  </a:lnTo>
-                  <a:lnTo>
-                    <a:pt x="1124969" y="1565579"/>
-                  </a:lnTo>
-                  <a:lnTo>
-                    <a:pt x="1202603" y="1644628"/>
-                  </a:lnTo>
-                  <a:lnTo>
-                    <a:pt x="1280237" y="1720683"/>
-                  </a:lnTo>
-                  <a:lnTo>
-                    <a:pt x="1357871" y="1793857"/>
-                  </a:lnTo>
-                  <a:lnTo>
-                    <a:pt x="1435505" y="1864260"/>
-                  </a:lnTo>
-                  <a:lnTo>
-                    <a:pt x="1513139" y="1931996"/>
-                  </a:lnTo>
-                  <a:lnTo>
-                    <a:pt x="1590773" y="1997166"/>
-                  </a:lnTo>
-                  <a:lnTo>
-                    <a:pt x="1668407" y="2059868"/>
-                  </a:lnTo>
-                  <a:lnTo>
-                    <a:pt x="1746041" y="2120196"/>
-                  </a:lnTo>
-                  <a:lnTo>
-                    <a:pt x="1823675" y="2178238"/>
-                  </a:lnTo>
-                  <a:lnTo>
-                    <a:pt x="1901309" y="2234082"/>
-                  </a:lnTo>
-                  <a:lnTo>
-                    <a:pt x="1978943" y="2287811"/>
-                  </a:lnTo>
-                  <a:lnTo>
-                    <a:pt x="2056577" y="2339505"/>
-                  </a:lnTo>
-                  <a:lnTo>
-                    <a:pt x="2134211" y="2389241"/>
-                  </a:lnTo>
-                  <a:lnTo>
-                    <a:pt x="2211845" y="2437093"/>
-                  </a:lnTo>
-                  <a:lnTo>
-                    <a:pt x="2289480" y="2483132"/>
-                  </a:lnTo>
-                  <a:lnTo>
-                    <a:pt x="2367114" y="2527428"/>
-                  </a:lnTo>
-                  <a:lnTo>
-                    <a:pt x="2444748" y="2570046"/>
-                  </a:lnTo>
-                  <a:lnTo>
-                    <a:pt x="2522382" y="2611050"/>
-                  </a:lnTo>
-                  <a:lnTo>
-                    <a:pt x="2600016" y="2650501"/>
-                  </a:lnTo>
-                  <a:lnTo>
-                    <a:pt x="2677650" y="2688458"/>
-                  </a:lnTo>
-                  <a:lnTo>
-                    <a:pt x="2755284" y="2724977"/>
-                  </a:lnTo>
-                  <a:lnTo>
-                    <a:pt x="2832918" y="2760113"/>
-                  </a:lnTo>
-                  <a:lnTo>
-                    <a:pt x="2910552" y="2793918"/>
-                  </a:lnTo>
-                  <a:lnTo>
-                    <a:pt x="2988186" y="2826443"/>
-                  </a:lnTo>
-                  <a:lnTo>
-                    <a:pt x="3065820" y="2857736"/>
-                  </a:lnTo>
-                  <a:lnTo>
-                    <a:pt x="3143454" y="2887843"/>
-                  </a:lnTo>
-                  <a:lnTo>
-                    <a:pt x="3221088" y="2916811"/>
-                  </a:lnTo>
-                  <a:lnTo>
-                    <a:pt x="3298722" y="2944681"/>
-                  </a:lnTo>
-                  <a:lnTo>
-                    <a:pt x="3376356" y="2971495"/>
-                  </a:lnTo>
-                  <a:lnTo>
-                    <a:pt x="3453990" y="2997294"/>
-                  </a:lnTo>
-                  <a:lnTo>
-                    <a:pt x="3531624" y="3022116"/>
-                  </a:lnTo>
-                  <a:lnTo>
-                    <a:pt x="3609258" y="3045997"/>
-                  </a:lnTo>
-                  <a:lnTo>
-                    <a:pt x="3686892" y="3068974"/>
-                  </a:lnTo>
-                  <a:lnTo>
-                    <a:pt x="3764526" y="3091081"/>
-                  </a:lnTo>
-                  <a:lnTo>
-                    <a:pt x="3842160" y="3112351"/>
-                  </a:lnTo>
-                  <a:lnTo>
-                    <a:pt x="3919794" y="3132815"/>
-                  </a:lnTo>
-                  <a:lnTo>
-                    <a:pt x="3997429" y="3152503"/>
-                  </a:lnTo>
-                  <a:lnTo>
-                    <a:pt x="4075063" y="3171447"/>
-                  </a:lnTo>
-                  <a:lnTo>
-                    <a:pt x="4152697" y="3189672"/>
-                  </a:lnTo>
-                  <a:lnTo>
-                    <a:pt x="4230331" y="3207207"/>
-                  </a:lnTo>
-                  <a:lnTo>
-                    <a:pt x="4307965" y="3224079"/>
-                  </a:lnTo>
-                  <a:lnTo>
-                    <a:pt x="4385599" y="3240311"/>
-                  </a:lnTo>
-                  <a:lnTo>
-                    <a:pt x="4463233" y="3255928"/>
-                  </a:lnTo>
-                  <a:lnTo>
-                    <a:pt x="4540867" y="3270954"/>
-                  </a:lnTo>
-                  <a:lnTo>
-                    <a:pt x="4618501" y="3285411"/>
-                  </a:lnTo>
-                  <a:lnTo>
-                    <a:pt x="4696135" y="3299320"/>
-                  </a:lnTo>
-                  <a:lnTo>
-                    <a:pt x="4773769" y="3312702"/>
-                  </a:lnTo>
-                  <a:lnTo>
-                    <a:pt x="4851403" y="3325578"/>
-                  </a:lnTo>
-                  <a:lnTo>
-                    <a:pt x="4929037" y="3337965"/>
-                  </a:lnTo>
-                  <a:lnTo>
-                    <a:pt x="5006671" y="3349884"/>
-                  </a:lnTo>
-                  <a:lnTo>
-                    <a:pt x="5084305" y="3361351"/>
-                  </a:lnTo>
-                  <a:lnTo>
-                    <a:pt x="5161939" y="3372384"/>
-                  </a:lnTo>
-                  <a:lnTo>
-                    <a:pt x="5239573" y="3382999"/>
-                  </a:lnTo>
-                  <a:lnTo>
-                    <a:pt x="5317207" y="3393212"/>
-                  </a:lnTo>
-                  <a:lnTo>
-                    <a:pt x="5394841" y="3403038"/>
-                  </a:lnTo>
-                  <a:lnTo>
-                    <a:pt x="5472475" y="3412492"/>
-                  </a:lnTo>
-                  <a:lnTo>
-                    <a:pt x="5550109" y="3421588"/>
-                  </a:lnTo>
-                  <a:lnTo>
-                    <a:pt x="5627743" y="3430339"/>
-                  </a:lnTo>
-                  <a:lnTo>
-                    <a:pt x="5705378" y="3438759"/>
-                  </a:lnTo>
-                  <a:lnTo>
-                    <a:pt x="5783012" y="3446860"/>
-                  </a:lnTo>
-                  <a:lnTo>
-                    <a:pt x="5860646" y="3454654"/>
-                  </a:lnTo>
-                  <a:lnTo>
-                    <a:pt x="5938280" y="3462153"/>
-                  </a:lnTo>
-                  <a:lnTo>
-                    <a:pt x="6015914" y="3469368"/>
-                  </a:lnTo>
-                  <a:lnTo>
-                    <a:pt x="6093548" y="3476310"/>
-                  </a:lnTo>
-                  <a:lnTo>
-                    <a:pt x="6171182" y="3482989"/>
-                  </a:lnTo>
-                  <a:lnTo>
-                    <a:pt x="6248816" y="3489414"/>
-                  </a:lnTo>
-                  <a:lnTo>
-                    <a:pt x="6326450" y="3495597"/>
-                  </a:lnTo>
-                  <a:lnTo>
-                    <a:pt x="6404084" y="3501545"/>
-                  </a:lnTo>
-                  <a:lnTo>
-                    <a:pt x="6481718" y="3507268"/>
-                  </a:lnTo>
-                  <a:lnTo>
-                    <a:pt x="6559352" y="3512774"/>
-                  </a:lnTo>
-                  <a:lnTo>
-                    <a:pt x="6636986" y="3518072"/>
-                  </a:lnTo>
-                  <a:lnTo>
-                    <a:pt x="6714620" y="3523169"/>
-                  </a:lnTo>
-                  <a:lnTo>
-                    <a:pt x="6792254" y="3528073"/>
-                  </a:lnTo>
-                  <a:lnTo>
-                    <a:pt x="6869888" y="3532791"/>
+                    <a:pt x="38092" y="66017"/>
+                  </a:lnTo>
+                  <a:lnTo>
+                    <a:pt x="115726" y="195465"/>
+                  </a:lnTo>
+                  <a:lnTo>
+                    <a:pt x="193360" y="320011"/>
+                  </a:lnTo>
+                  <a:lnTo>
+                    <a:pt x="270994" y="439839"/>
+                  </a:lnTo>
+                  <a:lnTo>
+                    <a:pt x="348628" y="555129"/>
+                  </a:lnTo>
+                  <a:lnTo>
+                    <a:pt x="426262" y="666052"/>
+                  </a:lnTo>
+                  <a:lnTo>
+                    <a:pt x="503897" y="772774"/>
+                  </a:lnTo>
+                  <a:lnTo>
+                    <a:pt x="581531" y="875453"/>
+                  </a:lnTo>
+                  <a:lnTo>
+                    <a:pt x="659165" y="974244"/>
+                  </a:lnTo>
+                  <a:lnTo>
+                    <a:pt x="736799" y="1069293"/>
+                  </a:lnTo>
+                  <a:lnTo>
+                    <a:pt x="814433" y="1160742"/>
+                  </a:lnTo>
+                  <a:lnTo>
+                    <a:pt x="892067" y="1248727"/>
+                  </a:lnTo>
+                  <a:lnTo>
+                    <a:pt x="969701" y="1333380"/>
+                  </a:lnTo>
+                  <a:lnTo>
+                    <a:pt x="1047335" y="1414826"/>
+                  </a:lnTo>
+                  <a:lnTo>
+                    <a:pt x="1124969" y="1493188"/>
+                  </a:lnTo>
+                  <a:lnTo>
+                    <a:pt x="1202603" y="1568581"/>
+                  </a:lnTo>
+                  <a:lnTo>
+                    <a:pt x="1280237" y="1641119"/>
+                  </a:lnTo>
+                  <a:lnTo>
+                    <a:pt x="1357871" y="1710910"/>
+                  </a:lnTo>
+                  <a:lnTo>
+                    <a:pt x="1435505" y="1778057"/>
+                  </a:lnTo>
+                  <a:lnTo>
+                    <a:pt x="1513139" y="1842661"/>
+                  </a:lnTo>
+                  <a:lnTo>
+                    <a:pt x="1590773" y="1904818"/>
+                  </a:lnTo>
+                  <a:lnTo>
+                    <a:pt x="1668407" y="1964621"/>
+                  </a:lnTo>
+                  <a:lnTo>
+                    <a:pt x="1746041" y="2022159"/>
+                  </a:lnTo>
+                  <a:lnTo>
+                    <a:pt x="1823675" y="2077517"/>
+                  </a:lnTo>
+                  <a:lnTo>
+                    <a:pt x="1901309" y="2130779"/>
+                  </a:lnTo>
+                  <a:lnTo>
+                    <a:pt x="1978943" y="2182023"/>
+                  </a:lnTo>
+                  <a:lnTo>
+                    <a:pt x="2056577" y="2231327"/>
+                  </a:lnTo>
+                  <a:lnTo>
+                    <a:pt x="2134211" y="2278763"/>
+                  </a:lnTo>
+                  <a:lnTo>
+                    <a:pt x="2211845" y="2324402"/>
+                  </a:lnTo>
+                  <a:lnTo>
+                    <a:pt x="2289480" y="2368313"/>
+                  </a:lnTo>
+                  <a:lnTo>
+                    <a:pt x="2367114" y="2410561"/>
+                  </a:lnTo>
+                  <a:lnTo>
+                    <a:pt x="2444748" y="2451208"/>
+                  </a:lnTo>
+                  <a:lnTo>
+                    <a:pt x="2522382" y="2490316"/>
+                  </a:lnTo>
+                  <a:lnTo>
+                    <a:pt x="2600016" y="2527943"/>
+                  </a:lnTo>
+                  <a:lnTo>
+                    <a:pt x="2677650" y="2564145"/>
+                  </a:lnTo>
+                  <a:lnTo>
+                    <a:pt x="2755284" y="2598975"/>
+                  </a:lnTo>
+                  <a:lnTo>
+                    <a:pt x="2832918" y="2632486"/>
+                  </a:lnTo>
+                  <a:lnTo>
+                    <a:pt x="2910552" y="2664728"/>
+                  </a:lnTo>
+                  <a:lnTo>
+                    <a:pt x="2988186" y="2695749"/>
+                  </a:lnTo>
+                  <a:lnTo>
+                    <a:pt x="3065820" y="2725595"/>
+                  </a:lnTo>
+                  <a:lnTo>
+                    <a:pt x="3143454" y="2754310"/>
+                  </a:lnTo>
+                  <a:lnTo>
+                    <a:pt x="3221088" y="2781938"/>
+                  </a:lnTo>
+                  <a:lnTo>
+                    <a:pt x="3298722" y="2808520"/>
+                  </a:lnTo>
+                  <a:lnTo>
+                    <a:pt x="3376356" y="2834094"/>
+                  </a:lnTo>
+                  <a:lnTo>
+                    <a:pt x="3453990" y="2858700"/>
+                  </a:lnTo>
+                  <a:lnTo>
+                    <a:pt x="3531624" y="2882374"/>
+                  </a:lnTo>
+                  <a:lnTo>
+                    <a:pt x="3609258" y="2905152"/>
+                  </a:lnTo>
+                  <a:lnTo>
+                    <a:pt x="3686892" y="2927066"/>
+                  </a:lnTo>
+                  <a:lnTo>
+                    <a:pt x="3764526" y="2948151"/>
+                  </a:lnTo>
+                  <a:lnTo>
+                    <a:pt x="3842160" y="2968437"/>
+                  </a:lnTo>
+                  <a:lnTo>
+                    <a:pt x="3919794" y="2987954"/>
+                  </a:lnTo>
+                  <a:lnTo>
+                    <a:pt x="3997429" y="3006733"/>
+                  </a:lnTo>
+                  <a:lnTo>
+                    <a:pt x="4075063" y="3024800"/>
+                  </a:lnTo>
+                  <a:lnTo>
+                    <a:pt x="4152697" y="3042183"/>
+                  </a:lnTo>
+                  <a:lnTo>
+                    <a:pt x="4230331" y="3058907"/>
+                  </a:lnTo>
+                  <a:lnTo>
+                    <a:pt x="4307965" y="3074998"/>
+                  </a:lnTo>
+                  <a:lnTo>
+                    <a:pt x="4385599" y="3090480"/>
+                  </a:lnTo>
+                  <a:lnTo>
+                    <a:pt x="4463233" y="3105375"/>
+                  </a:lnTo>
+                  <a:lnTo>
+                    <a:pt x="4540867" y="3119706"/>
+                  </a:lnTo>
+                  <a:lnTo>
+                    <a:pt x="4618501" y="3133494"/>
+                  </a:lnTo>
+                  <a:lnTo>
+                    <a:pt x="4696135" y="3146760"/>
+                  </a:lnTo>
+                  <a:lnTo>
+                    <a:pt x="4773769" y="3159524"/>
+                  </a:lnTo>
+                  <a:lnTo>
+                    <a:pt x="4851403" y="3171804"/>
+                  </a:lnTo>
+                  <a:lnTo>
+                    <a:pt x="4929037" y="3183619"/>
+                  </a:lnTo>
+                  <a:lnTo>
+                    <a:pt x="5006671" y="3194987"/>
+                  </a:lnTo>
+                  <a:lnTo>
+                    <a:pt x="5084305" y="3205924"/>
+                  </a:lnTo>
+                  <a:lnTo>
+                    <a:pt x="5161939" y="3216446"/>
+                  </a:lnTo>
+                  <a:lnTo>
+                    <a:pt x="5239573" y="3226570"/>
+                  </a:lnTo>
+                  <a:lnTo>
+                    <a:pt x="5317207" y="3236311"/>
+                  </a:lnTo>
+                  <a:lnTo>
+                    <a:pt x="5394841" y="3245683"/>
+                  </a:lnTo>
+                  <a:lnTo>
+                    <a:pt x="5472475" y="3254700"/>
+                  </a:lnTo>
+                  <a:lnTo>
+                    <a:pt x="5550109" y="3263375"/>
+                  </a:lnTo>
+                  <a:lnTo>
+                    <a:pt x="5627743" y="3271722"/>
+                  </a:lnTo>
+                  <a:lnTo>
+                    <a:pt x="5705378" y="3279752"/>
+                  </a:lnTo>
+                  <a:lnTo>
+                    <a:pt x="5783012" y="3287479"/>
+                  </a:lnTo>
+                  <a:lnTo>
+                    <a:pt x="5860646" y="3294912"/>
+                  </a:lnTo>
+                  <a:lnTo>
+                    <a:pt x="5938280" y="3302065"/>
+                  </a:lnTo>
+                  <a:lnTo>
+                    <a:pt x="6015914" y="3308946"/>
+                  </a:lnTo>
+                  <a:lnTo>
+                    <a:pt x="6093548" y="3315567"/>
+                  </a:lnTo>
+                  <a:lnTo>
+                    <a:pt x="6171182" y="3321936"/>
+                  </a:lnTo>
+                  <a:lnTo>
+                    <a:pt x="6248816" y="3328065"/>
+                  </a:lnTo>
+                  <a:lnTo>
+                    <a:pt x="6326450" y="3333962"/>
+                  </a:lnTo>
+                  <a:lnTo>
+                    <a:pt x="6404084" y="3339635"/>
+                  </a:lnTo>
+                  <a:lnTo>
+                    <a:pt x="6481718" y="3345093"/>
+                  </a:lnTo>
+                  <a:lnTo>
+                    <a:pt x="6559352" y="3350345"/>
+                  </a:lnTo>
+                  <a:lnTo>
+                    <a:pt x="6636986" y="3355397"/>
+                  </a:lnTo>
+                  <a:lnTo>
+                    <a:pt x="6714620" y="3360259"/>
+                  </a:lnTo>
+                  <a:lnTo>
+                    <a:pt x="6792254" y="3364936"/>
+                  </a:lnTo>
+                  <a:lnTo>
+                    <a:pt x="6869888" y="3369436"/>
                   </a:lnTo>
                 </a:path>
               </a:pathLst>
@@ -4401,7 +4401,7 @@
           </p:nvSpPr>
           <p:spPr>
             <a:xfrm>
-              <a:off x="817517" y="4679530"/>
+              <a:off x="817517" y="4727786"/>
               <a:ext cx="7799693" cy="0"/>
             </a:xfrm>
             <a:custGeom>
@@ -4444,15 +4444,15 @@
           </p:nvSpPr>
           <p:spPr>
             <a:xfrm>
-              <a:off x="4203673" y="1896563"/>
-              <a:ext cx="0" cy="3826579"/>
+              <a:off x="4203673" y="2073503"/>
+              <a:ext cx="0" cy="3649639"/>
             </a:xfrm>
             <a:custGeom>
               <a:avLst/>
               <a:pathLst>
-                <a:path w="0" h="3826579">
+                <a:path w="0" h="3649639">
                   <a:moveTo>
-                    <a:pt x="0" y="3826579"/>
+                    <a:pt x="0" y="3649639"/>
                   </a:moveTo>
                   <a:lnTo>
                     <a:pt x="0" y="0"/>
@@ -4487,7 +4487,7 @@
           </p:nvSpPr>
           <p:spPr>
             <a:xfrm>
-              <a:off x="692708" y="5509156"/>
+              <a:off x="692708" y="5517199"/>
               <a:ext cx="62179" cy="80101"/>
             </a:xfrm>
             <a:prstGeom prst="rect">
@@ -4533,7 +4533,7 @@
           </p:nvSpPr>
           <p:spPr>
             <a:xfrm>
-              <a:off x="692708" y="4639479"/>
+              <a:off x="692708" y="4687735"/>
               <a:ext cx="62179" cy="80101"/>
             </a:xfrm>
             <a:prstGeom prst="rect">
@@ -4579,7 +4579,7 @@
           </p:nvSpPr>
           <p:spPr>
             <a:xfrm>
-              <a:off x="692708" y="3769802"/>
+              <a:off x="692708" y="3858272"/>
               <a:ext cx="62179" cy="80101"/>
             </a:xfrm>
             <a:prstGeom prst="rect">
@@ -4625,7 +4625,7 @@
           </p:nvSpPr>
           <p:spPr>
             <a:xfrm>
-              <a:off x="692708" y="2900125"/>
+              <a:off x="692708" y="3028808"/>
               <a:ext cx="62179" cy="80101"/>
             </a:xfrm>
             <a:prstGeom prst="rect">
@@ -4671,7 +4671,7 @@
           </p:nvSpPr>
           <p:spPr>
             <a:xfrm>
-              <a:off x="692708" y="2030448"/>
+              <a:off x="692708" y="2199345"/>
               <a:ext cx="62179" cy="80101"/>
             </a:xfrm>
             <a:prstGeom prst="rect">
@@ -4947,7 +4947,7 @@
           </p:nvSpPr>
           <p:spPr>
             <a:xfrm rot="-5400000">
-              <a:off x="181100" y="3759743"/>
+              <a:off x="181100" y="3848213"/>
               <a:ext cx="791596" cy="100218"/>
             </a:xfrm>
             <a:prstGeom prst="rect">
@@ -4988,6 +4988,52 @@
         <p:sp>
           <p:nvSpPr>
             <p:cNvPr id="38" name="tx38"/>
+            <p:cNvSpPr/>
+            <p:nvPr/>
+          </p:nvSpPr>
+          <p:spPr>
+            <a:xfrm>
+              <a:off x="817517" y="1896563"/>
+              <a:ext cx="4483851" cy="82021"/>
+            </a:xfrm>
+            <a:prstGeom prst="rect">
+              <a:avLst/>
+            </a:prstGeom>
+            <a:noFill/>
+          </p:spPr>
+          <p:txBody>
+            <a:bodyPr lIns="0" rIns="0" tIns="0" bIns="0" anchorCtr="1" anchor="ctr" wrap="none"/>
+            <a:lstStyle/>
+            <a:p>
+              <a:pPr algn="l" marL="0" marR="0" indent="0">
+                <a:lnSpc>
+                  <a:spcPts val="900"/>
+                </a:lnSpc>
+                <a:spcBef>
+                  <a:spcPts val="0"/>
+                </a:spcBef>
+                <a:spcAft>
+                  <a:spcPts val="0"/>
+                </a:spcAft>
+              </a:pPr>
+              <a:r>
+                <a:rPr sz="900">
+                  <a:solidFill>
+                    <a:srgbClr val="404040">
+                      <a:alpha val="100000"/>
+                    </a:srgbClr>
+                  </a:solidFill>
+                  <a:latin typeface="Helvetica"/>
+                  <a:cs typeface="Helvetica"/>
+                </a:rPr>
+                <a:t>HR = 0.64 (95% CI 0.44-0.95), p = 0.025   (per 0.1-unit increase in eGFR ratio (Cox PH))</a:t>
+              </a:r>
+            </a:p>
+          </p:txBody>
+        </p:sp>
+        <p:sp>
+          <p:nvSpPr>
+            <p:cNvPr id="39" name="tx39"/>
             <p:cNvSpPr/>
             <p:nvPr/>
           </p:nvSpPr>

--- a/docs/plots/carbo/jx_carbo_cox_linear_ratio_death.pptx
+++ b/docs/plots/carbo/jx_carbo_cox_linear_ratio_death.pptx
@@ -2271,26 +2271,26 @@
           </p:nvSpPr>
           <p:spPr>
             <a:xfrm>
-              <a:off x="817517" y="5142518"/>
-              <a:ext cx="7799693" cy="0"/>
+              <a:off x="915645" y="5071743"/>
+              <a:ext cx="7682587" cy="0"/>
             </a:xfrm>
             <a:custGeom>
               <a:avLst/>
               <a:pathLst>
-                <a:path w="7799693" h="0">
+                <a:path w="7682587" h="0">
                   <a:moveTo>
                     <a:pt x="0" y="0"/>
                   </a:moveTo>
                   <a:lnTo>
-                    <a:pt x="7799693" y="0"/>
-                  </a:lnTo>
-                  <a:lnTo>
-                    <a:pt x="7799693" y="0"/>
+                    <a:pt x="7682587" y="0"/>
+                  </a:lnTo>
+                  <a:lnTo>
+                    <a:pt x="7682587" y="0"/>
                   </a:lnTo>
                 </a:path>
               </a:pathLst>
             </a:custGeom>
-            <a:ln w="6775" cap="flat">
+            <a:ln w="8623" cap="flat">
               <a:solidFill>
                 <a:srgbClr val="EBEBEB">
                   <a:alpha val="100000"/>
@@ -2314,26 +2314,26 @@
           </p:nvSpPr>
           <p:spPr>
             <a:xfrm>
-              <a:off x="817517" y="4313054"/>
-              <a:ext cx="7799693" cy="0"/>
+              <a:off x="915645" y="4298074"/>
+              <a:ext cx="7682587" cy="0"/>
             </a:xfrm>
             <a:custGeom>
               <a:avLst/>
               <a:pathLst>
-                <a:path w="7799693" h="0">
+                <a:path w="7682587" h="0">
                   <a:moveTo>
                     <a:pt x="0" y="0"/>
                   </a:moveTo>
                   <a:lnTo>
-                    <a:pt x="7799693" y="0"/>
-                  </a:lnTo>
-                  <a:lnTo>
-                    <a:pt x="7799693" y="0"/>
+                    <a:pt x="7682587" y="0"/>
+                  </a:lnTo>
+                  <a:lnTo>
+                    <a:pt x="7682587" y="0"/>
                   </a:lnTo>
                 </a:path>
               </a:pathLst>
             </a:custGeom>
-            <a:ln w="6775" cap="flat">
+            <a:ln w="8623" cap="flat">
               <a:solidFill>
                 <a:srgbClr val="EBEBEB">
                   <a:alpha val="100000"/>
@@ -2357,26 +2357,26 @@
           </p:nvSpPr>
           <p:spPr>
             <a:xfrm>
-              <a:off x="817517" y="3483591"/>
-              <a:ext cx="7799693" cy="0"/>
+              <a:off x="915645" y="3524405"/>
+              <a:ext cx="7682587" cy="0"/>
             </a:xfrm>
             <a:custGeom>
               <a:avLst/>
               <a:pathLst>
-                <a:path w="7799693" h="0">
+                <a:path w="7682587" h="0">
                   <a:moveTo>
                     <a:pt x="0" y="0"/>
                   </a:moveTo>
                   <a:lnTo>
-                    <a:pt x="7799693" y="0"/>
-                  </a:lnTo>
-                  <a:lnTo>
-                    <a:pt x="7799693" y="0"/>
+                    <a:pt x="7682587" y="0"/>
+                  </a:lnTo>
+                  <a:lnTo>
+                    <a:pt x="7682587" y="0"/>
                   </a:lnTo>
                 </a:path>
               </a:pathLst>
             </a:custGeom>
-            <a:ln w="6775" cap="flat">
+            <a:ln w="8623" cap="flat">
               <a:solidFill>
                 <a:srgbClr val="EBEBEB">
                   <a:alpha val="100000"/>
@@ -2400,26 +2400,26 @@
           </p:nvSpPr>
           <p:spPr>
             <a:xfrm>
-              <a:off x="817517" y="2654127"/>
-              <a:ext cx="7799693" cy="0"/>
+              <a:off x="915645" y="2750737"/>
+              <a:ext cx="7682587" cy="0"/>
             </a:xfrm>
             <a:custGeom>
               <a:avLst/>
               <a:pathLst>
-                <a:path w="7799693" h="0">
+                <a:path w="7682587" h="0">
                   <a:moveTo>
                     <a:pt x="0" y="0"/>
                   </a:moveTo>
                   <a:lnTo>
-                    <a:pt x="7799693" y="0"/>
-                  </a:lnTo>
-                  <a:lnTo>
-                    <a:pt x="7799693" y="0"/>
+                    <a:pt x="7682587" y="0"/>
+                  </a:lnTo>
+                  <a:lnTo>
+                    <a:pt x="7682587" y="0"/>
                   </a:lnTo>
                 </a:path>
               </a:pathLst>
             </a:custGeom>
-            <a:ln w="6775" cap="flat">
+            <a:ln w="8623" cap="flat">
               <a:solidFill>
                 <a:srgbClr val="EBEBEB">
                   <a:alpha val="100000"/>
@@ -2443,15 +2443,15 @@
           </p:nvSpPr>
           <p:spPr>
             <a:xfrm>
-              <a:off x="1615213" y="2073503"/>
-              <a:ext cx="0" cy="3649639"/>
+              <a:off x="1701364" y="2209169"/>
+              <a:ext cx="0" cy="3404141"/>
             </a:xfrm>
             <a:custGeom>
               <a:avLst/>
               <a:pathLst>
-                <a:path w="0" h="3649639">
+                <a:path w="0" h="3404141">
                   <a:moveTo>
-                    <a:pt x="0" y="3649639"/>
+                    <a:pt x="0" y="3404141"/>
                   </a:moveTo>
                   <a:lnTo>
                     <a:pt x="0" y="0"/>
@@ -2462,7 +2462,7 @@
                 </a:path>
               </a:pathLst>
             </a:custGeom>
-            <a:ln w="6775" cap="flat">
+            <a:ln w="8623" cap="flat">
               <a:solidFill>
                 <a:srgbClr val="EBEBEB">
                   <a:alpha val="100000"/>
@@ -2486,15 +2486,15 @@
           </p:nvSpPr>
           <p:spPr>
             <a:xfrm>
-              <a:off x="3387871" y="2073503"/>
-              <a:ext cx="0" cy="3649639"/>
+              <a:off x="3447406" y="2209169"/>
+              <a:ext cx="0" cy="3404141"/>
             </a:xfrm>
             <a:custGeom>
               <a:avLst/>
               <a:pathLst>
-                <a:path w="0" h="3649639">
+                <a:path w="0" h="3404141">
                   <a:moveTo>
-                    <a:pt x="0" y="3649639"/>
+                    <a:pt x="0" y="3404141"/>
                   </a:moveTo>
                   <a:lnTo>
                     <a:pt x="0" y="0"/>
@@ -2505,7 +2505,7 @@
                 </a:path>
               </a:pathLst>
             </a:custGeom>
-            <a:ln w="6775" cap="flat">
+            <a:ln w="8623" cap="flat">
               <a:solidFill>
                 <a:srgbClr val="EBEBEB">
                   <a:alpha val="100000"/>
@@ -2529,15 +2529,15 @@
           </p:nvSpPr>
           <p:spPr>
             <a:xfrm>
-              <a:off x="5160528" y="2073503"/>
-              <a:ext cx="0" cy="3649639"/>
+              <a:off x="5193449" y="2209169"/>
+              <a:ext cx="0" cy="3404141"/>
             </a:xfrm>
             <a:custGeom>
               <a:avLst/>
               <a:pathLst>
-                <a:path w="0" h="3649639">
+                <a:path w="0" h="3404141">
                   <a:moveTo>
-                    <a:pt x="0" y="3649639"/>
+                    <a:pt x="0" y="3404141"/>
                   </a:moveTo>
                   <a:lnTo>
                     <a:pt x="0" y="0"/>
@@ -2548,7 +2548,7 @@
                 </a:path>
               </a:pathLst>
             </a:custGeom>
-            <a:ln w="6775" cap="flat">
+            <a:ln w="8623" cap="flat">
               <a:solidFill>
                 <a:srgbClr val="EBEBEB">
                   <a:alpha val="100000"/>
@@ -2572,15 +2572,15 @@
           </p:nvSpPr>
           <p:spPr>
             <a:xfrm>
-              <a:off x="6933186" y="2073503"/>
-              <a:ext cx="0" cy="3649639"/>
+              <a:off x="6939491" y="2209169"/>
+              <a:ext cx="0" cy="3404141"/>
             </a:xfrm>
             <a:custGeom>
               <a:avLst/>
               <a:pathLst>
-                <a:path w="0" h="3649639">
+                <a:path w="0" h="3404141">
                   <a:moveTo>
-                    <a:pt x="0" y="3649639"/>
+                    <a:pt x="0" y="3404141"/>
                   </a:moveTo>
                   <a:lnTo>
                     <a:pt x="0" y="0"/>
@@ -2591,7 +2591,7 @@
                 </a:path>
               </a:pathLst>
             </a:custGeom>
-            <a:ln w="6775" cap="flat">
+            <a:ln w="8623" cap="flat">
               <a:solidFill>
                 <a:srgbClr val="EBEBEB">
                   <a:alpha val="100000"/>
@@ -2615,26 +2615,26 @@
           </p:nvSpPr>
           <p:spPr>
             <a:xfrm>
-              <a:off x="817517" y="5557249"/>
-              <a:ext cx="7799693" cy="0"/>
+              <a:off x="915645" y="5458577"/>
+              <a:ext cx="7682587" cy="0"/>
             </a:xfrm>
             <a:custGeom>
               <a:avLst/>
               <a:pathLst>
-                <a:path w="7799693" h="0">
+                <a:path w="7682587" h="0">
                   <a:moveTo>
                     <a:pt x="0" y="0"/>
                   </a:moveTo>
                   <a:lnTo>
-                    <a:pt x="7799693" y="0"/>
-                  </a:lnTo>
-                  <a:lnTo>
-                    <a:pt x="7799693" y="0"/>
+                    <a:pt x="7682587" y="0"/>
+                  </a:lnTo>
+                  <a:lnTo>
+                    <a:pt x="7682587" y="0"/>
                   </a:lnTo>
                 </a:path>
               </a:pathLst>
             </a:custGeom>
-            <a:ln w="13550" cap="flat">
+            <a:ln w="17246" cap="flat">
               <a:solidFill>
                 <a:srgbClr val="EBEBEB">
                   <a:alpha val="100000"/>
@@ -2658,26 +2658,26 @@
           </p:nvSpPr>
           <p:spPr>
             <a:xfrm>
-              <a:off x="817517" y="4727786"/>
-              <a:ext cx="7799693" cy="0"/>
+              <a:off x="915645" y="4684908"/>
+              <a:ext cx="7682587" cy="0"/>
             </a:xfrm>
             <a:custGeom>
               <a:avLst/>
               <a:pathLst>
-                <a:path w="7799693" h="0">
+                <a:path w="7682587" h="0">
                   <a:moveTo>
                     <a:pt x="0" y="0"/>
                   </a:moveTo>
                   <a:lnTo>
-                    <a:pt x="7799693" y="0"/>
-                  </a:lnTo>
-                  <a:lnTo>
-                    <a:pt x="7799693" y="0"/>
+                    <a:pt x="7682587" y="0"/>
+                  </a:lnTo>
+                  <a:lnTo>
+                    <a:pt x="7682587" y="0"/>
                   </a:lnTo>
                 </a:path>
               </a:pathLst>
             </a:custGeom>
-            <a:ln w="13550" cap="flat">
+            <a:ln w="17246" cap="flat">
               <a:solidFill>
                 <a:srgbClr val="EBEBEB">
                   <a:alpha val="100000"/>
@@ -2701,26 +2701,26 @@
           </p:nvSpPr>
           <p:spPr>
             <a:xfrm>
-              <a:off x="817517" y="3898322"/>
-              <a:ext cx="7799693" cy="0"/>
+              <a:off x="915645" y="3911240"/>
+              <a:ext cx="7682587" cy="0"/>
             </a:xfrm>
             <a:custGeom>
               <a:avLst/>
               <a:pathLst>
-                <a:path w="7799693" h="0">
+                <a:path w="7682587" h="0">
                   <a:moveTo>
                     <a:pt x="0" y="0"/>
                   </a:moveTo>
                   <a:lnTo>
-                    <a:pt x="7799693" y="0"/>
-                  </a:lnTo>
-                  <a:lnTo>
-                    <a:pt x="7799693" y="0"/>
+                    <a:pt x="7682587" y="0"/>
+                  </a:lnTo>
+                  <a:lnTo>
+                    <a:pt x="7682587" y="0"/>
                   </a:lnTo>
                 </a:path>
               </a:pathLst>
             </a:custGeom>
-            <a:ln w="13550" cap="flat">
+            <a:ln w="17246" cap="flat">
               <a:solidFill>
                 <a:srgbClr val="EBEBEB">
                   <a:alpha val="100000"/>
@@ -2744,26 +2744,26 @@
           </p:nvSpPr>
           <p:spPr>
             <a:xfrm>
-              <a:off x="817517" y="3068859"/>
-              <a:ext cx="7799693" cy="0"/>
+              <a:off x="915645" y="3137571"/>
+              <a:ext cx="7682587" cy="0"/>
             </a:xfrm>
             <a:custGeom>
               <a:avLst/>
               <a:pathLst>
-                <a:path w="7799693" h="0">
+                <a:path w="7682587" h="0">
                   <a:moveTo>
                     <a:pt x="0" y="0"/>
                   </a:moveTo>
                   <a:lnTo>
-                    <a:pt x="7799693" y="0"/>
-                  </a:lnTo>
-                  <a:lnTo>
-                    <a:pt x="7799693" y="0"/>
+                    <a:pt x="7682587" y="0"/>
+                  </a:lnTo>
+                  <a:lnTo>
+                    <a:pt x="7682587" y="0"/>
                   </a:lnTo>
                 </a:path>
               </a:pathLst>
             </a:custGeom>
-            <a:ln w="13550" cap="flat">
+            <a:ln w="17246" cap="flat">
               <a:solidFill>
                 <a:srgbClr val="EBEBEB">
                   <a:alpha val="100000"/>
@@ -2787,26 +2787,26 @@
           </p:nvSpPr>
           <p:spPr>
             <a:xfrm>
-              <a:off x="817517" y="2239395"/>
-              <a:ext cx="7799693" cy="0"/>
+              <a:off x="915645" y="2363903"/>
+              <a:ext cx="7682587" cy="0"/>
             </a:xfrm>
             <a:custGeom>
               <a:avLst/>
               <a:pathLst>
-                <a:path w="7799693" h="0">
+                <a:path w="7682587" h="0">
                   <a:moveTo>
                     <a:pt x="0" y="0"/>
                   </a:moveTo>
                   <a:lnTo>
-                    <a:pt x="7799693" y="0"/>
-                  </a:lnTo>
-                  <a:lnTo>
-                    <a:pt x="7799693" y="0"/>
+                    <a:pt x="7682587" y="0"/>
+                  </a:lnTo>
+                  <a:lnTo>
+                    <a:pt x="7682587" y="0"/>
                   </a:lnTo>
                 </a:path>
               </a:pathLst>
             </a:custGeom>
-            <a:ln w="13550" cap="flat">
+            <a:ln w="17246" cap="flat">
               <a:solidFill>
                 <a:srgbClr val="EBEBEB">
                   <a:alpha val="100000"/>
@@ -2830,15 +2830,15 @@
           </p:nvSpPr>
           <p:spPr>
             <a:xfrm>
-              <a:off x="2501542" y="2073503"/>
-              <a:ext cx="0" cy="3649639"/>
+              <a:off x="2574385" y="2209169"/>
+              <a:ext cx="0" cy="3404141"/>
             </a:xfrm>
             <a:custGeom>
               <a:avLst/>
               <a:pathLst>
-                <a:path w="0" h="3649639">
+                <a:path w="0" h="3404141">
                   <a:moveTo>
-                    <a:pt x="0" y="3649639"/>
+                    <a:pt x="0" y="3404141"/>
                   </a:moveTo>
                   <a:lnTo>
                     <a:pt x="0" y="0"/>
@@ -2849,7 +2849,7 @@
                 </a:path>
               </a:pathLst>
             </a:custGeom>
-            <a:ln w="13550" cap="flat">
+            <a:ln w="17246" cap="flat">
               <a:solidFill>
                 <a:srgbClr val="EBEBEB">
                   <a:alpha val="100000"/>
@@ -2873,15 +2873,15 @@
           </p:nvSpPr>
           <p:spPr>
             <a:xfrm>
-              <a:off x="4274200" y="2073503"/>
-              <a:ext cx="0" cy="3649639"/>
+              <a:off x="4320427" y="2209169"/>
+              <a:ext cx="0" cy="3404141"/>
             </a:xfrm>
             <a:custGeom>
               <a:avLst/>
               <a:pathLst>
-                <a:path w="0" h="3649639">
+                <a:path w="0" h="3404141">
                   <a:moveTo>
-                    <a:pt x="0" y="3649639"/>
+                    <a:pt x="0" y="3404141"/>
                   </a:moveTo>
                   <a:lnTo>
                     <a:pt x="0" y="0"/>
@@ -2892,7 +2892,7 @@
                 </a:path>
               </a:pathLst>
             </a:custGeom>
-            <a:ln w="13550" cap="flat">
+            <a:ln w="17246" cap="flat">
               <a:solidFill>
                 <a:srgbClr val="EBEBEB">
                   <a:alpha val="100000"/>
@@ -2916,15 +2916,15 @@
           </p:nvSpPr>
           <p:spPr>
             <a:xfrm>
-              <a:off x="6046857" y="2073503"/>
-              <a:ext cx="0" cy="3649639"/>
+              <a:off x="6066470" y="2209169"/>
+              <a:ext cx="0" cy="3404141"/>
             </a:xfrm>
             <a:custGeom>
               <a:avLst/>
               <a:pathLst>
-                <a:path w="0" h="3649639">
+                <a:path w="0" h="3404141">
                   <a:moveTo>
-                    <a:pt x="0" y="3649639"/>
+                    <a:pt x="0" y="3404141"/>
                   </a:moveTo>
                   <a:lnTo>
                     <a:pt x="0" y="0"/>
@@ -2935,7 +2935,7 @@
                 </a:path>
               </a:pathLst>
             </a:custGeom>
-            <a:ln w="13550" cap="flat">
+            <a:ln w="17246" cap="flat">
               <a:solidFill>
                 <a:srgbClr val="EBEBEB">
                   <a:alpha val="100000"/>
@@ -2959,15 +2959,15 @@
           </p:nvSpPr>
           <p:spPr>
             <a:xfrm>
-              <a:off x="7819515" y="2073503"/>
-              <a:ext cx="0" cy="3649639"/>
+              <a:off x="7812512" y="2209169"/>
+              <a:ext cx="0" cy="3404141"/>
             </a:xfrm>
             <a:custGeom>
               <a:avLst/>
               <a:pathLst>
-                <a:path w="0" h="3649639">
+                <a:path w="0" h="3404141">
                   <a:moveTo>
-                    <a:pt x="0" y="3649639"/>
+                    <a:pt x="0" y="3404141"/>
                   </a:moveTo>
                   <a:lnTo>
                     <a:pt x="0" y="0"/>
@@ -2978,7 +2978,7 @@
                 </a:path>
               </a:pathLst>
             </a:custGeom>
-            <a:ln w="13550" cap="flat">
+            <a:ln w="17246" cap="flat">
               <a:solidFill>
                 <a:srgbClr val="EBEBEB">
                   <a:alpha val="100000"/>
@@ -3002,519 +3002,519 @@
           </p:nvSpPr>
           <p:spPr>
             <a:xfrm>
-              <a:off x="817517" y="2073503"/>
-              <a:ext cx="7370972" cy="3463594"/>
+              <a:off x="915645" y="2209169"/>
+              <a:ext cx="7260303" cy="3230611"/>
             </a:xfrm>
             <a:custGeom>
               <a:avLst/>
               <a:pathLst>
-                <a:path w="7370972" h="3463594">
+                <a:path w="7260303" h="3230611">
                   <a:moveTo>
-                    <a:pt x="1848197" y="0"/>
+                    <a:pt x="1820448" y="0"/>
                   </a:moveTo>
                   <a:lnTo>
-                    <a:pt x="1858955" y="35885"/>
-                  </a:lnTo>
-                  <a:lnTo>
-                    <a:pt x="1936589" y="276769"/>
-                  </a:lnTo>
-                  <a:lnTo>
-                    <a:pt x="2014223" y="500823"/>
-                  </a:lnTo>
-                  <a:lnTo>
-                    <a:pt x="2091857" y="709224"/>
-                  </a:lnTo>
-                  <a:lnTo>
-                    <a:pt x="2169491" y="903064"/>
-                  </a:lnTo>
-                  <a:lnTo>
-                    <a:pt x="2247125" y="1083363"/>
-                  </a:lnTo>
-                  <a:lnTo>
-                    <a:pt x="2324759" y="1251064"/>
-                  </a:lnTo>
-                  <a:lnTo>
-                    <a:pt x="2402393" y="1407050"/>
-                  </a:lnTo>
-                  <a:lnTo>
-                    <a:pt x="2480027" y="1552137"/>
-                  </a:lnTo>
-                  <a:lnTo>
-                    <a:pt x="2557661" y="1687088"/>
-                  </a:lnTo>
-                  <a:lnTo>
-                    <a:pt x="2635295" y="1812611"/>
-                  </a:lnTo>
-                  <a:lnTo>
-                    <a:pt x="2712930" y="1929364"/>
-                  </a:lnTo>
-                  <a:lnTo>
-                    <a:pt x="2790564" y="2037960"/>
-                  </a:lnTo>
-                  <a:lnTo>
-                    <a:pt x="2868198" y="2138970"/>
-                  </a:lnTo>
-                  <a:lnTo>
-                    <a:pt x="2945832" y="2232922"/>
-                  </a:lnTo>
-                  <a:lnTo>
-                    <a:pt x="3023466" y="2320310"/>
-                  </a:lnTo>
-                  <a:lnTo>
-                    <a:pt x="3101100" y="2401593"/>
-                  </a:lnTo>
-                  <a:lnTo>
-                    <a:pt x="3178734" y="2477197"/>
-                  </a:lnTo>
-                  <a:lnTo>
-                    <a:pt x="3256368" y="2547519"/>
-                  </a:lnTo>
-                  <a:lnTo>
-                    <a:pt x="3334002" y="2612929"/>
-                  </a:lnTo>
-                  <a:lnTo>
-                    <a:pt x="3411636" y="2655588"/>
-                  </a:lnTo>
-                  <a:lnTo>
-                    <a:pt x="3489270" y="2659552"/>
-                  </a:lnTo>
-                  <a:lnTo>
-                    <a:pt x="3566904" y="2663497"/>
-                  </a:lnTo>
-                  <a:lnTo>
-                    <a:pt x="3644538" y="2667423"/>
-                  </a:lnTo>
-                  <a:lnTo>
-                    <a:pt x="3722172" y="2671330"/>
-                  </a:lnTo>
-                  <a:lnTo>
-                    <a:pt x="3799806" y="2675219"/>
-                  </a:lnTo>
-                  <a:lnTo>
-                    <a:pt x="3877440" y="2679089"/>
-                  </a:lnTo>
-                  <a:lnTo>
-                    <a:pt x="3955074" y="2682940"/>
-                  </a:lnTo>
-                  <a:lnTo>
-                    <a:pt x="4032708" y="2686773"/>
-                  </a:lnTo>
-                  <a:lnTo>
-                    <a:pt x="4110342" y="2690588"/>
-                  </a:lnTo>
-                  <a:lnTo>
-                    <a:pt x="4187976" y="2694384"/>
-                  </a:lnTo>
-                  <a:lnTo>
-                    <a:pt x="4265610" y="2698163"/>
-                  </a:lnTo>
-                  <a:lnTo>
-                    <a:pt x="4343244" y="2701923"/>
-                  </a:lnTo>
-                  <a:lnTo>
-                    <a:pt x="4420879" y="2705665"/>
-                  </a:lnTo>
-                  <a:lnTo>
-                    <a:pt x="4498513" y="2709389"/>
-                  </a:lnTo>
-                  <a:lnTo>
-                    <a:pt x="4576147" y="2713096"/>
-                  </a:lnTo>
-                  <a:lnTo>
-                    <a:pt x="4653781" y="2716784"/>
-                  </a:lnTo>
-                  <a:lnTo>
-                    <a:pt x="4731415" y="2720455"/>
-                  </a:lnTo>
-                  <a:lnTo>
-                    <a:pt x="4809049" y="2724109"/>
-                  </a:lnTo>
-                  <a:lnTo>
-                    <a:pt x="4886683" y="2727745"/>
-                  </a:lnTo>
-                  <a:lnTo>
-                    <a:pt x="4964317" y="2731363"/>
-                  </a:lnTo>
-                  <a:lnTo>
-                    <a:pt x="5041951" y="2734965"/>
-                  </a:lnTo>
-                  <a:lnTo>
-                    <a:pt x="5119585" y="2738549"/>
-                  </a:lnTo>
-                  <a:lnTo>
-                    <a:pt x="5197219" y="2742115"/>
-                  </a:lnTo>
-                  <a:lnTo>
-                    <a:pt x="5274853" y="2745665"/>
-                  </a:lnTo>
-                  <a:lnTo>
-                    <a:pt x="5352487" y="2749198"/>
-                  </a:lnTo>
-                  <a:lnTo>
-                    <a:pt x="5430121" y="2752714"/>
-                  </a:lnTo>
-                  <a:lnTo>
-                    <a:pt x="5507755" y="2756213"/>
-                  </a:lnTo>
-                  <a:lnTo>
-                    <a:pt x="5585389" y="2759695"/>
-                  </a:lnTo>
-                  <a:lnTo>
-                    <a:pt x="5663023" y="2763161"/>
-                  </a:lnTo>
-                  <a:lnTo>
-                    <a:pt x="5740657" y="2766610"/>
-                  </a:lnTo>
-                  <a:lnTo>
-                    <a:pt x="5818291" y="2770042"/>
-                  </a:lnTo>
-                  <a:lnTo>
-                    <a:pt x="5895925" y="2773458"/>
-                  </a:lnTo>
-                  <a:lnTo>
-                    <a:pt x="5973559" y="2776858"/>
-                  </a:lnTo>
-                  <a:lnTo>
-                    <a:pt x="6051193" y="2780242"/>
-                  </a:lnTo>
-                  <a:lnTo>
-                    <a:pt x="6128827" y="2783609"/>
-                  </a:lnTo>
-                  <a:lnTo>
-                    <a:pt x="6206462" y="2786960"/>
-                  </a:lnTo>
-                  <a:lnTo>
-                    <a:pt x="6284096" y="2790295"/>
-                  </a:lnTo>
-                  <a:lnTo>
-                    <a:pt x="6361730" y="2793614"/>
-                  </a:lnTo>
-                  <a:lnTo>
-                    <a:pt x="6439364" y="2796918"/>
-                  </a:lnTo>
-                  <a:lnTo>
-                    <a:pt x="6516998" y="2800205"/>
-                  </a:lnTo>
-                  <a:lnTo>
-                    <a:pt x="6594632" y="2803477"/>
-                  </a:lnTo>
-                  <a:lnTo>
-                    <a:pt x="6672266" y="2806733"/>
-                  </a:lnTo>
-                  <a:lnTo>
-                    <a:pt x="6749900" y="2809973"/>
-                  </a:lnTo>
-                  <a:lnTo>
-                    <a:pt x="6827534" y="2813198"/>
-                  </a:lnTo>
-                  <a:lnTo>
-                    <a:pt x="6905168" y="2816408"/>
-                  </a:lnTo>
-                  <a:lnTo>
-                    <a:pt x="6982802" y="2819602"/>
-                  </a:lnTo>
-                  <a:lnTo>
-                    <a:pt x="7060436" y="2822781"/>
-                  </a:lnTo>
-                  <a:lnTo>
-                    <a:pt x="7138070" y="2825945"/>
-                  </a:lnTo>
-                  <a:lnTo>
-                    <a:pt x="7215704" y="2829093"/>
-                  </a:lnTo>
-                  <a:lnTo>
-                    <a:pt x="7293338" y="2832227"/>
-                  </a:lnTo>
-                  <a:lnTo>
-                    <a:pt x="7370972" y="2835345"/>
-                  </a:lnTo>
-                  <a:lnTo>
-                    <a:pt x="7370972" y="3463594"/>
-                  </a:lnTo>
-                  <a:lnTo>
-                    <a:pt x="7293338" y="3462080"/>
-                  </a:lnTo>
-                  <a:lnTo>
-                    <a:pt x="7215704" y="3460453"/>
-                  </a:lnTo>
-                  <a:lnTo>
-                    <a:pt x="7138070" y="3458703"/>
-                  </a:lnTo>
-                  <a:lnTo>
-                    <a:pt x="7060436" y="3456822"/>
-                  </a:lnTo>
-                  <a:lnTo>
-                    <a:pt x="6982802" y="3454800"/>
-                  </a:lnTo>
-                  <a:lnTo>
-                    <a:pt x="6905168" y="3452626"/>
-                  </a:lnTo>
-                  <a:lnTo>
-                    <a:pt x="6827534" y="3450288"/>
-                  </a:lnTo>
-                  <a:lnTo>
-                    <a:pt x="6749900" y="3447775"/>
-                  </a:lnTo>
-                  <a:lnTo>
-                    <a:pt x="6672266" y="3445073"/>
-                  </a:lnTo>
-                  <a:lnTo>
-                    <a:pt x="6594632" y="3442168"/>
-                  </a:lnTo>
-                  <a:lnTo>
-                    <a:pt x="6516998" y="3439045"/>
-                  </a:lnTo>
-                  <a:lnTo>
-                    <a:pt x="6439364" y="3435687"/>
-                  </a:lnTo>
-                  <a:lnTo>
-                    <a:pt x="6361730" y="3432078"/>
-                  </a:lnTo>
-                  <a:lnTo>
-                    <a:pt x="6284096" y="3428197"/>
-                  </a:lnTo>
-                  <a:lnTo>
-                    <a:pt x="6206462" y="3424024"/>
-                  </a:lnTo>
-                  <a:lnTo>
-                    <a:pt x="6128827" y="3419538"/>
-                  </a:lnTo>
-                  <a:lnTo>
-                    <a:pt x="6051193" y="3414715"/>
-                  </a:lnTo>
-                  <a:lnTo>
-                    <a:pt x="5973559" y="3409530"/>
-                  </a:lnTo>
-                  <a:lnTo>
-                    <a:pt x="5895925" y="3403956"/>
-                  </a:lnTo>
-                  <a:lnTo>
-                    <a:pt x="5818291" y="3397963"/>
-                  </a:lnTo>
-                  <a:lnTo>
-                    <a:pt x="5740657" y="3391519"/>
-                  </a:lnTo>
-                  <a:lnTo>
-                    <a:pt x="5663023" y="3384592"/>
-                  </a:lnTo>
-                  <a:lnTo>
-                    <a:pt x="5585389" y="3377144"/>
-                  </a:lnTo>
-                  <a:lnTo>
-                    <a:pt x="5507755" y="3369137"/>
-                  </a:lnTo>
-                  <a:lnTo>
-                    <a:pt x="5430121" y="3360528"/>
-                  </a:lnTo>
-                  <a:lnTo>
-                    <a:pt x="5352487" y="3351273"/>
-                  </a:lnTo>
-                  <a:lnTo>
-                    <a:pt x="5274853" y="3341323"/>
-                  </a:lnTo>
-                  <a:lnTo>
-                    <a:pt x="5197219" y="3330625"/>
-                  </a:lnTo>
-                  <a:lnTo>
-                    <a:pt x="5119585" y="3319124"/>
-                  </a:lnTo>
-                  <a:lnTo>
-                    <a:pt x="5041951" y="3306759"/>
-                  </a:lnTo>
-                  <a:lnTo>
-                    <a:pt x="4964317" y="3293465"/>
-                  </a:lnTo>
-                  <a:lnTo>
-                    <a:pt x="4886683" y="3279172"/>
-                  </a:lnTo>
-                  <a:lnTo>
-                    <a:pt x="4809049" y="3263806"/>
-                  </a:lnTo>
-                  <a:lnTo>
-                    <a:pt x="4731415" y="3247286"/>
-                  </a:lnTo>
-                  <a:lnTo>
-                    <a:pt x="4653781" y="3229525"/>
-                  </a:lnTo>
-                  <a:lnTo>
-                    <a:pt x="4576147" y="3210430"/>
-                  </a:lnTo>
-                  <a:lnTo>
-                    <a:pt x="4498513" y="3189900"/>
-                  </a:lnTo>
-                  <a:lnTo>
-                    <a:pt x="4420879" y="3167829"/>
-                  </a:lnTo>
-                  <a:lnTo>
-                    <a:pt x="4343244" y="3144099"/>
-                  </a:lnTo>
-                  <a:lnTo>
-                    <a:pt x="4265610" y="3118588"/>
-                  </a:lnTo>
-                  <a:lnTo>
-                    <a:pt x="4187976" y="3091160"/>
-                  </a:lnTo>
-                  <a:lnTo>
-                    <a:pt x="4110342" y="3061672"/>
-                  </a:lnTo>
-                  <a:lnTo>
-                    <a:pt x="4032708" y="3029969"/>
-                  </a:lnTo>
-                  <a:lnTo>
-                    <a:pt x="3955074" y="2995885"/>
-                  </a:lnTo>
-                  <a:lnTo>
-                    <a:pt x="3877440" y="2959240"/>
-                  </a:lnTo>
-                  <a:lnTo>
-                    <a:pt x="3799806" y="2919843"/>
-                  </a:lnTo>
-                  <a:lnTo>
-                    <a:pt x="3722172" y="2877487"/>
-                  </a:lnTo>
-                  <a:lnTo>
-                    <a:pt x="3644538" y="2831950"/>
-                  </a:lnTo>
-                  <a:lnTo>
-                    <a:pt x="3566904" y="2782992"/>
-                  </a:lnTo>
-                  <a:lnTo>
-                    <a:pt x="3489270" y="2730357"/>
-                  </a:lnTo>
-                  <a:lnTo>
-                    <a:pt x="3411636" y="2673768"/>
-                  </a:lnTo>
-                  <a:lnTo>
-                    <a:pt x="3334002" y="2651605"/>
-                  </a:lnTo>
-                  <a:lnTo>
-                    <a:pt x="3256368" y="2647603"/>
-                  </a:lnTo>
-                  <a:lnTo>
-                    <a:pt x="3178734" y="2643581"/>
-                  </a:lnTo>
-                  <a:lnTo>
-                    <a:pt x="3101100" y="2639541"/>
-                  </a:lnTo>
-                  <a:lnTo>
-                    <a:pt x="3023466" y="2635481"/>
-                  </a:lnTo>
-                  <a:lnTo>
-                    <a:pt x="2945832" y="2631401"/>
-                  </a:lnTo>
-                  <a:lnTo>
-                    <a:pt x="2868198" y="2627302"/>
-                  </a:lnTo>
-                  <a:lnTo>
-                    <a:pt x="2790564" y="2623183"/>
-                  </a:lnTo>
-                  <a:lnTo>
-                    <a:pt x="2712930" y="2619044"/>
-                  </a:lnTo>
-                  <a:lnTo>
-                    <a:pt x="2635295" y="2614885"/>
-                  </a:lnTo>
-                  <a:lnTo>
-                    <a:pt x="2557661" y="2610706"/>
-                  </a:lnTo>
-                  <a:lnTo>
-                    <a:pt x="2480027" y="2606507"/>
-                  </a:lnTo>
-                  <a:lnTo>
-                    <a:pt x="2402393" y="2602288"/>
-                  </a:lnTo>
-                  <a:lnTo>
-                    <a:pt x="2324759" y="2598049"/>
-                  </a:lnTo>
-                  <a:lnTo>
-                    <a:pt x="2247125" y="2593789"/>
-                  </a:lnTo>
-                  <a:lnTo>
-                    <a:pt x="2169491" y="2589509"/>
-                  </a:lnTo>
-                  <a:lnTo>
-                    <a:pt x="2091857" y="2585208"/>
-                  </a:lnTo>
-                  <a:lnTo>
-                    <a:pt x="2014223" y="2580887"/>
-                  </a:lnTo>
-                  <a:lnTo>
-                    <a:pt x="1936589" y="2576544"/>
-                  </a:lnTo>
-                  <a:lnTo>
-                    <a:pt x="1858955" y="2572181"/>
-                  </a:lnTo>
-                  <a:lnTo>
-                    <a:pt x="1781321" y="2567797"/>
-                  </a:lnTo>
-                  <a:lnTo>
-                    <a:pt x="1703687" y="2563392"/>
-                  </a:lnTo>
-                  <a:lnTo>
-                    <a:pt x="1626053" y="2558965"/>
-                  </a:lnTo>
-                  <a:lnTo>
-                    <a:pt x="1548419" y="2554518"/>
-                  </a:lnTo>
-                  <a:lnTo>
-                    <a:pt x="1470785" y="2550049"/>
-                  </a:lnTo>
-                  <a:lnTo>
-                    <a:pt x="1393151" y="2545558"/>
-                  </a:lnTo>
-                  <a:lnTo>
-                    <a:pt x="1315517" y="2541046"/>
-                  </a:lnTo>
-                  <a:lnTo>
-                    <a:pt x="1237883" y="2536512"/>
-                  </a:lnTo>
-                  <a:lnTo>
-                    <a:pt x="1160249" y="2531956"/>
-                  </a:lnTo>
-                  <a:lnTo>
-                    <a:pt x="1082615" y="2527379"/>
-                  </a:lnTo>
-                  <a:lnTo>
-                    <a:pt x="1004981" y="2522779"/>
-                  </a:lnTo>
-                  <a:lnTo>
-                    <a:pt x="927346" y="2518157"/>
-                  </a:lnTo>
-                  <a:lnTo>
-                    <a:pt x="849712" y="2513513"/>
-                  </a:lnTo>
-                  <a:lnTo>
-                    <a:pt x="772078" y="2508847"/>
-                  </a:lnTo>
-                  <a:lnTo>
-                    <a:pt x="694444" y="2504158"/>
-                  </a:lnTo>
-                  <a:lnTo>
-                    <a:pt x="616810" y="2499447"/>
-                  </a:lnTo>
-                  <a:lnTo>
-                    <a:pt x="539176" y="2494713"/>
-                  </a:lnTo>
-                  <a:lnTo>
-                    <a:pt x="461542" y="2489956"/>
-                  </a:lnTo>
-                  <a:lnTo>
-                    <a:pt x="383908" y="2485177"/>
-                  </a:lnTo>
-                  <a:lnTo>
-                    <a:pt x="306274" y="2480374"/>
-                  </a:lnTo>
-                  <a:lnTo>
-                    <a:pt x="228640" y="2475548"/>
-                  </a:lnTo>
-                  <a:lnTo>
-                    <a:pt x="151006" y="2470700"/>
-                  </a:lnTo>
-                  <a:lnTo>
-                    <a:pt x="73372" y="2465827"/>
-                  </a:lnTo>
-                  <a:lnTo>
-                    <a:pt x="0" y="2461200"/>
+                    <a:pt x="1831044" y="33471"/>
+                  </a:lnTo>
+                  <a:lnTo>
+                    <a:pt x="1907513" y="258151"/>
+                  </a:lnTo>
+                  <a:lnTo>
+                    <a:pt x="1983981" y="467134"/>
+                  </a:lnTo>
+                  <a:lnTo>
+                    <a:pt x="2060450" y="661517"/>
+                  </a:lnTo>
+                  <a:lnTo>
+                    <a:pt x="2136918" y="842319"/>
+                  </a:lnTo>
+                  <a:lnTo>
+                    <a:pt x="2213386" y="1010489"/>
+                  </a:lnTo>
+                  <a:lnTo>
+                    <a:pt x="2289855" y="1166910"/>
+                  </a:lnTo>
+                  <a:lnTo>
+                    <a:pt x="2366323" y="1312403"/>
+                  </a:lnTo>
+                  <a:lnTo>
+                    <a:pt x="2442792" y="1447731"/>
+                  </a:lnTo>
+                  <a:lnTo>
+                    <a:pt x="2519260" y="1573604"/>
+                  </a:lnTo>
+                  <a:lnTo>
+                    <a:pt x="2595729" y="1690683"/>
+                  </a:lnTo>
+                  <a:lnTo>
+                    <a:pt x="2672197" y="1799583"/>
+                  </a:lnTo>
+                  <a:lnTo>
+                    <a:pt x="2748666" y="1900874"/>
+                  </a:lnTo>
+                  <a:lnTo>
+                    <a:pt x="2825134" y="1995089"/>
+                  </a:lnTo>
+                  <a:lnTo>
+                    <a:pt x="2901602" y="2082721"/>
+                  </a:lnTo>
+                  <a:lnTo>
+                    <a:pt x="2978071" y="2164231"/>
+                  </a:lnTo>
+                  <a:lnTo>
+                    <a:pt x="3054539" y="2240047"/>
+                  </a:lnTo>
+                  <a:lnTo>
+                    <a:pt x="3131008" y="2310565"/>
+                  </a:lnTo>
+                  <a:lnTo>
+                    <a:pt x="3207476" y="2376157"/>
+                  </a:lnTo>
+                  <a:lnTo>
+                    <a:pt x="3283945" y="2437166"/>
+                  </a:lnTo>
+                  <a:lnTo>
+                    <a:pt x="3360413" y="2476956"/>
+                  </a:lnTo>
+                  <a:lnTo>
+                    <a:pt x="3436881" y="2480654"/>
+                  </a:lnTo>
+                  <a:lnTo>
+                    <a:pt x="3513350" y="2484333"/>
+                  </a:lnTo>
+                  <a:lnTo>
+                    <a:pt x="3589818" y="2487995"/>
+                  </a:lnTo>
+                  <a:lnTo>
+                    <a:pt x="3666287" y="2491640"/>
+                  </a:lnTo>
+                  <a:lnTo>
+                    <a:pt x="3742755" y="2495267"/>
+                  </a:lnTo>
+                  <a:lnTo>
+                    <a:pt x="3819224" y="2498876"/>
+                  </a:lnTo>
+                  <a:lnTo>
+                    <a:pt x="3895692" y="2502469"/>
+                  </a:lnTo>
+                  <a:lnTo>
+                    <a:pt x="3972160" y="2506044"/>
+                  </a:lnTo>
+                  <a:lnTo>
+                    <a:pt x="4048629" y="2509602"/>
+                  </a:lnTo>
+                  <a:lnTo>
+                    <a:pt x="4125097" y="2513143"/>
+                  </a:lnTo>
+                  <a:lnTo>
+                    <a:pt x="4201566" y="2516667"/>
+                  </a:lnTo>
+                  <a:lnTo>
+                    <a:pt x="4278034" y="2520174"/>
+                  </a:lnTo>
+                  <a:lnTo>
+                    <a:pt x="4354503" y="2523665"/>
+                  </a:lnTo>
+                  <a:lnTo>
+                    <a:pt x="4430971" y="2527139"/>
+                  </a:lnTo>
+                  <a:lnTo>
+                    <a:pt x="4507439" y="2530596"/>
+                  </a:lnTo>
+                  <a:lnTo>
+                    <a:pt x="4583908" y="2534036"/>
+                  </a:lnTo>
+                  <a:lnTo>
+                    <a:pt x="4660376" y="2537460"/>
+                  </a:lnTo>
+                  <a:lnTo>
+                    <a:pt x="4736845" y="2540868"/>
+                  </a:lnTo>
+                  <a:lnTo>
+                    <a:pt x="4813313" y="2544259"/>
+                  </a:lnTo>
+                  <a:lnTo>
+                    <a:pt x="4889782" y="2547634"/>
+                  </a:lnTo>
+                  <a:lnTo>
+                    <a:pt x="4966250" y="2550993"/>
+                  </a:lnTo>
+                  <a:lnTo>
+                    <a:pt x="5042719" y="2554336"/>
+                  </a:lnTo>
+                  <a:lnTo>
+                    <a:pt x="5119187" y="2557663"/>
+                  </a:lnTo>
+                  <a:lnTo>
+                    <a:pt x="5195655" y="2560974"/>
+                  </a:lnTo>
+                  <a:lnTo>
+                    <a:pt x="5272124" y="2564269"/>
+                  </a:lnTo>
+                  <a:lnTo>
+                    <a:pt x="5348592" y="2567549"/>
+                  </a:lnTo>
+                  <a:lnTo>
+                    <a:pt x="5425061" y="2570813"/>
+                  </a:lnTo>
+                  <a:lnTo>
+                    <a:pt x="5501529" y="2574061"/>
+                  </a:lnTo>
+                  <a:lnTo>
+                    <a:pt x="5577998" y="2577293"/>
+                  </a:lnTo>
+                  <a:lnTo>
+                    <a:pt x="5654466" y="2580510"/>
+                  </a:lnTo>
+                  <a:lnTo>
+                    <a:pt x="5730934" y="2583712"/>
+                  </a:lnTo>
+                  <a:lnTo>
+                    <a:pt x="5807403" y="2586898"/>
+                  </a:lnTo>
+                  <a:lnTo>
+                    <a:pt x="5883871" y="2590069"/>
+                  </a:lnTo>
+                  <a:lnTo>
+                    <a:pt x="5960340" y="2593225"/>
+                  </a:lnTo>
+                  <a:lnTo>
+                    <a:pt x="6036808" y="2596366"/>
+                  </a:lnTo>
+                  <a:lnTo>
+                    <a:pt x="6113277" y="2599492"/>
+                  </a:lnTo>
+                  <a:lnTo>
+                    <a:pt x="6189745" y="2602602"/>
+                  </a:lnTo>
+                  <a:lnTo>
+                    <a:pt x="6266213" y="2605698"/>
+                  </a:lnTo>
+                  <a:lnTo>
+                    <a:pt x="6342682" y="2608779"/>
+                  </a:lnTo>
+                  <a:lnTo>
+                    <a:pt x="6419150" y="2611846"/>
+                  </a:lnTo>
+                  <a:lnTo>
+                    <a:pt x="6495619" y="2614897"/>
+                  </a:lnTo>
+                  <a:lnTo>
+                    <a:pt x="6572087" y="2617934"/>
+                  </a:lnTo>
+                  <a:lnTo>
+                    <a:pt x="6648556" y="2620957"/>
+                  </a:lnTo>
+                  <a:lnTo>
+                    <a:pt x="6725024" y="2623965"/>
+                  </a:lnTo>
+                  <a:lnTo>
+                    <a:pt x="6801492" y="2626959"/>
+                  </a:lnTo>
+                  <a:lnTo>
+                    <a:pt x="6877961" y="2629938"/>
+                  </a:lnTo>
+                  <a:lnTo>
+                    <a:pt x="6954429" y="2632903"/>
+                  </a:lnTo>
+                  <a:lnTo>
+                    <a:pt x="7030898" y="2635854"/>
+                  </a:lnTo>
+                  <a:lnTo>
+                    <a:pt x="7107366" y="2638791"/>
+                  </a:lnTo>
+                  <a:lnTo>
+                    <a:pt x="7183835" y="2641713"/>
+                  </a:lnTo>
+                  <a:lnTo>
+                    <a:pt x="7260303" y="2644622"/>
+                  </a:lnTo>
+                  <a:lnTo>
+                    <a:pt x="7260303" y="3230611"/>
+                  </a:lnTo>
+                  <a:lnTo>
+                    <a:pt x="7183835" y="3229199"/>
+                  </a:lnTo>
+                  <a:lnTo>
+                    <a:pt x="7107366" y="3227681"/>
+                  </a:lnTo>
+                  <a:lnTo>
+                    <a:pt x="7030898" y="3226049"/>
+                  </a:lnTo>
+                  <a:lnTo>
+                    <a:pt x="6954429" y="3224294"/>
+                  </a:lnTo>
+                  <a:lnTo>
+                    <a:pt x="6877961" y="3222408"/>
+                  </a:lnTo>
+                  <a:lnTo>
+                    <a:pt x="6801492" y="3220380"/>
+                  </a:lnTo>
+                  <a:lnTo>
+                    <a:pt x="6725024" y="3218200"/>
+                  </a:lnTo>
+                  <a:lnTo>
+                    <a:pt x="6648556" y="3215856"/>
+                  </a:lnTo>
+                  <a:lnTo>
+                    <a:pt x="6572087" y="3213335"/>
+                  </a:lnTo>
+                  <a:lnTo>
+                    <a:pt x="6495619" y="3210626"/>
+                  </a:lnTo>
+                  <a:lnTo>
+                    <a:pt x="6419150" y="3207713"/>
+                  </a:lnTo>
+                  <a:lnTo>
+                    <a:pt x="6342682" y="3204581"/>
+                  </a:lnTo>
+                  <a:lnTo>
+                    <a:pt x="6266213" y="3201214"/>
+                  </a:lnTo>
+                  <a:lnTo>
+                    <a:pt x="6189745" y="3197594"/>
+                  </a:lnTo>
+                  <a:lnTo>
+                    <a:pt x="6113277" y="3193703"/>
+                  </a:lnTo>
+                  <a:lnTo>
+                    <a:pt x="6036808" y="3189518"/>
+                  </a:lnTo>
+                  <a:lnTo>
+                    <a:pt x="5960340" y="3185020"/>
+                  </a:lnTo>
+                  <a:lnTo>
+                    <a:pt x="5883871" y="3180184"/>
+                  </a:lnTo>
+                  <a:lnTo>
+                    <a:pt x="5807403" y="3174984"/>
+                  </a:lnTo>
+                  <a:lnTo>
+                    <a:pt x="5730934" y="3169394"/>
+                  </a:lnTo>
+                  <a:lnTo>
+                    <a:pt x="5654466" y="3163384"/>
+                  </a:lnTo>
+                  <a:lnTo>
+                    <a:pt x="5577998" y="3156923"/>
+                  </a:lnTo>
+                  <a:lnTo>
+                    <a:pt x="5501529" y="3149976"/>
+                  </a:lnTo>
+                  <a:lnTo>
+                    <a:pt x="5425061" y="3142507"/>
+                  </a:lnTo>
+                  <a:lnTo>
+                    <a:pt x="5348592" y="3134478"/>
+                  </a:lnTo>
+                  <a:lnTo>
+                    <a:pt x="5272124" y="3125845"/>
+                  </a:lnTo>
+                  <a:lnTo>
+                    <a:pt x="5195655" y="3116564"/>
+                  </a:lnTo>
+                  <a:lnTo>
+                    <a:pt x="5119187" y="3106586"/>
+                  </a:lnTo>
+                  <a:lnTo>
+                    <a:pt x="5042719" y="3095858"/>
+                  </a:lnTo>
+                  <a:lnTo>
+                    <a:pt x="4966250" y="3084325"/>
+                  </a:lnTo>
+                  <a:lnTo>
+                    <a:pt x="4889782" y="3071925"/>
+                  </a:lnTo>
+                  <a:lnTo>
+                    <a:pt x="4813313" y="3058594"/>
+                  </a:lnTo>
+                  <a:lnTo>
+                    <a:pt x="4736845" y="3044262"/>
+                  </a:lnTo>
+                  <a:lnTo>
+                    <a:pt x="4660376" y="3028853"/>
+                  </a:lnTo>
+                  <a:lnTo>
+                    <a:pt x="4583908" y="3012286"/>
+                  </a:lnTo>
+                  <a:lnTo>
+                    <a:pt x="4507439" y="2994476"/>
+                  </a:lnTo>
+                  <a:lnTo>
+                    <a:pt x="4430971" y="2975327"/>
+                  </a:lnTo>
+                  <a:lnTo>
+                    <a:pt x="4354503" y="2954740"/>
+                  </a:lnTo>
+                  <a:lnTo>
+                    <a:pt x="4278034" y="2932607"/>
+                  </a:lnTo>
+                  <a:lnTo>
+                    <a:pt x="4201566" y="2908812"/>
+                  </a:lnTo>
+                  <a:lnTo>
+                    <a:pt x="4125097" y="2883229"/>
+                  </a:lnTo>
+                  <a:lnTo>
+                    <a:pt x="4048629" y="2855724"/>
+                  </a:lnTo>
+                  <a:lnTo>
+                    <a:pt x="3972160" y="2826154"/>
+                  </a:lnTo>
+                  <a:lnTo>
+                    <a:pt x="3895692" y="2794362"/>
+                  </a:lnTo>
+                  <a:lnTo>
+                    <a:pt x="3819224" y="2760183"/>
+                  </a:lnTo>
+                  <a:lnTo>
+                    <a:pt x="3742755" y="2723436"/>
+                  </a:lnTo>
+                  <a:lnTo>
+                    <a:pt x="3666287" y="2683929"/>
+                  </a:lnTo>
+                  <a:lnTo>
+                    <a:pt x="3589818" y="2641455"/>
+                  </a:lnTo>
+                  <a:lnTo>
+                    <a:pt x="3513350" y="2595790"/>
+                  </a:lnTo>
+                  <a:lnTo>
+                    <a:pt x="3436881" y="2546696"/>
+                  </a:lnTo>
+                  <a:lnTo>
+                    <a:pt x="3360413" y="2493913"/>
+                  </a:lnTo>
+                  <a:lnTo>
+                    <a:pt x="3283945" y="2473241"/>
+                  </a:lnTo>
+                  <a:lnTo>
+                    <a:pt x="3207476" y="2469508"/>
+                  </a:lnTo>
+                  <a:lnTo>
+                    <a:pt x="3131008" y="2465757"/>
+                  </a:lnTo>
+                  <a:lnTo>
+                    <a:pt x="3054539" y="2461989"/>
+                  </a:lnTo>
+                  <a:lnTo>
+                    <a:pt x="2978071" y="2458201"/>
+                  </a:lnTo>
+                  <a:lnTo>
+                    <a:pt x="2901602" y="2454396"/>
+                  </a:lnTo>
+                  <a:lnTo>
+                    <a:pt x="2825134" y="2450573"/>
+                  </a:lnTo>
+                  <a:lnTo>
+                    <a:pt x="2748666" y="2446731"/>
+                  </a:lnTo>
+                  <a:lnTo>
+                    <a:pt x="2672197" y="2442870"/>
+                  </a:lnTo>
+                  <a:lnTo>
+                    <a:pt x="2595729" y="2438991"/>
+                  </a:lnTo>
+                  <a:lnTo>
+                    <a:pt x="2519260" y="2435094"/>
+                  </a:lnTo>
+                  <a:lnTo>
+                    <a:pt x="2442792" y="2431177"/>
+                  </a:lnTo>
+                  <a:lnTo>
+                    <a:pt x="2366323" y="2427242"/>
+                  </a:lnTo>
+                  <a:lnTo>
+                    <a:pt x="2289855" y="2423288"/>
+                  </a:lnTo>
+                  <a:lnTo>
+                    <a:pt x="2213386" y="2419314"/>
+                  </a:lnTo>
+                  <a:lnTo>
+                    <a:pt x="2136918" y="2415322"/>
+                  </a:lnTo>
+                  <a:lnTo>
+                    <a:pt x="2060450" y="2411311"/>
+                  </a:lnTo>
+                  <a:lnTo>
+                    <a:pt x="1983981" y="2407280"/>
+                  </a:lnTo>
+                  <a:lnTo>
+                    <a:pt x="1907513" y="2403230"/>
+                  </a:lnTo>
+                  <a:lnTo>
+                    <a:pt x="1831044" y="2399160"/>
+                  </a:lnTo>
+                  <a:lnTo>
+                    <a:pt x="1754576" y="2395071"/>
+                  </a:lnTo>
+                  <a:lnTo>
+                    <a:pt x="1678107" y="2390962"/>
+                  </a:lnTo>
+                  <a:lnTo>
+                    <a:pt x="1601639" y="2386833"/>
+                  </a:lnTo>
+                  <a:lnTo>
+                    <a:pt x="1525171" y="2382685"/>
+                  </a:lnTo>
+                  <a:lnTo>
+                    <a:pt x="1448702" y="2378516"/>
+                  </a:lnTo>
+                  <a:lnTo>
+                    <a:pt x="1372234" y="2374328"/>
+                  </a:lnTo>
+                  <a:lnTo>
+                    <a:pt x="1295765" y="2370119"/>
+                  </a:lnTo>
+                  <a:lnTo>
+                    <a:pt x="1219297" y="2365890"/>
+                  </a:lnTo>
+                  <a:lnTo>
+                    <a:pt x="1142828" y="2361641"/>
+                  </a:lnTo>
+                  <a:lnTo>
+                    <a:pt x="1066360" y="2357371"/>
+                  </a:lnTo>
+                  <a:lnTo>
+                    <a:pt x="989892" y="2353081"/>
+                  </a:lnTo>
+                  <a:lnTo>
+                    <a:pt x="913423" y="2348770"/>
+                  </a:lnTo>
+                  <a:lnTo>
+                    <a:pt x="836955" y="2344439"/>
+                  </a:lnTo>
+                  <a:lnTo>
+                    <a:pt x="760486" y="2340086"/>
+                  </a:lnTo>
+                  <a:lnTo>
+                    <a:pt x="684018" y="2335713"/>
+                  </a:lnTo>
+                  <a:lnTo>
+                    <a:pt x="607549" y="2331318"/>
+                  </a:lnTo>
+                  <a:lnTo>
+                    <a:pt x="531081" y="2326903"/>
+                  </a:lnTo>
+                  <a:lnTo>
+                    <a:pt x="454613" y="2322466"/>
+                  </a:lnTo>
+                  <a:lnTo>
+                    <a:pt x="378144" y="2318008"/>
+                  </a:lnTo>
+                  <a:lnTo>
+                    <a:pt x="301676" y="2313528"/>
+                  </a:lnTo>
+                  <a:lnTo>
+                    <a:pt x="225207" y="2309027"/>
+                  </a:lnTo>
+                  <a:lnTo>
+                    <a:pt x="148739" y="2304505"/>
+                  </a:lnTo>
+                  <a:lnTo>
+                    <a:pt x="72270" y="2299960"/>
+                  </a:lnTo>
+                  <a:lnTo>
+                    <a:pt x="0" y="2295645"/>
                   </a:lnTo>
                   <a:close/>
                 </a:path>
@@ -3540,231 +3540,231 @@
           </p:nvSpPr>
           <p:spPr>
             <a:xfrm>
-              <a:off x="2665715" y="2073503"/>
-              <a:ext cx="5522774" cy="2835345"/>
+              <a:off x="2736093" y="2209169"/>
+              <a:ext cx="5439854" cy="2644622"/>
             </a:xfrm>
             <a:custGeom>
               <a:avLst/>
               <a:pathLst>
-                <a:path w="5522774" h="2835345">
+                <a:path w="5439854" h="2644622">
                   <a:moveTo>
                     <a:pt x="0" y="0"/>
                   </a:moveTo>
                   <a:lnTo>
-                    <a:pt x="10757" y="35885"/>
-                  </a:lnTo>
-                  <a:lnTo>
-                    <a:pt x="88391" y="276769"/>
-                  </a:lnTo>
-                  <a:lnTo>
-                    <a:pt x="166025" y="500823"/>
-                  </a:lnTo>
-                  <a:lnTo>
-                    <a:pt x="243659" y="709224"/>
-                  </a:lnTo>
-                  <a:lnTo>
-                    <a:pt x="321293" y="903064"/>
-                  </a:lnTo>
-                  <a:lnTo>
-                    <a:pt x="398927" y="1083363"/>
-                  </a:lnTo>
-                  <a:lnTo>
-                    <a:pt x="476561" y="1251064"/>
-                  </a:lnTo>
-                  <a:lnTo>
-                    <a:pt x="554195" y="1407050"/>
-                  </a:lnTo>
-                  <a:lnTo>
-                    <a:pt x="631829" y="1552137"/>
-                  </a:lnTo>
-                  <a:lnTo>
-                    <a:pt x="709464" y="1687088"/>
-                  </a:lnTo>
-                  <a:lnTo>
-                    <a:pt x="787098" y="1812611"/>
-                  </a:lnTo>
-                  <a:lnTo>
-                    <a:pt x="864732" y="1929364"/>
-                  </a:lnTo>
-                  <a:lnTo>
-                    <a:pt x="942366" y="2037960"/>
-                  </a:lnTo>
-                  <a:lnTo>
-                    <a:pt x="1020000" y="2138970"/>
-                  </a:lnTo>
-                  <a:lnTo>
-                    <a:pt x="1097634" y="2232922"/>
-                  </a:lnTo>
-                  <a:lnTo>
-                    <a:pt x="1175268" y="2320310"/>
-                  </a:lnTo>
-                  <a:lnTo>
-                    <a:pt x="1252902" y="2401593"/>
-                  </a:lnTo>
-                  <a:lnTo>
-                    <a:pt x="1330536" y="2477197"/>
-                  </a:lnTo>
-                  <a:lnTo>
-                    <a:pt x="1408170" y="2547519"/>
-                  </a:lnTo>
-                  <a:lnTo>
-                    <a:pt x="1485804" y="2612929"/>
-                  </a:lnTo>
-                  <a:lnTo>
-                    <a:pt x="1563438" y="2655588"/>
-                  </a:lnTo>
-                  <a:lnTo>
-                    <a:pt x="1641072" y="2659552"/>
-                  </a:lnTo>
-                  <a:lnTo>
-                    <a:pt x="1718706" y="2663497"/>
-                  </a:lnTo>
-                  <a:lnTo>
-                    <a:pt x="1796340" y="2667423"/>
-                  </a:lnTo>
-                  <a:lnTo>
-                    <a:pt x="1873974" y="2671330"/>
-                  </a:lnTo>
-                  <a:lnTo>
-                    <a:pt x="1951608" y="2675219"/>
-                  </a:lnTo>
-                  <a:lnTo>
-                    <a:pt x="2029242" y="2679089"/>
-                  </a:lnTo>
-                  <a:lnTo>
-                    <a:pt x="2106876" y="2682940"/>
-                  </a:lnTo>
-                  <a:lnTo>
-                    <a:pt x="2184510" y="2686773"/>
-                  </a:lnTo>
-                  <a:lnTo>
-                    <a:pt x="2262144" y="2690588"/>
-                  </a:lnTo>
-                  <a:lnTo>
-                    <a:pt x="2339778" y="2694384"/>
-                  </a:lnTo>
-                  <a:lnTo>
-                    <a:pt x="2417412" y="2698163"/>
-                  </a:lnTo>
-                  <a:lnTo>
-                    <a:pt x="2495047" y="2701923"/>
-                  </a:lnTo>
-                  <a:lnTo>
-                    <a:pt x="2572681" y="2705665"/>
-                  </a:lnTo>
-                  <a:lnTo>
-                    <a:pt x="2650315" y="2709389"/>
-                  </a:lnTo>
-                  <a:lnTo>
-                    <a:pt x="2727949" y="2713096"/>
-                  </a:lnTo>
-                  <a:lnTo>
-                    <a:pt x="2805583" y="2716784"/>
-                  </a:lnTo>
-                  <a:lnTo>
-                    <a:pt x="2883217" y="2720455"/>
-                  </a:lnTo>
-                  <a:lnTo>
-                    <a:pt x="2960851" y="2724109"/>
-                  </a:lnTo>
-                  <a:lnTo>
-                    <a:pt x="3038485" y="2727745"/>
-                  </a:lnTo>
-                  <a:lnTo>
-                    <a:pt x="3116119" y="2731363"/>
-                  </a:lnTo>
-                  <a:lnTo>
-                    <a:pt x="3193753" y="2734965"/>
-                  </a:lnTo>
-                  <a:lnTo>
-                    <a:pt x="3271387" y="2738549"/>
-                  </a:lnTo>
-                  <a:lnTo>
-                    <a:pt x="3349021" y="2742115"/>
-                  </a:lnTo>
-                  <a:lnTo>
-                    <a:pt x="3426655" y="2745665"/>
-                  </a:lnTo>
-                  <a:lnTo>
-                    <a:pt x="3504289" y="2749198"/>
-                  </a:lnTo>
-                  <a:lnTo>
-                    <a:pt x="3581923" y="2752714"/>
-                  </a:lnTo>
-                  <a:lnTo>
-                    <a:pt x="3659557" y="2756213"/>
-                  </a:lnTo>
-                  <a:lnTo>
-                    <a:pt x="3737191" y="2759695"/>
-                  </a:lnTo>
-                  <a:lnTo>
-                    <a:pt x="3814825" y="2763161"/>
-                  </a:lnTo>
-                  <a:lnTo>
-                    <a:pt x="3892459" y="2766610"/>
-                  </a:lnTo>
-                  <a:lnTo>
-                    <a:pt x="3970093" y="2770042"/>
-                  </a:lnTo>
-                  <a:lnTo>
-                    <a:pt x="4047727" y="2773458"/>
-                  </a:lnTo>
-                  <a:lnTo>
-                    <a:pt x="4125361" y="2776858"/>
-                  </a:lnTo>
-                  <a:lnTo>
-                    <a:pt x="4202996" y="2780242"/>
-                  </a:lnTo>
-                  <a:lnTo>
-                    <a:pt x="4280630" y="2783609"/>
-                  </a:lnTo>
-                  <a:lnTo>
-                    <a:pt x="4358264" y="2786960"/>
-                  </a:lnTo>
-                  <a:lnTo>
-                    <a:pt x="4435898" y="2790295"/>
-                  </a:lnTo>
-                  <a:lnTo>
-                    <a:pt x="4513532" y="2793614"/>
-                  </a:lnTo>
-                  <a:lnTo>
-                    <a:pt x="4591166" y="2796918"/>
-                  </a:lnTo>
-                  <a:lnTo>
-                    <a:pt x="4668800" y="2800205"/>
-                  </a:lnTo>
-                  <a:lnTo>
-                    <a:pt x="4746434" y="2803477"/>
-                  </a:lnTo>
-                  <a:lnTo>
-                    <a:pt x="4824068" y="2806733"/>
-                  </a:lnTo>
-                  <a:lnTo>
-                    <a:pt x="4901702" y="2809973"/>
-                  </a:lnTo>
-                  <a:lnTo>
-                    <a:pt x="4979336" y="2813198"/>
-                  </a:lnTo>
-                  <a:lnTo>
-                    <a:pt x="5056970" y="2816408"/>
-                  </a:lnTo>
-                  <a:lnTo>
-                    <a:pt x="5134604" y="2819602"/>
-                  </a:lnTo>
-                  <a:lnTo>
-                    <a:pt x="5212238" y="2822781"/>
-                  </a:lnTo>
-                  <a:lnTo>
-                    <a:pt x="5289872" y="2825945"/>
-                  </a:lnTo>
-                  <a:lnTo>
-                    <a:pt x="5367506" y="2829093"/>
-                  </a:lnTo>
-                  <a:lnTo>
-                    <a:pt x="5445140" y="2832227"/>
-                  </a:lnTo>
-                  <a:lnTo>
-                    <a:pt x="5522774" y="2835345"/>
+                    <a:pt x="10596" y="33471"/>
+                  </a:lnTo>
+                  <a:lnTo>
+                    <a:pt x="87064" y="258151"/>
+                  </a:lnTo>
+                  <a:lnTo>
+                    <a:pt x="163532" y="467134"/>
+                  </a:lnTo>
+                  <a:lnTo>
+                    <a:pt x="240001" y="661517"/>
+                  </a:lnTo>
+                  <a:lnTo>
+                    <a:pt x="316469" y="842319"/>
+                  </a:lnTo>
+                  <a:lnTo>
+                    <a:pt x="392938" y="1010489"/>
+                  </a:lnTo>
+                  <a:lnTo>
+                    <a:pt x="469406" y="1166910"/>
+                  </a:lnTo>
+                  <a:lnTo>
+                    <a:pt x="545875" y="1312403"/>
+                  </a:lnTo>
+                  <a:lnTo>
+                    <a:pt x="622343" y="1447731"/>
+                  </a:lnTo>
+                  <a:lnTo>
+                    <a:pt x="698811" y="1573604"/>
+                  </a:lnTo>
+                  <a:lnTo>
+                    <a:pt x="775280" y="1690683"/>
+                  </a:lnTo>
+                  <a:lnTo>
+                    <a:pt x="851748" y="1799583"/>
+                  </a:lnTo>
+                  <a:lnTo>
+                    <a:pt x="928217" y="1900874"/>
+                  </a:lnTo>
+                  <a:lnTo>
+                    <a:pt x="1004685" y="1995089"/>
+                  </a:lnTo>
+                  <a:lnTo>
+                    <a:pt x="1081154" y="2082721"/>
+                  </a:lnTo>
+                  <a:lnTo>
+                    <a:pt x="1157622" y="2164231"/>
+                  </a:lnTo>
+                  <a:lnTo>
+                    <a:pt x="1234091" y="2240047"/>
+                  </a:lnTo>
+                  <a:lnTo>
+                    <a:pt x="1310559" y="2310565"/>
+                  </a:lnTo>
+                  <a:lnTo>
+                    <a:pt x="1387027" y="2376157"/>
+                  </a:lnTo>
+                  <a:lnTo>
+                    <a:pt x="1463496" y="2437166"/>
+                  </a:lnTo>
+                  <a:lnTo>
+                    <a:pt x="1539964" y="2476956"/>
+                  </a:lnTo>
+                  <a:lnTo>
+                    <a:pt x="1616433" y="2480654"/>
+                  </a:lnTo>
+                  <a:lnTo>
+                    <a:pt x="1692901" y="2484333"/>
+                  </a:lnTo>
+                  <a:lnTo>
+                    <a:pt x="1769370" y="2487995"/>
+                  </a:lnTo>
+                  <a:lnTo>
+                    <a:pt x="1845838" y="2491640"/>
+                  </a:lnTo>
+                  <a:lnTo>
+                    <a:pt x="1922306" y="2495267"/>
+                  </a:lnTo>
+                  <a:lnTo>
+                    <a:pt x="1998775" y="2498876"/>
+                  </a:lnTo>
+                  <a:lnTo>
+                    <a:pt x="2075243" y="2502469"/>
+                  </a:lnTo>
+                  <a:lnTo>
+                    <a:pt x="2151712" y="2506044"/>
+                  </a:lnTo>
+                  <a:lnTo>
+                    <a:pt x="2228180" y="2509602"/>
+                  </a:lnTo>
+                  <a:lnTo>
+                    <a:pt x="2304649" y="2513143"/>
+                  </a:lnTo>
+                  <a:lnTo>
+                    <a:pt x="2381117" y="2516667"/>
+                  </a:lnTo>
+                  <a:lnTo>
+                    <a:pt x="2457585" y="2520174"/>
+                  </a:lnTo>
+                  <a:lnTo>
+                    <a:pt x="2534054" y="2523665"/>
+                  </a:lnTo>
+                  <a:lnTo>
+                    <a:pt x="2610522" y="2527139"/>
+                  </a:lnTo>
+                  <a:lnTo>
+                    <a:pt x="2686991" y="2530596"/>
+                  </a:lnTo>
+                  <a:lnTo>
+                    <a:pt x="2763459" y="2534036"/>
+                  </a:lnTo>
+                  <a:lnTo>
+                    <a:pt x="2839928" y="2537460"/>
+                  </a:lnTo>
+                  <a:lnTo>
+                    <a:pt x="2916396" y="2540868"/>
+                  </a:lnTo>
+                  <a:lnTo>
+                    <a:pt x="2992864" y="2544259"/>
+                  </a:lnTo>
+                  <a:lnTo>
+                    <a:pt x="3069333" y="2547634"/>
+                  </a:lnTo>
+                  <a:lnTo>
+                    <a:pt x="3145801" y="2550993"/>
+                  </a:lnTo>
+                  <a:lnTo>
+                    <a:pt x="3222270" y="2554336"/>
+                  </a:lnTo>
+                  <a:lnTo>
+                    <a:pt x="3298738" y="2557663"/>
+                  </a:lnTo>
+                  <a:lnTo>
+                    <a:pt x="3375207" y="2560974"/>
+                  </a:lnTo>
+                  <a:lnTo>
+                    <a:pt x="3451675" y="2564269"/>
+                  </a:lnTo>
+                  <a:lnTo>
+                    <a:pt x="3528144" y="2567549"/>
+                  </a:lnTo>
+                  <a:lnTo>
+                    <a:pt x="3604612" y="2570813"/>
+                  </a:lnTo>
+                  <a:lnTo>
+                    <a:pt x="3681080" y="2574061"/>
+                  </a:lnTo>
+                  <a:lnTo>
+                    <a:pt x="3757549" y="2577293"/>
+                  </a:lnTo>
+                  <a:lnTo>
+                    <a:pt x="3834017" y="2580510"/>
+                  </a:lnTo>
+                  <a:lnTo>
+                    <a:pt x="3910486" y="2583712"/>
+                  </a:lnTo>
+                  <a:lnTo>
+                    <a:pt x="3986954" y="2586898"/>
+                  </a:lnTo>
+                  <a:lnTo>
+                    <a:pt x="4063423" y="2590069"/>
+                  </a:lnTo>
+                  <a:lnTo>
+                    <a:pt x="4139891" y="2593225"/>
+                  </a:lnTo>
+                  <a:lnTo>
+                    <a:pt x="4216359" y="2596366"/>
+                  </a:lnTo>
+                  <a:lnTo>
+                    <a:pt x="4292828" y="2599492"/>
+                  </a:lnTo>
+                  <a:lnTo>
+                    <a:pt x="4369296" y="2602602"/>
+                  </a:lnTo>
+                  <a:lnTo>
+                    <a:pt x="4445765" y="2605698"/>
+                  </a:lnTo>
+                  <a:lnTo>
+                    <a:pt x="4522233" y="2608779"/>
+                  </a:lnTo>
+                  <a:lnTo>
+                    <a:pt x="4598702" y="2611846"/>
+                  </a:lnTo>
+                  <a:lnTo>
+                    <a:pt x="4675170" y="2614897"/>
+                  </a:lnTo>
+                  <a:lnTo>
+                    <a:pt x="4751638" y="2617934"/>
+                  </a:lnTo>
+                  <a:lnTo>
+                    <a:pt x="4828107" y="2620957"/>
+                  </a:lnTo>
+                  <a:lnTo>
+                    <a:pt x="4904575" y="2623965"/>
+                  </a:lnTo>
+                  <a:lnTo>
+                    <a:pt x="4981044" y="2626959"/>
+                  </a:lnTo>
+                  <a:lnTo>
+                    <a:pt x="5057512" y="2629938"/>
+                  </a:lnTo>
+                  <a:lnTo>
+                    <a:pt x="5133981" y="2632903"/>
+                  </a:lnTo>
+                  <a:lnTo>
+                    <a:pt x="5210449" y="2635854"/>
+                  </a:lnTo>
+                  <a:lnTo>
+                    <a:pt x="5286917" y="2638791"/>
+                  </a:lnTo>
+                  <a:lnTo>
+                    <a:pt x="5363386" y="2641713"/>
+                  </a:lnTo>
+                  <a:lnTo>
+                    <a:pt x="5439854" y="2644622"/>
                   </a:lnTo>
                 </a:path>
               </a:pathLst>
@@ -3784,297 +3784,297 @@
           </p:nvSpPr>
           <p:spPr>
             <a:xfrm>
-              <a:off x="817517" y="4534704"/>
-              <a:ext cx="7370972" cy="1002393"/>
+              <a:off x="915645" y="4504814"/>
+              <a:ext cx="7260303" cy="934966"/>
             </a:xfrm>
             <a:custGeom>
               <a:avLst/>
               <a:pathLst>
-                <a:path w="7370972" h="1002393">
+                <a:path w="7260303" h="934966">
                   <a:moveTo>
-                    <a:pt x="7370972" y="1002393"/>
+                    <a:pt x="7260303" y="934966"/>
                   </a:moveTo>
                   <a:lnTo>
-                    <a:pt x="7293338" y="1000879"/>
-                  </a:lnTo>
-                  <a:lnTo>
-                    <a:pt x="7215704" y="999252"/>
-                  </a:lnTo>
-                  <a:lnTo>
-                    <a:pt x="7138070" y="997502"/>
-                  </a:lnTo>
-                  <a:lnTo>
-                    <a:pt x="7060436" y="995621"/>
-                  </a:lnTo>
-                  <a:lnTo>
-                    <a:pt x="6982802" y="993599"/>
-                  </a:lnTo>
-                  <a:lnTo>
-                    <a:pt x="6905168" y="991425"/>
-                  </a:lnTo>
-                  <a:lnTo>
-                    <a:pt x="6827534" y="989087"/>
-                  </a:lnTo>
-                  <a:lnTo>
-                    <a:pt x="6749900" y="986574"/>
-                  </a:lnTo>
-                  <a:lnTo>
-                    <a:pt x="6672266" y="983872"/>
-                  </a:lnTo>
-                  <a:lnTo>
-                    <a:pt x="6594632" y="980967"/>
-                  </a:lnTo>
-                  <a:lnTo>
-                    <a:pt x="6516998" y="977844"/>
-                  </a:lnTo>
-                  <a:lnTo>
-                    <a:pt x="6439364" y="974486"/>
-                  </a:lnTo>
-                  <a:lnTo>
-                    <a:pt x="6361730" y="970877"/>
-                  </a:lnTo>
-                  <a:lnTo>
-                    <a:pt x="6284096" y="966996"/>
-                  </a:lnTo>
-                  <a:lnTo>
-                    <a:pt x="6206462" y="962823"/>
-                  </a:lnTo>
-                  <a:lnTo>
-                    <a:pt x="6128827" y="958337"/>
-                  </a:lnTo>
-                  <a:lnTo>
-                    <a:pt x="6051193" y="953514"/>
-                  </a:lnTo>
-                  <a:lnTo>
-                    <a:pt x="5973559" y="948329"/>
-                  </a:lnTo>
-                  <a:lnTo>
-                    <a:pt x="5895925" y="942755"/>
-                  </a:lnTo>
-                  <a:lnTo>
-                    <a:pt x="5818291" y="936762"/>
-                  </a:lnTo>
-                  <a:lnTo>
-                    <a:pt x="5740657" y="930318"/>
-                  </a:lnTo>
-                  <a:lnTo>
-                    <a:pt x="5663023" y="923391"/>
-                  </a:lnTo>
-                  <a:lnTo>
-                    <a:pt x="5585389" y="915943"/>
-                  </a:lnTo>
-                  <a:lnTo>
-                    <a:pt x="5507755" y="907936"/>
-                  </a:lnTo>
-                  <a:lnTo>
-                    <a:pt x="5430121" y="899327"/>
-                  </a:lnTo>
-                  <a:lnTo>
-                    <a:pt x="5352487" y="890072"/>
-                  </a:lnTo>
-                  <a:lnTo>
-                    <a:pt x="5274853" y="880122"/>
-                  </a:lnTo>
-                  <a:lnTo>
-                    <a:pt x="5197219" y="869424"/>
-                  </a:lnTo>
-                  <a:lnTo>
-                    <a:pt x="5119585" y="857923"/>
-                  </a:lnTo>
-                  <a:lnTo>
-                    <a:pt x="5041951" y="845558"/>
-                  </a:lnTo>
-                  <a:lnTo>
-                    <a:pt x="4964317" y="832264"/>
-                  </a:lnTo>
-                  <a:lnTo>
-                    <a:pt x="4886683" y="817971"/>
-                  </a:lnTo>
-                  <a:lnTo>
-                    <a:pt x="4809049" y="802605"/>
-                  </a:lnTo>
-                  <a:lnTo>
-                    <a:pt x="4731415" y="786085"/>
-                  </a:lnTo>
-                  <a:lnTo>
-                    <a:pt x="4653781" y="768324"/>
-                  </a:lnTo>
-                  <a:lnTo>
-                    <a:pt x="4576147" y="749229"/>
-                  </a:lnTo>
-                  <a:lnTo>
-                    <a:pt x="4498513" y="728699"/>
-                  </a:lnTo>
-                  <a:lnTo>
-                    <a:pt x="4420879" y="706628"/>
-                  </a:lnTo>
-                  <a:lnTo>
-                    <a:pt x="4343244" y="682898"/>
-                  </a:lnTo>
-                  <a:lnTo>
-                    <a:pt x="4265610" y="657387"/>
-                  </a:lnTo>
-                  <a:lnTo>
-                    <a:pt x="4187976" y="629959"/>
-                  </a:lnTo>
-                  <a:lnTo>
-                    <a:pt x="4110342" y="600471"/>
-                  </a:lnTo>
-                  <a:lnTo>
-                    <a:pt x="4032708" y="568768"/>
-                  </a:lnTo>
-                  <a:lnTo>
-                    <a:pt x="3955074" y="534684"/>
-                  </a:lnTo>
-                  <a:lnTo>
-                    <a:pt x="3877440" y="498039"/>
-                  </a:lnTo>
-                  <a:lnTo>
-                    <a:pt x="3799806" y="458642"/>
-                  </a:lnTo>
-                  <a:lnTo>
-                    <a:pt x="3722172" y="416286"/>
-                  </a:lnTo>
-                  <a:lnTo>
-                    <a:pt x="3644538" y="370749"/>
-                  </a:lnTo>
-                  <a:lnTo>
-                    <a:pt x="3566904" y="321791"/>
-                  </a:lnTo>
-                  <a:lnTo>
-                    <a:pt x="3489270" y="269156"/>
-                  </a:lnTo>
-                  <a:lnTo>
-                    <a:pt x="3411636" y="212567"/>
-                  </a:lnTo>
-                  <a:lnTo>
-                    <a:pt x="3334002" y="190404"/>
-                  </a:lnTo>
-                  <a:lnTo>
-                    <a:pt x="3256368" y="186402"/>
-                  </a:lnTo>
-                  <a:lnTo>
-                    <a:pt x="3178734" y="182381"/>
-                  </a:lnTo>
-                  <a:lnTo>
-                    <a:pt x="3101100" y="178340"/>
-                  </a:lnTo>
-                  <a:lnTo>
-                    <a:pt x="3023466" y="174280"/>
-                  </a:lnTo>
-                  <a:lnTo>
-                    <a:pt x="2945832" y="170200"/>
-                  </a:lnTo>
-                  <a:lnTo>
-                    <a:pt x="2868198" y="166101"/>
-                  </a:lnTo>
-                  <a:lnTo>
-                    <a:pt x="2790564" y="161982"/>
-                  </a:lnTo>
-                  <a:lnTo>
-                    <a:pt x="2712930" y="157843"/>
-                  </a:lnTo>
-                  <a:lnTo>
-                    <a:pt x="2635295" y="153684"/>
-                  </a:lnTo>
-                  <a:lnTo>
-                    <a:pt x="2557661" y="149505"/>
-                  </a:lnTo>
-                  <a:lnTo>
-                    <a:pt x="2480027" y="145306"/>
-                  </a:lnTo>
-                  <a:lnTo>
-                    <a:pt x="2402393" y="141087"/>
-                  </a:lnTo>
-                  <a:lnTo>
-                    <a:pt x="2324759" y="136848"/>
-                  </a:lnTo>
-                  <a:lnTo>
-                    <a:pt x="2247125" y="132588"/>
-                  </a:lnTo>
-                  <a:lnTo>
-                    <a:pt x="2169491" y="128308"/>
-                  </a:lnTo>
-                  <a:lnTo>
-                    <a:pt x="2091857" y="124007"/>
-                  </a:lnTo>
-                  <a:lnTo>
-                    <a:pt x="2014223" y="119686"/>
-                  </a:lnTo>
-                  <a:lnTo>
-                    <a:pt x="1936589" y="115343"/>
-                  </a:lnTo>
-                  <a:lnTo>
-                    <a:pt x="1858955" y="110980"/>
-                  </a:lnTo>
-                  <a:lnTo>
-                    <a:pt x="1781321" y="106596"/>
-                  </a:lnTo>
-                  <a:lnTo>
-                    <a:pt x="1703687" y="102191"/>
-                  </a:lnTo>
-                  <a:lnTo>
-                    <a:pt x="1626053" y="97764"/>
-                  </a:lnTo>
-                  <a:lnTo>
-                    <a:pt x="1548419" y="93317"/>
-                  </a:lnTo>
-                  <a:lnTo>
-                    <a:pt x="1470785" y="88848"/>
-                  </a:lnTo>
-                  <a:lnTo>
-                    <a:pt x="1393151" y="84357"/>
-                  </a:lnTo>
-                  <a:lnTo>
-                    <a:pt x="1315517" y="79845"/>
-                  </a:lnTo>
-                  <a:lnTo>
-                    <a:pt x="1237883" y="75311"/>
-                  </a:lnTo>
-                  <a:lnTo>
-                    <a:pt x="1160249" y="70755"/>
-                  </a:lnTo>
-                  <a:lnTo>
-                    <a:pt x="1082615" y="66178"/>
-                  </a:lnTo>
-                  <a:lnTo>
-                    <a:pt x="1004981" y="61578"/>
-                  </a:lnTo>
-                  <a:lnTo>
-                    <a:pt x="927346" y="56956"/>
-                  </a:lnTo>
-                  <a:lnTo>
-                    <a:pt x="849712" y="52312"/>
-                  </a:lnTo>
-                  <a:lnTo>
-                    <a:pt x="772078" y="47646"/>
-                  </a:lnTo>
-                  <a:lnTo>
-                    <a:pt x="694444" y="42957"/>
-                  </a:lnTo>
-                  <a:lnTo>
-                    <a:pt x="616810" y="38246"/>
-                  </a:lnTo>
-                  <a:lnTo>
-                    <a:pt x="539176" y="33512"/>
-                  </a:lnTo>
-                  <a:lnTo>
-                    <a:pt x="461542" y="28755"/>
-                  </a:lnTo>
-                  <a:lnTo>
-                    <a:pt x="383908" y="23976"/>
-                  </a:lnTo>
-                  <a:lnTo>
-                    <a:pt x="306274" y="19173"/>
-                  </a:lnTo>
-                  <a:lnTo>
-                    <a:pt x="228640" y="14348"/>
-                  </a:lnTo>
-                  <a:lnTo>
-                    <a:pt x="151006" y="9499"/>
-                  </a:lnTo>
-                  <a:lnTo>
-                    <a:pt x="73372" y="4626"/>
+                    <a:pt x="7183835" y="933554"/>
+                  </a:lnTo>
+                  <a:lnTo>
+                    <a:pt x="7107366" y="932036"/>
+                  </a:lnTo>
+                  <a:lnTo>
+                    <a:pt x="7030898" y="930404"/>
+                  </a:lnTo>
+                  <a:lnTo>
+                    <a:pt x="6954429" y="928649"/>
+                  </a:lnTo>
+                  <a:lnTo>
+                    <a:pt x="6877961" y="926763"/>
+                  </a:lnTo>
+                  <a:lnTo>
+                    <a:pt x="6801492" y="924735"/>
+                  </a:lnTo>
+                  <a:lnTo>
+                    <a:pt x="6725024" y="922555"/>
+                  </a:lnTo>
+                  <a:lnTo>
+                    <a:pt x="6648556" y="920211"/>
+                  </a:lnTo>
+                  <a:lnTo>
+                    <a:pt x="6572087" y="917690"/>
+                  </a:lnTo>
+                  <a:lnTo>
+                    <a:pt x="6495619" y="914981"/>
+                  </a:lnTo>
+                  <a:lnTo>
+                    <a:pt x="6419150" y="912068"/>
+                  </a:lnTo>
+                  <a:lnTo>
+                    <a:pt x="6342682" y="908936"/>
+                  </a:lnTo>
+                  <a:lnTo>
+                    <a:pt x="6266213" y="905569"/>
+                  </a:lnTo>
+                  <a:lnTo>
+                    <a:pt x="6189745" y="901949"/>
+                  </a:lnTo>
+                  <a:lnTo>
+                    <a:pt x="6113277" y="898058"/>
+                  </a:lnTo>
+                  <a:lnTo>
+                    <a:pt x="6036808" y="893873"/>
+                  </a:lnTo>
+                  <a:lnTo>
+                    <a:pt x="5960340" y="889375"/>
+                  </a:lnTo>
+                  <a:lnTo>
+                    <a:pt x="5883871" y="884539"/>
+                  </a:lnTo>
+                  <a:lnTo>
+                    <a:pt x="5807403" y="879339"/>
+                  </a:lnTo>
+                  <a:lnTo>
+                    <a:pt x="5730934" y="873749"/>
+                  </a:lnTo>
+                  <a:lnTo>
+                    <a:pt x="5654466" y="867739"/>
+                  </a:lnTo>
+                  <a:lnTo>
+                    <a:pt x="5577998" y="861278"/>
+                  </a:lnTo>
+                  <a:lnTo>
+                    <a:pt x="5501529" y="854331"/>
+                  </a:lnTo>
+                  <a:lnTo>
+                    <a:pt x="5425061" y="846862"/>
+                  </a:lnTo>
+                  <a:lnTo>
+                    <a:pt x="5348592" y="838833"/>
+                  </a:lnTo>
+                  <a:lnTo>
+                    <a:pt x="5272124" y="830200"/>
+                  </a:lnTo>
+                  <a:lnTo>
+                    <a:pt x="5195655" y="820919"/>
+                  </a:lnTo>
+                  <a:lnTo>
+                    <a:pt x="5119187" y="810941"/>
+                  </a:lnTo>
+                  <a:lnTo>
+                    <a:pt x="5042719" y="800213"/>
+                  </a:lnTo>
+                  <a:lnTo>
+                    <a:pt x="4966250" y="788680"/>
+                  </a:lnTo>
+                  <a:lnTo>
+                    <a:pt x="4889782" y="776280"/>
+                  </a:lnTo>
+                  <a:lnTo>
+                    <a:pt x="4813313" y="762949"/>
+                  </a:lnTo>
+                  <a:lnTo>
+                    <a:pt x="4736845" y="748617"/>
+                  </a:lnTo>
+                  <a:lnTo>
+                    <a:pt x="4660376" y="733208"/>
+                  </a:lnTo>
+                  <a:lnTo>
+                    <a:pt x="4583908" y="716641"/>
+                  </a:lnTo>
+                  <a:lnTo>
+                    <a:pt x="4507439" y="698831"/>
+                  </a:lnTo>
+                  <a:lnTo>
+                    <a:pt x="4430971" y="679682"/>
+                  </a:lnTo>
+                  <a:lnTo>
+                    <a:pt x="4354503" y="659095"/>
+                  </a:lnTo>
+                  <a:lnTo>
+                    <a:pt x="4278034" y="636962"/>
+                  </a:lnTo>
+                  <a:lnTo>
+                    <a:pt x="4201566" y="613167"/>
+                  </a:lnTo>
+                  <a:lnTo>
+                    <a:pt x="4125097" y="587584"/>
+                  </a:lnTo>
+                  <a:lnTo>
+                    <a:pt x="4048629" y="560079"/>
+                  </a:lnTo>
+                  <a:lnTo>
+                    <a:pt x="3972160" y="530509"/>
+                  </a:lnTo>
+                  <a:lnTo>
+                    <a:pt x="3895692" y="498717"/>
+                  </a:lnTo>
+                  <a:lnTo>
+                    <a:pt x="3819224" y="464538"/>
+                  </a:lnTo>
+                  <a:lnTo>
+                    <a:pt x="3742755" y="427791"/>
+                  </a:lnTo>
+                  <a:lnTo>
+                    <a:pt x="3666287" y="388284"/>
+                  </a:lnTo>
+                  <a:lnTo>
+                    <a:pt x="3589818" y="345810"/>
+                  </a:lnTo>
+                  <a:lnTo>
+                    <a:pt x="3513350" y="300145"/>
+                  </a:lnTo>
+                  <a:lnTo>
+                    <a:pt x="3436881" y="251051"/>
+                  </a:lnTo>
+                  <a:lnTo>
+                    <a:pt x="3360413" y="198268"/>
+                  </a:lnTo>
+                  <a:lnTo>
+                    <a:pt x="3283945" y="177596"/>
+                  </a:lnTo>
+                  <a:lnTo>
+                    <a:pt x="3207476" y="173863"/>
+                  </a:lnTo>
+                  <a:lnTo>
+                    <a:pt x="3131008" y="170112"/>
+                  </a:lnTo>
+                  <a:lnTo>
+                    <a:pt x="3054539" y="166343"/>
+                  </a:lnTo>
+                  <a:lnTo>
+                    <a:pt x="2978071" y="162556"/>
+                  </a:lnTo>
+                  <a:lnTo>
+                    <a:pt x="2901602" y="158751"/>
+                  </a:lnTo>
+                  <a:lnTo>
+                    <a:pt x="2825134" y="154928"/>
+                  </a:lnTo>
+                  <a:lnTo>
+                    <a:pt x="2748666" y="151086"/>
+                  </a:lnTo>
+                  <a:lnTo>
+                    <a:pt x="2672197" y="147225"/>
+                  </a:lnTo>
+                  <a:lnTo>
+                    <a:pt x="2595729" y="143346"/>
+                  </a:lnTo>
+                  <a:lnTo>
+                    <a:pt x="2519260" y="139448"/>
+                  </a:lnTo>
+                  <a:lnTo>
+                    <a:pt x="2442792" y="135532"/>
+                  </a:lnTo>
+                  <a:lnTo>
+                    <a:pt x="2366323" y="131597"/>
+                  </a:lnTo>
+                  <a:lnTo>
+                    <a:pt x="2289855" y="127643"/>
+                  </a:lnTo>
+                  <a:lnTo>
+                    <a:pt x="2213386" y="123669"/>
+                  </a:lnTo>
+                  <a:lnTo>
+                    <a:pt x="2136918" y="119677"/>
+                  </a:lnTo>
+                  <a:lnTo>
+                    <a:pt x="2060450" y="115666"/>
+                  </a:lnTo>
+                  <a:lnTo>
+                    <a:pt x="1983981" y="111635"/>
+                  </a:lnTo>
+                  <a:lnTo>
+                    <a:pt x="1907513" y="107585"/>
+                  </a:lnTo>
+                  <a:lnTo>
+                    <a:pt x="1831044" y="103515"/>
+                  </a:lnTo>
+                  <a:lnTo>
+                    <a:pt x="1754576" y="99426"/>
+                  </a:lnTo>
+                  <a:lnTo>
+                    <a:pt x="1678107" y="95317"/>
+                  </a:lnTo>
+                  <a:lnTo>
+                    <a:pt x="1601639" y="91188"/>
+                  </a:lnTo>
+                  <a:lnTo>
+                    <a:pt x="1525171" y="87040"/>
+                  </a:lnTo>
+                  <a:lnTo>
+                    <a:pt x="1448702" y="82871"/>
+                  </a:lnTo>
+                  <a:lnTo>
+                    <a:pt x="1372234" y="78683"/>
+                  </a:lnTo>
+                  <a:lnTo>
+                    <a:pt x="1295765" y="74474"/>
+                  </a:lnTo>
+                  <a:lnTo>
+                    <a:pt x="1219297" y="70245"/>
+                  </a:lnTo>
+                  <a:lnTo>
+                    <a:pt x="1142828" y="65996"/>
+                  </a:lnTo>
+                  <a:lnTo>
+                    <a:pt x="1066360" y="61726"/>
+                  </a:lnTo>
+                  <a:lnTo>
+                    <a:pt x="989892" y="57436"/>
+                  </a:lnTo>
+                  <a:lnTo>
+                    <a:pt x="913423" y="53125"/>
+                  </a:lnTo>
+                  <a:lnTo>
+                    <a:pt x="836955" y="48793"/>
+                  </a:lnTo>
+                  <a:lnTo>
+                    <a:pt x="760486" y="44441"/>
+                  </a:lnTo>
+                  <a:lnTo>
+                    <a:pt x="684018" y="40068"/>
+                  </a:lnTo>
+                  <a:lnTo>
+                    <a:pt x="607549" y="35673"/>
+                  </a:lnTo>
+                  <a:lnTo>
+                    <a:pt x="531081" y="31258"/>
+                  </a:lnTo>
+                  <a:lnTo>
+                    <a:pt x="454613" y="26821"/>
+                  </a:lnTo>
+                  <a:lnTo>
+                    <a:pt x="378144" y="22363"/>
+                  </a:lnTo>
+                  <a:lnTo>
+                    <a:pt x="301676" y="17883"/>
+                  </a:lnTo>
+                  <a:lnTo>
+                    <a:pt x="225207" y="13382"/>
+                  </a:lnTo>
+                  <a:lnTo>
+                    <a:pt x="148739" y="8860"/>
+                  </a:lnTo>
+                  <a:lnTo>
+                    <a:pt x="72270" y="4315"/>
                   </a:lnTo>
                   <a:lnTo>
                     <a:pt x="0" y="0"/>
@@ -4097,282 +4097,282 @@
           </p:nvSpPr>
           <p:spPr>
             <a:xfrm>
-              <a:off x="1318601" y="2073503"/>
-              <a:ext cx="6869888" cy="3369436"/>
+              <a:off x="1409205" y="2209169"/>
+              <a:ext cx="6766742" cy="3142786"/>
             </a:xfrm>
             <a:custGeom>
               <a:avLst/>
               <a:pathLst>
-                <a:path w="6869888" h="3369436">
+                <a:path w="6766742" h="3142786">
                   <a:moveTo>
                     <a:pt x="0" y="0"/>
                   </a:moveTo>
                   <a:lnTo>
-                    <a:pt x="38092" y="66017"/>
-                  </a:lnTo>
-                  <a:lnTo>
-                    <a:pt x="115726" y="195465"/>
-                  </a:lnTo>
-                  <a:lnTo>
-                    <a:pt x="193360" y="320011"/>
-                  </a:lnTo>
-                  <a:lnTo>
-                    <a:pt x="270994" y="439839"/>
-                  </a:lnTo>
-                  <a:lnTo>
-                    <a:pt x="348628" y="555129"/>
-                  </a:lnTo>
-                  <a:lnTo>
-                    <a:pt x="426262" y="666052"/>
-                  </a:lnTo>
-                  <a:lnTo>
-                    <a:pt x="503897" y="772774"/>
-                  </a:lnTo>
-                  <a:lnTo>
-                    <a:pt x="581531" y="875453"/>
-                  </a:lnTo>
-                  <a:lnTo>
-                    <a:pt x="659165" y="974244"/>
-                  </a:lnTo>
-                  <a:lnTo>
-                    <a:pt x="736799" y="1069293"/>
-                  </a:lnTo>
-                  <a:lnTo>
-                    <a:pt x="814433" y="1160742"/>
-                  </a:lnTo>
-                  <a:lnTo>
-                    <a:pt x="892067" y="1248727"/>
-                  </a:lnTo>
-                  <a:lnTo>
-                    <a:pt x="969701" y="1333380"/>
-                  </a:lnTo>
-                  <a:lnTo>
-                    <a:pt x="1047335" y="1414826"/>
-                  </a:lnTo>
-                  <a:lnTo>
-                    <a:pt x="1124969" y="1493188"/>
-                  </a:lnTo>
-                  <a:lnTo>
-                    <a:pt x="1202603" y="1568581"/>
-                  </a:lnTo>
-                  <a:lnTo>
-                    <a:pt x="1280237" y="1641119"/>
-                  </a:lnTo>
-                  <a:lnTo>
-                    <a:pt x="1357871" y="1710910"/>
-                  </a:lnTo>
-                  <a:lnTo>
-                    <a:pt x="1435505" y="1778057"/>
-                  </a:lnTo>
-                  <a:lnTo>
-                    <a:pt x="1513139" y="1842661"/>
-                  </a:lnTo>
-                  <a:lnTo>
-                    <a:pt x="1590773" y="1904818"/>
-                  </a:lnTo>
-                  <a:lnTo>
-                    <a:pt x="1668407" y="1964621"/>
-                  </a:lnTo>
-                  <a:lnTo>
-                    <a:pt x="1746041" y="2022159"/>
-                  </a:lnTo>
-                  <a:lnTo>
-                    <a:pt x="1823675" y="2077517"/>
-                  </a:lnTo>
-                  <a:lnTo>
-                    <a:pt x="1901309" y="2130779"/>
-                  </a:lnTo>
-                  <a:lnTo>
-                    <a:pt x="1978943" y="2182023"/>
-                  </a:lnTo>
-                  <a:lnTo>
-                    <a:pt x="2056577" y="2231327"/>
-                  </a:lnTo>
-                  <a:lnTo>
-                    <a:pt x="2134211" y="2278763"/>
-                  </a:lnTo>
-                  <a:lnTo>
-                    <a:pt x="2211845" y="2324402"/>
-                  </a:lnTo>
-                  <a:lnTo>
-                    <a:pt x="2289480" y="2368313"/>
-                  </a:lnTo>
-                  <a:lnTo>
-                    <a:pt x="2367114" y="2410561"/>
-                  </a:lnTo>
-                  <a:lnTo>
-                    <a:pt x="2444748" y="2451208"/>
-                  </a:lnTo>
-                  <a:lnTo>
-                    <a:pt x="2522382" y="2490316"/>
-                  </a:lnTo>
-                  <a:lnTo>
-                    <a:pt x="2600016" y="2527943"/>
-                  </a:lnTo>
-                  <a:lnTo>
-                    <a:pt x="2677650" y="2564145"/>
-                  </a:lnTo>
-                  <a:lnTo>
-                    <a:pt x="2755284" y="2598975"/>
-                  </a:lnTo>
-                  <a:lnTo>
-                    <a:pt x="2832918" y="2632486"/>
-                  </a:lnTo>
-                  <a:lnTo>
-                    <a:pt x="2910552" y="2664728"/>
-                  </a:lnTo>
-                  <a:lnTo>
-                    <a:pt x="2988186" y="2695749"/>
-                  </a:lnTo>
-                  <a:lnTo>
-                    <a:pt x="3065820" y="2725595"/>
-                  </a:lnTo>
-                  <a:lnTo>
-                    <a:pt x="3143454" y="2754310"/>
-                  </a:lnTo>
-                  <a:lnTo>
-                    <a:pt x="3221088" y="2781938"/>
-                  </a:lnTo>
-                  <a:lnTo>
-                    <a:pt x="3298722" y="2808520"/>
-                  </a:lnTo>
-                  <a:lnTo>
-                    <a:pt x="3376356" y="2834094"/>
-                  </a:lnTo>
-                  <a:lnTo>
-                    <a:pt x="3453990" y="2858700"/>
-                  </a:lnTo>
-                  <a:lnTo>
-                    <a:pt x="3531624" y="2882374"/>
-                  </a:lnTo>
-                  <a:lnTo>
-                    <a:pt x="3609258" y="2905152"/>
-                  </a:lnTo>
-                  <a:lnTo>
-                    <a:pt x="3686892" y="2927066"/>
-                  </a:lnTo>
-                  <a:lnTo>
-                    <a:pt x="3764526" y="2948151"/>
-                  </a:lnTo>
-                  <a:lnTo>
-                    <a:pt x="3842160" y="2968437"/>
-                  </a:lnTo>
-                  <a:lnTo>
-                    <a:pt x="3919794" y="2987954"/>
-                  </a:lnTo>
-                  <a:lnTo>
-                    <a:pt x="3997429" y="3006733"/>
-                  </a:lnTo>
-                  <a:lnTo>
-                    <a:pt x="4075063" y="3024800"/>
-                  </a:lnTo>
-                  <a:lnTo>
-                    <a:pt x="4152697" y="3042183"/>
-                  </a:lnTo>
-                  <a:lnTo>
-                    <a:pt x="4230331" y="3058907"/>
-                  </a:lnTo>
-                  <a:lnTo>
-                    <a:pt x="4307965" y="3074998"/>
-                  </a:lnTo>
-                  <a:lnTo>
-                    <a:pt x="4385599" y="3090480"/>
-                  </a:lnTo>
-                  <a:lnTo>
-                    <a:pt x="4463233" y="3105375"/>
-                  </a:lnTo>
-                  <a:lnTo>
-                    <a:pt x="4540867" y="3119706"/>
-                  </a:lnTo>
-                  <a:lnTo>
-                    <a:pt x="4618501" y="3133494"/>
-                  </a:lnTo>
-                  <a:lnTo>
-                    <a:pt x="4696135" y="3146760"/>
-                  </a:lnTo>
-                  <a:lnTo>
-                    <a:pt x="4773769" y="3159524"/>
-                  </a:lnTo>
-                  <a:lnTo>
-                    <a:pt x="4851403" y="3171804"/>
-                  </a:lnTo>
-                  <a:lnTo>
-                    <a:pt x="4929037" y="3183619"/>
-                  </a:lnTo>
-                  <a:lnTo>
-                    <a:pt x="5006671" y="3194987"/>
-                  </a:lnTo>
-                  <a:lnTo>
-                    <a:pt x="5084305" y="3205924"/>
-                  </a:lnTo>
-                  <a:lnTo>
-                    <a:pt x="5161939" y="3216446"/>
-                  </a:lnTo>
-                  <a:lnTo>
-                    <a:pt x="5239573" y="3226570"/>
-                  </a:lnTo>
-                  <a:lnTo>
-                    <a:pt x="5317207" y="3236311"/>
-                  </a:lnTo>
-                  <a:lnTo>
-                    <a:pt x="5394841" y="3245683"/>
-                  </a:lnTo>
-                  <a:lnTo>
-                    <a:pt x="5472475" y="3254700"/>
-                  </a:lnTo>
-                  <a:lnTo>
-                    <a:pt x="5550109" y="3263375"/>
-                  </a:lnTo>
-                  <a:lnTo>
-                    <a:pt x="5627743" y="3271722"/>
-                  </a:lnTo>
-                  <a:lnTo>
-                    <a:pt x="5705378" y="3279752"/>
-                  </a:lnTo>
-                  <a:lnTo>
-                    <a:pt x="5783012" y="3287479"/>
-                  </a:lnTo>
-                  <a:lnTo>
-                    <a:pt x="5860646" y="3294912"/>
-                  </a:lnTo>
-                  <a:lnTo>
-                    <a:pt x="5938280" y="3302065"/>
-                  </a:lnTo>
-                  <a:lnTo>
-                    <a:pt x="6015914" y="3308946"/>
-                  </a:lnTo>
-                  <a:lnTo>
-                    <a:pt x="6093548" y="3315567"/>
-                  </a:lnTo>
-                  <a:lnTo>
-                    <a:pt x="6171182" y="3321936"/>
-                  </a:lnTo>
-                  <a:lnTo>
-                    <a:pt x="6248816" y="3328065"/>
-                  </a:lnTo>
-                  <a:lnTo>
-                    <a:pt x="6326450" y="3333962"/>
-                  </a:lnTo>
-                  <a:lnTo>
-                    <a:pt x="6404084" y="3339635"/>
-                  </a:lnTo>
-                  <a:lnTo>
-                    <a:pt x="6481718" y="3345093"/>
-                  </a:lnTo>
-                  <a:lnTo>
-                    <a:pt x="6559352" y="3350345"/>
-                  </a:lnTo>
-                  <a:lnTo>
-                    <a:pt x="6636986" y="3355397"/>
-                  </a:lnTo>
-                  <a:lnTo>
-                    <a:pt x="6714620" y="3360259"/>
-                  </a:lnTo>
-                  <a:lnTo>
-                    <a:pt x="6792254" y="3364936"/>
-                  </a:lnTo>
-                  <a:lnTo>
-                    <a:pt x="6869888" y="3369436"/>
+                    <a:pt x="37520" y="61576"/>
+                  </a:lnTo>
+                  <a:lnTo>
+                    <a:pt x="113989" y="182317"/>
+                  </a:lnTo>
+                  <a:lnTo>
+                    <a:pt x="190457" y="298485"/>
+                  </a:lnTo>
+                  <a:lnTo>
+                    <a:pt x="266926" y="410253"/>
+                  </a:lnTo>
+                  <a:lnTo>
+                    <a:pt x="343394" y="517787"/>
+                  </a:lnTo>
+                  <a:lnTo>
+                    <a:pt x="419862" y="621249"/>
+                  </a:lnTo>
+                  <a:lnTo>
+                    <a:pt x="496331" y="720792"/>
+                  </a:lnTo>
+                  <a:lnTo>
+                    <a:pt x="572799" y="816565"/>
+                  </a:lnTo>
+                  <a:lnTo>
+                    <a:pt x="649268" y="908710"/>
+                  </a:lnTo>
+                  <a:lnTo>
+                    <a:pt x="725736" y="997365"/>
+                  </a:lnTo>
+                  <a:lnTo>
+                    <a:pt x="802205" y="1082663"/>
+                  </a:lnTo>
+                  <a:lnTo>
+                    <a:pt x="878673" y="1164730"/>
+                  </a:lnTo>
+                  <a:lnTo>
+                    <a:pt x="955142" y="1243688"/>
+                  </a:lnTo>
+                  <a:lnTo>
+                    <a:pt x="1031610" y="1319656"/>
+                  </a:lnTo>
+                  <a:lnTo>
+                    <a:pt x="1108078" y="1392746"/>
+                  </a:lnTo>
+                  <a:lnTo>
+                    <a:pt x="1184547" y="1463068"/>
+                  </a:lnTo>
+                  <a:lnTo>
+                    <a:pt x="1261015" y="1530727"/>
+                  </a:lnTo>
+                  <a:lnTo>
+                    <a:pt x="1337484" y="1595823"/>
+                  </a:lnTo>
+                  <a:lnTo>
+                    <a:pt x="1413952" y="1658454"/>
+                  </a:lnTo>
+                  <a:lnTo>
+                    <a:pt x="1490421" y="1718712"/>
+                  </a:lnTo>
+                  <a:lnTo>
+                    <a:pt x="1566889" y="1776688"/>
+                  </a:lnTo>
+                  <a:lnTo>
+                    <a:pt x="1643357" y="1832468"/>
+                  </a:lnTo>
+                  <a:lnTo>
+                    <a:pt x="1719826" y="1886135"/>
+                  </a:lnTo>
+                  <a:lnTo>
+                    <a:pt x="1796294" y="1937770"/>
+                  </a:lnTo>
+                  <a:lnTo>
+                    <a:pt x="1872763" y="1987449"/>
+                  </a:lnTo>
+                  <a:lnTo>
+                    <a:pt x="1949231" y="2035247"/>
+                  </a:lnTo>
+                  <a:lnTo>
+                    <a:pt x="2025700" y="2081234"/>
+                  </a:lnTo>
+                  <a:lnTo>
+                    <a:pt x="2102168" y="2125479"/>
+                  </a:lnTo>
+                  <a:lnTo>
+                    <a:pt x="2178636" y="2168048"/>
+                  </a:lnTo>
+                  <a:lnTo>
+                    <a:pt x="2255105" y="2209005"/>
+                  </a:lnTo>
+                  <a:lnTo>
+                    <a:pt x="2331573" y="2248411"/>
+                  </a:lnTo>
+                  <a:lnTo>
+                    <a:pt x="2408042" y="2286325"/>
+                  </a:lnTo>
+                  <a:lnTo>
+                    <a:pt x="2484510" y="2322802"/>
+                  </a:lnTo>
+                  <a:lnTo>
+                    <a:pt x="2560979" y="2357898"/>
+                  </a:lnTo>
+                  <a:lnTo>
+                    <a:pt x="2637447" y="2391664"/>
+                  </a:lnTo>
+                  <a:lnTo>
+                    <a:pt x="2713915" y="2424152"/>
+                  </a:lnTo>
+                  <a:lnTo>
+                    <a:pt x="2790384" y="2455409"/>
+                  </a:lnTo>
+                  <a:lnTo>
+                    <a:pt x="2866852" y="2485482"/>
+                  </a:lnTo>
+                  <a:lnTo>
+                    <a:pt x="2943321" y="2514416"/>
+                  </a:lnTo>
+                  <a:lnTo>
+                    <a:pt x="3019789" y="2542254"/>
+                  </a:lnTo>
+                  <a:lnTo>
+                    <a:pt x="3096258" y="2569038"/>
+                  </a:lnTo>
+                  <a:lnTo>
+                    <a:pt x="3172726" y="2594807"/>
+                  </a:lnTo>
+                  <a:lnTo>
+                    <a:pt x="3249194" y="2619601"/>
+                  </a:lnTo>
+                  <a:lnTo>
+                    <a:pt x="3325663" y="2643455"/>
+                  </a:lnTo>
+                  <a:lnTo>
+                    <a:pt x="3402131" y="2666406"/>
+                  </a:lnTo>
+                  <a:lnTo>
+                    <a:pt x="3478600" y="2688487"/>
+                  </a:lnTo>
+                  <a:lnTo>
+                    <a:pt x="3555068" y="2709733"/>
+                  </a:lnTo>
+                  <a:lnTo>
+                    <a:pt x="3631537" y="2730173"/>
+                  </a:lnTo>
+                  <a:lnTo>
+                    <a:pt x="3708005" y="2749839"/>
+                  </a:lnTo>
+                  <a:lnTo>
+                    <a:pt x="3784474" y="2768761"/>
+                  </a:lnTo>
+                  <a:lnTo>
+                    <a:pt x="3860942" y="2786966"/>
+                  </a:lnTo>
+                  <a:lnTo>
+                    <a:pt x="3937410" y="2804481"/>
+                  </a:lnTo>
+                  <a:lnTo>
+                    <a:pt x="4013879" y="2821333"/>
+                  </a:lnTo>
+                  <a:lnTo>
+                    <a:pt x="4090347" y="2837546"/>
+                  </a:lnTo>
+                  <a:lnTo>
+                    <a:pt x="4166816" y="2853146"/>
+                  </a:lnTo>
+                  <a:lnTo>
+                    <a:pt x="4243284" y="2868154"/>
+                  </a:lnTo>
+                  <a:lnTo>
+                    <a:pt x="4319753" y="2882595"/>
+                  </a:lnTo>
+                  <a:lnTo>
+                    <a:pt x="4396221" y="2896488"/>
+                  </a:lnTo>
+                  <a:lnTo>
+                    <a:pt x="4472689" y="2909855"/>
+                  </a:lnTo>
+                  <a:lnTo>
+                    <a:pt x="4549158" y="2922716"/>
+                  </a:lnTo>
+                  <a:lnTo>
+                    <a:pt x="4625626" y="2935089"/>
+                  </a:lnTo>
+                  <a:lnTo>
+                    <a:pt x="4702095" y="2946994"/>
+                  </a:lnTo>
+                  <a:lnTo>
+                    <a:pt x="4778563" y="2958448"/>
+                  </a:lnTo>
+                  <a:lnTo>
+                    <a:pt x="4855032" y="2969469"/>
+                  </a:lnTo>
+                  <a:lnTo>
+                    <a:pt x="4931500" y="2980072"/>
+                  </a:lnTo>
+                  <a:lnTo>
+                    <a:pt x="5007968" y="2990273"/>
+                  </a:lnTo>
+                  <a:lnTo>
+                    <a:pt x="5084437" y="3000088"/>
+                  </a:lnTo>
+                  <a:lnTo>
+                    <a:pt x="5160905" y="3009531"/>
+                  </a:lnTo>
+                  <a:lnTo>
+                    <a:pt x="5237374" y="3018616"/>
+                  </a:lnTo>
+                  <a:lnTo>
+                    <a:pt x="5313842" y="3027358"/>
+                  </a:lnTo>
+                  <a:lnTo>
+                    <a:pt x="5390311" y="3035768"/>
+                  </a:lnTo>
+                  <a:lnTo>
+                    <a:pt x="5466779" y="3043860"/>
+                  </a:lnTo>
+                  <a:lnTo>
+                    <a:pt x="5543247" y="3051645"/>
+                  </a:lnTo>
+                  <a:lnTo>
+                    <a:pt x="5619716" y="3059135"/>
+                  </a:lnTo>
+                  <a:lnTo>
+                    <a:pt x="5696184" y="3066342"/>
+                  </a:lnTo>
+                  <a:lnTo>
+                    <a:pt x="5772653" y="3073276"/>
+                  </a:lnTo>
+                  <a:lnTo>
+                    <a:pt x="5849121" y="3079947"/>
+                  </a:lnTo>
+                  <a:lnTo>
+                    <a:pt x="5925590" y="3086365"/>
+                  </a:lnTo>
+                  <a:lnTo>
+                    <a:pt x="6002058" y="3092541"/>
+                  </a:lnTo>
+                  <a:lnTo>
+                    <a:pt x="6078527" y="3098482"/>
+                  </a:lnTo>
+                  <a:lnTo>
+                    <a:pt x="6154995" y="3104198"/>
+                  </a:lnTo>
+                  <a:lnTo>
+                    <a:pt x="6231463" y="3109698"/>
+                  </a:lnTo>
+                  <a:lnTo>
+                    <a:pt x="6307932" y="3114990"/>
+                  </a:lnTo>
+                  <a:lnTo>
+                    <a:pt x="6384400" y="3120081"/>
+                  </a:lnTo>
+                  <a:lnTo>
+                    <a:pt x="6460869" y="3124979"/>
+                  </a:lnTo>
+                  <a:lnTo>
+                    <a:pt x="6537337" y="3129692"/>
+                  </a:lnTo>
+                  <a:lnTo>
+                    <a:pt x="6613806" y="3134226"/>
+                  </a:lnTo>
+                  <a:lnTo>
+                    <a:pt x="6690274" y="3138589"/>
+                  </a:lnTo>
+                  <a:lnTo>
+                    <a:pt x="6766742" y="3142786"/>
                   </a:lnTo>
                 </a:path>
               </a:pathLst>
@@ -4401,21 +4401,21 @@
           </p:nvSpPr>
           <p:spPr>
             <a:xfrm>
-              <a:off x="817517" y="4727786"/>
-              <a:ext cx="7799693" cy="0"/>
+              <a:off x="915645" y="4684908"/>
+              <a:ext cx="7682587" cy="0"/>
             </a:xfrm>
             <a:custGeom>
               <a:avLst/>
               <a:pathLst>
-                <a:path w="7799693" h="0">
+                <a:path w="7682587" h="0">
                   <a:moveTo>
                     <a:pt x="0" y="0"/>
                   </a:moveTo>
                   <a:lnTo>
-                    <a:pt x="7799693" y="0"/>
-                  </a:lnTo>
-                  <a:lnTo>
-                    <a:pt x="7799693" y="0"/>
+                    <a:pt x="7682587" y="0"/>
+                  </a:lnTo>
+                  <a:lnTo>
+                    <a:pt x="7682587" y="0"/>
                   </a:lnTo>
                 </a:path>
               </a:pathLst>
@@ -4444,15 +4444,15 @@
           </p:nvSpPr>
           <p:spPr>
             <a:xfrm>
-              <a:off x="4203673" y="2073503"/>
-              <a:ext cx="0" cy="3649639"/>
+              <a:off x="4250960" y="2209169"/>
+              <a:ext cx="0" cy="3404141"/>
             </a:xfrm>
             <a:custGeom>
               <a:avLst/>
               <a:pathLst>
-                <a:path w="0" h="3649639">
+                <a:path w="0" h="3404141">
                   <a:moveTo>
-                    <a:pt x="0" y="3649639"/>
+                    <a:pt x="0" y="3404141"/>
                   </a:moveTo>
                   <a:lnTo>
                     <a:pt x="0" y="0"/>
@@ -4487,8 +4487,8 @@
           </p:nvSpPr>
           <p:spPr>
             <a:xfrm>
-              <a:off x="692708" y="5517199"/>
-              <a:ext cx="62179" cy="80101"/>
+              <a:off x="756929" y="5407599"/>
+              <a:ext cx="79004" cy="101955"/>
             </a:xfrm>
             <a:prstGeom prst="rect">
               <a:avLst/>
@@ -4501,7 +4501,7 @@
             <a:p>
               <a:pPr algn="l" marL="0" marR="0" indent="0">
                 <a:lnSpc>
-                  <a:spcPts val="880"/>
+                  <a:spcPts val="1120"/>
                 </a:lnSpc>
                 <a:spcBef>
                   <a:spcPts val="0"/>
@@ -4511,7 +4511,7 @@
                 </a:spcAft>
               </a:pPr>
               <a:r>
-                <a:rPr sz="880">
+                <a:rPr sz="1120">
                   <a:solidFill>
                     <a:srgbClr val="4D4D4D">
                       <a:alpha val="100000"/>
@@ -4533,8 +4533,8 @@
           </p:nvSpPr>
           <p:spPr>
             <a:xfrm>
-              <a:off x="692708" y="4687735"/>
-              <a:ext cx="62179" cy="80101"/>
+              <a:off x="756929" y="4633931"/>
+              <a:ext cx="79004" cy="101955"/>
             </a:xfrm>
             <a:prstGeom prst="rect">
               <a:avLst/>
@@ -4547,7 +4547,7 @@
             <a:p>
               <a:pPr algn="l" marL="0" marR="0" indent="0">
                 <a:lnSpc>
-                  <a:spcPts val="880"/>
+                  <a:spcPts val="1120"/>
                 </a:lnSpc>
                 <a:spcBef>
                   <a:spcPts val="0"/>
@@ -4557,7 +4557,7 @@
                 </a:spcAft>
               </a:pPr>
               <a:r>
-                <a:rPr sz="880">
+                <a:rPr sz="1120">
                   <a:solidFill>
                     <a:srgbClr val="4D4D4D">
                       <a:alpha val="100000"/>
@@ -4579,8 +4579,8 @@
           </p:nvSpPr>
           <p:spPr>
             <a:xfrm>
-              <a:off x="692708" y="3858272"/>
-              <a:ext cx="62179" cy="80101"/>
+              <a:off x="756929" y="3860262"/>
+              <a:ext cx="79004" cy="101955"/>
             </a:xfrm>
             <a:prstGeom prst="rect">
               <a:avLst/>
@@ -4593,7 +4593,7 @@
             <a:p>
               <a:pPr algn="l" marL="0" marR="0" indent="0">
                 <a:lnSpc>
-                  <a:spcPts val="880"/>
+                  <a:spcPts val="1120"/>
                 </a:lnSpc>
                 <a:spcBef>
                   <a:spcPts val="0"/>
@@ -4603,7 +4603,7 @@
                 </a:spcAft>
               </a:pPr>
               <a:r>
-                <a:rPr sz="880">
+                <a:rPr sz="1120">
                   <a:solidFill>
                     <a:srgbClr val="4D4D4D">
                       <a:alpha val="100000"/>
@@ -4625,8 +4625,8 @@
           </p:nvSpPr>
           <p:spPr>
             <a:xfrm>
-              <a:off x="692708" y="3028808"/>
-              <a:ext cx="62179" cy="80101"/>
+              <a:off x="756929" y="3086593"/>
+              <a:ext cx="79004" cy="101955"/>
             </a:xfrm>
             <a:prstGeom prst="rect">
               <a:avLst/>
@@ -4639,7 +4639,7 @@
             <a:p>
               <a:pPr algn="l" marL="0" marR="0" indent="0">
                 <a:lnSpc>
-                  <a:spcPts val="880"/>
+                  <a:spcPts val="1120"/>
                 </a:lnSpc>
                 <a:spcBef>
                   <a:spcPts val="0"/>
@@ -4649,7 +4649,7 @@
                 </a:spcAft>
               </a:pPr>
               <a:r>
-                <a:rPr sz="880">
+                <a:rPr sz="1120">
                   <a:solidFill>
                     <a:srgbClr val="4D4D4D">
                       <a:alpha val="100000"/>
@@ -4671,8 +4671,8 @@
           </p:nvSpPr>
           <p:spPr>
             <a:xfrm>
-              <a:off x="692708" y="2199345"/>
-              <a:ext cx="62179" cy="80101"/>
+              <a:off x="756929" y="2312925"/>
+              <a:ext cx="79004" cy="101955"/>
             </a:xfrm>
             <a:prstGeom prst="rect">
               <a:avLst/>
@@ -4685,7 +4685,7 @@
             <a:p>
               <a:pPr algn="l" marL="0" marR="0" indent="0">
                 <a:lnSpc>
-                  <a:spcPts val="880"/>
+                  <a:spcPts val="1120"/>
                 </a:lnSpc>
                 <a:spcBef>
                   <a:spcPts val="0"/>
@@ -4695,7 +4695,7 @@
                 </a:spcAft>
               </a:pPr>
               <a:r>
-                <a:rPr sz="880">
+                <a:rPr sz="1120">
                   <a:solidFill>
                     <a:srgbClr val="4D4D4D">
                       <a:alpha val="100000"/>
@@ -4717,8 +4717,8 @@
           </p:nvSpPr>
           <p:spPr>
             <a:xfrm>
-              <a:off x="2423864" y="5785772"/>
-              <a:ext cx="155356" cy="80101"/>
+              <a:off x="2475630" y="5693022"/>
+              <a:ext cx="197510" cy="101955"/>
             </a:xfrm>
             <a:prstGeom prst="rect">
               <a:avLst/>
@@ -4731,7 +4731,7 @@
             <a:p>
               <a:pPr algn="l" marL="0" marR="0" indent="0">
                 <a:lnSpc>
-                  <a:spcPts val="880"/>
+                  <a:spcPts val="1120"/>
                 </a:lnSpc>
                 <a:spcBef>
                   <a:spcPts val="0"/>
@@ -4741,7 +4741,7 @@
                 </a:spcAft>
               </a:pPr>
               <a:r>
-                <a:rPr sz="880">
+                <a:rPr sz="1120">
                   <a:solidFill>
                     <a:srgbClr val="4D4D4D">
                       <a:alpha val="100000"/>
@@ -4763,8 +4763,8 @@
           </p:nvSpPr>
           <p:spPr>
             <a:xfrm>
-              <a:off x="4196521" y="5785772"/>
-              <a:ext cx="155356" cy="80101"/>
+              <a:off x="4221672" y="5693022"/>
+              <a:ext cx="197510" cy="101955"/>
             </a:xfrm>
             <a:prstGeom prst="rect">
               <a:avLst/>
@@ -4777,7 +4777,7 @@
             <a:p>
               <a:pPr algn="l" marL="0" marR="0" indent="0">
                 <a:lnSpc>
-                  <a:spcPts val="880"/>
+                  <a:spcPts val="1120"/>
                 </a:lnSpc>
                 <a:spcBef>
                   <a:spcPts val="0"/>
@@ -4787,7 +4787,7 @@
                 </a:spcAft>
               </a:pPr>
               <a:r>
-                <a:rPr sz="880">
+                <a:rPr sz="1120">
                   <a:solidFill>
                     <a:srgbClr val="4D4D4D">
                       <a:alpha val="100000"/>
@@ -4809,8 +4809,8 @@
           </p:nvSpPr>
           <p:spPr>
             <a:xfrm>
-              <a:off x="5969179" y="5785772"/>
-              <a:ext cx="155356" cy="80101"/>
+              <a:off x="5967715" y="5693022"/>
+              <a:ext cx="197510" cy="101955"/>
             </a:xfrm>
             <a:prstGeom prst="rect">
               <a:avLst/>
@@ -4823,7 +4823,7 @@
             <a:p>
               <a:pPr algn="l" marL="0" marR="0" indent="0">
                 <a:lnSpc>
-                  <a:spcPts val="880"/>
+                  <a:spcPts val="1120"/>
                 </a:lnSpc>
                 <a:spcBef>
                   <a:spcPts val="0"/>
@@ -4833,7 +4833,7 @@
                 </a:spcAft>
               </a:pPr>
               <a:r>
-                <a:rPr sz="880">
+                <a:rPr sz="1120">
                   <a:solidFill>
                     <a:srgbClr val="4D4D4D">
                       <a:alpha val="100000"/>
@@ -4855,8 +4855,8 @@
           </p:nvSpPr>
           <p:spPr>
             <a:xfrm>
-              <a:off x="7741836" y="5785772"/>
-              <a:ext cx="155356" cy="80101"/>
+              <a:off x="7713757" y="5693022"/>
+              <a:ext cx="197510" cy="101955"/>
             </a:xfrm>
             <a:prstGeom prst="rect">
               <a:avLst/>
@@ -4869,7 +4869,7 @@
             <a:p>
               <a:pPr algn="l" marL="0" marR="0" indent="0">
                 <a:lnSpc>
-                  <a:spcPts val="880"/>
+                  <a:spcPts val="1120"/>
                 </a:lnSpc>
                 <a:spcBef>
                   <a:spcPts val="0"/>
@@ -4879,7 +4879,7 @@
                 </a:spcAft>
               </a:pPr>
               <a:r>
-                <a:rPr sz="880">
+                <a:rPr sz="1120">
                   <a:solidFill>
                     <a:srgbClr val="4D4D4D">
                       <a:alpha val="100000"/>
@@ -4901,8 +4901,8 @@
           </p:nvSpPr>
           <p:spPr>
             <a:xfrm>
-              <a:off x="3879271" y="5925448"/>
-              <a:ext cx="1676186" cy="100218"/>
+              <a:off x="3690153" y="5870717"/>
+              <a:ext cx="2133569" cy="127558"/>
             </a:xfrm>
             <a:prstGeom prst="rect">
               <a:avLst/>
@@ -4915,7 +4915,7 @@
             <a:p>
               <a:pPr algn="l" marL="0" marR="0" indent="0">
                 <a:lnSpc>
-                  <a:spcPts val="1100"/>
+                  <a:spcPts val="1400"/>
                 </a:lnSpc>
                 <a:spcBef>
                   <a:spcPts val="0"/>
@@ -4925,7 +4925,7 @@
                 </a:spcAft>
               </a:pPr>
               <a:r>
-                <a:rPr sz="1100">
+                <a:rPr sz="1400">
                   <a:solidFill>
                     <a:srgbClr val="000000">
                       <a:alpha val="100000"/>
@@ -4947,8 +4947,8 @@
           </p:nvSpPr>
           <p:spPr>
             <a:xfrm rot="-5400000">
-              <a:off x="181100" y="3848213"/>
-              <a:ext cx="791596" cy="100218"/>
+              <a:off x="105758" y="3847460"/>
+              <a:ext cx="1007577" cy="127558"/>
             </a:xfrm>
             <a:prstGeom prst="rect">
               <a:avLst/>
@@ -4961,7 +4961,7 @@
             <a:p>
               <a:pPr algn="l" marL="0" marR="0" indent="0">
                 <a:lnSpc>
-                  <a:spcPts val="1100"/>
+                  <a:spcPts val="1400"/>
                 </a:lnSpc>
                 <a:spcBef>
                   <a:spcPts val="0"/>
@@ -4971,7 +4971,7 @@
                 </a:spcAft>
               </a:pPr>
               <a:r>
-                <a:rPr sz="1100">
+                <a:rPr sz="1400">
                   <a:solidFill>
                     <a:srgbClr val="000000">
                       <a:alpha val="100000"/>
@@ -4993,8 +4993,8 @@
           </p:nvSpPr>
           <p:spPr>
             <a:xfrm>
-              <a:off x="817517" y="1896563"/>
-              <a:ext cx="4483851" cy="82021"/>
+              <a:off x="915645" y="1977589"/>
+              <a:ext cx="5980176" cy="109362"/>
             </a:xfrm>
             <a:prstGeom prst="rect">
               <a:avLst/>
@@ -5007,7 +5007,7 @@
             <a:p>
               <a:pPr algn="l" marL="0" marR="0" indent="0">
                 <a:lnSpc>
-                  <a:spcPts val="900"/>
+                  <a:spcPts val="1200"/>
                 </a:lnSpc>
                 <a:spcBef>
                   <a:spcPts val="0"/>
@@ -5017,7 +5017,7 @@
                 </a:spcAft>
               </a:pPr>
               <a:r>
-                <a:rPr sz="900">
+                <a:rPr sz="1200">
                   <a:solidFill>
                     <a:srgbClr val="404040">
                       <a:alpha val="100000"/>
@@ -5039,8 +5039,8 @@
           </p:nvSpPr>
           <p:spPr>
             <a:xfrm>
-              <a:off x="817517" y="1669789"/>
-              <a:ext cx="2783799" cy="120152"/>
+              <a:off x="915645" y="1688767"/>
+              <a:ext cx="3544214" cy="153070"/>
             </a:xfrm>
             <a:prstGeom prst="rect">
               <a:avLst/>
@@ -5053,7 +5053,7 @@
             <a:p>
               <a:pPr algn="l" marL="0" marR="0" indent="0">
                 <a:lnSpc>
-                  <a:spcPts val="1320"/>
+                  <a:spcPts val="1680"/>
                 </a:lnSpc>
                 <a:spcBef>
                   <a:spcPts val="0"/>
@@ -5063,7 +5063,7 @@
                 </a:spcAft>
               </a:pPr>
               <a:r>
-                <a:rPr sz="1320">
+                <a:rPr sz="1680">
                   <a:solidFill>
                     <a:srgbClr val="000000">
                       <a:alpha val="100000"/>
